--- a/experiment_files/351_stage10/reports/talk/Stage10_author_readout_talk.pptx
+++ b/experiment_files/351_stage10/reports/talk/Stage10_author_readout_talk.pptx
@@ -22,6 +22,10 @@
     <p:sldId id="270" r:id="rId22"/>
     <p:sldId id="271" r:id="rId23"/>
     <p:sldId id="272" r:id="rId24"/>
+    <p:sldId id="273" r:id="rId25"/>
+    <p:sldId id="274" r:id="rId26"/>
+    <p:sldId id="275" r:id="rId27"/>
+    <p:sldId id="276" r:id="rId28"/>
   </p:sldIdLst>
   <p:sldSz cx="12191695" cy="6858000" type="screen4x3"/>
   <p:notesSz cx="6858000" cy="9144000"/>
@@ -588,7 +592,7 @@
           <a:lstStyle/>
           <a:p>
             <a:r>
-              <a:t>Comparing lenses. On readout quality fitA is best in most middle layers, self100 at L40; at L48 the Jacobian lenses put the right token in the top 10 for 15-18% of tokens versus 1% for the logit lens. At L62 the plain logit lens is best.</a:t>
+              <a:t>Stage 11 turns the readout question into interventions. 593 target and 593 control papers, matched within citation bins. Patching: run the paper with its true title and with a matched false title, and copy the true run hidden state into the false run at one layer. Knockout: forbid attention to the title tokens from layer l to the end. Probe: train a linear map from the last title token to the output state. Chain: score every author after the previous ones.</a:t>
             </a:r>
           </a:p>
         </p:txBody>
@@ -658,7 +662,7 @@
           <a:lstStyle/>
           <a:p>
             <a:r>
-              <a:t>Do Jacobian lenses see paper-specific information the logit lens misses? A little: +0.01 to +0.03 more title-specific signal at L24-L48, CIs above zero, but tiny next to 0.44 at L62. And it is not bigger for target: target minus control of that extra is about zero, negative at L48 and L56.</a:t>
+              <a:t>Two causal curves. Left: copying the hidden states of the tokens after the title (closing quote, year, Authors:, the name) from the true run into the false run recovers 29 percent at L40, 83 percent at L48 and everything from L52. Copying only the last title token recovers about 12 percent. Right: blocking attention to the title from L0 removes 83 percent of the effect, from L32 37 percent, from L48 6 percent, from L52 nothing. Blocking only the colon and name positions removes at most 15 percent, so the information is routed through the tokens right after the title. Target and control follow the same curves.</a:t>
             </a:r>
           </a:p>
         </p:txBody>
@@ -728,7 +732,7 @@
           <a:lstStyle/>
           <a:p>
             <a:r>
-              <a:t>Citations. Within both groups the title-specific signal rises steadily with citation bin: target from +0.35 in bin 0-2 to +0.64 in 4097+. Spearman with log citations: 0.45 overall, 0.33 within target, 0.19 within control. The level itself changes much less - names are not easier to guess for famous papers, the model just knows famous papers better.</a:t>
+              <a:t>Is the author readable at the title itself? With the lenses, barely: about 0.01 to 0.03 title-specific signal at the last title token. A linear probe trained across papers gets more, 0.04 at L16 rising to 0.08 at L56, and a little more for target papers. Caution: a probe trained across papers can also pick up topic-to-name associations, not only this paper.</a:t>
             </a:r>
           </a:p>
         </p:txBody>
@@ -798,7 +802,7 @@
           <a:lstStyle/>
           <a:p>
             <a:r>
-              <a:t>Is the signal decided by the first token? It depends on the name format. Initial-first names: the initial carries little, the signal is on the later tokens that include the surname. Given-name-first names: the given name carries about as much as the rest. Note teacher forcing: later tokens already see the correct prefix in every condition, so their title-specific signal can only come from the title.</a:t>
+              <a:t>Author chain. When the earlier authors are in the context, later authors become easier: plus 0.17 to 0.23 for target, 0.12 to 0.18 for control. But the title matters less: the title-specific signal drops from 0.45 to 0.26 for later target authors, because the co-authors already identify the paper. Target still beats control within bins, plus 0.11 to 0.15.</a:t>
             </a:r>
           </a:p>
         </p:txBody>
@@ -868,7 +872,7 @@
           <a:lstStyle/>
           <a:p>
             <a:r>
-              <a:t>Does knowing the first word make the rest easier? For a full given name, yes: when it is in the top 10 the surname is +0.22 better at the output, +0.32 for the logit lens at L62. For an initial, no. Mixing both formats would even show a negative effect, because initials are easy and the surnames after them are hard.</a:t>
+              <a:t>Comparing lenses. On readout quality fitA is best in most middle layers, self100 at L40; at L48 the Jacobian lenses put the right token in the top 10 for 15-18% of tokens versus 1% for the logit lens. At L62 the plain logit lens is best.</a:t>
             </a:r>
           </a:p>
         </p:txBody>
@@ -938,7 +942,7 @@
           <a:lstStyle/>
           <a:p>
             <a:r>
-              <a:t>Left: title-specific signal by token role at the output - surname first token carries most, initials least, punctuation about zero (negative control). Right: across all unrecalled papers, the more multiple-choice orders right, the better the model output (Spearman 0.27).</a:t>
+              <a:t>Do Jacobian lenses see paper-specific information the logit lens misses? A little: +0.01 to +0.03 more title-specific signal at L24-L48, CIs above zero, but tiny next to 0.44 at L62. And it is not bigger for target: target minus control of that extra is about zero, negative at L48 and L56.</a:t>
             </a:r>
           </a:p>
         </p:txBody>
@@ -1008,7 +1012,7 @@
           <a:lstStyle/>
           <a:p>
             <a:r>
-              <a:t>Wrap up the five findings.</a:t>
+              <a:t>Citations. Within both groups the title-specific signal rises steadily with citation bin: target from +0.35 in bin 0-2 to +0.64 in 4097+. Spearman with log citations: 0.45 overall, 0.33 within target, 0.19 within control. The level itself changes much less - names are not easier to guess for famous papers, the model just knows famous papers better.</a:t>
             </a:r>
           </a:p>
         </p:txBody>
@@ -1078,7 +1082,147 @@
           <a:lstStyle/>
           <a:p>
             <a:r>
-              <a:t>Limits and next steps. Everything here is correlational. Next: causal patching at L56, author-chain scoring, and blocking attention to the title tokens in the late layers.</a:t>
+              <a:t>Is the signal decided by the first token? It depends on the name format. Initial-first names: the initial carries little, the signal is on the later tokens that include the surname. Given-name-first names: the given name carries about as much as the rest. Note teacher forcing: later tokens already see the correct prefix in every condition, so their title-specific signal can only come from the title.</a:t>
+            </a:r>
+          </a:p>
+        </p:txBody>
+      </p:sp>
+      <p:sp>
+        <p:nvSpPr>
+          <p:cNvPr id="4" name="Slide Number Placeholder 3"/>
+          <p:cNvSpPr>
+            <a:spLocks noGrp="1"/>
+          </p:cNvSpPr>
+          <p:nvPr>
+            <p:ph type="sldNum" idx="5" sz="quarter"/>
+          </p:nvPr>
+        </p:nvSpPr>
+        <p:spPr/>
+      </p:sp>
+    </p:spTree>
+  </p:cSld>
+  <p:clrMapOvr>
+    <a:masterClrMapping/>
+  </p:clrMapOvr>
+</p:notes>
+</file>
+
+<file path=ppt/notesSlides/notesSlide18.xml><?xml version="1.0" encoding="utf-8"?>
+<p:notes xmlns:a="http://schemas.openxmlformats.org/drawingml/2006/main" xmlns:p="http://schemas.openxmlformats.org/presentationml/2006/main" xmlns:r="http://schemas.openxmlformats.org/officeDocument/2006/relationships">
+  <p:cSld>
+    <p:spTree>
+      <p:nvGrpSpPr>
+        <p:cNvPr id="1" name=""/>
+        <p:cNvGrpSpPr/>
+        <p:nvPr/>
+      </p:nvGrpSpPr>
+      <p:grpSpPr>
+        <a:xfrm>
+          <a:off x="0" y="0"/>
+          <a:ext cx="0" cy="0"/>
+          <a:chOff x="0" y="0"/>
+          <a:chExt cx="0" cy="0"/>
+        </a:xfrm>
+      </p:grpSpPr>
+      <p:sp>
+        <p:nvSpPr>
+          <p:cNvPr id="2" name="Slide Image Placeholder 1"/>
+          <p:cNvSpPr>
+            <a:spLocks noGrp="1"/>
+          </p:cNvSpPr>
+          <p:nvPr>
+            <p:ph type="sldImg" idx="2"/>
+          </p:nvPr>
+        </p:nvSpPr>
+        <p:spPr/>
+      </p:sp>
+      <p:sp>
+        <p:nvSpPr>
+          <p:cNvPr id="3" name="Notes Placeholder 2"/>
+          <p:cNvSpPr>
+            <a:spLocks noGrp="1"/>
+          </p:cNvSpPr>
+          <p:nvPr>
+            <p:ph type="body" idx="3" sz="quarter"/>
+          </p:nvPr>
+        </p:nvSpPr>
+        <p:spPr/>
+        <p:txBody>
+          <a:bodyPr/>
+          <a:lstStyle/>
+          <a:p>
+            <a:r>
+              <a:t>Does knowing the first word make the rest easier? For a full given name, yes: when it is in the top 10 the surname is +0.22 better at the output, +0.32 for the logit lens at L62. For an initial, no. Mixing both formats would even show a negative effect, because initials are easy and the surnames after them are hard.</a:t>
+            </a:r>
+          </a:p>
+        </p:txBody>
+      </p:sp>
+      <p:sp>
+        <p:nvSpPr>
+          <p:cNvPr id="4" name="Slide Number Placeholder 3"/>
+          <p:cNvSpPr>
+            <a:spLocks noGrp="1"/>
+          </p:cNvSpPr>
+          <p:nvPr>
+            <p:ph type="sldNum" idx="5" sz="quarter"/>
+          </p:nvPr>
+        </p:nvSpPr>
+        <p:spPr/>
+      </p:sp>
+    </p:spTree>
+  </p:cSld>
+  <p:clrMapOvr>
+    <a:masterClrMapping/>
+  </p:clrMapOvr>
+</p:notes>
+</file>
+
+<file path=ppt/notesSlides/notesSlide19.xml><?xml version="1.0" encoding="utf-8"?>
+<p:notes xmlns:a="http://schemas.openxmlformats.org/drawingml/2006/main" xmlns:p="http://schemas.openxmlformats.org/presentationml/2006/main" xmlns:r="http://schemas.openxmlformats.org/officeDocument/2006/relationships">
+  <p:cSld>
+    <p:spTree>
+      <p:nvGrpSpPr>
+        <p:cNvPr id="1" name=""/>
+        <p:cNvGrpSpPr/>
+        <p:nvPr/>
+      </p:nvGrpSpPr>
+      <p:grpSpPr>
+        <a:xfrm>
+          <a:off x="0" y="0"/>
+          <a:ext cx="0" cy="0"/>
+          <a:chOff x="0" y="0"/>
+          <a:chExt cx="0" cy="0"/>
+        </a:xfrm>
+      </p:grpSpPr>
+      <p:sp>
+        <p:nvSpPr>
+          <p:cNvPr id="2" name="Slide Image Placeholder 1"/>
+          <p:cNvSpPr>
+            <a:spLocks noGrp="1"/>
+          </p:cNvSpPr>
+          <p:nvPr>
+            <p:ph type="sldImg" idx="2"/>
+          </p:nvPr>
+        </p:nvSpPr>
+        <p:spPr/>
+      </p:sp>
+      <p:sp>
+        <p:nvSpPr>
+          <p:cNvPr id="3" name="Notes Placeholder 2"/>
+          <p:cNvSpPr>
+            <a:spLocks noGrp="1"/>
+          </p:cNvSpPr>
+          <p:nvPr>
+            <p:ph type="body" idx="3" sz="quarter"/>
+          </p:nvPr>
+        </p:nvSpPr>
+        <p:spPr/>
+        <p:txBody>
+          <a:bodyPr/>
+          <a:lstStyle/>
+          <a:p>
+            <a:r>
+              <a:t>Left: title-specific signal by token role at the output - surname first token carries most, initials least, punctuation about zero (negative control). Right: across all unrecalled papers, the more multiple-choice orders right, the better the model output (Spearman 0.27).</a:t>
             </a:r>
           </a:p>
         </p:txBody>
@@ -1149,6 +1293,146 @@
           <a:p>
             <a:r>
               <a:t>Earlier labels: for about half of the papers the model cannot write the authors when asked openly, but picks the true author list in a 4-option multiple choice. We call these target papers. Control papers: cannot write, cannot pick. If recognition is already computed in middle layers, a lens should read the right names better for target than control there.</a:t>
+            </a:r>
+          </a:p>
+        </p:txBody>
+      </p:sp>
+      <p:sp>
+        <p:nvSpPr>
+          <p:cNvPr id="4" name="Slide Number Placeholder 3"/>
+          <p:cNvSpPr>
+            <a:spLocks noGrp="1"/>
+          </p:cNvSpPr>
+          <p:nvPr>
+            <p:ph type="sldNum" idx="5" sz="quarter"/>
+          </p:nvPr>
+        </p:nvSpPr>
+        <p:spPr/>
+      </p:sp>
+    </p:spTree>
+  </p:cSld>
+  <p:clrMapOvr>
+    <a:masterClrMapping/>
+  </p:clrMapOvr>
+</p:notes>
+</file>
+
+<file path=ppt/notesSlides/notesSlide20.xml><?xml version="1.0" encoding="utf-8"?>
+<p:notes xmlns:a="http://schemas.openxmlformats.org/drawingml/2006/main" xmlns:p="http://schemas.openxmlformats.org/presentationml/2006/main" xmlns:r="http://schemas.openxmlformats.org/officeDocument/2006/relationships">
+  <p:cSld>
+    <p:spTree>
+      <p:nvGrpSpPr>
+        <p:cNvPr id="1" name=""/>
+        <p:cNvGrpSpPr/>
+        <p:nvPr/>
+      </p:nvGrpSpPr>
+      <p:grpSpPr>
+        <a:xfrm>
+          <a:off x="0" y="0"/>
+          <a:ext cx="0" cy="0"/>
+          <a:chOff x="0" y="0"/>
+          <a:chExt cx="0" cy="0"/>
+        </a:xfrm>
+      </p:grpSpPr>
+      <p:sp>
+        <p:nvSpPr>
+          <p:cNvPr id="2" name="Slide Image Placeholder 1"/>
+          <p:cNvSpPr>
+            <a:spLocks noGrp="1"/>
+          </p:cNvSpPr>
+          <p:nvPr>
+            <p:ph type="sldImg" idx="2"/>
+          </p:nvPr>
+        </p:nvSpPr>
+        <p:spPr/>
+      </p:sp>
+      <p:sp>
+        <p:nvSpPr>
+          <p:cNvPr id="3" name="Notes Placeholder 2"/>
+          <p:cNvSpPr>
+            <a:spLocks noGrp="1"/>
+          </p:cNvSpPr>
+          <p:nvPr>
+            <p:ph type="body" idx="3" sz="quarter"/>
+          </p:nvPr>
+        </p:nvSpPr>
+        <p:spPr/>
+        <p:txBody>
+          <a:bodyPr/>
+          <a:lstStyle/>
+          <a:p>
+            <a:r>
+              <a:t>Wrap up the five findings.</a:t>
+            </a:r>
+          </a:p>
+        </p:txBody>
+      </p:sp>
+      <p:sp>
+        <p:nvSpPr>
+          <p:cNvPr id="4" name="Slide Number Placeholder 3"/>
+          <p:cNvSpPr>
+            <a:spLocks noGrp="1"/>
+          </p:cNvSpPr>
+          <p:nvPr>
+            <p:ph type="sldNum" idx="5" sz="quarter"/>
+          </p:nvPr>
+        </p:nvSpPr>
+        <p:spPr/>
+      </p:sp>
+    </p:spTree>
+  </p:cSld>
+  <p:clrMapOvr>
+    <a:masterClrMapping/>
+  </p:clrMapOvr>
+</p:notes>
+</file>
+
+<file path=ppt/notesSlides/notesSlide21.xml><?xml version="1.0" encoding="utf-8"?>
+<p:notes xmlns:a="http://schemas.openxmlformats.org/drawingml/2006/main" xmlns:p="http://schemas.openxmlformats.org/presentationml/2006/main" xmlns:r="http://schemas.openxmlformats.org/officeDocument/2006/relationships">
+  <p:cSld>
+    <p:spTree>
+      <p:nvGrpSpPr>
+        <p:cNvPr id="1" name=""/>
+        <p:cNvGrpSpPr/>
+        <p:nvPr/>
+      </p:nvGrpSpPr>
+      <p:grpSpPr>
+        <a:xfrm>
+          <a:off x="0" y="0"/>
+          <a:ext cx="0" cy="0"/>
+          <a:chOff x="0" y="0"/>
+          <a:chExt cx="0" cy="0"/>
+        </a:xfrm>
+      </p:grpSpPr>
+      <p:sp>
+        <p:nvSpPr>
+          <p:cNvPr id="2" name="Slide Image Placeholder 1"/>
+          <p:cNvSpPr>
+            <a:spLocks noGrp="1"/>
+          </p:cNvSpPr>
+          <p:nvPr>
+            <p:ph type="sldImg" idx="2"/>
+          </p:nvPr>
+        </p:nvSpPr>
+        <p:spPr/>
+      </p:sp>
+      <p:sp>
+        <p:nvSpPr>
+          <p:cNvPr id="3" name="Notes Placeholder 2"/>
+          <p:cNvSpPr>
+            <a:spLocks noGrp="1"/>
+          </p:cNvSpPr>
+          <p:nvPr>
+            <p:ph type="body" idx="3" sz="quarter"/>
+          </p:nvPr>
+        </p:nvSpPr>
+        <p:spPr/>
+        <p:txBody>
+          <a:bodyPr/>
+          <a:lstStyle/>
+          <a:p>
+            <a:r>
+              <a:t>Limits and next steps. Patching and knockout now fix when the title is read (L24-L50) but not what happens inside those layers. Next: patch single positions after the title, localise the computation inside L24-L50, and repeat on a second model.</a:t>
             </a:r>
           </a:p>
         </p:txBody>
@@ -4945,7 +5229,7 @@
                 </a:solidFill>
                 <a:latin typeface="Caveat"/>
               </a:rPr>
-              <a:t>Which lens reads best?</a:t>
+              <a:t>Stage 11: intervene, do not just read</a:t>
             </a:r>
           </a:p>
         </p:txBody>
@@ -4984,58 +5268,33 @@
                 </a:solidFill>
                 <a:latin typeface="Patrick Hand"/>
               </a:rPr>
-              <a:t>all papers · true title</a:t>
-            </a:r>
-          </a:p>
-        </p:txBody>
-      </p:sp>
-      <p:pic>
-        <p:nvPicPr>
-          <p:cNvPr id="5" name="Picture 4" descr="c4_lens_quality.png"/>
-          <p:cNvPicPr>
-            <a:picLocks noChangeAspect="1"/>
-          </p:cNvPicPr>
-          <p:nvPr/>
-        </p:nvPicPr>
-        <p:blipFill>
-          <a:blip r:embed="rId4"/>
-          <a:stretch>
-            <a:fillRect/>
-          </a:stretch>
-        </p:blipFill>
-        <p:spPr>
-          <a:xfrm>
-            <a:off x="457200" y="1463040"/>
-            <a:ext cx="8412480" cy="3963572"/>
-          </a:xfrm>
-          <a:prstGeom prst="rect">
-            <a:avLst/>
-          </a:prstGeom>
-        </p:spPr>
-      </p:pic>
-      <p:sp>
-        <p:nvSpPr>
-          <p:cNvPr id="6" name="Rectangle 5"/>
+              <a:t>593 target + 593 control papers (balanced within citation bins) · all 9,108 for probe and chain</a:t>
+            </a:r>
+          </a:p>
+        </p:txBody>
+      </p:sp>
+      <p:sp>
+        <p:nvSpPr>
+          <p:cNvPr id="5" name="Rounded Rectangle 4"/>
           <p:cNvSpPr/>
           <p:nvPr/>
         </p:nvSpPr>
         <p:spPr>
-          <a:xfrm rot="21510000">
-            <a:off x="9098280" y="1737360"/>
-            <a:ext cx="2651760" cy="3108960"/>
-          </a:xfrm>
-          <a:prstGeom prst="rect">
-            <a:avLst/>
-          </a:prstGeom>
-          <a:solidFill>
-            <a:srgbClr val="FFF1A8"/>
-          </a:solidFill>
-          <a:ln w="12700">
+          <a:xfrm rot="21540000">
+            <a:off x="822960" y="1737360"/>
+            <a:ext cx="5120640" cy="1828800"/>
+          </a:xfrm>
+          <a:prstGeom prst="roundRect">
+            <a:avLst>
+              <a:gd name="adj" fmla="val 8000"/>
+            </a:avLst>
+          </a:prstGeom>
+          <a:noFill/>
+          <a:ln w="28575">
             <a:solidFill>
-              <a:srgbClr val="E2D37A"/>
+              <a:srgbClr val="E07A2F"/>
             </a:solidFill>
           </a:ln>
-          <a:effectLst/>
         </p:spPr>
         <p:style>
           <a:lnRef idx="1">
@@ -5052,63 +5311,299 @@
           </a:fontRef>
         </p:style>
         <p:txBody>
-          <a:bodyPr rtlCol="0" anchor="t" wrap="square" lIns="201168" rIns="201168" tIns="164592" bIns="164592"/>
-          <a:lstStyle/>
-          <a:p>
-            <a:pPr algn="l">
-              <a:spcAft>
-                <a:spcPts val="900"/>
-              </a:spcAft>
-            </a:pPr>
-            <a:r>
-              <a:rPr sz="1900" b="1">
+          <a:bodyPr rtlCol="0" anchor="ctr" wrap="square" lIns="164592" rIns="164592"/>
+          <a:lstStyle/>
+          <a:p>
+            <a:pPr algn="ctr">
+              <a:spcAft>
+                <a:spcPts val="400"/>
+              </a:spcAft>
+            </a:pPr>
+            <a:r>
+              <a:rPr sz="2000" b="1">
+                <a:solidFill>
+                  <a:srgbClr val="E07A2F"/>
+                </a:solidFill>
+                <a:latin typeface="Patrick Hand"/>
+              </a:rPr>
+              <a:t>patch</a:t>
+            </a:r>
+          </a:p>
+          <a:p>
+            <a:pPr algn="ctr">
+              <a:spcAft>
+                <a:spcPts val="400"/>
+              </a:spcAft>
+            </a:pPr>
+            <a:r>
+              <a:rPr sz="2000" b="0">
+                <a:solidFill>
+                  <a:srgbClr val="E07A2F"/>
+                </a:solidFill>
+                <a:latin typeface="Patrick Hand"/>
+              </a:rPr>
+              <a:t>copy the true-title hidden state into the false-title run at one layer</a:t>
+            </a:r>
+          </a:p>
+        </p:txBody>
+      </p:sp>
+      <p:sp>
+        <p:nvSpPr>
+          <p:cNvPr id="6" name="Rounded Rectangle 5"/>
+          <p:cNvSpPr/>
+          <p:nvPr/>
+        </p:nvSpPr>
+        <p:spPr>
+          <a:xfrm rot="60000">
+            <a:off x="6400800" y="1737360"/>
+            <a:ext cx="5120640" cy="1828800"/>
+          </a:xfrm>
+          <a:prstGeom prst="roundRect">
+            <a:avLst>
+              <a:gd name="adj" fmla="val 8000"/>
+            </a:avLst>
+          </a:prstGeom>
+          <a:noFill/>
+          <a:ln w="28575">
+            <a:solidFill>
+              <a:srgbClr val="3A6EA5"/>
+            </a:solidFill>
+          </a:ln>
+        </p:spPr>
+        <p:style>
+          <a:lnRef idx="1">
+            <a:schemeClr val="accent1"/>
+          </a:lnRef>
+          <a:fillRef idx="3">
+            <a:schemeClr val="accent1"/>
+          </a:fillRef>
+          <a:effectRef idx="2">
+            <a:schemeClr val="accent1"/>
+          </a:effectRef>
+          <a:fontRef idx="minor">
+            <a:schemeClr val="lt1"/>
+          </a:fontRef>
+        </p:style>
+        <p:txBody>
+          <a:bodyPr rtlCol="0" anchor="ctr" wrap="square" lIns="164592" rIns="164592"/>
+          <a:lstStyle/>
+          <a:p>
+            <a:pPr algn="ctr">
+              <a:spcAft>
+                <a:spcPts val="400"/>
+              </a:spcAft>
+            </a:pPr>
+            <a:r>
+              <a:rPr sz="2000" b="1">
+                <a:solidFill>
+                  <a:srgbClr val="3A6EA5"/>
+                </a:solidFill>
+                <a:latin typeface="Patrick Hand"/>
+              </a:rPr>
+              <a:t>knock out</a:t>
+            </a:r>
+          </a:p>
+          <a:p>
+            <a:pPr algn="ctr">
+              <a:spcAft>
+                <a:spcPts val="400"/>
+              </a:spcAft>
+            </a:pPr>
+            <a:r>
+              <a:rPr sz="2000" b="0">
+                <a:solidFill>
+                  <a:srgbClr val="3A6EA5"/>
+                </a:solidFill>
+                <a:latin typeface="Patrick Hand"/>
+              </a:rPr>
+              <a:t>block attention to the title tokens from layer l on</a:t>
+            </a:r>
+          </a:p>
+        </p:txBody>
+      </p:sp>
+      <p:sp>
+        <p:nvSpPr>
+          <p:cNvPr id="7" name="Rounded Rectangle 6"/>
+          <p:cNvSpPr/>
+          <p:nvPr/>
+        </p:nvSpPr>
+        <p:spPr>
+          <a:xfrm rot="21570000">
+            <a:off x="822960" y="3886200"/>
+            <a:ext cx="5120640" cy="1828800"/>
+          </a:xfrm>
+          <a:prstGeom prst="roundRect">
+            <a:avLst>
+              <a:gd name="adj" fmla="val 8000"/>
+            </a:avLst>
+          </a:prstGeom>
+          <a:noFill/>
+          <a:ln w="28575">
+            <a:solidFill>
+              <a:srgbClr val="3C8D5A"/>
+            </a:solidFill>
+          </a:ln>
+        </p:spPr>
+        <p:style>
+          <a:lnRef idx="1">
+            <a:schemeClr val="accent1"/>
+          </a:lnRef>
+          <a:fillRef idx="3">
+            <a:schemeClr val="accent1"/>
+          </a:fillRef>
+          <a:effectRef idx="2">
+            <a:schemeClr val="accent1"/>
+          </a:effectRef>
+          <a:fontRef idx="minor">
+            <a:schemeClr val="lt1"/>
+          </a:fontRef>
+        </p:style>
+        <p:txBody>
+          <a:bodyPr rtlCol="0" anchor="ctr" wrap="square" lIns="164592" rIns="164592"/>
+          <a:lstStyle/>
+          <a:p>
+            <a:pPr algn="ctr">
+              <a:spcAft>
+                <a:spcPts val="400"/>
+              </a:spcAft>
+            </a:pPr>
+            <a:r>
+              <a:rPr sz="2000" b="1">
                 <a:solidFill>
                   <a:srgbClr val="3C8D5A"/>
                 </a:solidFill>
                 <a:latin typeface="Patrick Hand"/>
               </a:rPr>
-              <a:t>Middle layers:</a:t>
-            </a:r>
-          </a:p>
-          <a:p>
-            <a:pPr algn="l">
-              <a:spcAft>
-                <a:spcPts val="900"/>
-              </a:spcAft>
-            </a:pPr>
-            <a:r>
-              <a:rPr sz="1900" b="0">
+              <a:t>probe</a:t>
+            </a:r>
+          </a:p>
+          <a:p>
+            <a:pPr algn="ctr">
+              <a:spcAft>
+                <a:spcPts val="400"/>
+              </a:spcAft>
+            </a:pPr>
+            <a:r>
+              <a:rPr sz="2000" b="0">
+                <a:solidFill>
+                  <a:srgbClr val="3C8D5A"/>
+                </a:solidFill>
+                <a:latin typeface="Patrick Hand"/>
+              </a:rPr>
+              <a:t>linear map from the last title token to the output state</a:t>
+            </a:r>
+          </a:p>
+        </p:txBody>
+      </p:sp>
+      <p:sp>
+        <p:nvSpPr>
+          <p:cNvPr id="8" name="Rounded Rectangle 7"/>
+          <p:cNvSpPr/>
+          <p:nvPr/>
+        </p:nvSpPr>
+        <p:spPr>
+          <a:xfrm rot="48000">
+            <a:off x="6400800" y="3886200"/>
+            <a:ext cx="5120640" cy="1828800"/>
+          </a:xfrm>
+          <a:prstGeom prst="roundRect">
+            <a:avLst>
+              <a:gd name="adj" fmla="val 8000"/>
+            </a:avLst>
+          </a:prstGeom>
+          <a:noFill/>
+          <a:ln w="28575">
+            <a:solidFill>
+              <a:srgbClr val="2B2D42"/>
+            </a:solidFill>
+          </a:ln>
+        </p:spPr>
+        <p:style>
+          <a:lnRef idx="1">
+            <a:schemeClr val="accent1"/>
+          </a:lnRef>
+          <a:fillRef idx="3">
+            <a:schemeClr val="accent1"/>
+          </a:fillRef>
+          <a:effectRef idx="2">
+            <a:schemeClr val="accent1"/>
+          </a:effectRef>
+          <a:fontRef idx="minor">
+            <a:schemeClr val="lt1"/>
+          </a:fontRef>
+        </p:style>
+        <p:txBody>
+          <a:bodyPr rtlCol="0" anchor="ctr" wrap="square" lIns="164592" rIns="164592"/>
+          <a:lstStyle/>
+          <a:p>
+            <a:pPr algn="ctr">
+              <a:spcAft>
+                <a:spcPts val="400"/>
+              </a:spcAft>
+            </a:pPr>
+            <a:r>
+              <a:rPr sz="2000" b="1">
                 <a:solidFill>
                   <a:srgbClr val="2B2D42"/>
                 </a:solidFill>
                 <a:latin typeface="Patrick Hand"/>
               </a:rPr>
-              <a:t>fitA best; at L48 15-18% top-10 vs 1% for logit</a:t>
-            </a:r>
-          </a:p>
-          <a:p>
-            <a:pPr algn="l">
-              <a:spcAft>
-                <a:spcPts val="900"/>
-              </a:spcAft>
-            </a:pPr>
-            <a:r>
-              <a:rPr sz="1900" b="1">
-                <a:solidFill>
-                  <a:srgbClr val="3A6EA5"/>
-                </a:solidFill>
-                <a:latin typeface="Patrick Hand"/>
-              </a:rPr>
-              <a:t>L62:</a:t>
-            </a:r>
-            <a:r>
-              <a:rPr sz="1900" b="0">
+              <a:t>chain</a:t>
+            </a:r>
+          </a:p>
+          <a:p>
+            <a:pPr algn="ctr">
+              <a:spcAft>
+                <a:spcPts val="400"/>
+              </a:spcAft>
+            </a:pPr>
+            <a:r>
+              <a:rPr sz="2000" b="0">
                 <a:solidFill>
                   <a:srgbClr val="2B2D42"/>
                 </a:solidFill>
                 <a:latin typeface="Patrick Hand"/>
               </a:rPr>
-              <a:t> logit lens best (59%)</a:t>
+              <a:t>"Authors: A1, A2, ..." instead of each author alone</a:t>
+            </a:r>
+          </a:p>
+        </p:txBody>
+      </p:sp>
+      <p:sp>
+        <p:nvSpPr>
+          <p:cNvPr id="9" name="TextBox 8"/>
+          <p:cNvSpPr txBox="1"/>
+          <p:nvPr/>
+        </p:nvSpPr>
+        <p:spPr>
+          <a:xfrm>
+            <a:off x="713232" y="6355080"/>
+            <a:ext cx="10789920" cy="320040"/>
+          </a:xfrm>
+          <a:prstGeom prst="rect">
+            <a:avLst/>
+          </a:prstGeom>
+          <a:noFill/>
+        </p:spPr>
+        <p:txBody>
+          <a:bodyPr wrap="square" lIns="0" rIns="0" tIns="0" bIns="0" anchor="t">
+            <a:spAutoFit/>
+          </a:bodyPr>
+          <a:lstStyle/>
+          <a:p>
+            <a:pPr algn="l">
+              <a:spcAft>
+                <a:spcPts val="800"/>
+              </a:spcAft>
+            </a:pPr>
+            <a:r>
+              <a:rPr sz="1400" b="0">
+                <a:solidFill>
+                  <a:srgbClr val="6E7080"/>
+                </a:solidFill>
+                <a:latin typeface="Patrick Hand"/>
+              </a:rPr>
+              <a:t>Score: rank of the correct name token at the model output; "share of the true-false gap" = (intervened - false) / (true - false).</a:t>
             </a:r>
           </a:p>
         </p:txBody>
@@ -5189,7 +5684,7 @@
                 </a:solidFill>
                 <a:latin typeface="Caveat"/>
               </a:rPr>
-              <a:t>Do lenses reveal hidden paper knowledge?</a:t>
+              <a:t>The title is read in L24-L50, early</a:t>
             </a:r>
           </a:p>
         </p:txBody>
@@ -5228,14 +5723,14 @@
                 </a:solidFill>
                 <a:latin typeface="Patrick Hand"/>
               </a:rPr>
-              <a:t>paired differences, 95% CI</a:t>
+              <a:t>model output · share of the true-false gap · CIs about +/-0.02</a:t>
             </a:r>
           </a:p>
         </p:txBody>
       </p:sp>
       <p:pic>
         <p:nvPicPr>
-          <p:cNvPr id="5" name="Picture 4" descr="c5_lens_extra.png"/>
+          <p:cNvPr id="5" name="Picture 4" descr="c12_patch_knockout.png"/>
           <p:cNvPicPr>
             <a:picLocks noChangeAspect="1"/>
           </p:cNvPicPr>
@@ -5250,7 +5745,7 @@
         <p:spPr>
           <a:xfrm>
             <a:off x="457200" y="1463040"/>
-            <a:ext cx="8412480" cy="3963572"/>
+            <a:ext cx="8412480" cy="3968150"/>
           </a:xfrm>
           <a:prstGeom prst="rect">
             <a:avLst/>
@@ -5266,7 +5761,7 @@
         <p:spPr>
           <a:xfrm rot="90000">
             <a:off x="9098280" y="1737360"/>
-            <a:ext cx="2651760" cy="3108960"/>
+            <a:ext cx="2651760" cy="3291840"/>
           </a:xfrm>
           <a:prstGeom prst="rect">
             <a:avLst/>
@@ -5305,22 +5800,56 @@
               </a:spcAft>
             </a:pPr>
             <a:r>
-              <a:rPr sz="1900" b="0">
+              <a:rPr sz="1800" b="1">
+                <a:solidFill>
+                  <a:srgbClr val="E07A2F"/>
+                </a:solidFill>
+                <a:latin typeface="Patrick Hand"/>
+              </a:rPr>
+              <a:t>L52+</a:t>
+            </a:r>
+            <a:r>
+              <a:rPr sz="1800" b="0">
                 <a:solidFill>
                   <a:srgbClr val="2B2D42"/>
                 </a:solidFill>
                 <a:latin typeface="Patrick Hand"/>
               </a:rPr>
-              <a:t>Extra signal: </a:t>
-            </a:r>
-            <a:r>
-              <a:rPr sz="1900" b="1">
+              <a:t>: title no longer needed</a:t>
+            </a:r>
+          </a:p>
+          <a:p>
+            <a:pPr algn="l">
+              <a:spcAft>
+                <a:spcPts val="900"/>
+              </a:spcAft>
+            </a:pPr>
+            <a:r>
+              <a:rPr sz="1800" b="0">
                 <a:solidFill>
                   <a:srgbClr val="2B2D42"/>
                 </a:solidFill>
                 <a:latin typeface="Patrick Hand"/>
               </a:rPr>
-              <a:t>+0.01 to +0.03</a:t>
+              <a:t>info moved to the tokens </a:t>
+            </a:r>
+            <a:r>
+              <a:rPr sz="1800" b="1">
+                <a:solidFill>
+                  <a:srgbClr val="2B2D42"/>
+                </a:solidFill>
+                <a:latin typeface="Patrick Hand"/>
+              </a:rPr>
+              <a:t>right after</a:t>
+            </a:r>
+            <a:r>
+              <a:rPr sz="1800" b="0">
+                <a:solidFill>
+                  <a:srgbClr val="2B2D42"/>
+                </a:solidFill>
+                <a:latin typeface="Patrick Hand"/>
+              </a:rPr>
+              <a:t> the title</a:t>
             </a:r>
           </a:p>
           <a:p>
@@ -5330,38 +5859,13 @@
               </a:spcAft>
             </a:pPr>
             <a:r>
-              <a:rPr sz="1900" b="0">
+              <a:rPr sz="1800" b="0">
                 <a:solidFill>
                   <a:srgbClr val="2B2D42"/>
                 </a:solidFill>
                 <a:latin typeface="Patrick Hand"/>
               </a:rPr>
-              <a:t>vs ~0.44 at L62</a:t>
-            </a:r>
-          </a:p>
-          <a:p>
-            <a:pPr algn="l">
-              <a:spcAft>
-                <a:spcPts val="900"/>
-              </a:spcAft>
-            </a:pPr>
-            <a:r>
-              <a:rPr sz="1900" b="1">
-                <a:solidFill>
-                  <a:srgbClr val="E07A2F"/>
-                </a:solidFill>
-                <a:latin typeface="Patrick Hand"/>
-              </a:rPr>
-              <a:t>Not bigger for target</a:t>
-            </a:r>
-            <a:r>
-              <a:rPr sz="1900" b="0">
-                <a:solidFill>
-                  <a:srgbClr val="2B2D42"/>
-                </a:solidFill>
-                <a:latin typeface="Patrick Hand"/>
-              </a:rPr>
-              <a:t> (even negative at L48-56)</a:t>
+              <a:t>same timing for target and control</a:t>
             </a:r>
           </a:p>
         </p:txBody>
@@ -5442,7 +5946,7 @@
                 </a:solidFill>
                 <a:latin typeface="Caveat"/>
               </a:rPr>
-              <a:t>More citations, more paper knowledge</a:t>
+              <a:t>Not readable at the title token itself</a:t>
             </a:r>
           </a:p>
         </p:txBody>
@@ -5481,14 +5985,14 @@
                 </a:solidFill>
                 <a:latin typeface="Patrick Hand"/>
               </a:rPr>
-              <a:t>model output · bins with &lt; 10 papers omitted</a:t>
+              <a:t>title-specific signal at the last title token · all 9,108 papers</a:t>
             </a:r>
           </a:p>
         </p:txBody>
       </p:sp>
       <p:pic>
         <p:nvPicPr>
-          <p:cNvPr id="5" name="Picture 4" descr="c6_citation.png"/>
+          <p:cNvPr id="5" name="Picture 4" descr="c13_title_position.png"/>
           <p:cNvPicPr>
             <a:picLocks noChangeAspect="1"/>
           </p:cNvPicPr>
@@ -5503,7 +6007,7 @@
         <p:spPr>
           <a:xfrm>
             <a:off x="457200" y="1463040"/>
-            <a:ext cx="8412480" cy="3894666"/>
+            <a:ext cx="8412480" cy="3968150"/>
           </a:xfrm>
           <a:prstGeom prst="rect">
             <a:avLst/>
@@ -5519,7 +6023,7 @@
         <p:spPr>
           <a:xfrm rot="21510000">
             <a:off x="9098280" y="1737360"/>
-            <a:ext cx="2651760" cy="3108960"/>
+            <a:ext cx="2651760" cy="3291840"/>
           </a:xfrm>
           <a:prstGeom prst="rect">
             <a:avLst/>
@@ -5564,16 +6068,16 @@
                 </a:solidFill>
                 <a:latin typeface="Patrick Hand"/>
               </a:rPr>
-              <a:t>Target: </a:t>
+              <a:t>lenses: </a:t>
             </a:r>
             <a:r>
               <a:rPr sz="1800" b="1">
                 <a:solidFill>
-                  <a:srgbClr val="E07A2F"/>
-                </a:solidFill>
-                <a:latin typeface="Patrick Hand"/>
-              </a:rPr>
-              <a:t>+0.35 -&gt; +0.64</a:t>
+                  <a:srgbClr val="2B2D42"/>
+                </a:solidFill>
+                <a:latin typeface="Patrick Hand"/>
+              </a:rPr>
+              <a:t>~0.01-0.03</a:t>
             </a:r>
           </a:p>
           <a:p>
@@ -5589,7 +6093,16 @@
                 </a:solidFill>
                 <a:latin typeface="Patrick Hand"/>
               </a:rPr>
-              <a:t>Spearman (title-specific)</a:t>
+              <a:t>probe: </a:t>
+            </a:r>
+            <a:r>
+              <a:rPr sz="1800" b="1">
+                <a:solidFill>
+                  <a:srgbClr val="3C8D5A"/>
+                </a:solidFill>
+                <a:latin typeface="Patrick Hand"/>
+              </a:rPr>
+              <a:t>0.04 -&gt; 0.08</a:t>
             </a:r>
           </a:p>
           <a:p>
@@ -5599,38 +6112,13 @@
               </a:spcAft>
             </a:pPr>
             <a:r>
-              <a:rPr sz="1800" b="1">
+              <a:rPr sz="1800" b="0">
                 <a:solidFill>
                   <a:srgbClr val="2B2D42"/>
                 </a:solidFill>
                 <a:latin typeface="Patrick Hand"/>
               </a:rPr>
-              <a:t>0.45</a:t>
-            </a:r>
-            <a:r>
-              <a:rPr sz="1800" b="0">
-                <a:solidFill>
-                  <a:srgbClr val="2B2D42"/>
-                </a:solidFill>
-                <a:latin typeface="Patrick Hand"/>
-              </a:rPr>
-              <a:t> all · 0.33 target · 0.19 control</a:t>
-            </a:r>
-          </a:p>
-          <a:p>
-            <a:pPr algn="l">
-              <a:spcAft>
-                <a:spcPts val="900"/>
-              </a:spcAft>
-            </a:pPr>
-            <a:r>
-              <a:rPr sz="1800" b="0">
-                <a:solidFill>
-                  <a:srgbClr val="2B2D42"/>
-                </a:solidFill>
-                <a:latin typeface="Patrick Hand"/>
-              </a:rPr>
-              <a:t>Target &gt; control in every bin</a:t>
+              <a:t>target a bit higher; may include topic -&gt; name associations</a:t>
             </a:r>
           </a:p>
         </p:txBody>
@@ -5711,7 +6199,7 @@
                 </a:solidFill>
                 <a:latin typeface="Caveat"/>
               </a:rPr>
-              <a:t>First token or the rest of the name?</a:t>
+              <a:t>Co-authors help, and partly replace the title</a:t>
             </a:r>
           </a:p>
         </p:txBody>
@@ -5750,14 +6238,14 @@
                 </a:solidFill>
                 <a:latin typeface="Patrick Hand"/>
               </a:rPr>
-              <a:t>model output · split by name format</a:t>
+              <a:t>model output · all 9,108 papers · 95% CI</a:t>
             </a:r>
           </a:p>
         </p:txBody>
       </p:sp>
       <p:pic>
         <p:nvPicPr>
-          <p:cNvPr id="5" name="Picture 4" descr="c7_format_position.png"/>
+          <p:cNvPr id="5" name="Picture 4" descr="c14_author_chain.png"/>
           <p:cNvPicPr>
             <a:picLocks noChangeAspect="1"/>
           </p:cNvPicPr>
@@ -5772,7 +6260,7 @@
         <p:spPr>
           <a:xfrm>
             <a:off x="457200" y="1463040"/>
-            <a:ext cx="8412480" cy="3963572"/>
+            <a:ext cx="8412480" cy="3968150"/>
           </a:xfrm>
           <a:prstGeom prst="rect">
             <a:avLst/>
@@ -5788,7 +6276,7 @@
         <p:spPr>
           <a:xfrm rot="90000">
             <a:off x="9098280" y="1737360"/>
-            <a:ext cx="2651760" cy="3108960"/>
+            <a:ext cx="2651760" cy="3291840"/>
           </a:xfrm>
           <a:prstGeom prst="rect">
             <a:avLst/>
@@ -5827,22 +6315,22 @@
               </a:spcAft>
             </a:pPr>
             <a:r>
-              <a:rPr sz="1900" b="1">
-                <a:solidFill>
-                  <a:srgbClr val="3A6EA5"/>
-                </a:solidFill>
-                <a:latin typeface="Patrick Hand"/>
-              </a:rPr>
-              <a:t>Initial:</a:t>
-            </a:r>
-            <a:r>
-              <a:rPr sz="1900" b="0">
+              <a:rPr sz="1800" b="0">
                 <a:solidFill>
                   <a:srgbClr val="2B2D42"/>
                 </a:solidFill>
                 <a:latin typeface="Patrick Hand"/>
               </a:rPr>
-              <a:t> carries little; signal is on the surname</a:t>
+              <a:t>later authors </a:t>
+            </a:r>
+            <a:r>
+              <a:rPr sz="1800" b="1">
+                <a:solidFill>
+                  <a:srgbClr val="E07A2F"/>
+                </a:solidFill>
+                <a:latin typeface="Patrick Hand"/>
+              </a:rPr>
+              <a:t>+0.17 to +0.23</a:t>
             </a:r>
           </a:p>
           <a:p>
@@ -5852,22 +6340,38 @@
               </a:spcAft>
             </a:pPr>
             <a:r>
-              <a:rPr sz="1900" b="1">
-                <a:solidFill>
-                  <a:srgbClr val="E07A2F"/>
-                </a:solidFill>
-                <a:latin typeface="Patrick Hand"/>
-              </a:rPr>
-              <a:t>Full given name:</a:t>
-            </a:r>
-            <a:r>
-              <a:rPr sz="1900" b="0">
+              <a:rPr sz="1800" b="0">
                 <a:solidFill>
                   <a:srgbClr val="2B2D42"/>
                 </a:solidFill>
                 <a:latin typeface="Patrick Hand"/>
               </a:rPr>
-              <a:t> carries about as much as the surname</a:t>
+              <a:t>title-specific part </a:t>
+            </a:r>
+            <a:r>
+              <a:rPr sz="1800" b="1">
+                <a:solidFill>
+                  <a:srgbClr val="2B2D42"/>
+                </a:solidFill>
+                <a:latin typeface="Patrick Hand"/>
+              </a:rPr>
+              <a:t>shrinks</a:t>
+            </a:r>
+          </a:p>
+          <a:p>
+            <a:pPr algn="l">
+              <a:spcAft>
+                <a:spcPts val="900"/>
+              </a:spcAft>
+            </a:pPr>
+            <a:r>
+              <a:rPr sz="1800" b="0">
+                <a:solidFill>
+                  <a:srgbClr val="2B2D42"/>
+                </a:solidFill>
+                <a:latin typeface="Patrick Hand"/>
+              </a:rPr>
+              <a:t>target &gt; control still</a:t>
             </a:r>
           </a:p>
         </p:txBody>
@@ -5948,7 +6452,7 @@
                 </a:solidFill>
                 <a:latin typeface="Caveat"/>
               </a:rPr>
-              <a:t>Knowing the given name helps with the surname</a:t>
+              <a:t>Which lens reads best?</a:t>
             </a:r>
           </a:p>
         </p:txBody>
@@ -5987,14 +6491,14 @@
                 </a:solidFill>
                 <a:latin typeface="Patrick Hand"/>
               </a:rPr>
-              <a:t>true title · later words when the first word is / is not in the top 10</a:t>
+              <a:t>all papers · true title</a:t>
             </a:r>
           </a:p>
         </p:txBody>
       </p:sp>
       <p:pic>
         <p:nvPicPr>
-          <p:cNvPr id="5" name="Picture 4" descr="c8_first_word_helps.png"/>
+          <p:cNvPr id="5" name="Picture 4" descr="c4_lens_quality.png"/>
           <p:cNvPicPr>
             <a:picLocks noChangeAspect="1"/>
           </p:cNvPicPr>
@@ -6008,8 +6512,8 @@
         </p:blipFill>
         <p:spPr>
           <a:xfrm>
-            <a:off x="548640" y="1463040"/>
-            <a:ext cx="7315200" cy="4354285"/>
+            <a:off x="457200" y="1463040"/>
+            <a:ext cx="8412480" cy="3963572"/>
           </a:xfrm>
           <a:prstGeom prst="rect">
             <a:avLst/>
@@ -6024,8 +6528,8 @@
         </p:nvSpPr>
         <p:spPr>
           <a:xfrm rot="21510000">
-            <a:off x="8229600" y="1737360"/>
-            <a:ext cx="3383280" cy="3108960"/>
+            <a:off x="9098280" y="1737360"/>
+            <a:ext cx="2651760" cy="3108960"/>
           </a:xfrm>
           <a:prstGeom prst="rect">
             <a:avLst/>
@@ -6066,11 +6570,11 @@
             <a:r>
               <a:rPr sz="1900" b="1">
                 <a:solidFill>
-                  <a:srgbClr val="E07A2F"/>
-                </a:solidFill>
-                <a:latin typeface="Patrick Hand"/>
-              </a:rPr>
-              <a:t>Given name in top 10</a:t>
+                  <a:srgbClr val="3C8D5A"/>
+                </a:solidFill>
+                <a:latin typeface="Patrick Hand"/>
+              </a:rPr>
+              <a:t>Middle layers:</a:t>
             </a:r>
           </a:p>
           <a:p>
@@ -6086,7 +6590,7 @@
                 </a:solidFill>
                 <a:latin typeface="Patrick Hand"/>
               </a:rPr>
-              <a:t>surname +0.22 (output)</a:t>
+              <a:t>fitA best; at L48 15-18% top-10 vs 1% for logit</a:t>
             </a:r>
           </a:p>
           <a:p>
@@ -6096,38 +6600,22 @@
               </a:spcAft>
             </a:pPr>
             <a:r>
+              <a:rPr sz="1900" b="1">
+                <a:solidFill>
+                  <a:srgbClr val="3A6EA5"/>
+                </a:solidFill>
+                <a:latin typeface="Patrick Hand"/>
+              </a:rPr>
+              <a:t>L62:</a:t>
+            </a:r>
+            <a:r>
               <a:rPr sz="1900" b="0">
                 <a:solidFill>
                   <a:srgbClr val="2B2D42"/>
                 </a:solidFill>
                 <a:latin typeface="Patrick Hand"/>
               </a:rPr>
-              <a:t>+0.32 (logit L62)</a:t>
-            </a:r>
-          </a:p>
-          <a:p>
-            <a:pPr algn="l">
-              <a:spcAft>
-                <a:spcPts val="900"/>
-              </a:spcAft>
-            </a:pPr>
-            <a:r>
-              <a:rPr sz="1900" b="1">
-                <a:solidFill>
-                  <a:srgbClr val="3A6EA5"/>
-                </a:solidFill>
-                <a:latin typeface="Patrick Hand"/>
-              </a:rPr>
-              <a:t>Initial in top 10</a:t>
-            </a:r>
-            <a:r>
-              <a:rPr sz="1900" b="0">
-                <a:solidFill>
-                  <a:srgbClr val="2B2D42"/>
-                </a:solidFill>
-                <a:latin typeface="Patrick Hand"/>
-              </a:rPr>
-              <a:t>: no help</a:t>
+              <a:t> logit lens best (59%)</a:t>
             </a:r>
           </a:p>
         </p:txBody>
@@ -6208,7 +6696,7 @@
                 </a:solidFill>
                 <a:latin typeface="Caveat"/>
               </a:rPr>
-              <a:t>Where the signal sits, and a dose-response</a:t>
+              <a:t>Do lenses reveal hidden paper knowledge?</a:t>
             </a:r>
           </a:p>
         </p:txBody>
@@ -6247,14 +6735,14 @@
                 </a:solidFill>
                 <a:latin typeface="Patrick Hand"/>
               </a:rPr>
-              <a:t>model output</a:t>
+              <a:t>paired differences, 95% CI</a:t>
             </a:r>
           </a:p>
         </p:txBody>
       </p:sp>
       <p:pic>
         <p:nvPicPr>
-          <p:cNvPr id="5" name="Picture 4" descr="c9_roles.png"/>
+          <p:cNvPr id="5" name="Picture 4" descr="c5_lens_extra.png"/>
           <p:cNvPicPr>
             <a:picLocks noChangeAspect="1"/>
           </p:cNvPicPr>
@@ -6268,73 +6756,119 @@
         </p:blipFill>
         <p:spPr>
           <a:xfrm>
-            <a:off x="365760" y="1463040"/>
-            <a:ext cx="6675120" cy="3973285"/>
+            <a:off x="457200" y="1463040"/>
+            <a:ext cx="8412480" cy="3963572"/>
           </a:xfrm>
           <a:prstGeom prst="rect">
             <a:avLst/>
           </a:prstGeom>
         </p:spPr>
       </p:pic>
-      <p:pic>
-        <p:nvPicPr>
-          <p:cNvPr id="6" name="Picture 5" descr="c10_graded.png"/>
-          <p:cNvPicPr>
-            <a:picLocks noChangeAspect="1"/>
-          </p:cNvPicPr>
-          <p:nvPr/>
-        </p:nvPicPr>
-        <p:blipFill>
-          <a:blip r:embed="rId5"/>
-          <a:stretch>
-            <a:fillRect/>
-          </a:stretch>
-        </p:blipFill>
-        <p:spPr>
-          <a:xfrm>
-            <a:off x="7223760" y="1737360"/>
-            <a:ext cx="4572000" cy="3282553"/>
-          </a:xfrm>
-          <a:prstGeom prst="rect">
-            <a:avLst/>
-          </a:prstGeom>
-        </p:spPr>
-      </p:pic>
-      <p:sp>
-        <p:nvSpPr>
-          <p:cNvPr id="7" name="TextBox 6"/>
-          <p:cNvSpPr txBox="1"/>
-          <p:nvPr/>
-        </p:nvSpPr>
-        <p:spPr>
-          <a:xfrm>
-            <a:off x="713232" y="6355080"/>
-            <a:ext cx="10789920" cy="320040"/>
-          </a:xfrm>
-          <a:prstGeom prst="rect">
-            <a:avLst/>
-          </a:prstGeom>
-          <a:noFill/>
-        </p:spPr>
-        <p:txBody>
-          <a:bodyPr wrap="square" lIns="0" rIns="0" tIns="0" bIns="0" anchor="t">
-            <a:spAutoFit/>
-          </a:bodyPr>
-          <a:lstStyle/>
-          <a:p>
-            <a:pPr algn="l">
-              <a:spcAft>
-                <a:spcPts val="800"/>
-              </a:spcAft>
-            </a:pPr>
-            <a:r>
-              <a:rPr sz="1400" b="0">
-                <a:solidFill>
-                  <a:srgbClr val="6E7080"/>
-                </a:solidFill>
-                <a:latin typeface="Patrick Hand"/>
-              </a:rPr>
-              <a:t>Right: R0/R1 papers, centred within citation bin; Spearman rho = 0.27, p &lt; 0.001.</a:t>
+      <p:sp>
+        <p:nvSpPr>
+          <p:cNvPr id="6" name="Rectangle 5"/>
+          <p:cNvSpPr/>
+          <p:nvPr/>
+        </p:nvSpPr>
+        <p:spPr>
+          <a:xfrm rot="90000">
+            <a:off x="9098280" y="1737360"/>
+            <a:ext cx="2651760" cy="3108960"/>
+          </a:xfrm>
+          <a:prstGeom prst="rect">
+            <a:avLst/>
+          </a:prstGeom>
+          <a:solidFill>
+            <a:srgbClr val="FFF1A8"/>
+          </a:solidFill>
+          <a:ln w="12700">
+            <a:solidFill>
+              <a:srgbClr val="E2D37A"/>
+            </a:solidFill>
+          </a:ln>
+          <a:effectLst/>
+        </p:spPr>
+        <p:style>
+          <a:lnRef idx="1">
+            <a:schemeClr val="accent1"/>
+          </a:lnRef>
+          <a:fillRef idx="3">
+            <a:schemeClr val="accent1"/>
+          </a:fillRef>
+          <a:effectRef idx="2">
+            <a:schemeClr val="accent1"/>
+          </a:effectRef>
+          <a:fontRef idx="minor">
+            <a:schemeClr val="lt1"/>
+          </a:fontRef>
+        </p:style>
+        <p:txBody>
+          <a:bodyPr rtlCol="0" anchor="t" wrap="square" lIns="201168" rIns="201168" tIns="164592" bIns="164592"/>
+          <a:lstStyle/>
+          <a:p>
+            <a:pPr algn="l">
+              <a:spcAft>
+                <a:spcPts val="900"/>
+              </a:spcAft>
+            </a:pPr>
+            <a:r>
+              <a:rPr sz="1900" b="0">
+                <a:solidFill>
+                  <a:srgbClr val="2B2D42"/>
+                </a:solidFill>
+                <a:latin typeface="Patrick Hand"/>
+              </a:rPr>
+              <a:t>Extra signal: </a:t>
+            </a:r>
+            <a:r>
+              <a:rPr sz="1900" b="1">
+                <a:solidFill>
+                  <a:srgbClr val="2B2D42"/>
+                </a:solidFill>
+                <a:latin typeface="Patrick Hand"/>
+              </a:rPr>
+              <a:t>+0.01 to +0.03</a:t>
+            </a:r>
+          </a:p>
+          <a:p>
+            <a:pPr algn="l">
+              <a:spcAft>
+                <a:spcPts val="900"/>
+              </a:spcAft>
+            </a:pPr>
+            <a:r>
+              <a:rPr sz="1900" b="0">
+                <a:solidFill>
+                  <a:srgbClr val="2B2D42"/>
+                </a:solidFill>
+                <a:latin typeface="Patrick Hand"/>
+              </a:rPr>
+              <a:t>vs ~0.44 at L62</a:t>
+            </a:r>
+          </a:p>
+          <a:p>
+            <a:pPr algn="l">
+              <a:spcAft>
+                <a:spcPts val="900"/>
+              </a:spcAft>
+            </a:pPr>
+            <a:r>
+              <a:rPr sz="1900" b="1">
+                <a:solidFill>
+                  <a:srgbClr val="E07A2F"/>
+                </a:solidFill>
+                <a:latin typeface="Patrick Hand"/>
+              </a:rPr>
+              <a:t>Not bigger for target</a:t>
+            </a:r>
+            <a:r>
+              <a:rPr sz="1900" b="0">
+                <a:solidFill>
+                  <a:srgbClr val="2B2D42"/>
+                </a:solidFill>
+                <a:latin typeface="Patrick Hand"/>
+              </a:rPr>
+              <a:t> (even negative at L48-56)</a:t>
             </a:r>
           </a:p>
         </p:txBody>
@@ -6415,7 +6949,7 @@
                 </a:solidFill>
                 <a:latin typeface="Caveat"/>
               </a:rPr>
-              <a:t>What we learned</a:t>
+              <a:t>More citations, more paper knowledge</a:t>
             </a:r>
           </a:p>
         </p:txBody>
@@ -6428,8 +6962,8 @@
         </p:nvSpPr>
         <p:spPr>
           <a:xfrm>
-            <a:off x="822960" y="1417320"/>
-            <a:ext cx="2834640" cy="822960"/>
+            <a:off x="713232" y="987552"/>
+            <a:ext cx="10881360" cy="411480"/>
           </a:xfrm>
           <a:prstGeom prst="rect">
             <a:avLst/>
@@ -6448,364 +6982,162 @@
               </a:spcAft>
             </a:pPr>
             <a:r>
-              <a:rPr sz="3000" b="1">
+              <a:rPr sz="1900" b="0">
+                <a:solidFill>
+                  <a:srgbClr val="6E7080"/>
+                </a:solidFill>
+                <a:latin typeface="Patrick Hand"/>
+              </a:rPr>
+              <a:t>model output · bins with &lt; 10 papers omitted</a:t>
+            </a:r>
+          </a:p>
+        </p:txBody>
+      </p:sp>
+      <p:pic>
+        <p:nvPicPr>
+          <p:cNvPr id="5" name="Picture 4" descr="c6_citation.png"/>
+          <p:cNvPicPr>
+            <a:picLocks noChangeAspect="1"/>
+          </p:cNvPicPr>
+          <p:nvPr/>
+        </p:nvPicPr>
+        <p:blipFill>
+          <a:blip r:embed="rId4"/>
+          <a:stretch>
+            <a:fillRect/>
+          </a:stretch>
+        </p:blipFill>
+        <p:spPr>
+          <a:xfrm>
+            <a:off x="457200" y="1463040"/>
+            <a:ext cx="8412480" cy="3894666"/>
+          </a:xfrm>
+          <a:prstGeom prst="rect">
+            <a:avLst/>
+          </a:prstGeom>
+        </p:spPr>
+      </p:pic>
+      <p:sp>
+        <p:nvSpPr>
+          <p:cNvPr id="6" name="Rectangle 5"/>
+          <p:cNvSpPr/>
+          <p:nvPr/>
+        </p:nvSpPr>
+        <p:spPr>
+          <a:xfrm rot="21510000">
+            <a:off x="9098280" y="1737360"/>
+            <a:ext cx="2651760" cy="3108960"/>
+          </a:xfrm>
+          <a:prstGeom prst="rect">
+            <a:avLst/>
+          </a:prstGeom>
+          <a:solidFill>
+            <a:srgbClr val="FFF1A8"/>
+          </a:solidFill>
+          <a:ln w="12700">
+            <a:solidFill>
+              <a:srgbClr val="E2D37A"/>
+            </a:solidFill>
+          </a:ln>
+          <a:effectLst/>
+        </p:spPr>
+        <p:style>
+          <a:lnRef idx="1">
+            <a:schemeClr val="accent1"/>
+          </a:lnRef>
+          <a:fillRef idx="3">
+            <a:schemeClr val="accent1"/>
+          </a:fillRef>
+          <a:effectRef idx="2">
+            <a:schemeClr val="accent1"/>
+          </a:effectRef>
+          <a:fontRef idx="minor">
+            <a:schemeClr val="lt1"/>
+          </a:fontRef>
+        </p:style>
+        <p:txBody>
+          <a:bodyPr rtlCol="0" anchor="t" wrap="square" lIns="201168" rIns="201168" tIns="164592" bIns="164592"/>
+          <a:lstStyle/>
+          <a:p>
+            <a:pPr algn="l">
+              <a:spcAft>
+                <a:spcPts val="900"/>
+              </a:spcAft>
+            </a:pPr>
+            <a:r>
+              <a:rPr sz="1800" b="0">
+                <a:solidFill>
+                  <a:srgbClr val="2B2D42"/>
+                </a:solidFill>
+                <a:latin typeface="Patrick Hand"/>
+              </a:rPr>
+              <a:t>Target: </a:t>
+            </a:r>
+            <a:r>
+              <a:rPr sz="1800" b="1">
                 <a:solidFill>
                   <a:srgbClr val="E07A2F"/>
                 </a:solidFill>
-                <a:latin typeface="Caveat"/>
-              </a:rPr>
-              <a:t>Late</a:t>
-            </a:r>
-          </a:p>
-        </p:txBody>
-      </p:sp>
-      <p:sp>
-        <p:nvSpPr>
-          <p:cNvPr id="5" name="TextBox 4"/>
-          <p:cNvSpPr txBox="1"/>
-          <p:nvPr/>
-        </p:nvSpPr>
-        <p:spPr>
-          <a:xfrm>
-            <a:off x="3657600" y="1527048"/>
-            <a:ext cx="7863840" cy="822960"/>
-          </a:xfrm>
-          <a:prstGeom prst="rect">
-            <a:avLst/>
-          </a:prstGeom>
-          <a:noFill/>
-        </p:spPr>
-        <p:txBody>
-          <a:bodyPr wrap="square" lIns="0" rIns="0" tIns="0" bIns="0" anchor="t">
-            <a:spAutoFit/>
-          </a:bodyPr>
-          <a:lstStyle/>
-          <a:p>
-            <a:pPr algn="l">
-              <a:spcAft>
-                <a:spcPts val="800"/>
-              </a:spcAft>
-            </a:pPr>
-            <a:r>
-              <a:rPr sz="2200" b="0">
+                <a:latin typeface="Patrick Hand"/>
+              </a:rPr>
+              <a:t>+0.35 -&gt; +0.64</a:t>
+            </a:r>
+          </a:p>
+          <a:p>
+            <a:pPr algn="l">
+              <a:spcAft>
+                <a:spcPts val="900"/>
+              </a:spcAft>
+            </a:pPr>
+            <a:r>
+              <a:rPr sz="1800" b="0">
                 <a:solidFill>
                   <a:srgbClr val="2B2D42"/>
                 </a:solidFill>
                 <a:latin typeface="Patrick Hand"/>
               </a:rPr>
-              <a:t>Paper-specific author knowledge builds up from about L50, fastest over L57-L61, peaking at L61-L62.</a:t>
-            </a:r>
-          </a:p>
-        </p:txBody>
-      </p:sp>
-      <p:sp>
-        <p:nvSpPr>
-          <p:cNvPr id="6" name="TextBox 5"/>
-          <p:cNvSpPr txBox="1"/>
-          <p:nvPr/>
-        </p:nvSpPr>
-        <p:spPr>
-          <a:xfrm>
-            <a:off x="822960" y="2377440"/>
-            <a:ext cx="2834640" cy="822960"/>
-          </a:xfrm>
-          <a:prstGeom prst="rect">
-            <a:avLst/>
-          </a:prstGeom>
-          <a:noFill/>
-        </p:spPr>
-        <p:txBody>
-          <a:bodyPr wrap="square" lIns="0" rIns="0" tIns="0" bIns="0" anchor="t">
-            <a:spAutoFit/>
-          </a:bodyPr>
-          <a:lstStyle/>
-          <a:p>
-            <a:pPr algn="l">
-              <a:spcAft>
-                <a:spcPts val="800"/>
-              </a:spcAft>
-            </a:pPr>
-            <a:r>
-              <a:rPr sz="3000" b="1">
-                <a:solidFill>
-                  <a:srgbClr val="3A6EA5"/>
-                </a:solidFill>
-                <a:latin typeface="Caveat"/>
-              </a:rPr>
-              <a:t>No head start</a:t>
-            </a:r>
-          </a:p>
-        </p:txBody>
-      </p:sp>
-      <p:sp>
-        <p:nvSpPr>
-          <p:cNvPr id="7" name="TextBox 6"/>
-          <p:cNvSpPr txBox="1"/>
-          <p:nvPr/>
-        </p:nvSpPr>
-        <p:spPr>
-          <a:xfrm>
-            <a:off x="3657600" y="2487168"/>
-            <a:ext cx="7863840" cy="822960"/>
-          </a:xfrm>
-          <a:prstGeom prst="rect">
-            <a:avLst/>
-          </a:prstGeom>
-          <a:noFill/>
-        </p:spPr>
-        <p:txBody>
-          <a:bodyPr wrap="square" lIns="0" rIns="0" tIns="0" bIns="0" anchor="t">
-            <a:spAutoFit/>
-          </a:bodyPr>
-          <a:lstStyle/>
-          <a:p>
-            <a:pPr algn="l">
-              <a:spcAft>
-                <a:spcPts val="800"/>
-              </a:spcAft>
-            </a:pPr>
-            <a:r>
-              <a:rPr sz="2200" b="0">
+              <a:t>Spearman (title-specific)</a:t>
+            </a:r>
+          </a:p>
+          <a:p>
+            <a:pPr algn="l">
+              <a:spcAft>
+                <a:spcPts val="900"/>
+              </a:spcAft>
+            </a:pPr>
+            <a:r>
+              <a:rPr sz="1800" b="1">
                 <a:solidFill>
                   <a:srgbClr val="2B2D42"/>
                 </a:solidFill>
                 <a:latin typeface="Patrick Hand"/>
               </a:rPr>
-              <a:t>Target papers are not ahead of control in middle layers; the +0.21 gap is at the end.</a:t>
-            </a:r>
-          </a:p>
-        </p:txBody>
-      </p:sp>
-      <p:sp>
-        <p:nvSpPr>
-          <p:cNvPr id="8" name="TextBox 7"/>
-          <p:cNvSpPr txBox="1"/>
-          <p:nvPr/>
-        </p:nvSpPr>
-        <p:spPr>
-          <a:xfrm>
-            <a:off x="822960" y="3337560"/>
-            <a:ext cx="2834640" cy="822960"/>
-          </a:xfrm>
-          <a:prstGeom prst="rect">
-            <a:avLst/>
-          </a:prstGeom>
-          <a:noFill/>
-        </p:spPr>
-        <p:txBody>
-          <a:bodyPr wrap="square" lIns="0" rIns="0" tIns="0" bIns="0" anchor="t">
-            <a:spAutoFit/>
-          </a:bodyPr>
-          <a:lstStyle/>
-          <a:p>
-            <a:pPr algn="l">
-              <a:spcAft>
-                <a:spcPts val="800"/>
-              </a:spcAft>
-            </a:pPr>
-            <a:r>
-              <a:rPr sz="3000" b="1">
-                <a:solidFill>
-                  <a:srgbClr val="3C8D5A"/>
-                </a:solidFill>
-                <a:latin typeface="Caveat"/>
-              </a:rPr>
-              <a:t>Real knowledge</a:t>
-            </a:r>
-          </a:p>
-        </p:txBody>
-      </p:sp>
-      <p:sp>
-        <p:nvSpPr>
-          <p:cNvPr id="9" name="TextBox 8"/>
-          <p:cNvSpPr txBox="1"/>
-          <p:nvPr/>
-        </p:nvSpPr>
-        <p:spPr>
-          <a:xfrm>
-            <a:off x="3657600" y="3447288"/>
-            <a:ext cx="7863840" cy="822960"/>
-          </a:xfrm>
-          <a:prstGeom prst="rect">
-            <a:avLst/>
-          </a:prstGeom>
-          <a:noFill/>
-        </p:spPr>
-        <p:txBody>
-          <a:bodyPr wrap="square" lIns="0" rIns="0" tIns="0" bIns="0" anchor="t">
-            <a:spAutoFit/>
-          </a:bodyPr>
-          <a:lstStyle/>
-          <a:p>
-            <a:pPr algn="l">
-              <a:spcAft>
-                <a:spcPts val="800"/>
-              </a:spcAft>
-            </a:pPr>
-            <a:r>
-              <a:rPr sz="2200" b="0">
+              <a:t>0.45</a:t>
+            </a:r>
+            <a:r>
+              <a:rPr sz="1800" b="0">
                 <a:solidFill>
                   <a:srgbClr val="2B2D42"/>
                 </a:solidFill>
                 <a:latin typeface="Patrick Hand"/>
               </a:rPr>
-              <a:t>The gap is title-specific and grows with citations, so it is not name guessing.</a:t>
-            </a:r>
-          </a:p>
-        </p:txBody>
-      </p:sp>
-      <p:sp>
-        <p:nvSpPr>
-          <p:cNvPr id="10" name="TextBox 9"/>
-          <p:cNvSpPr txBox="1"/>
-          <p:nvPr/>
-        </p:nvSpPr>
-        <p:spPr>
-          <a:xfrm>
-            <a:off x="822960" y="4297680"/>
-            <a:ext cx="2834640" cy="822960"/>
-          </a:xfrm>
-          <a:prstGeom prst="rect">
-            <a:avLst/>
-          </a:prstGeom>
-          <a:noFill/>
-        </p:spPr>
-        <p:txBody>
-          <a:bodyPr wrap="square" lIns="0" rIns="0" tIns="0" bIns="0" anchor="t">
-            <a:spAutoFit/>
-          </a:bodyPr>
-          <a:lstStyle/>
-          <a:p>
-            <a:pPr algn="l">
-              <a:spcAft>
-                <a:spcPts val="800"/>
-              </a:spcAft>
-            </a:pPr>
-            <a:r>
-              <a:rPr sz="3000" b="1">
+              <a:t> all · 0.33 target · 0.19 control</a:t>
+            </a:r>
+          </a:p>
+          <a:p>
+            <a:pPr algn="l">
+              <a:spcAft>
+                <a:spcPts val="900"/>
+              </a:spcAft>
+            </a:pPr>
+            <a:r>
+              <a:rPr sz="1800" b="0">
                 <a:solidFill>
                   <a:srgbClr val="2B2D42"/>
                 </a:solidFill>
-                <a:latin typeface="Caveat"/>
-              </a:rPr>
-              <a:t>Lenses agree</a:t>
-            </a:r>
-          </a:p>
-        </p:txBody>
-      </p:sp>
-      <p:sp>
-        <p:nvSpPr>
-          <p:cNvPr id="11" name="TextBox 10"/>
-          <p:cNvSpPr txBox="1"/>
-          <p:nvPr/>
-        </p:nvSpPr>
-        <p:spPr>
-          <a:xfrm>
-            <a:off x="3657600" y="4407408"/>
-            <a:ext cx="7863840" cy="822960"/>
-          </a:xfrm>
-          <a:prstGeom prst="rect">
-            <a:avLst/>
-          </a:prstGeom>
-          <a:noFill/>
-        </p:spPr>
-        <p:txBody>
-          <a:bodyPr wrap="square" lIns="0" rIns="0" tIns="0" bIns="0" anchor="t">
-            <a:spAutoFit/>
-          </a:bodyPr>
-          <a:lstStyle/>
-          <a:p>
-            <a:pPr algn="l">
-              <a:spcAft>
-                <a:spcPts val="800"/>
-              </a:spcAft>
-            </a:pPr>
-            <a:r>
-              <a:rPr sz="2200" b="0">
-                <a:solidFill>
-                  <a:srgbClr val="2B2D42"/>
-                </a:solidFill>
-                <a:latin typeface="Patrick Hand"/>
-              </a:rPr>
-              <a:t>Jacobian lenses read more in middle layers, but nothing target-specific.</a:t>
-            </a:r>
-          </a:p>
-        </p:txBody>
-      </p:sp>
-      <p:sp>
-        <p:nvSpPr>
-          <p:cNvPr id="12" name="TextBox 11"/>
-          <p:cNvSpPr txBox="1"/>
-          <p:nvPr/>
-        </p:nvSpPr>
-        <p:spPr>
-          <a:xfrm>
-            <a:off x="822960" y="5257800"/>
-            <a:ext cx="2834640" cy="822960"/>
-          </a:xfrm>
-          <a:prstGeom prst="rect">
-            <a:avLst/>
-          </a:prstGeom>
-          <a:noFill/>
-        </p:spPr>
-        <p:txBody>
-          <a:bodyPr wrap="square" lIns="0" rIns="0" tIns="0" bIns="0" anchor="t">
-            <a:spAutoFit/>
-          </a:bodyPr>
-          <a:lstStyle/>
-          <a:p>
-            <a:pPr algn="l">
-              <a:spcAft>
-                <a:spcPts val="800"/>
-              </a:spcAft>
-            </a:pPr>
-            <a:r>
-              <a:rPr sz="3000" b="1">
-                <a:solidFill>
-                  <a:srgbClr val="E07A2F"/>
-                </a:solidFill>
-                <a:latin typeface="Caveat"/>
-              </a:rPr>
-              <a:t>Name format</a:t>
-            </a:r>
-          </a:p>
-        </p:txBody>
-      </p:sp>
-      <p:sp>
-        <p:nvSpPr>
-          <p:cNvPr id="13" name="TextBox 12"/>
-          <p:cNvSpPr txBox="1"/>
-          <p:nvPr/>
-        </p:nvSpPr>
-        <p:spPr>
-          <a:xfrm>
-            <a:off x="3657600" y="5367528"/>
-            <a:ext cx="7863840" cy="822960"/>
-          </a:xfrm>
-          <a:prstGeom prst="rect">
-            <a:avLst/>
-          </a:prstGeom>
-          <a:noFill/>
-        </p:spPr>
-        <p:txBody>
-          <a:bodyPr wrap="square" lIns="0" rIns="0" tIns="0" bIns="0" anchor="t">
-            <a:spAutoFit/>
-          </a:bodyPr>
-          <a:lstStyle/>
-          <a:p>
-            <a:pPr algn="l">
-              <a:spcAft>
-                <a:spcPts val="800"/>
-              </a:spcAft>
-            </a:pPr>
-            <a:r>
-              <a:rPr sz="2200" b="0">
-                <a:solidFill>
-                  <a:srgbClr val="2B2D42"/>
-                </a:solidFill>
-                <a:latin typeface="Patrick Hand"/>
-              </a:rPr>
-              <a:t>Initials carry little; full given names carry as much as surnames and help predict them.</a:t>
+                <a:latin typeface="Patrick Hand"/>
+              </a:rPr>
+              <a:t>Target &gt; control in every bin</a:t>
             </a:r>
           </a:p>
         </p:txBody>
@@ -6886,7 +7218,7 @@
                 </a:solidFill>
                 <a:latin typeface="Caveat"/>
               </a:rPr>
-              <a:t>Caveats and next steps</a:t>
+              <a:t>First token or the rest of the name?</a:t>
             </a:r>
           </a:p>
         </p:txBody>
@@ -6899,8 +7231,8 @@
         </p:nvSpPr>
         <p:spPr>
           <a:xfrm>
-            <a:off x="822960" y="1463040"/>
-            <a:ext cx="5486400" cy="4389120"/>
+            <a:off x="713232" y="987552"/>
+            <a:ext cx="10881360" cy="411480"/>
           </a:xfrm>
           <a:prstGeom prst="rect">
             <a:avLst/>
@@ -6915,95 +7247,55 @@
           <a:p>
             <a:pPr algn="l">
               <a:spcAft>
-                <a:spcPts val="1000"/>
-              </a:spcAft>
-            </a:pPr>
-            <a:r>
-              <a:rPr sz="2100" b="1">
-                <a:solidFill>
-                  <a:srgbClr val="2B2D42"/>
-                </a:solidFill>
-                <a:latin typeface="Patrick Hand"/>
-              </a:rPr>
-              <a:t>Caveats</a:t>
-            </a:r>
-          </a:p>
-          <a:p>
-            <a:pPr algn="l">
-              <a:spcAft>
-                <a:spcPts val="1000"/>
-              </a:spcAft>
-            </a:pPr>
-            <a:r>
-              <a:rPr sz="2100" b="0">
-                <a:solidFill>
-                  <a:srgbClr val="2B2D42"/>
-                </a:solidFill>
-                <a:latin typeface="Patrick Hand"/>
-              </a:rPr>
-              <a:t>- Correlational: shows where info is readable, not where it is made</a:t>
-            </a:r>
-          </a:p>
-          <a:p>
-            <a:pPr algn="l">
-              <a:spcAft>
-                <a:spcPts val="1000"/>
-              </a:spcAft>
-            </a:pPr>
-            <a:r>
-              <a:rPr sz="2100" b="0">
-                <a:solidFill>
-                  <a:srgbClr val="2B2D42"/>
-                </a:solidFill>
-                <a:latin typeface="Patrick Hand"/>
-              </a:rPr>
-              <a:t>- Parity tolerance raised 0.25 -&gt; 0.5 after the fact</a:t>
-            </a:r>
-          </a:p>
-          <a:p>
-            <a:pPr algn="l">
-              <a:spcAft>
-                <a:spcPts val="1000"/>
-              </a:spcAft>
-            </a:pPr>
-            <a:r>
-              <a:rPr sz="2100" b="0">
-                <a:solidFill>
-                  <a:srgbClr val="2B2D42"/>
-                </a:solidFill>
-                <a:latin typeface="Patrick Hand"/>
-              </a:rPr>
-              <a:t>- Groups are model-specific; low-citation "recognition" is near chance</a:t>
-            </a:r>
-          </a:p>
-          <a:p>
-            <a:pPr algn="l">
-              <a:spcAft>
-                <a:spcPts val="1000"/>
-              </a:spcAft>
-            </a:pPr>
-            <a:r>
-              <a:rPr sz="2100" b="0">
-                <a:solidFill>
-                  <a:srgbClr val="2B2D42"/>
-                </a:solidFill>
-                <a:latin typeface="Patrick Hand"/>
-              </a:rPr>
-              <a:t>- Few control papers above 1,000 citations</a:t>
-            </a:r>
-          </a:p>
-        </p:txBody>
-      </p:sp>
-      <p:sp>
-        <p:nvSpPr>
-          <p:cNvPr id="5" name="Rectangle 4"/>
+                <a:spcPts val="800"/>
+              </a:spcAft>
+            </a:pPr>
+            <a:r>
+              <a:rPr sz="1900" b="0">
+                <a:solidFill>
+                  <a:srgbClr val="6E7080"/>
+                </a:solidFill>
+                <a:latin typeface="Patrick Hand"/>
+              </a:rPr>
+              <a:t>model output · split by name format</a:t>
+            </a:r>
+          </a:p>
+        </p:txBody>
+      </p:sp>
+      <p:pic>
+        <p:nvPicPr>
+          <p:cNvPr id="5" name="Picture 4" descr="c7_format_position.png"/>
+          <p:cNvPicPr>
+            <a:picLocks noChangeAspect="1"/>
+          </p:cNvPicPr>
+          <p:nvPr/>
+        </p:nvPicPr>
+        <p:blipFill>
+          <a:blip r:embed="rId4"/>
+          <a:stretch>
+            <a:fillRect/>
+          </a:stretch>
+        </p:blipFill>
+        <p:spPr>
+          <a:xfrm>
+            <a:off x="457200" y="1463040"/>
+            <a:ext cx="8412480" cy="3963572"/>
+          </a:xfrm>
+          <a:prstGeom prst="rect">
+            <a:avLst/>
+          </a:prstGeom>
+        </p:spPr>
+      </p:pic>
+      <p:sp>
+        <p:nvSpPr>
+          <p:cNvPr id="6" name="Rectangle 5"/>
           <p:cNvSpPr/>
           <p:nvPr/>
         </p:nvSpPr>
         <p:spPr>
           <a:xfrm rot="90000">
-            <a:off x="6766560" y="1554480"/>
-            <a:ext cx="4663440" cy="3291840"/>
+            <a:off x="9098280" y="1737360"/>
+            <a:ext cx="2651760" cy="3108960"/>
           </a:xfrm>
           <a:prstGeom prst="rect">
             <a:avLst/>
@@ -7044,11 +7336,20 @@
             <a:r>
               <a:rPr sz="1900" b="1">
                 <a:solidFill>
+                  <a:srgbClr val="3A6EA5"/>
+                </a:solidFill>
+                <a:latin typeface="Patrick Hand"/>
+              </a:rPr>
+              <a:t>Initial:</a:t>
+            </a:r>
+            <a:r>
+              <a:rPr sz="1900" b="0">
+                <a:solidFill>
                   <a:srgbClr val="2B2D42"/>
                 </a:solidFill>
                 <a:latin typeface="Patrick Hand"/>
               </a:rPr>
-              <a:t>Next</a:t>
+              <a:t> carries little; signal is on the surname</a:t>
             </a:r>
           </a:p>
           <a:p>
@@ -7058,15 +7359,211 @@
               </a:spcAft>
             </a:pPr>
             <a:r>
+              <a:rPr sz="1900" b="1">
+                <a:solidFill>
+                  <a:srgbClr val="E07A2F"/>
+                </a:solidFill>
+                <a:latin typeface="Patrick Hand"/>
+              </a:rPr>
+              <a:t>Full given name:</a:t>
+            </a:r>
+            <a:r>
               <a:rPr sz="1900" b="0">
                 <a:solidFill>
                   <a:srgbClr val="2B2D42"/>
                 </a:solidFill>
                 <a:latin typeface="Patrick Hand"/>
               </a:rPr>
-              <a:t>1. Patch the true-title state at L56 into a false-title run: are the right authors rescued?</a:t>
-            </a:r>
-          </a:p>
+              <a:t> carries about as much as the surname</a:t>
+            </a:r>
+          </a:p>
+        </p:txBody>
+      </p:sp>
+    </p:spTree>
+  </p:cSld>
+  <p:clrMapOvr>
+    <a:masterClrMapping/>
+  </p:clrMapOvr>
+</p:sld>
+</file>
+
+<file path=ppt/slides/slide18.xml><?xml version="1.0" encoding="utf-8"?>
+<p:sld xmlns:a="http://schemas.openxmlformats.org/drawingml/2006/main" xmlns:p="http://schemas.openxmlformats.org/presentationml/2006/main" xmlns:r="http://schemas.openxmlformats.org/officeDocument/2006/relationships">
+  <p:cSld>
+    <p:spTree>
+      <p:nvGrpSpPr>
+        <p:cNvPr id="1" name=""/>
+        <p:cNvGrpSpPr/>
+        <p:nvPr/>
+      </p:nvGrpSpPr>
+      <p:grpSpPr/>
+      <p:pic>
+        <p:nvPicPr>
+          <p:cNvPr id="2" name="Picture 1" descr="paper.png"/>
+          <p:cNvPicPr>
+            <a:picLocks noChangeAspect="1"/>
+          </p:cNvPicPr>
+          <p:nvPr/>
+        </p:nvPicPr>
+        <p:blipFill>
+          <a:blip r:embed="rId2"/>
+          <a:stretch>
+            <a:fillRect/>
+          </a:stretch>
+        </p:blipFill>
+        <p:spPr>
+          <a:xfrm>
+            <a:off x="0" y="0"/>
+            <a:ext cx="12191695" cy="6858000"/>
+          </a:xfrm>
+          <a:prstGeom prst="rect">
+            <a:avLst/>
+          </a:prstGeom>
+        </p:spPr>
+      </p:pic>
+      <p:sp>
+        <p:nvSpPr>
+          <p:cNvPr id="3" name="TextBox 2"/>
+          <p:cNvSpPr txBox="1"/>
+          <p:nvPr/>
+        </p:nvSpPr>
+        <p:spPr>
+          <a:xfrm>
+            <a:off x="685800" y="274320"/>
+            <a:ext cx="10881360" cy="822960"/>
+          </a:xfrm>
+          <a:prstGeom prst="rect">
+            <a:avLst/>
+          </a:prstGeom>
+          <a:noFill/>
+        </p:spPr>
+        <p:txBody>
+          <a:bodyPr wrap="square" lIns="0" rIns="0" tIns="0" bIns="0" anchor="t">
+            <a:spAutoFit/>
+          </a:bodyPr>
+          <a:lstStyle/>
+          <a:p>
+            <a:pPr algn="l">
+              <a:spcAft>
+                <a:spcPts val="800"/>
+              </a:spcAft>
+            </a:pPr>
+            <a:r>
+              <a:rPr sz="4600" b="1">
+                <a:solidFill>
+                  <a:srgbClr val="2B2D42"/>
+                </a:solidFill>
+                <a:latin typeface="Caveat"/>
+              </a:rPr>
+              <a:t>Knowing the given name helps with the surname</a:t>
+            </a:r>
+          </a:p>
+        </p:txBody>
+      </p:sp>
+      <p:sp>
+        <p:nvSpPr>
+          <p:cNvPr id="4" name="TextBox 3"/>
+          <p:cNvSpPr txBox="1"/>
+          <p:nvPr/>
+        </p:nvSpPr>
+        <p:spPr>
+          <a:xfrm>
+            <a:off x="713232" y="987552"/>
+            <a:ext cx="10881360" cy="411480"/>
+          </a:xfrm>
+          <a:prstGeom prst="rect">
+            <a:avLst/>
+          </a:prstGeom>
+          <a:noFill/>
+        </p:spPr>
+        <p:txBody>
+          <a:bodyPr wrap="square" lIns="0" rIns="0" tIns="0" bIns="0" anchor="t">
+            <a:spAutoFit/>
+          </a:bodyPr>
+          <a:lstStyle/>
+          <a:p>
+            <a:pPr algn="l">
+              <a:spcAft>
+                <a:spcPts val="800"/>
+              </a:spcAft>
+            </a:pPr>
+            <a:r>
+              <a:rPr sz="1900" b="0">
+                <a:solidFill>
+                  <a:srgbClr val="6E7080"/>
+                </a:solidFill>
+                <a:latin typeface="Patrick Hand"/>
+              </a:rPr>
+              <a:t>true title · later words when the first word is / is not in the top 10</a:t>
+            </a:r>
+          </a:p>
+        </p:txBody>
+      </p:sp>
+      <p:pic>
+        <p:nvPicPr>
+          <p:cNvPr id="5" name="Picture 4" descr="c8_first_word_helps.png"/>
+          <p:cNvPicPr>
+            <a:picLocks noChangeAspect="1"/>
+          </p:cNvPicPr>
+          <p:nvPr/>
+        </p:nvPicPr>
+        <p:blipFill>
+          <a:blip r:embed="rId4"/>
+          <a:stretch>
+            <a:fillRect/>
+          </a:stretch>
+        </p:blipFill>
+        <p:spPr>
+          <a:xfrm>
+            <a:off x="548640" y="1463040"/>
+            <a:ext cx="7315200" cy="4354285"/>
+          </a:xfrm>
+          <a:prstGeom prst="rect">
+            <a:avLst/>
+          </a:prstGeom>
+        </p:spPr>
+      </p:pic>
+      <p:sp>
+        <p:nvSpPr>
+          <p:cNvPr id="6" name="Rectangle 5"/>
+          <p:cNvSpPr/>
+          <p:nvPr/>
+        </p:nvSpPr>
+        <p:spPr>
+          <a:xfrm rot="21510000">
+            <a:off x="8229600" y="1737360"/>
+            <a:ext cx="3383280" cy="3108960"/>
+          </a:xfrm>
+          <a:prstGeom prst="rect">
+            <a:avLst/>
+          </a:prstGeom>
+          <a:solidFill>
+            <a:srgbClr val="FFF1A8"/>
+          </a:solidFill>
+          <a:ln w="12700">
+            <a:solidFill>
+              <a:srgbClr val="E2D37A"/>
+            </a:solidFill>
+          </a:ln>
+          <a:effectLst/>
+        </p:spPr>
+        <p:style>
+          <a:lnRef idx="1">
+            <a:schemeClr val="accent1"/>
+          </a:lnRef>
+          <a:fillRef idx="3">
+            <a:schemeClr val="accent1"/>
+          </a:fillRef>
+          <a:effectRef idx="2">
+            <a:schemeClr val="accent1"/>
+          </a:effectRef>
+          <a:fontRef idx="minor">
+            <a:schemeClr val="lt1"/>
+          </a:fontRef>
+        </p:style>
+        <p:txBody>
+          <a:bodyPr rtlCol="0" anchor="t" wrap="square" lIns="201168" rIns="201168" tIns="164592" bIns="164592"/>
+          <a:lstStyle/>
           <a:p>
             <a:pPr algn="l">
               <a:spcAft>
@@ -7074,13 +7571,29 @@
               </a:spcAft>
             </a:pPr>
             <a:r>
+              <a:rPr sz="1900" b="1">
+                <a:solidFill>
+                  <a:srgbClr val="E07A2F"/>
+                </a:solidFill>
+                <a:latin typeface="Patrick Hand"/>
+              </a:rPr>
+              <a:t>Given name in top 10</a:t>
+            </a:r>
+          </a:p>
+          <a:p>
+            <a:pPr algn="l">
+              <a:spcAft>
+                <a:spcPts val="900"/>
+              </a:spcAft>
+            </a:pPr>
+            <a:r>
               <a:rPr sz="1900" b="0">
                 <a:solidFill>
                   <a:srgbClr val="2B2D42"/>
                 </a:solidFill>
                 <a:latin typeface="Patrick Hand"/>
               </a:rPr>
-              <a:t>2. Score each author after the previous one: does the first author help with co-authors?</a:t>
+              <a:t>surname +0.22 (output)</a:t>
             </a:r>
           </a:p>
           <a:p>
@@ -7096,7 +7609,239 @@
                 </a:solidFill>
                 <a:latin typeface="Patrick Hand"/>
               </a:rPr>
-              <a:t>3. Block attention to the title tokens at L50-L61: where is the paper read from?</a:t>
+              <a:t>+0.32 (logit L62)</a:t>
+            </a:r>
+          </a:p>
+          <a:p>
+            <a:pPr algn="l">
+              <a:spcAft>
+                <a:spcPts val="900"/>
+              </a:spcAft>
+            </a:pPr>
+            <a:r>
+              <a:rPr sz="1900" b="1">
+                <a:solidFill>
+                  <a:srgbClr val="3A6EA5"/>
+                </a:solidFill>
+                <a:latin typeface="Patrick Hand"/>
+              </a:rPr>
+              <a:t>Initial in top 10</a:t>
+            </a:r>
+            <a:r>
+              <a:rPr sz="1900" b="0">
+                <a:solidFill>
+                  <a:srgbClr val="2B2D42"/>
+                </a:solidFill>
+                <a:latin typeface="Patrick Hand"/>
+              </a:rPr>
+              <a:t>: no help</a:t>
+            </a:r>
+          </a:p>
+        </p:txBody>
+      </p:sp>
+    </p:spTree>
+  </p:cSld>
+  <p:clrMapOvr>
+    <a:masterClrMapping/>
+  </p:clrMapOvr>
+</p:sld>
+</file>
+
+<file path=ppt/slides/slide19.xml><?xml version="1.0" encoding="utf-8"?>
+<p:sld xmlns:a="http://schemas.openxmlformats.org/drawingml/2006/main" xmlns:p="http://schemas.openxmlformats.org/presentationml/2006/main" xmlns:r="http://schemas.openxmlformats.org/officeDocument/2006/relationships">
+  <p:cSld>
+    <p:spTree>
+      <p:nvGrpSpPr>
+        <p:cNvPr id="1" name=""/>
+        <p:cNvGrpSpPr/>
+        <p:nvPr/>
+      </p:nvGrpSpPr>
+      <p:grpSpPr/>
+      <p:pic>
+        <p:nvPicPr>
+          <p:cNvPr id="2" name="Picture 1" descr="paper.png"/>
+          <p:cNvPicPr>
+            <a:picLocks noChangeAspect="1"/>
+          </p:cNvPicPr>
+          <p:nvPr/>
+        </p:nvPicPr>
+        <p:blipFill>
+          <a:blip r:embed="rId2"/>
+          <a:stretch>
+            <a:fillRect/>
+          </a:stretch>
+        </p:blipFill>
+        <p:spPr>
+          <a:xfrm>
+            <a:off x="0" y="0"/>
+            <a:ext cx="12191695" cy="6858000"/>
+          </a:xfrm>
+          <a:prstGeom prst="rect">
+            <a:avLst/>
+          </a:prstGeom>
+        </p:spPr>
+      </p:pic>
+      <p:sp>
+        <p:nvSpPr>
+          <p:cNvPr id="3" name="TextBox 2"/>
+          <p:cNvSpPr txBox="1"/>
+          <p:nvPr/>
+        </p:nvSpPr>
+        <p:spPr>
+          <a:xfrm>
+            <a:off x="685800" y="274320"/>
+            <a:ext cx="10881360" cy="822960"/>
+          </a:xfrm>
+          <a:prstGeom prst="rect">
+            <a:avLst/>
+          </a:prstGeom>
+          <a:noFill/>
+        </p:spPr>
+        <p:txBody>
+          <a:bodyPr wrap="square" lIns="0" rIns="0" tIns="0" bIns="0" anchor="t">
+            <a:spAutoFit/>
+          </a:bodyPr>
+          <a:lstStyle/>
+          <a:p>
+            <a:pPr algn="l">
+              <a:spcAft>
+                <a:spcPts val="800"/>
+              </a:spcAft>
+            </a:pPr>
+            <a:r>
+              <a:rPr sz="4600" b="1">
+                <a:solidFill>
+                  <a:srgbClr val="2B2D42"/>
+                </a:solidFill>
+                <a:latin typeface="Caveat"/>
+              </a:rPr>
+              <a:t>Where the signal sits, and a dose-response</a:t>
+            </a:r>
+          </a:p>
+        </p:txBody>
+      </p:sp>
+      <p:sp>
+        <p:nvSpPr>
+          <p:cNvPr id="4" name="TextBox 3"/>
+          <p:cNvSpPr txBox="1"/>
+          <p:nvPr/>
+        </p:nvSpPr>
+        <p:spPr>
+          <a:xfrm>
+            <a:off x="713232" y="987552"/>
+            <a:ext cx="10881360" cy="411480"/>
+          </a:xfrm>
+          <a:prstGeom prst="rect">
+            <a:avLst/>
+          </a:prstGeom>
+          <a:noFill/>
+        </p:spPr>
+        <p:txBody>
+          <a:bodyPr wrap="square" lIns="0" rIns="0" tIns="0" bIns="0" anchor="t">
+            <a:spAutoFit/>
+          </a:bodyPr>
+          <a:lstStyle/>
+          <a:p>
+            <a:pPr algn="l">
+              <a:spcAft>
+                <a:spcPts val="800"/>
+              </a:spcAft>
+            </a:pPr>
+            <a:r>
+              <a:rPr sz="1900" b="0">
+                <a:solidFill>
+                  <a:srgbClr val="6E7080"/>
+                </a:solidFill>
+                <a:latin typeface="Patrick Hand"/>
+              </a:rPr>
+              <a:t>model output</a:t>
+            </a:r>
+          </a:p>
+        </p:txBody>
+      </p:sp>
+      <p:pic>
+        <p:nvPicPr>
+          <p:cNvPr id="5" name="Picture 4" descr="c9_roles.png"/>
+          <p:cNvPicPr>
+            <a:picLocks noChangeAspect="1"/>
+          </p:cNvPicPr>
+          <p:nvPr/>
+        </p:nvPicPr>
+        <p:blipFill>
+          <a:blip r:embed="rId4"/>
+          <a:stretch>
+            <a:fillRect/>
+          </a:stretch>
+        </p:blipFill>
+        <p:spPr>
+          <a:xfrm>
+            <a:off x="365760" y="1463040"/>
+            <a:ext cx="6675120" cy="3973285"/>
+          </a:xfrm>
+          <a:prstGeom prst="rect">
+            <a:avLst/>
+          </a:prstGeom>
+        </p:spPr>
+      </p:pic>
+      <p:pic>
+        <p:nvPicPr>
+          <p:cNvPr id="6" name="Picture 5" descr="c10_graded.png"/>
+          <p:cNvPicPr>
+            <a:picLocks noChangeAspect="1"/>
+          </p:cNvPicPr>
+          <p:nvPr/>
+        </p:nvPicPr>
+        <p:blipFill>
+          <a:blip r:embed="rId5"/>
+          <a:stretch>
+            <a:fillRect/>
+          </a:stretch>
+        </p:blipFill>
+        <p:spPr>
+          <a:xfrm>
+            <a:off x="7223760" y="1737360"/>
+            <a:ext cx="4572000" cy="3282553"/>
+          </a:xfrm>
+          <a:prstGeom prst="rect">
+            <a:avLst/>
+          </a:prstGeom>
+        </p:spPr>
+      </p:pic>
+      <p:sp>
+        <p:nvSpPr>
+          <p:cNvPr id="7" name="TextBox 6"/>
+          <p:cNvSpPr txBox="1"/>
+          <p:nvPr/>
+        </p:nvSpPr>
+        <p:spPr>
+          <a:xfrm>
+            <a:off x="713232" y="6355080"/>
+            <a:ext cx="10789920" cy="320040"/>
+          </a:xfrm>
+          <a:prstGeom prst="rect">
+            <a:avLst/>
+          </a:prstGeom>
+          <a:noFill/>
+        </p:spPr>
+        <p:txBody>
+          <a:bodyPr wrap="square" lIns="0" rIns="0" tIns="0" bIns="0" anchor="t">
+            <a:spAutoFit/>
+          </a:bodyPr>
+          <a:lstStyle/>
+          <a:p>
+            <a:pPr algn="l">
+              <a:spcAft>
+                <a:spcPts val="800"/>
+              </a:spcAft>
+            </a:pPr>
+            <a:r>
+              <a:rPr sz="1400" b="0">
+                <a:solidFill>
+                  <a:srgbClr val="6E7080"/>
+                </a:solidFill>
+                <a:latin typeface="Patrick Hand"/>
+              </a:rPr>
+              <a:t>Right: R0/R1 papers, centred within citation bin; Spearman rho = 0.27, p &lt; 0.001.</a:t>
             </a:r>
           </a:p>
         </p:txBody>
@@ -7508,6 +8253,846 @@
                 <a:latin typeface="Patrick Hand"/>
               </a:rPr>
               <a:t>So: at which layer does target pull ahead of control?</a:t>
+            </a:r>
+          </a:p>
+        </p:txBody>
+      </p:sp>
+    </p:spTree>
+  </p:cSld>
+  <p:clrMapOvr>
+    <a:masterClrMapping/>
+  </p:clrMapOvr>
+</p:sld>
+</file>
+
+<file path=ppt/slides/slide20.xml><?xml version="1.0" encoding="utf-8"?>
+<p:sld xmlns:a="http://schemas.openxmlformats.org/drawingml/2006/main" xmlns:p="http://schemas.openxmlformats.org/presentationml/2006/main" xmlns:r="http://schemas.openxmlformats.org/officeDocument/2006/relationships">
+  <p:cSld>
+    <p:spTree>
+      <p:nvGrpSpPr>
+        <p:cNvPr id="1" name=""/>
+        <p:cNvGrpSpPr/>
+        <p:nvPr/>
+      </p:nvGrpSpPr>
+      <p:grpSpPr/>
+      <p:pic>
+        <p:nvPicPr>
+          <p:cNvPr id="2" name="Picture 1" descr="paper.png"/>
+          <p:cNvPicPr>
+            <a:picLocks noChangeAspect="1"/>
+          </p:cNvPicPr>
+          <p:nvPr/>
+        </p:nvPicPr>
+        <p:blipFill>
+          <a:blip r:embed="rId2"/>
+          <a:stretch>
+            <a:fillRect/>
+          </a:stretch>
+        </p:blipFill>
+        <p:spPr>
+          <a:xfrm>
+            <a:off x="0" y="0"/>
+            <a:ext cx="12191695" cy="6858000"/>
+          </a:xfrm>
+          <a:prstGeom prst="rect">
+            <a:avLst/>
+          </a:prstGeom>
+        </p:spPr>
+      </p:pic>
+      <p:sp>
+        <p:nvSpPr>
+          <p:cNvPr id="3" name="TextBox 2"/>
+          <p:cNvSpPr txBox="1"/>
+          <p:nvPr/>
+        </p:nvSpPr>
+        <p:spPr>
+          <a:xfrm>
+            <a:off x="685800" y="274320"/>
+            <a:ext cx="10881360" cy="822960"/>
+          </a:xfrm>
+          <a:prstGeom prst="rect">
+            <a:avLst/>
+          </a:prstGeom>
+          <a:noFill/>
+        </p:spPr>
+        <p:txBody>
+          <a:bodyPr wrap="square" lIns="0" rIns="0" tIns="0" bIns="0" anchor="t">
+            <a:spAutoFit/>
+          </a:bodyPr>
+          <a:lstStyle/>
+          <a:p>
+            <a:pPr algn="l">
+              <a:spcAft>
+                <a:spcPts val="800"/>
+              </a:spcAft>
+            </a:pPr>
+            <a:r>
+              <a:rPr sz="4600" b="1">
+                <a:solidFill>
+                  <a:srgbClr val="2B2D42"/>
+                </a:solidFill>
+                <a:latin typeface="Caveat"/>
+              </a:rPr>
+              <a:t>What we learned</a:t>
+            </a:r>
+          </a:p>
+        </p:txBody>
+      </p:sp>
+      <p:sp>
+        <p:nvSpPr>
+          <p:cNvPr id="4" name="TextBox 3"/>
+          <p:cNvSpPr txBox="1"/>
+          <p:nvPr/>
+        </p:nvSpPr>
+        <p:spPr>
+          <a:xfrm>
+            <a:off x="822960" y="1325880"/>
+            <a:ext cx="2834640" cy="777240"/>
+          </a:xfrm>
+          <a:prstGeom prst="rect">
+            <a:avLst/>
+          </a:prstGeom>
+          <a:noFill/>
+        </p:spPr>
+        <p:txBody>
+          <a:bodyPr wrap="square" lIns="0" rIns="0" tIns="0" bIns="0" anchor="t">
+            <a:spAutoFit/>
+          </a:bodyPr>
+          <a:lstStyle/>
+          <a:p>
+            <a:pPr algn="l">
+              <a:spcAft>
+                <a:spcPts val="800"/>
+              </a:spcAft>
+            </a:pPr>
+            <a:r>
+              <a:rPr sz="2800" b="1">
+                <a:solidFill>
+                  <a:srgbClr val="E07A2F"/>
+                </a:solidFill>
+                <a:latin typeface="Caveat"/>
+              </a:rPr>
+              <a:t>Late</a:t>
+            </a:r>
+          </a:p>
+        </p:txBody>
+      </p:sp>
+      <p:sp>
+        <p:nvSpPr>
+          <p:cNvPr id="5" name="TextBox 4"/>
+          <p:cNvSpPr txBox="1"/>
+          <p:nvPr/>
+        </p:nvSpPr>
+        <p:spPr>
+          <a:xfrm>
+            <a:off x="3657600" y="1417320"/>
+            <a:ext cx="7863840" cy="777240"/>
+          </a:xfrm>
+          <a:prstGeom prst="rect">
+            <a:avLst/>
+          </a:prstGeom>
+          <a:noFill/>
+        </p:spPr>
+        <p:txBody>
+          <a:bodyPr wrap="square" lIns="0" rIns="0" tIns="0" bIns="0" anchor="t">
+            <a:spAutoFit/>
+          </a:bodyPr>
+          <a:lstStyle/>
+          <a:p>
+            <a:pPr algn="l">
+              <a:spcAft>
+                <a:spcPts val="800"/>
+              </a:spcAft>
+            </a:pPr>
+            <a:r>
+              <a:rPr sz="2000" b="0">
+                <a:solidFill>
+                  <a:srgbClr val="2B2D42"/>
+                </a:solidFill>
+                <a:latin typeface="Patrick Hand"/>
+              </a:rPr>
+              <a:t>Paper-specific author knowledge builds up from about L50, fastest over L57-L61, peaking at L61-L62.</a:t>
+            </a:r>
+          </a:p>
+        </p:txBody>
+      </p:sp>
+      <p:sp>
+        <p:nvSpPr>
+          <p:cNvPr id="6" name="TextBox 5"/>
+          <p:cNvSpPr txBox="1"/>
+          <p:nvPr/>
+        </p:nvSpPr>
+        <p:spPr>
+          <a:xfrm>
+            <a:off x="822960" y="2167128"/>
+            <a:ext cx="2834640" cy="777240"/>
+          </a:xfrm>
+          <a:prstGeom prst="rect">
+            <a:avLst/>
+          </a:prstGeom>
+          <a:noFill/>
+        </p:spPr>
+        <p:txBody>
+          <a:bodyPr wrap="square" lIns="0" rIns="0" tIns="0" bIns="0" anchor="t">
+            <a:spAutoFit/>
+          </a:bodyPr>
+          <a:lstStyle/>
+          <a:p>
+            <a:pPr algn="l">
+              <a:spcAft>
+                <a:spcPts val="800"/>
+              </a:spcAft>
+            </a:pPr>
+            <a:r>
+              <a:rPr sz="2800" b="1">
+                <a:solidFill>
+                  <a:srgbClr val="3C8D5A"/>
+                </a:solidFill>
+                <a:latin typeface="Caveat"/>
+              </a:rPr>
+              <a:t>Read early</a:t>
+            </a:r>
+          </a:p>
+        </p:txBody>
+      </p:sp>
+      <p:sp>
+        <p:nvSpPr>
+          <p:cNvPr id="7" name="TextBox 6"/>
+          <p:cNvSpPr txBox="1"/>
+          <p:nvPr/>
+        </p:nvSpPr>
+        <p:spPr>
+          <a:xfrm>
+            <a:off x="3657600" y="2258568"/>
+            <a:ext cx="7863840" cy="777240"/>
+          </a:xfrm>
+          <a:prstGeom prst="rect">
+            <a:avLst/>
+          </a:prstGeom>
+          <a:noFill/>
+        </p:spPr>
+        <p:txBody>
+          <a:bodyPr wrap="square" lIns="0" rIns="0" tIns="0" bIns="0" anchor="t">
+            <a:spAutoFit/>
+          </a:bodyPr>
+          <a:lstStyle/>
+          <a:p>
+            <a:pPr algn="l">
+              <a:spcAft>
+                <a:spcPts val="800"/>
+              </a:spcAft>
+            </a:pPr>
+            <a:r>
+              <a:rPr sz="2000" b="0">
+                <a:solidFill>
+                  <a:srgbClr val="2B2D42"/>
+                </a:solidFill>
+                <a:latin typeface="Patrick Hand"/>
+              </a:rPr>
+              <a:t>Causally, the title is read in L24-L50 and moved into the tokens after it; after L52 it is no longer needed.</a:t>
+            </a:r>
+          </a:p>
+        </p:txBody>
+      </p:sp>
+      <p:sp>
+        <p:nvSpPr>
+          <p:cNvPr id="8" name="TextBox 7"/>
+          <p:cNvSpPr txBox="1"/>
+          <p:nvPr/>
+        </p:nvSpPr>
+        <p:spPr>
+          <a:xfrm>
+            <a:off x="822960" y="3008376"/>
+            <a:ext cx="2834640" cy="777240"/>
+          </a:xfrm>
+          <a:prstGeom prst="rect">
+            <a:avLst/>
+          </a:prstGeom>
+          <a:noFill/>
+        </p:spPr>
+        <p:txBody>
+          <a:bodyPr wrap="square" lIns="0" rIns="0" tIns="0" bIns="0" anchor="t">
+            <a:spAutoFit/>
+          </a:bodyPr>
+          <a:lstStyle/>
+          <a:p>
+            <a:pPr algn="l">
+              <a:spcAft>
+                <a:spcPts val="800"/>
+              </a:spcAft>
+            </a:pPr>
+            <a:r>
+              <a:rPr sz="2800" b="1">
+                <a:solidFill>
+                  <a:srgbClr val="3A6EA5"/>
+                </a:solidFill>
+                <a:latin typeface="Caveat"/>
+              </a:rPr>
+              <a:t>No head start</a:t>
+            </a:r>
+          </a:p>
+        </p:txBody>
+      </p:sp>
+      <p:sp>
+        <p:nvSpPr>
+          <p:cNvPr id="9" name="TextBox 8"/>
+          <p:cNvSpPr txBox="1"/>
+          <p:nvPr/>
+        </p:nvSpPr>
+        <p:spPr>
+          <a:xfrm>
+            <a:off x="3657600" y="3099816"/>
+            <a:ext cx="7863840" cy="777240"/>
+          </a:xfrm>
+          <a:prstGeom prst="rect">
+            <a:avLst/>
+          </a:prstGeom>
+          <a:noFill/>
+        </p:spPr>
+        <p:txBody>
+          <a:bodyPr wrap="square" lIns="0" rIns="0" tIns="0" bIns="0" anchor="t">
+            <a:spAutoFit/>
+          </a:bodyPr>
+          <a:lstStyle/>
+          <a:p>
+            <a:pPr algn="l">
+              <a:spcAft>
+                <a:spcPts val="800"/>
+              </a:spcAft>
+            </a:pPr>
+            <a:r>
+              <a:rPr sz="2000" b="0">
+                <a:solidFill>
+                  <a:srgbClr val="2B2D42"/>
+                </a:solidFill>
+                <a:latin typeface="Patrick Hand"/>
+              </a:rPr>
+              <a:t>Target papers are not ahead of control in middle layers; the +0.21 gap is at the end.</a:t>
+            </a:r>
+          </a:p>
+        </p:txBody>
+      </p:sp>
+      <p:sp>
+        <p:nvSpPr>
+          <p:cNvPr id="10" name="TextBox 9"/>
+          <p:cNvSpPr txBox="1"/>
+          <p:nvPr/>
+        </p:nvSpPr>
+        <p:spPr>
+          <a:xfrm>
+            <a:off x="822960" y="3849624"/>
+            <a:ext cx="2834640" cy="777240"/>
+          </a:xfrm>
+          <a:prstGeom prst="rect">
+            <a:avLst/>
+          </a:prstGeom>
+          <a:noFill/>
+        </p:spPr>
+        <p:txBody>
+          <a:bodyPr wrap="square" lIns="0" rIns="0" tIns="0" bIns="0" anchor="t">
+            <a:spAutoFit/>
+          </a:bodyPr>
+          <a:lstStyle/>
+          <a:p>
+            <a:pPr algn="l">
+              <a:spcAft>
+                <a:spcPts val="800"/>
+              </a:spcAft>
+            </a:pPr>
+            <a:r>
+              <a:rPr sz="2800" b="1">
+                <a:solidFill>
+                  <a:srgbClr val="3C8D5A"/>
+                </a:solidFill>
+                <a:latin typeface="Caveat"/>
+              </a:rPr>
+              <a:t>Real knowledge</a:t>
+            </a:r>
+          </a:p>
+        </p:txBody>
+      </p:sp>
+      <p:sp>
+        <p:nvSpPr>
+          <p:cNvPr id="11" name="TextBox 10"/>
+          <p:cNvSpPr txBox="1"/>
+          <p:nvPr/>
+        </p:nvSpPr>
+        <p:spPr>
+          <a:xfrm>
+            <a:off x="3657600" y="3941063"/>
+            <a:ext cx="7863840" cy="777240"/>
+          </a:xfrm>
+          <a:prstGeom prst="rect">
+            <a:avLst/>
+          </a:prstGeom>
+          <a:noFill/>
+        </p:spPr>
+        <p:txBody>
+          <a:bodyPr wrap="square" lIns="0" rIns="0" tIns="0" bIns="0" anchor="t">
+            <a:spAutoFit/>
+          </a:bodyPr>
+          <a:lstStyle/>
+          <a:p>
+            <a:pPr algn="l">
+              <a:spcAft>
+                <a:spcPts val="800"/>
+              </a:spcAft>
+            </a:pPr>
+            <a:r>
+              <a:rPr sz="2000" b="0">
+                <a:solidFill>
+                  <a:srgbClr val="2B2D42"/>
+                </a:solidFill>
+                <a:latin typeface="Patrick Hand"/>
+              </a:rPr>
+              <a:t>The gap is title-specific and grows with citations, so it is not name guessing.</a:t>
+            </a:r>
+          </a:p>
+        </p:txBody>
+      </p:sp>
+      <p:sp>
+        <p:nvSpPr>
+          <p:cNvPr id="12" name="TextBox 11"/>
+          <p:cNvSpPr txBox="1"/>
+          <p:nvPr/>
+        </p:nvSpPr>
+        <p:spPr>
+          <a:xfrm>
+            <a:off x="822960" y="4690872"/>
+            <a:ext cx="2834640" cy="777240"/>
+          </a:xfrm>
+          <a:prstGeom prst="rect">
+            <a:avLst/>
+          </a:prstGeom>
+          <a:noFill/>
+        </p:spPr>
+        <p:txBody>
+          <a:bodyPr wrap="square" lIns="0" rIns="0" tIns="0" bIns="0" anchor="t">
+            <a:spAutoFit/>
+          </a:bodyPr>
+          <a:lstStyle/>
+          <a:p>
+            <a:pPr algn="l">
+              <a:spcAft>
+                <a:spcPts val="800"/>
+              </a:spcAft>
+            </a:pPr>
+            <a:r>
+              <a:rPr sz="2800" b="1">
+                <a:solidFill>
+                  <a:srgbClr val="2B2D42"/>
+                </a:solidFill>
+                <a:latin typeface="Caveat"/>
+              </a:rPr>
+              <a:t>Lenses agree</a:t>
+            </a:r>
+          </a:p>
+        </p:txBody>
+      </p:sp>
+      <p:sp>
+        <p:nvSpPr>
+          <p:cNvPr id="13" name="TextBox 12"/>
+          <p:cNvSpPr txBox="1"/>
+          <p:nvPr/>
+        </p:nvSpPr>
+        <p:spPr>
+          <a:xfrm>
+            <a:off x="3657600" y="4782312"/>
+            <a:ext cx="7863840" cy="777240"/>
+          </a:xfrm>
+          <a:prstGeom prst="rect">
+            <a:avLst/>
+          </a:prstGeom>
+          <a:noFill/>
+        </p:spPr>
+        <p:txBody>
+          <a:bodyPr wrap="square" lIns="0" rIns="0" tIns="0" bIns="0" anchor="t">
+            <a:spAutoFit/>
+          </a:bodyPr>
+          <a:lstStyle/>
+          <a:p>
+            <a:pPr algn="l">
+              <a:spcAft>
+                <a:spcPts val="800"/>
+              </a:spcAft>
+            </a:pPr>
+            <a:r>
+              <a:rPr sz="2000" b="0">
+                <a:solidFill>
+                  <a:srgbClr val="2B2D42"/>
+                </a:solidFill>
+                <a:latin typeface="Patrick Hand"/>
+              </a:rPr>
+              <a:t>Jacobian lenses read more in middle layers, but nothing target-specific.</a:t>
+            </a:r>
+          </a:p>
+        </p:txBody>
+      </p:sp>
+      <p:sp>
+        <p:nvSpPr>
+          <p:cNvPr id="14" name="TextBox 13"/>
+          <p:cNvSpPr txBox="1"/>
+          <p:nvPr/>
+        </p:nvSpPr>
+        <p:spPr>
+          <a:xfrm>
+            <a:off x="822960" y="5532120"/>
+            <a:ext cx="2834640" cy="777240"/>
+          </a:xfrm>
+          <a:prstGeom prst="rect">
+            <a:avLst/>
+          </a:prstGeom>
+          <a:noFill/>
+        </p:spPr>
+        <p:txBody>
+          <a:bodyPr wrap="square" lIns="0" rIns="0" tIns="0" bIns="0" anchor="t">
+            <a:spAutoFit/>
+          </a:bodyPr>
+          <a:lstStyle/>
+          <a:p>
+            <a:pPr algn="l">
+              <a:spcAft>
+                <a:spcPts val="800"/>
+              </a:spcAft>
+            </a:pPr>
+            <a:r>
+              <a:rPr sz="2800" b="1">
+                <a:solidFill>
+                  <a:srgbClr val="E07A2F"/>
+                </a:solidFill>
+                <a:latin typeface="Caveat"/>
+              </a:rPr>
+              <a:t>Name format</a:t>
+            </a:r>
+          </a:p>
+        </p:txBody>
+      </p:sp>
+      <p:sp>
+        <p:nvSpPr>
+          <p:cNvPr id="15" name="TextBox 14"/>
+          <p:cNvSpPr txBox="1"/>
+          <p:nvPr/>
+        </p:nvSpPr>
+        <p:spPr>
+          <a:xfrm>
+            <a:off x="3657600" y="5623560"/>
+            <a:ext cx="7863840" cy="777240"/>
+          </a:xfrm>
+          <a:prstGeom prst="rect">
+            <a:avLst/>
+          </a:prstGeom>
+          <a:noFill/>
+        </p:spPr>
+        <p:txBody>
+          <a:bodyPr wrap="square" lIns="0" rIns="0" tIns="0" bIns="0" anchor="t">
+            <a:spAutoFit/>
+          </a:bodyPr>
+          <a:lstStyle/>
+          <a:p>
+            <a:pPr algn="l">
+              <a:spcAft>
+                <a:spcPts val="800"/>
+              </a:spcAft>
+            </a:pPr>
+            <a:r>
+              <a:rPr sz="2000" b="0">
+                <a:solidFill>
+                  <a:srgbClr val="2B2D42"/>
+                </a:solidFill>
+                <a:latin typeface="Patrick Hand"/>
+              </a:rPr>
+              <a:t>Initials carry little; full given names carry as much as surnames and help predict them.</a:t>
+            </a:r>
+          </a:p>
+        </p:txBody>
+      </p:sp>
+    </p:spTree>
+  </p:cSld>
+  <p:clrMapOvr>
+    <a:masterClrMapping/>
+  </p:clrMapOvr>
+</p:sld>
+</file>
+
+<file path=ppt/slides/slide21.xml><?xml version="1.0" encoding="utf-8"?>
+<p:sld xmlns:a="http://schemas.openxmlformats.org/drawingml/2006/main" xmlns:p="http://schemas.openxmlformats.org/presentationml/2006/main" xmlns:r="http://schemas.openxmlformats.org/officeDocument/2006/relationships">
+  <p:cSld>
+    <p:spTree>
+      <p:nvGrpSpPr>
+        <p:cNvPr id="1" name=""/>
+        <p:cNvGrpSpPr/>
+        <p:nvPr/>
+      </p:nvGrpSpPr>
+      <p:grpSpPr/>
+      <p:pic>
+        <p:nvPicPr>
+          <p:cNvPr id="2" name="Picture 1" descr="paper.png"/>
+          <p:cNvPicPr>
+            <a:picLocks noChangeAspect="1"/>
+          </p:cNvPicPr>
+          <p:nvPr/>
+        </p:nvPicPr>
+        <p:blipFill>
+          <a:blip r:embed="rId2"/>
+          <a:stretch>
+            <a:fillRect/>
+          </a:stretch>
+        </p:blipFill>
+        <p:spPr>
+          <a:xfrm>
+            <a:off x="0" y="0"/>
+            <a:ext cx="12191695" cy="6858000"/>
+          </a:xfrm>
+          <a:prstGeom prst="rect">
+            <a:avLst/>
+          </a:prstGeom>
+        </p:spPr>
+      </p:pic>
+      <p:sp>
+        <p:nvSpPr>
+          <p:cNvPr id="3" name="TextBox 2"/>
+          <p:cNvSpPr txBox="1"/>
+          <p:nvPr/>
+        </p:nvSpPr>
+        <p:spPr>
+          <a:xfrm>
+            <a:off x="685800" y="274320"/>
+            <a:ext cx="10881360" cy="822960"/>
+          </a:xfrm>
+          <a:prstGeom prst="rect">
+            <a:avLst/>
+          </a:prstGeom>
+          <a:noFill/>
+        </p:spPr>
+        <p:txBody>
+          <a:bodyPr wrap="square" lIns="0" rIns="0" tIns="0" bIns="0" anchor="t">
+            <a:spAutoFit/>
+          </a:bodyPr>
+          <a:lstStyle/>
+          <a:p>
+            <a:pPr algn="l">
+              <a:spcAft>
+                <a:spcPts val="800"/>
+              </a:spcAft>
+            </a:pPr>
+            <a:r>
+              <a:rPr sz="4600" b="1">
+                <a:solidFill>
+                  <a:srgbClr val="2B2D42"/>
+                </a:solidFill>
+                <a:latin typeface="Caveat"/>
+              </a:rPr>
+              <a:t>Caveats and next steps</a:t>
+            </a:r>
+          </a:p>
+        </p:txBody>
+      </p:sp>
+      <p:sp>
+        <p:nvSpPr>
+          <p:cNvPr id="4" name="TextBox 3"/>
+          <p:cNvSpPr txBox="1"/>
+          <p:nvPr/>
+        </p:nvSpPr>
+        <p:spPr>
+          <a:xfrm>
+            <a:off x="822960" y="1463040"/>
+            <a:ext cx="5486400" cy="4389120"/>
+          </a:xfrm>
+          <a:prstGeom prst="rect">
+            <a:avLst/>
+          </a:prstGeom>
+          <a:noFill/>
+        </p:spPr>
+        <p:txBody>
+          <a:bodyPr wrap="square" lIns="0" rIns="0" tIns="0" bIns="0" anchor="t">
+            <a:spAutoFit/>
+          </a:bodyPr>
+          <a:lstStyle/>
+          <a:p>
+            <a:pPr algn="l">
+              <a:spcAft>
+                <a:spcPts val="1000"/>
+              </a:spcAft>
+            </a:pPr>
+            <a:r>
+              <a:rPr sz="2100" b="1">
+                <a:solidFill>
+                  <a:srgbClr val="2B2D42"/>
+                </a:solidFill>
+                <a:latin typeface="Patrick Hand"/>
+              </a:rPr>
+              <a:t>Caveats</a:t>
+            </a:r>
+          </a:p>
+          <a:p>
+            <a:pPr algn="l">
+              <a:spcAft>
+                <a:spcPts val="1000"/>
+              </a:spcAft>
+            </a:pPr>
+            <a:r>
+              <a:rPr sz="2100" b="0">
+                <a:solidFill>
+                  <a:srgbClr val="2B2D42"/>
+                </a:solidFill>
+                <a:latin typeface="Patrick Hand"/>
+              </a:rPr>
+              <a:t>- Readout is correlational; patching/knockout fix the timing, not the mechanism inside L24-L50</a:t>
+            </a:r>
+          </a:p>
+          <a:p>
+            <a:pPr algn="l">
+              <a:spcAft>
+                <a:spcPts val="1000"/>
+              </a:spcAft>
+            </a:pPr>
+            <a:r>
+              <a:rPr sz="2100" b="0">
+                <a:solidFill>
+                  <a:srgbClr val="2B2D42"/>
+                </a:solidFill>
+                <a:latin typeface="Patrick Hand"/>
+              </a:rPr>
+              <a:t>- Parity tolerance raised 0.25 -&gt; 0.5 after the fact</a:t>
+            </a:r>
+          </a:p>
+          <a:p>
+            <a:pPr algn="l">
+              <a:spcAft>
+                <a:spcPts val="1000"/>
+              </a:spcAft>
+            </a:pPr>
+            <a:r>
+              <a:rPr sz="2100" b="0">
+                <a:solidFill>
+                  <a:srgbClr val="2B2D42"/>
+                </a:solidFill>
+                <a:latin typeface="Patrick Hand"/>
+              </a:rPr>
+              <a:t>- Groups are model-specific; low-citation "recognition" is near chance</a:t>
+            </a:r>
+          </a:p>
+          <a:p>
+            <a:pPr algn="l">
+              <a:spcAft>
+                <a:spcPts val="1000"/>
+              </a:spcAft>
+            </a:pPr>
+            <a:r>
+              <a:rPr sz="2100" b="0">
+                <a:solidFill>
+                  <a:srgbClr val="2B2D42"/>
+                </a:solidFill>
+                <a:latin typeface="Patrick Hand"/>
+              </a:rPr>
+              <a:t>- Few control papers above 1,000 citations</a:t>
+            </a:r>
+          </a:p>
+        </p:txBody>
+      </p:sp>
+      <p:sp>
+        <p:nvSpPr>
+          <p:cNvPr id="5" name="Rectangle 4"/>
+          <p:cNvSpPr/>
+          <p:nvPr/>
+        </p:nvSpPr>
+        <p:spPr>
+          <a:xfrm rot="90000">
+            <a:off x="6766560" y="1554480"/>
+            <a:ext cx="4663440" cy="3291840"/>
+          </a:xfrm>
+          <a:prstGeom prst="rect">
+            <a:avLst/>
+          </a:prstGeom>
+          <a:solidFill>
+            <a:srgbClr val="FFF1A8"/>
+          </a:solidFill>
+          <a:ln w="12700">
+            <a:solidFill>
+              <a:srgbClr val="E2D37A"/>
+            </a:solidFill>
+          </a:ln>
+          <a:effectLst/>
+        </p:spPr>
+        <p:style>
+          <a:lnRef idx="1">
+            <a:schemeClr val="accent1"/>
+          </a:lnRef>
+          <a:fillRef idx="3">
+            <a:schemeClr val="accent1"/>
+          </a:fillRef>
+          <a:effectRef idx="2">
+            <a:schemeClr val="accent1"/>
+          </a:effectRef>
+          <a:fontRef idx="minor">
+            <a:schemeClr val="lt1"/>
+          </a:fontRef>
+        </p:style>
+        <p:txBody>
+          <a:bodyPr rtlCol="0" anchor="t" wrap="square" lIns="201168" rIns="201168" tIns="164592" bIns="164592"/>
+          <a:lstStyle/>
+          <a:p>
+            <a:pPr algn="l">
+              <a:spcAft>
+                <a:spcPts val="900"/>
+              </a:spcAft>
+            </a:pPr>
+            <a:r>
+              <a:rPr sz="1900" b="1">
+                <a:solidFill>
+                  <a:srgbClr val="2B2D42"/>
+                </a:solidFill>
+                <a:latin typeface="Patrick Hand"/>
+              </a:rPr>
+              <a:t>Next</a:t>
+            </a:r>
+          </a:p>
+          <a:p>
+            <a:pPr algn="l">
+              <a:spcAft>
+                <a:spcPts val="900"/>
+              </a:spcAft>
+            </a:pPr>
+            <a:r>
+              <a:rPr sz="1900" b="0">
+                <a:solidFill>
+                  <a:srgbClr val="2B2D42"/>
+                </a:solidFill>
+                <a:latin typeface="Patrick Hand"/>
+              </a:rPr>
+              <a:t>1. Patch single positions (quote, year, "Authors:") to find which token carries the paper</a:t>
+            </a:r>
+          </a:p>
+          <a:p>
+            <a:pPr algn="l">
+              <a:spcAft>
+                <a:spcPts val="900"/>
+              </a:spcAft>
+            </a:pPr>
+            <a:r>
+              <a:rPr sz="1900" b="0">
+                <a:solidFill>
+                  <a:srgbClr val="2B2D42"/>
+                </a:solidFill>
+                <a:latin typeface="Patrick Hand"/>
+              </a:rPr>
+              <a:t>2. Patch / probe per layer inside L24-L50 to see when it is computed</a:t>
+            </a:r>
+          </a:p>
+          <a:p>
+            <a:pPr algn="l">
+              <a:spcAft>
+                <a:spcPts val="900"/>
+              </a:spcAft>
+            </a:pPr>
+            <a:r>
+              <a:rPr sz="1900" b="0">
+                <a:solidFill>
+                  <a:srgbClr val="2B2D42"/>
+                </a:solidFill>
+                <a:latin typeface="Patrick Hand"/>
+              </a:rPr>
+              <a:t>3. Repeat on a second model</a:t>
             </a:r>
           </a:p>
         </p:txBody>

--- a/experiment_files/351_stage10/reports/talk/Stage10_author_readout_talk.pptx
+++ b/experiment_files/351_stage10/reports/talk/Stage10_author_readout_talk.pptx
@@ -26,6 +26,8 @@
     <p:sldId id="274" r:id="rId26"/>
     <p:sldId id="275" r:id="rId27"/>
     <p:sldId id="276" r:id="rId28"/>
+    <p:sldId id="277" r:id="rId29"/>
+    <p:sldId id="278" r:id="rId30"/>
   </p:sldIdLst>
   <p:sldSz cx="12191695" cy="6858000" type="screen4x3"/>
   <p:notesSz cx="6858000" cy="9144000"/>
@@ -732,7 +734,7 @@
           <a:lstStyle/>
           <a:p>
             <a:r>
-              <a:t>Is the author readable at the title itself? With the lenses, barely: about 0.01 to 0.03 title-specific signal at the last title token. A linear probe trained across papers gets more, 0.04 at L16 rising to 0.08 at L56, and a little more for target papers. Caution: a probe trained across papers can also pick up topic-to-name associations, not only this paper.</a:t>
+              <a:t>Is the author readable at the title itself? With the lenses, barely: about 0.01 to 0.03 title-specific signal at the last title token. A linear probe trained across papers gets more, 0.04 at L16 rising to 0.08 at L56, and a little more for target papers. The controls on the next slide show this probe signal is specific to the paper, not a topic-to-name association.</a:t>
             </a:r>
           </a:p>
         </p:txBody>
@@ -872,7 +874,7 @@
           <a:lstStyle/>
           <a:p>
             <a:r>
-              <a:t>Comparing lenses. On readout quality fitA is best in most middle layers, self100 at L40; at L48 the Jacobian lenses put the right token in the top 10 for 15-18% of tokens versus 1% for the logit lens. At L62 the plain logit lens is best.</a:t>
+              <a:t>How much is just the name prior? We score the same names with no title at all. Without a title the correct name already sits around rank 12 on average: punctuation and the rest of a surname are easy once the prefix is given. The true title improves the surname first token the most: for target papers from about rank 146 to rank 24. Split the target minus control gap within citation bins: about 0.09 is already there without a title (target names are a bit easier to guess), false titles take back 0.05, and 0.21 is paper-specific. On the surname first token the prior part is about zero and 0.42 is paper-specific. The prior barely tracks multiple-choice recognition (Spearman 0.09 vs 0.33 for the paper-specific part).</a:t>
             </a:r>
           </a:p>
         </p:txBody>
@@ -942,7 +944,7 @@
           <a:lstStyle/>
           <a:p>
             <a:r>
-              <a:t>Do Jacobian lenses see paper-specific information the logit lens misses? A little: +0.01 to +0.03 more title-specific signal at L24-L48, CIs above zero, but tiny next to 0.44 at L62. And it is not bigger for target: target minus control of that extra is about zero, negative at L48 and L56.</a:t>
+              <a:t>Is the probe at the title token reading real paper knowledge, or just topic to name associations? If we score its output against the authors of another paper, or of another paper in the same field, the signal drops to zero. If we train it only on false-title pairs it gets even stronger. So the last title token carries linearly decodable, paper-specific author information already at L24, more for target papers, even though the lenses cannot read it.</a:t>
             </a:r>
           </a:p>
         </p:txBody>
@@ -1012,7 +1014,7 @@
           <a:lstStyle/>
           <a:p>
             <a:r>
-              <a:t>Citations. Within both groups the title-specific signal rises steadily with citation bin: target from +0.35 in bin 0-2 to +0.64 in 4097+. Spearman with log citations: 0.45 overall, 0.33 within target, 0.19 within control. The level itself changes much less - names are not easier to guess for famous papers, the model just knows famous papers better.</a:t>
+              <a:t>Comparing lenses. On readout quality fitA is best in most middle layers, self100 at L40; at L48 the Jacobian lenses put the right token in the top 10 for 15-18% of tokens versus 1% for the logit lens. At L62 the plain logit lens is best.</a:t>
             </a:r>
           </a:p>
         </p:txBody>
@@ -1082,7 +1084,7 @@
           <a:lstStyle/>
           <a:p>
             <a:r>
-              <a:t>Is the signal decided by the first token? It depends on the name format. Initial-first names: the initial carries little, the signal is on the later tokens that include the surname. Given-name-first names: the given name carries about as much as the rest. Note teacher forcing: later tokens already see the correct prefix in every condition, so their title-specific signal can only come from the title.</a:t>
+              <a:t>Do Jacobian lenses see paper-specific information the logit lens misses? A little: +0.01 to +0.03 more title-specific signal at L24-L48, CIs above zero, but tiny next to 0.44 at L62. And it is not bigger for target: target minus control of that extra is about zero, negative at L48 and L56.</a:t>
             </a:r>
           </a:p>
         </p:txBody>
@@ -1152,7 +1154,7 @@
           <a:lstStyle/>
           <a:p>
             <a:r>
-              <a:t>Does knowing the first word make the rest easier? For a full given name, yes: when it is in the top 10 the surname is +0.22 better at the output, +0.32 for the logit lens at L62. For an initial, no. Mixing both formats would even show a negative effect, because initials are easy and the surnames after them are hard.</a:t>
+              <a:t>Citations. Within both groups the title-specific signal rises steadily with citation bin: target from +0.35 in bin 0-2 to +0.64 in 4097+. Spearman with log citations: 0.45 overall, 0.33 within target, 0.19 within control. The level itself changes much less - names are not easier to guess for famous papers, the model just knows famous papers better.</a:t>
             </a:r>
           </a:p>
         </p:txBody>
@@ -1222,7 +1224,7 @@
           <a:lstStyle/>
           <a:p>
             <a:r>
-              <a:t>Left: title-specific signal by token role at the output - surname first token carries most, initials least, punctuation about zero (negative control). Right: across all unrecalled papers, the more multiple-choice orders right, the better the model output (Spearman 0.27).</a:t>
+              <a:t>Is the signal decided by the first token? It depends on the name format. Initial-first names: the initial carries little, the signal is on the later tokens that include the surname. Given-name-first names: the given name carries about as much as the rest. Note teacher forcing: later tokens already see the correct prefix in every condition, so their title-specific signal can only come from the title.</a:t>
             </a:r>
           </a:p>
         </p:txBody>
@@ -1362,7 +1364,7 @@
           <a:lstStyle/>
           <a:p>
             <a:r>
-              <a:t>Wrap up the five findings.</a:t>
+              <a:t>Does knowing the first word make the rest easier? For a full given name, yes: when it is in the top 10 the surname is +0.22 better at the output, +0.32 for the logit lens at L62. For an initial, no. Mixing both formats would even show a negative effect, because initials are easy and the surnames after them are hard.</a:t>
             </a:r>
           </a:p>
         </p:txBody>
@@ -1388,6 +1390,146 @@
 </file>
 
 <file path=ppt/notesSlides/notesSlide21.xml><?xml version="1.0" encoding="utf-8"?>
+<p:notes xmlns:a="http://schemas.openxmlformats.org/drawingml/2006/main" xmlns:p="http://schemas.openxmlformats.org/presentationml/2006/main" xmlns:r="http://schemas.openxmlformats.org/officeDocument/2006/relationships">
+  <p:cSld>
+    <p:spTree>
+      <p:nvGrpSpPr>
+        <p:cNvPr id="1" name=""/>
+        <p:cNvGrpSpPr/>
+        <p:nvPr/>
+      </p:nvGrpSpPr>
+      <p:grpSpPr>
+        <a:xfrm>
+          <a:off x="0" y="0"/>
+          <a:ext cx="0" cy="0"/>
+          <a:chOff x="0" y="0"/>
+          <a:chExt cx="0" cy="0"/>
+        </a:xfrm>
+      </p:grpSpPr>
+      <p:sp>
+        <p:nvSpPr>
+          <p:cNvPr id="2" name="Slide Image Placeholder 1"/>
+          <p:cNvSpPr>
+            <a:spLocks noGrp="1"/>
+          </p:cNvSpPr>
+          <p:nvPr>
+            <p:ph type="sldImg" idx="2"/>
+          </p:nvPr>
+        </p:nvSpPr>
+        <p:spPr/>
+      </p:sp>
+      <p:sp>
+        <p:nvSpPr>
+          <p:cNvPr id="3" name="Notes Placeholder 2"/>
+          <p:cNvSpPr>
+            <a:spLocks noGrp="1"/>
+          </p:cNvSpPr>
+          <p:nvPr>
+            <p:ph type="body" idx="3" sz="quarter"/>
+          </p:nvPr>
+        </p:nvSpPr>
+        <p:spPr/>
+        <p:txBody>
+          <a:bodyPr/>
+          <a:lstStyle/>
+          <a:p>
+            <a:r>
+              <a:t>Left: title-specific signal by token role at the output - surname first token carries most, initials least, punctuation about zero (negative control). Right: across all unrecalled papers, the more multiple-choice orders right, the better the model output (Spearman 0.27).</a:t>
+            </a:r>
+          </a:p>
+        </p:txBody>
+      </p:sp>
+      <p:sp>
+        <p:nvSpPr>
+          <p:cNvPr id="4" name="Slide Number Placeholder 3"/>
+          <p:cNvSpPr>
+            <a:spLocks noGrp="1"/>
+          </p:cNvSpPr>
+          <p:nvPr>
+            <p:ph type="sldNum" idx="5" sz="quarter"/>
+          </p:nvPr>
+        </p:nvSpPr>
+        <p:spPr/>
+      </p:sp>
+    </p:spTree>
+  </p:cSld>
+  <p:clrMapOvr>
+    <a:masterClrMapping/>
+  </p:clrMapOvr>
+</p:notes>
+</file>
+
+<file path=ppt/notesSlides/notesSlide22.xml><?xml version="1.0" encoding="utf-8"?>
+<p:notes xmlns:a="http://schemas.openxmlformats.org/drawingml/2006/main" xmlns:p="http://schemas.openxmlformats.org/presentationml/2006/main" xmlns:r="http://schemas.openxmlformats.org/officeDocument/2006/relationships">
+  <p:cSld>
+    <p:spTree>
+      <p:nvGrpSpPr>
+        <p:cNvPr id="1" name=""/>
+        <p:cNvGrpSpPr/>
+        <p:nvPr/>
+      </p:nvGrpSpPr>
+      <p:grpSpPr>
+        <a:xfrm>
+          <a:off x="0" y="0"/>
+          <a:ext cx="0" cy="0"/>
+          <a:chOff x="0" y="0"/>
+          <a:chExt cx="0" cy="0"/>
+        </a:xfrm>
+      </p:grpSpPr>
+      <p:sp>
+        <p:nvSpPr>
+          <p:cNvPr id="2" name="Slide Image Placeholder 1"/>
+          <p:cNvSpPr>
+            <a:spLocks noGrp="1"/>
+          </p:cNvSpPr>
+          <p:nvPr>
+            <p:ph type="sldImg" idx="2"/>
+          </p:nvPr>
+        </p:nvSpPr>
+        <p:spPr/>
+      </p:sp>
+      <p:sp>
+        <p:nvSpPr>
+          <p:cNvPr id="3" name="Notes Placeholder 2"/>
+          <p:cNvSpPr>
+            <a:spLocks noGrp="1"/>
+          </p:cNvSpPr>
+          <p:nvPr>
+            <p:ph type="body" idx="3" sz="quarter"/>
+          </p:nvPr>
+        </p:nvSpPr>
+        <p:spPr/>
+        <p:txBody>
+          <a:bodyPr/>
+          <a:lstStyle/>
+          <a:p>
+            <a:r>
+              <a:t>Wrap up the five findings.</a:t>
+            </a:r>
+          </a:p>
+        </p:txBody>
+      </p:sp>
+      <p:sp>
+        <p:nvSpPr>
+          <p:cNvPr id="4" name="Slide Number Placeholder 3"/>
+          <p:cNvSpPr>
+            <a:spLocks noGrp="1"/>
+          </p:cNvSpPr>
+          <p:nvPr>
+            <p:ph type="sldNum" idx="5" sz="quarter"/>
+          </p:nvPr>
+        </p:nvSpPr>
+        <p:spPr/>
+      </p:sp>
+    </p:spTree>
+  </p:cSld>
+  <p:clrMapOvr>
+    <a:masterClrMapping/>
+  </p:clrMapOvr>
+</p:notes>
+</file>
+
+<file path=ppt/notesSlides/notesSlide23.xml><?xml version="1.0" encoding="utf-8"?>
 <p:notes xmlns:a="http://schemas.openxmlformats.org/drawingml/2006/main" xmlns:p="http://schemas.openxmlformats.org/presentationml/2006/main" xmlns:r="http://schemas.openxmlformats.org/officeDocument/2006/relationships">
   <p:cSld>
     <p:spTree>
@@ -5946,7 +6088,7 @@
                 </a:solidFill>
                 <a:latin typeface="Caveat"/>
               </a:rPr>
-              <a:t>Not readable at the title token itself</a:t>
+              <a:t>Lenses cannot read it at the title token</a:t>
             </a:r>
           </a:p>
         </p:txBody>
@@ -6118,7 +6260,7 @@
                 </a:solidFill>
                 <a:latin typeface="Patrick Hand"/>
               </a:rPr>
-              <a:t>target a bit higher; may include topic -&gt; name associations</a:t>
+              <a:t>target higher; paper-specific (next slide)</a:t>
             </a:r>
           </a:p>
         </p:txBody>
@@ -6452,7 +6594,7 @@
                 </a:solidFill>
                 <a:latin typeface="Caveat"/>
               </a:rPr>
-              <a:t>Which lens reads best?</a:t>
+              <a:t>How much is just the name prior?</a:t>
             </a:r>
           </a:p>
         </p:txBody>
@@ -6491,14 +6633,14 @@
                 </a:solidFill>
                 <a:latin typeface="Patrick Hand"/>
               </a:rPr>
-              <a:t>all papers · true title</a:t>
+              <a:t>model output · no title vs false title vs true title · all 9,108 papers</a:t>
             </a:r>
           </a:p>
         </p:txBody>
       </p:sp>
       <p:pic>
         <p:nvPicPr>
-          <p:cNvPr id="5" name="Picture 4" descr="c4_lens_quality.png"/>
+          <p:cNvPr id="5" name="Picture 4" descr="c15_name_prior.png"/>
           <p:cNvPicPr>
             <a:picLocks noChangeAspect="1"/>
           </p:cNvPicPr>
@@ -6513,7 +6655,7 @@
         <p:spPr>
           <a:xfrm>
             <a:off x="457200" y="1463040"/>
-            <a:ext cx="8412480" cy="3963572"/>
+            <a:ext cx="8412480" cy="3968150"/>
           </a:xfrm>
           <a:prstGeom prst="rect">
             <a:avLst/>
@@ -6527,9 +6669,9 @@
           <p:nvPr/>
         </p:nvSpPr>
         <p:spPr>
-          <a:xfrm rot="21510000">
+          <a:xfrm rot="90000">
             <a:off x="9098280" y="1737360"/>
-            <a:ext cx="2651760" cy="3108960"/>
+            <a:ext cx="2651760" cy="3566160"/>
           </a:xfrm>
           <a:prstGeom prst="rect">
             <a:avLst/>
@@ -6568,13 +6710,22 @@
               </a:spcAft>
             </a:pPr>
             <a:r>
-              <a:rPr sz="1900" b="1">
-                <a:solidFill>
-                  <a:srgbClr val="3C8D5A"/>
-                </a:solidFill>
-                <a:latin typeface="Patrick Hand"/>
-              </a:rPr>
-              <a:t>Middle layers:</a:t>
+              <a:rPr sz="1700" b="0">
+                <a:solidFill>
+                  <a:srgbClr val="2B2D42"/>
+                </a:solidFill>
+                <a:latin typeface="Patrick Hand"/>
+              </a:rPr>
+              <a:t>no title: rank </a:t>
+            </a:r>
+            <a:r>
+              <a:rPr sz="1700" b="1">
+                <a:solidFill>
+                  <a:srgbClr val="2B2D42"/>
+                </a:solidFill>
+                <a:latin typeface="Patrick Hand"/>
+              </a:rPr>
+              <a:t>~12</a:t>
             </a:r>
           </a:p>
           <a:p>
@@ -6584,13 +6735,49 @@
               </a:spcAft>
             </a:pPr>
             <a:r>
-              <a:rPr sz="1900" b="0">
-                <a:solidFill>
-                  <a:srgbClr val="2B2D42"/>
-                </a:solidFill>
-                <a:latin typeface="Patrick Hand"/>
-              </a:rPr>
-              <a:t>fitA best; at L48 15-18% top-10 vs 1% for logit</a:t>
+              <a:rPr sz="1700" b="0">
+                <a:solidFill>
+                  <a:srgbClr val="2B2D42"/>
+                </a:solidFill>
+                <a:latin typeface="Patrick Hand"/>
+              </a:rPr>
+              <a:t>target - control: </a:t>
+            </a:r>
+            <a:r>
+              <a:rPr sz="1700" b="1">
+                <a:solidFill>
+                  <a:srgbClr val="6E7080"/>
+                </a:solidFill>
+                <a:latin typeface="Patrick Hand"/>
+              </a:rPr>
+              <a:t>+0.09</a:t>
+            </a:r>
+            <a:r>
+              <a:rPr sz="1700" b="0">
+                <a:solidFill>
+                  <a:srgbClr val="2B2D42"/>
+                </a:solidFill>
+                <a:latin typeface="Patrick Hand"/>
+              </a:rPr>
+              <a:t> prior, </a:t>
+            </a:r>
+            <a:r>
+              <a:rPr sz="1700" b="1">
+                <a:solidFill>
+                  <a:srgbClr val="E07A2F"/>
+                </a:solidFill>
+                <a:latin typeface="Patrick Hand"/>
+              </a:rPr>
+              <a:t>+0.21</a:t>
+            </a:r>
+            <a:r>
+              <a:rPr sz="1700" b="0">
+                <a:solidFill>
+                  <a:srgbClr val="2B2D42"/>
+                </a:solidFill>
+                <a:latin typeface="Patrick Hand"/>
+              </a:rPr>
+              <a:t> paper</a:t>
             </a:r>
           </a:p>
           <a:p>
@@ -6600,22 +6787,47 @@
               </a:spcAft>
             </a:pPr>
             <a:r>
-              <a:rPr sz="1900" b="1">
-                <a:solidFill>
-                  <a:srgbClr val="3A6EA5"/>
-                </a:solidFill>
-                <a:latin typeface="Patrick Hand"/>
-              </a:rPr>
-              <a:t>L62:</a:t>
-            </a:r>
-            <a:r>
-              <a:rPr sz="1900" b="0">
-                <a:solidFill>
-                  <a:srgbClr val="2B2D42"/>
-                </a:solidFill>
-                <a:latin typeface="Patrick Hand"/>
-              </a:rPr>
-              <a:t> logit lens best (59%)</a:t>
+              <a:rPr sz="1700" b="0">
+                <a:solidFill>
+                  <a:srgbClr val="2B2D42"/>
+                </a:solidFill>
+                <a:latin typeface="Patrick Hand"/>
+              </a:rPr>
+              <a:t>surname 1st: prior ~0, paper </a:t>
+            </a:r>
+            <a:r>
+              <a:rPr sz="1700" b="1">
+                <a:solidFill>
+                  <a:srgbClr val="E07A2F"/>
+                </a:solidFill>
+                <a:latin typeface="Patrick Hand"/>
+              </a:rPr>
+              <a:t>+0.42</a:t>
+            </a:r>
+          </a:p>
+          <a:p>
+            <a:pPr algn="l">
+              <a:spcAft>
+                <a:spcPts val="900"/>
+              </a:spcAft>
+            </a:pPr>
+            <a:r>
+              <a:rPr sz="1700" b="0">
+                <a:solidFill>
+                  <a:srgbClr val="2B2D42"/>
+                </a:solidFill>
+                <a:latin typeface="Patrick Hand"/>
+              </a:rPr>
+              <a:t>prior vs recognition rho </a:t>
+            </a:r>
+            <a:r>
+              <a:rPr sz="1700" b="1">
+                <a:solidFill>
+                  <a:srgbClr val="2B2D42"/>
+                </a:solidFill>
+                <a:latin typeface="Patrick Hand"/>
+              </a:rPr>
+              <a:t>0.09</a:t>
             </a:r>
           </a:p>
         </p:txBody>
@@ -6696,7 +6908,7 @@
                 </a:solidFill>
                 <a:latin typeface="Caveat"/>
               </a:rPr>
-              <a:t>Do lenses reveal hidden paper knowledge?</a:t>
+              <a:t>The probe signal is paper-specific</a:t>
             </a:r>
           </a:p>
         </p:txBody>
@@ -6735,14 +6947,14 @@
                 </a:solidFill>
                 <a:latin typeface="Patrick Hand"/>
               </a:rPr>
-              <a:t>paired differences, 95% CI</a:t>
+              <a:t>last title token · 5-fold ridge probe · controls · all 9,108 papers</a:t>
             </a:r>
           </a:p>
         </p:txBody>
       </p:sp>
       <p:pic>
         <p:nvPicPr>
-          <p:cNvPr id="5" name="Picture 4" descr="c5_lens_extra.png"/>
+          <p:cNvPr id="5" name="Picture 4" descr="c16_probe_controls.png"/>
           <p:cNvPicPr>
             <a:picLocks noChangeAspect="1"/>
           </p:cNvPicPr>
@@ -6756,8 +6968,8 @@
         </p:blipFill>
         <p:spPr>
           <a:xfrm>
-            <a:off x="457200" y="1463040"/>
-            <a:ext cx="8412480" cy="3963572"/>
+            <a:off x="548640" y="1463040"/>
+            <a:ext cx="7315200" cy="4167962"/>
           </a:xfrm>
           <a:prstGeom prst="rect">
             <a:avLst/>
@@ -6771,9 +6983,9 @@
           <p:nvPr/>
         </p:nvSpPr>
         <p:spPr>
-          <a:xfrm rot="90000">
-            <a:off x="9098280" y="1737360"/>
-            <a:ext cx="2651760" cy="3108960"/>
+          <a:xfrm rot="21510000">
+            <a:off x="8229600" y="1737360"/>
+            <a:ext cx="3383280" cy="3291840"/>
           </a:xfrm>
           <a:prstGeom prst="rect">
             <a:avLst/>
@@ -6812,22 +7024,22 @@
               </a:spcAft>
             </a:pPr>
             <a:r>
-              <a:rPr sz="1900" b="0">
-                <a:solidFill>
-                  <a:srgbClr val="2B2D42"/>
-                </a:solidFill>
-                <a:latin typeface="Patrick Hand"/>
-              </a:rPr>
-              <a:t>Extra signal: </a:t>
-            </a:r>
-            <a:r>
-              <a:rPr sz="1900" b="1">
-                <a:solidFill>
-                  <a:srgbClr val="2B2D42"/>
-                </a:solidFill>
-                <a:latin typeface="Patrick Hand"/>
-              </a:rPr>
-              <a:t>+0.01 to +0.03</a:t>
+              <a:rPr sz="1800" b="0">
+                <a:solidFill>
+                  <a:srgbClr val="2B2D42"/>
+                </a:solidFill>
+                <a:latin typeface="Patrick Hand"/>
+              </a:rPr>
+              <a:t>another paper's authors: </a:t>
+            </a:r>
+            <a:r>
+              <a:rPr sz="1800" b="1">
+                <a:solidFill>
+                  <a:srgbClr val="2B2D42"/>
+                </a:solidFill>
+                <a:latin typeface="Patrick Hand"/>
+              </a:rPr>
+              <a:t>0</a:t>
             </a:r>
           </a:p>
           <a:p>
@@ -6837,13 +7049,22 @@
               </a:spcAft>
             </a:pPr>
             <a:r>
-              <a:rPr sz="1900" b="0">
-                <a:solidFill>
-                  <a:srgbClr val="2B2D42"/>
-                </a:solidFill>
-                <a:latin typeface="Patrick Hand"/>
-              </a:rPr>
-              <a:t>vs ~0.44 at L62</a:t>
+              <a:rPr sz="1800" b="0">
+                <a:solidFill>
+                  <a:srgbClr val="2B2D42"/>
+                </a:solidFill>
+                <a:latin typeface="Patrick Hand"/>
+              </a:rPr>
+              <a:t>same-field paper: </a:t>
+            </a:r>
+            <a:r>
+              <a:rPr sz="1800" b="1">
+                <a:solidFill>
+                  <a:srgbClr val="2B2D42"/>
+                </a:solidFill>
+                <a:latin typeface="Patrick Hand"/>
+              </a:rPr>
+              <a:t>0</a:t>
             </a:r>
           </a:p>
           <a:p>
@@ -6853,22 +7074,47 @@
               </a:spcAft>
             </a:pPr>
             <a:r>
-              <a:rPr sz="1900" b="1">
+              <a:rPr sz="1800" b="0">
+                <a:solidFill>
+                  <a:srgbClr val="2B2D42"/>
+                </a:solidFill>
+                <a:latin typeface="Patrick Hand"/>
+              </a:rPr>
+              <a:t>so it is </a:t>
+            </a:r>
+            <a:r>
+              <a:rPr sz="1800" b="1">
                 <a:solidFill>
                   <a:srgbClr val="E07A2F"/>
                 </a:solidFill>
                 <a:latin typeface="Patrick Hand"/>
               </a:rPr>
-              <a:t>Not bigger for target</a:t>
-            </a:r>
-            <a:r>
-              <a:rPr sz="1900" b="0">
-                <a:solidFill>
-                  <a:srgbClr val="2B2D42"/>
-                </a:solidFill>
-                <a:latin typeface="Patrick Hand"/>
-              </a:rPr>
-              <a:t> (even negative at L48-56)</a:t>
+              <a:t>this paper</a:t>
+            </a:r>
+            <a:r>
+              <a:rPr sz="1800" b="0">
+                <a:solidFill>
+                  <a:srgbClr val="2B2D42"/>
+                </a:solidFill>
+                <a:latin typeface="Patrick Hand"/>
+              </a:rPr>
+              <a:t>, already at L24</a:t>
+            </a:r>
+          </a:p>
+          <a:p>
+            <a:pPr algn="l">
+              <a:spcAft>
+                <a:spcPts val="900"/>
+              </a:spcAft>
+            </a:pPr>
+            <a:r>
+              <a:rPr sz="1800" b="0">
+                <a:solidFill>
+                  <a:srgbClr val="2B2D42"/>
+                </a:solidFill>
+                <a:latin typeface="Patrick Hand"/>
+              </a:rPr>
+              <a:t>lenses cannot read it</a:t>
             </a:r>
           </a:p>
         </p:txBody>
@@ -6949,7 +7195,7 @@
                 </a:solidFill>
                 <a:latin typeface="Caveat"/>
               </a:rPr>
-              <a:t>More citations, more paper knowledge</a:t>
+              <a:t>Which lens reads best?</a:t>
             </a:r>
           </a:p>
         </p:txBody>
@@ -6988,14 +7234,14 @@
                 </a:solidFill>
                 <a:latin typeface="Patrick Hand"/>
               </a:rPr>
-              <a:t>model output · bins with &lt; 10 papers omitted</a:t>
+              <a:t>all papers · true title</a:t>
             </a:r>
           </a:p>
         </p:txBody>
       </p:sp>
       <p:pic>
         <p:nvPicPr>
-          <p:cNvPr id="5" name="Picture 4" descr="c6_citation.png"/>
+          <p:cNvPr id="5" name="Picture 4" descr="c4_lens_quality.png"/>
           <p:cNvPicPr>
             <a:picLocks noChangeAspect="1"/>
           </p:cNvPicPr>
@@ -7010,7 +7256,7 @@
         <p:spPr>
           <a:xfrm>
             <a:off x="457200" y="1463040"/>
-            <a:ext cx="8412480" cy="3894666"/>
+            <a:ext cx="8412480" cy="3963572"/>
           </a:xfrm>
           <a:prstGeom prst="rect">
             <a:avLst/>
@@ -7065,22 +7311,13 @@
               </a:spcAft>
             </a:pPr>
             <a:r>
-              <a:rPr sz="1800" b="0">
-                <a:solidFill>
-                  <a:srgbClr val="2B2D42"/>
-                </a:solidFill>
-                <a:latin typeface="Patrick Hand"/>
-              </a:rPr>
-              <a:t>Target: </a:t>
-            </a:r>
-            <a:r>
-              <a:rPr sz="1800" b="1">
-                <a:solidFill>
-                  <a:srgbClr val="E07A2F"/>
-                </a:solidFill>
-                <a:latin typeface="Patrick Hand"/>
-              </a:rPr>
-              <a:t>+0.35 -&gt; +0.64</a:t>
+              <a:rPr sz="1900" b="1">
+                <a:solidFill>
+                  <a:srgbClr val="3C8D5A"/>
+                </a:solidFill>
+                <a:latin typeface="Patrick Hand"/>
+              </a:rPr>
+              <a:t>Middle layers:</a:t>
             </a:r>
           </a:p>
           <a:p>
@@ -7090,13 +7327,13 @@
               </a:spcAft>
             </a:pPr>
             <a:r>
-              <a:rPr sz="1800" b="0">
-                <a:solidFill>
-                  <a:srgbClr val="2B2D42"/>
-                </a:solidFill>
-                <a:latin typeface="Patrick Hand"/>
-              </a:rPr>
-              <a:t>Spearman (title-specific)</a:t>
+              <a:rPr sz="1900" b="0">
+                <a:solidFill>
+                  <a:srgbClr val="2B2D42"/>
+                </a:solidFill>
+                <a:latin typeface="Patrick Hand"/>
+              </a:rPr>
+              <a:t>fitA best; at L48 15-18% top-10 vs 1% for logit</a:t>
             </a:r>
           </a:p>
           <a:p>
@@ -7106,38 +7343,22 @@
               </a:spcAft>
             </a:pPr>
             <a:r>
-              <a:rPr sz="1800" b="1">
-                <a:solidFill>
-                  <a:srgbClr val="2B2D42"/>
-                </a:solidFill>
-                <a:latin typeface="Patrick Hand"/>
-              </a:rPr>
-              <a:t>0.45</a:t>
-            </a:r>
-            <a:r>
-              <a:rPr sz="1800" b="0">
-                <a:solidFill>
-                  <a:srgbClr val="2B2D42"/>
-                </a:solidFill>
-                <a:latin typeface="Patrick Hand"/>
-              </a:rPr>
-              <a:t> all · 0.33 target · 0.19 control</a:t>
-            </a:r>
-          </a:p>
-          <a:p>
-            <a:pPr algn="l">
-              <a:spcAft>
-                <a:spcPts val="900"/>
-              </a:spcAft>
-            </a:pPr>
-            <a:r>
-              <a:rPr sz="1800" b="0">
-                <a:solidFill>
-                  <a:srgbClr val="2B2D42"/>
-                </a:solidFill>
-                <a:latin typeface="Patrick Hand"/>
-              </a:rPr>
-              <a:t>Target &gt; control in every bin</a:t>
+              <a:rPr sz="1900" b="1">
+                <a:solidFill>
+                  <a:srgbClr val="3A6EA5"/>
+                </a:solidFill>
+                <a:latin typeface="Patrick Hand"/>
+              </a:rPr>
+              <a:t>L62:</a:t>
+            </a:r>
+            <a:r>
+              <a:rPr sz="1900" b="0">
+                <a:solidFill>
+                  <a:srgbClr val="2B2D42"/>
+                </a:solidFill>
+                <a:latin typeface="Patrick Hand"/>
+              </a:rPr>
+              <a:t> logit lens best (59%)</a:t>
             </a:r>
           </a:p>
         </p:txBody>
@@ -7218,7 +7439,7 @@
                 </a:solidFill>
                 <a:latin typeface="Caveat"/>
               </a:rPr>
-              <a:t>First token or the rest of the name?</a:t>
+              <a:t>Do lenses reveal hidden paper knowledge?</a:t>
             </a:r>
           </a:p>
         </p:txBody>
@@ -7257,14 +7478,14 @@
                 </a:solidFill>
                 <a:latin typeface="Patrick Hand"/>
               </a:rPr>
-              <a:t>model output · split by name format</a:t>
+              <a:t>paired differences, 95% CI</a:t>
             </a:r>
           </a:p>
         </p:txBody>
       </p:sp>
       <p:pic>
         <p:nvPicPr>
-          <p:cNvPr id="5" name="Picture 4" descr="c7_format_position.png"/>
+          <p:cNvPr id="5" name="Picture 4" descr="c5_lens_extra.png"/>
           <p:cNvPicPr>
             <a:picLocks noChangeAspect="1"/>
           </p:cNvPicPr>
@@ -7334,14 +7555,30 @@
               </a:spcAft>
             </a:pPr>
             <a:r>
+              <a:rPr sz="1900" b="0">
+                <a:solidFill>
+                  <a:srgbClr val="2B2D42"/>
+                </a:solidFill>
+                <a:latin typeface="Patrick Hand"/>
+              </a:rPr>
+              <a:t>Extra signal: </a:t>
+            </a:r>
+            <a:r>
               <a:rPr sz="1900" b="1">
                 <a:solidFill>
-                  <a:srgbClr val="3A6EA5"/>
-                </a:solidFill>
-                <a:latin typeface="Patrick Hand"/>
-              </a:rPr>
-              <a:t>Initial:</a:t>
-            </a:r>
+                  <a:srgbClr val="2B2D42"/>
+                </a:solidFill>
+                <a:latin typeface="Patrick Hand"/>
+              </a:rPr>
+              <a:t>+0.01 to +0.03</a:t>
+            </a:r>
+          </a:p>
+          <a:p>
+            <a:pPr algn="l">
+              <a:spcAft>
+                <a:spcPts val="900"/>
+              </a:spcAft>
+            </a:pPr>
             <a:r>
               <a:rPr sz="1900" b="0">
                 <a:solidFill>
@@ -7349,7 +7586,7 @@
                 </a:solidFill>
                 <a:latin typeface="Patrick Hand"/>
               </a:rPr>
-              <a:t> carries little; signal is on the surname</a:t>
+              <a:t>vs ~0.44 at L62</a:t>
             </a:r>
           </a:p>
           <a:p>
@@ -7365,7 +7602,7 @@
                 </a:solidFill>
                 <a:latin typeface="Patrick Hand"/>
               </a:rPr>
-              <a:t>Full given name:</a:t>
+              <a:t>Not bigger for target</a:t>
             </a:r>
             <a:r>
               <a:rPr sz="1900" b="0">
@@ -7374,7 +7611,7 @@
                 </a:solidFill>
                 <a:latin typeface="Patrick Hand"/>
               </a:rPr>
-              <a:t> carries about as much as the surname</a:t>
+              <a:t> (even negative at L48-56)</a:t>
             </a:r>
           </a:p>
         </p:txBody>
@@ -7455,7 +7692,7 @@
                 </a:solidFill>
                 <a:latin typeface="Caveat"/>
               </a:rPr>
-              <a:t>Knowing the given name helps with the surname</a:t>
+              <a:t>More citations, more paper knowledge</a:t>
             </a:r>
           </a:p>
         </p:txBody>
@@ -7494,14 +7731,14 @@
                 </a:solidFill>
                 <a:latin typeface="Patrick Hand"/>
               </a:rPr>
-              <a:t>true title · later words when the first word is / is not in the top 10</a:t>
+              <a:t>model output · bins with &lt; 10 papers omitted</a:t>
             </a:r>
           </a:p>
         </p:txBody>
       </p:sp>
       <p:pic>
         <p:nvPicPr>
-          <p:cNvPr id="5" name="Picture 4" descr="c8_first_word_helps.png"/>
+          <p:cNvPr id="5" name="Picture 4" descr="c6_citation.png"/>
           <p:cNvPicPr>
             <a:picLocks noChangeAspect="1"/>
           </p:cNvPicPr>
@@ -7515,8 +7752,8 @@
         </p:blipFill>
         <p:spPr>
           <a:xfrm>
-            <a:off x="548640" y="1463040"/>
-            <a:ext cx="7315200" cy="4354285"/>
+            <a:off x="457200" y="1463040"/>
+            <a:ext cx="8412480" cy="3894666"/>
           </a:xfrm>
           <a:prstGeom prst="rect">
             <a:avLst/>
@@ -7531,8 +7768,8 @@
         </p:nvSpPr>
         <p:spPr>
           <a:xfrm rot="21510000">
-            <a:off x="8229600" y="1737360"/>
-            <a:ext cx="3383280" cy="3108960"/>
+            <a:off x="9098280" y="1737360"/>
+            <a:ext cx="2651760" cy="3108960"/>
           </a:xfrm>
           <a:prstGeom prst="rect">
             <a:avLst/>
@@ -7571,13 +7808,22 @@
               </a:spcAft>
             </a:pPr>
             <a:r>
-              <a:rPr sz="1900" b="1">
+              <a:rPr sz="1800" b="0">
+                <a:solidFill>
+                  <a:srgbClr val="2B2D42"/>
+                </a:solidFill>
+                <a:latin typeface="Patrick Hand"/>
+              </a:rPr>
+              <a:t>Target: </a:t>
+            </a:r>
+            <a:r>
+              <a:rPr sz="1800" b="1">
                 <a:solidFill>
                   <a:srgbClr val="E07A2F"/>
                 </a:solidFill>
                 <a:latin typeface="Patrick Hand"/>
               </a:rPr>
-              <a:t>Given name in top 10</a:t>
+              <a:t>+0.35 -&gt; +0.64</a:t>
             </a:r>
           </a:p>
           <a:p>
@@ -7587,13 +7833,13 @@
               </a:spcAft>
             </a:pPr>
             <a:r>
-              <a:rPr sz="1900" b="0">
-                <a:solidFill>
-                  <a:srgbClr val="2B2D42"/>
-                </a:solidFill>
-                <a:latin typeface="Patrick Hand"/>
-              </a:rPr>
-              <a:t>surname +0.22 (output)</a:t>
+              <a:rPr sz="1800" b="0">
+                <a:solidFill>
+                  <a:srgbClr val="2B2D42"/>
+                </a:solidFill>
+                <a:latin typeface="Patrick Hand"/>
+              </a:rPr>
+              <a:t>Spearman (title-specific)</a:t>
             </a:r>
           </a:p>
           <a:p>
@@ -7603,13 +7849,22 @@
               </a:spcAft>
             </a:pPr>
             <a:r>
-              <a:rPr sz="1900" b="0">
-                <a:solidFill>
-                  <a:srgbClr val="2B2D42"/>
-                </a:solidFill>
-                <a:latin typeface="Patrick Hand"/>
-              </a:rPr>
-              <a:t>+0.32 (logit L62)</a:t>
+              <a:rPr sz="1800" b="1">
+                <a:solidFill>
+                  <a:srgbClr val="2B2D42"/>
+                </a:solidFill>
+                <a:latin typeface="Patrick Hand"/>
+              </a:rPr>
+              <a:t>0.45</a:t>
+            </a:r>
+            <a:r>
+              <a:rPr sz="1800" b="0">
+                <a:solidFill>
+                  <a:srgbClr val="2B2D42"/>
+                </a:solidFill>
+                <a:latin typeface="Patrick Hand"/>
+              </a:rPr>
+              <a:t> all · 0.33 target · 0.19 control</a:t>
             </a:r>
           </a:p>
           <a:p>
@@ -7619,22 +7874,13 @@
               </a:spcAft>
             </a:pPr>
             <a:r>
-              <a:rPr sz="1900" b="1">
-                <a:solidFill>
-                  <a:srgbClr val="3A6EA5"/>
-                </a:solidFill>
-                <a:latin typeface="Patrick Hand"/>
-              </a:rPr>
-              <a:t>Initial in top 10</a:t>
-            </a:r>
-            <a:r>
-              <a:rPr sz="1900" b="0">
-                <a:solidFill>
-                  <a:srgbClr val="2B2D42"/>
-                </a:solidFill>
-                <a:latin typeface="Patrick Hand"/>
-              </a:rPr>
-              <a:t>: no help</a:t>
+              <a:rPr sz="1800" b="0">
+                <a:solidFill>
+                  <a:srgbClr val="2B2D42"/>
+                </a:solidFill>
+                <a:latin typeface="Patrick Hand"/>
+              </a:rPr>
+              <a:t>Target &gt; control in every bin</a:t>
             </a:r>
           </a:p>
         </p:txBody>
@@ -7715,7 +7961,7 @@
                 </a:solidFill>
                 <a:latin typeface="Caveat"/>
               </a:rPr>
-              <a:t>Where the signal sits, and a dose-response</a:t>
+              <a:t>First token or the rest of the name?</a:t>
             </a:r>
           </a:p>
         </p:txBody>
@@ -7754,14 +8000,14 @@
                 </a:solidFill>
                 <a:latin typeface="Patrick Hand"/>
               </a:rPr>
-              <a:t>model output</a:t>
+              <a:t>model output · split by name format</a:t>
             </a:r>
           </a:p>
         </p:txBody>
       </p:sp>
       <p:pic>
         <p:nvPicPr>
-          <p:cNvPr id="5" name="Picture 4" descr="c9_roles.png"/>
+          <p:cNvPr id="5" name="Picture 4" descr="c7_format_position.png"/>
           <p:cNvPicPr>
             <a:picLocks noChangeAspect="1"/>
           </p:cNvPicPr>
@@ -7775,73 +8021,103 @@
         </p:blipFill>
         <p:spPr>
           <a:xfrm>
-            <a:off x="365760" y="1463040"/>
-            <a:ext cx="6675120" cy="3973285"/>
+            <a:off x="457200" y="1463040"/>
+            <a:ext cx="8412480" cy="3963572"/>
           </a:xfrm>
           <a:prstGeom prst="rect">
             <a:avLst/>
           </a:prstGeom>
         </p:spPr>
       </p:pic>
-      <p:pic>
-        <p:nvPicPr>
-          <p:cNvPr id="6" name="Picture 5" descr="c10_graded.png"/>
-          <p:cNvPicPr>
-            <a:picLocks noChangeAspect="1"/>
-          </p:cNvPicPr>
-          <p:nvPr/>
-        </p:nvPicPr>
-        <p:blipFill>
-          <a:blip r:embed="rId5"/>
-          <a:stretch>
-            <a:fillRect/>
-          </a:stretch>
-        </p:blipFill>
-        <p:spPr>
-          <a:xfrm>
-            <a:off x="7223760" y="1737360"/>
-            <a:ext cx="4572000" cy="3282553"/>
-          </a:xfrm>
-          <a:prstGeom prst="rect">
-            <a:avLst/>
-          </a:prstGeom>
-        </p:spPr>
-      </p:pic>
-      <p:sp>
-        <p:nvSpPr>
-          <p:cNvPr id="7" name="TextBox 6"/>
-          <p:cNvSpPr txBox="1"/>
-          <p:nvPr/>
-        </p:nvSpPr>
-        <p:spPr>
-          <a:xfrm>
-            <a:off x="713232" y="6355080"/>
-            <a:ext cx="10789920" cy="320040"/>
-          </a:xfrm>
-          <a:prstGeom prst="rect">
-            <a:avLst/>
-          </a:prstGeom>
-          <a:noFill/>
-        </p:spPr>
-        <p:txBody>
-          <a:bodyPr wrap="square" lIns="0" rIns="0" tIns="0" bIns="0" anchor="t">
-            <a:spAutoFit/>
-          </a:bodyPr>
-          <a:lstStyle/>
-          <a:p>
-            <a:pPr algn="l">
-              <a:spcAft>
-                <a:spcPts val="800"/>
-              </a:spcAft>
-            </a:pPr>
-            <a:r>
-              <a:rPr sz="1400" b="0">
-                <a:solidFill>
-                  <a:srgbClr val="6E7080"/>
-                </a:solidFill>
-                <a:latin typeface="Patrick Hand"/>
-              </a:rPr>
-              <a:t>Right: R0/R1 papers, centred within citation bin; Spearman rho = 0.27, p &lt; 0.001.</a:t>
+      <p:sp>
+        <p:nvSpPr>
+          <p:cNvPr id="6" name="Rectangle 5"/>
+          <p:cNvSpPr/>
+          <p:nvPr/>
+        </p:nvSpPr>
+        <p:spPr>
+          <a:xfrm rot="90000">
+            <a:off x="9098280" y="1737360"/>
+            <a:ext cx="2651760" cy="3108960"/>
+          </a:xfrm>
+          <a:prstGeom prst="rect">
+            <a:avLst/>
+          </a:prstGeom>
+          <a:solidFill>
+            <a:srgbClr val="FFF1A8"/>
+          </a:solidFill>
+          <a:ln w="12700">
+            <a:solidFill>
+              <a:srgbClr val="E2D37A"/>
+            </a:solidFill>
+          </a:ln>
+          <a:effectLst/>
+        </p:spPr>
+        <p:style>
+          <a:lnRef idx="1">
+            <a:schemeClr val="accent1"/>
+          </a:lnRef>
+          <a:fillRef idx="3">
+            <a:schemeClr val="accent1"/>
+          </a:fillRef>
+          <a:effectRef idx="2">
+            <a:schemeClr val="accent1"/>
+          </a:effectRef>
+          <a:fontRef idx="minor">
+            <a:schemeClr val="lt1"/>
+          </a:fontRef>
+        </p:style>
+        <p:txBody>
+          <a:bodyPr rtlCol="0" anchor="t" wrap="square" lIns="201168" rIns="201168" tIns="164592" bIns="164592"/>
+          <a:lstStyle/>
+          <a:p>
+            <a:pPr algn="l">
+              <a:spcAft>
+                <a:spcPts val="900"/>
+              </a:spcAft>
+            </a:pPr>
+            <a:r>
+              <a:rPr sz="1900" b="1">
+                <a:solidFill>
+                  <a:srgbClr val="3A6EA5"/>
+                </a:solidFill>
+                <a:latin typeface="Patrick Hand"/>
+              </a:rPr>
+              <a:t>Initial:</a:t>
+            </a:r>
+            <a:r>
+              <a:rPr sz="1900" b="0">
+                <a:solidFill>
+                  <a:srgbClr val="2B2D42"/>
+                </a:solidFill>
+                <a:latin typeface="Patrick Hand"/>
+              </a:rPr>
+              <a:t> carries little; signal is on the surname</a:t>
+            </a:r>
+          </a:p>
+          <a:p>
+            <a:pPr algn="l">
+              <a:spcAft>
+                <a:spcPts val="900"/>
+              </a:spcAft>
+            </a:pPr>
+            <a:r>
+              <a:rPr sz="1900" b="1">
+                <a:solidFill>
+                  <a:srgbClr val="E07A2F"/>
+                </a:solidFill>
+                <a:latin typeface="Patrick Hand"/>
+              </a:rPr>
+              <a:t>Full given name:</a:t>
+            </a:r>
+            <a:r>
+              <a:rPr sz="1900" b="0">
+                <a:solidFill>
+                  <a:srgbClr val="2B2D42"/>
+                </a:solidFill>
+                <a:latin typeface="Patrick Hand"/>
+              </a:rPr>
+              <a:t> carries about as much as the surname</a:t>
             </a:r>
           </a:p>
         </p:txBody>
@@ -8333,7 +8609,7 @@
                 </a:solidFill>
                 <a:latin typeface="Caveat"/>
               </a:rPr>
-              <a:t>What we learned</a:t>
+              <a:t>Knowing the given name helps with the surname</a:t>
             </a:r>
           </a:p>
         </p:txBody>
@@ -8346,8 +8622,8 @@
         </p:nvSpPr>
         <p:spPr>
           <a:xfrm>
-            <a:off x="822960" y="1325880"/>
-            <a:ext cx="2834640" cy="777240"/>
+            <a:off x="713232" y="987552"/>
+            <a:ext cx="10881360" cy="411480"/>
           </a:xfrm>
           <a:prstGeom prst="rect">
             <a:avLst/>
@@ -8366,442 +8642,153 @@
               </a:spcAft>
             </a:pPr>
             <a:r>
-              <a:rPr sz="2800" b="1">
+              <a:rPr sz="1900" b="0">
+                <a:solidFill>
+                  <a:srgbClr val="6E7080"/>
+                </a:solidFill>
+                <a:latin typeface="Patrick Hand"/>
+              </a:rPr>
+              <a:t>true title · later words when the first word is / is not in the top 10</a:t>
+            </a:r>
+          </a:p>
+        </p:txBody>
+      </p:sp>
+      <p:pic>
+        <p:nvPicPr>
+          <p:cNvPr id="5" name="Picture 4" descr="c8_first_word_helps.png"/>
+          <p:cNvPicPr>
+            <a:picLocks noChangeAspect="1"/>
+          </p:cNvPicPr>
+          <p:nvPr/>
+        </p:nvPicPr>
+        <p:blipFill>
+          <a:blip r:embed="rId4"/>
+          <a:stretch>
+            <a:fillRect/>
+          </a:stretch>
+        </p:blipFill>
+        <p:spPr>
+          <a:xfrm>
+            <a:off x="548640" y="1463040"/>
+            <a:ext cx="7315200" cy="4354285"/>
+          </a:xfrm>
+          <a:prstGeom prst="rect">
+            <a:avLst/>
+          </a:prstGeom>
+        </p:spPr>
+      </p:pic>
+      <p:sp>
+        <p:nvSpPr>
+          <p:cNvPr id="6" name="Rectangle 5"/>
+          <p:cNvSpPr/>
+          <p:nvPr/>
+        </p:nvSpPr>
+        <p:spPr>
+          <a:xfrm rot="21510000">
+            <a:off x="8229600" y="1737360"/>
+            <a:ext cx="3383280" cy="3108960"/>
+          </a:xfrm>
+          <a:prstGeom prst="rect">
+            <a:avLst/>
+          </a:prstGeom>
+          <a:solidFill>
+            <a:srgbClr val="FFF1A8"/>
+          </a:solidFill>
+          <a:ln w="12700">
+            <a:solidFill>
+              <a:srgbClr val="E2D37A"/>
+            </a:solidFill>
+          </a:ln>
+          <a:effectLst/>
+        </p:spPr>
+        <p:style>
+          <a:lnRef idx="1">
+            <a:schemeClr val="accent1"/>
+          </a:lnRef>
+          <a:fillRef idx="3">
+            <a:schemeClr val="accent1"/>
+          </a:fillRef>
+          <a:effectRef idx="2">
+            <a:schemeClr val="accent1"/>
+          </a:effectRef>
+          <a:fontRef idx="minor">
+            <a:schemeClr val="lt1"/>
+          </a:fontRef>
+        </p:style>
+        <p:txBody>
+          <a:bodyPr rtlCol="0" anchor="t" wrap="square" lIns="201168" rIns="201168" tIns="164592" bIns="164592"/>
+          <a:lstStyle/>
+          <a:p>
+            <a:pPr algn="l">
+              <a:spcAft>
+                <a:spcPts val="900"/>
+              </a:spcAft>
+            </a:pPr>
+            <a:r>
+              <a:rPr sz="1900" b="1">
                 <a:solidFill>
                   <a:srgbClr val="E07A2F"/>
                 </a:solidFill>
-                <a:latin typeface="Caveat"/>
-              </a:rPr>
-              <a:t>Late</a:t>
-            </a:r>
-          </a:p>
-        </p:txBody>
-      </p:sp>
-      <p:sp>
-        <p:nvSpPr>
-          <p:cNvPr id="5" name="TextBox 4"/>
-          <p:cNvSpPr txBox="1"/>
-          <p:nvPr/>
-        </p:nvSpPr>
-        <p:spPr>
-          <a:xfrm>
-            <a:off x="3657600" y="1417320"/>
-            <a:ext cx="7863840" cy="777240"/>
-          </a:xfrm>
-          <a:prstGeom prst="rect">
-            <a:avLst/>
-          </a:prstGeom>
-          <a:noFill/>
-        </p:spPr>
-        <p:txBody>
-          <a:bodyPr wrap="square" lIns="0" rIns="0" tIns="0" bIns="0" anchor="t">
-            <a:spAutoFit/>
-          </a:bodyPr>
-          <a:lstStyle/>
-          <a:p>
-            <a:pPr algn="l">
-              <a:spcAft>
-                <a:spcPts val="800"/>
-              </a:spcAft>
-            </a:pPr>
-            <a:r>
-              <a:rPr sz="2000" b="0">
-                <a:solidFill>
-                  <a:srgbClr val="2B2D42"/>
-                </a:solidFill>
-                <a:latin typeface="Patrick Hand"/>
-              </a:rPr>
-              <a:t>Paper-specific author knowledge builds up from about L50, fastest over L57-L61, peaking at L61-L62.</a:t>
-            </a:r>
-          </a:p>
-        </p:txBody>
-      </p:sp>
-      <p:sp>
-        <p:nvSpPr>
-          <p:cNvPr id="6" name="TextBox 5"/>
-          <p:cNvSpPr txBox="1"/>
-          <p:nvPr/>
-        </p:nvSpPr>
-        <p:spPr>
-          <a:xfrm>
-            <a:off x="822960" y="2167128"/>
-            <a:ext cx="2834640" cy="777240"/>
-          </a:xfrm>
-          <a:prstGeom prst="rect">
-            <a:avLst/>
-          </a:prstGeom>
-          <a:noFill/>
-        </p:spPr>
-        <p:txBody>
-          <a:bodyPr wrap="square" lIns="0" rIns="0" tIns="0" bIns="0" anchor="t">
-            <a:spAutoFit/>
-          </a:bodyPr>
-          <a:lstStyle/>
-          <a:p>
-            <a:pPr algn="l">
-              <a:spcAft>
-                <a:spcPts val="800"/>
-              </a:spcAft>
-            </a:pPr>
-            <a:r>
-              <a:rPr sz="2800" b="1">
-                <a:solidFill>
-                  <a:srgbClr val="3C8D5A"/>
-                </a:solidFill>
-                <a:latin typeface="Caveat"/>
-              </a:rPr>
-              <a:t>Read early</a:t>
-            </a:r>
-          </a:p>
-        </p:txBody>
-      </p:sp>
-      <p:sp>
-        <p:nvSpPr>
-          <p:cNvPr id="7" name="TextBox 6"/>
-          <p:cNvSpPr txBox="1"/>
-          <p:nvPr/>
-        </p:nvSpPr>
-        <p:spPr>
-          <a:xfrm>
-            <a:off x="3657600" y="2258568"/>
-            <a:ext cx="7863840" cy="777240"/>
-          </a:xfrm>
-          <a:prstGeom prst="rect">
-            <a:avLst/>
-          </a:prstGeom>
-          <a:noFill/>
-        </p:spPr>
-        <p:txBody>
-          <a:bodyPr wrap="square" lIns="0" rIns="0" tIns="0" bIns="0" anchor="t">
-            <a:spAutoFit/>
-          </a:bodyPr>
-          <a:lstStyle/>
-          <a:p>
-            <a:pPr algn="l">
-              <a:spcAft>
-                <a:spcPts val="800"/>
-              </a:spcAft>
-            </a:pPr>
-            <a:r>
-              <a:rPr sz="2000" b="0">
-                <a:solidFill>
-                  <a:srgbClr val="2B2D42"/>
-                </a:solidFill>
-                <a:latin typeface="Patrick Hand"/>
-              </a:rPr>
-              <a:t>Causally, the title is read in L24-L50 and moved into the tokens after it; after L52 it is no longer needed.</a:t>
-            </a:r>
-          </a:p>
-        </p:txBody>
-      </p:sp>
-      <p:sp>
-        <p:nvSpPr>
-          <p:cNvPr id="8" name="TextBox 7"/>
-          <p:cNvSpPr txBox="1"/>
-          <p:nvPr/>
-        </p:nvSpPr>
-        <p:spPr>
-          <a:xfrm>
-            <a:off x="822960" y="3008376"/>
-            <a:ext cx="2834640" cy="777240"/>
-          </a:xfrm>
-          <a:prstGeom prst="rect">
-            <a:avLst/>
-          </a:prstGeom>
-          <a:noFill/>
-        </p:spPr>
-        <p:txBody>
-          <a:bodyPr wrap="square" lIns="0" rIns="0" tIns="0" bIns="0" anchor="t">
-            <a:spAutoFit/>
-          </a:bodyPr>
-          <a:lstStyle/>
-          <a:p>
-            <a:pPr algn="l">
-              <a:spcAft>
-                <a:spcPts val="800"/>
-              </a:spcAft>
-            </a:pPr>
-            <a:r>
-              <a:rPr sz="2800" b="1">
+                <a:latin typeface="Patrick Hand"/>
+              </a:rPr>
+              <a:t>Given name in top 10</a:t>
+            </a:r>
+          </a:p>
+          <a:p>
+            <a:pPr algn="l">
+              <a:spcAft>
+                <a:spcPts val="900"/>
+              </a:spcAft>
+            </a:pPr>
+            <a:r>
+              <a:rPr sz="1900" b="0">
+                <a:solidFill>
+                  <a:srgbClr val="2B2D42"/>
+                </a:solidFill>
+                <a:latin typeface="Patrick Hand"/>
+              </a:rPr>
+              <a:t>surname +0.22 (output)</a:t>
+            </a:r>
+          </a:p>
+          <a:p>
+            <a:pPr algn="l">
+              <a:spcAft>
+                <a:spcPts val="900"/>
+              </a:spcAft>
+            </a:pPr>
+            <a:r>
+              <a:rPr sz="1900" b="0">
+                <a:solidFill>
+                  <a:srgbClr val="2B2D42"/>
+                </a:solidFill>
+                <a:latin typeface="Patrick Hand"/>
+              </a:rPr>
+              <a:t>+0.32 (logit L62)</a:t>
+            </a:r>
+          </a:p>
+          <a:p>
+            <a:pPr algn="l">
+              <a:spcAft>
+                <a:spcPts val="900"/>
+              </a:spcAft>
+            </a:pPr>
+            <a:r>
+              <a:rPr sz="1900" b="1">
                 <a:solidFill>
                   <a:srgbClr val="3A6EA5"/>
                 </a:solidFill>
-                <a:latin typeface="Caveat"/>
-              </a:rPr>
-              <a:t>No head start</a:t>
-            </a:r>
-          </a:p>
-        </p:txBody>
-      </p:sp>
-      <p:sp>
-        <p:nvSpPr>
-          <p:cNvPr id="9" name="TextBox 8"/>
-          <p:cNvSpPr txBox="1"/>
-          <p:nvPr/>
-        </p:nvSpPr>
-        <p:spPr>
-          <a:xfrm>
-            <a:off x="3657600" y="3099816"/>
-            <a:ext cx="7863840" cy="777240"/>
-          </a:xfrm>
-          <a:prstGeom prst="rect">
-            <a:avLst/>
-          </a:prstGeom>
-          <a:noFill/>
-        </p:spPr>
-        <p:txBody>
-          <a:bodyPr wrap="square" lIns="0" rIns="0" tIns="0" bIns="0" anchor="t">
-            <a:spAutoFit/>
-          </a:bodyPr>
-          <a:lstStyle/>
-          <a:p>
-            <a:pPr algn="l">
-              <a:spcAft>
-                <a:spcPts val="800"/>
-              </a:spcAft>
-            </a:pPr>
-            <a:r>
-              <a:rPr sz="2000" b="0">
-                <a:solidFill>
-                  <a:srgbClr val="2B2D42"/>
-                </a:solidFill>
-                <a:latin typeface="Patrick Hand"/>
-              </a:rPr>
-              <a:t>Target papers are not ahead of control in middle layers; the +0.21 gap is at the end.</a:t>
-            </a:r>
-          </a:p>
-        </p:txBody>
-      </p:sp>
-      <p:sp>
-        <p:nvSpPr>
-          <p:cNvPr id="10" name="TextBox 9"/>
-          <p:cNvSpPr txBox="1"/>
-          <p:nvPr/>
-        </p:nvSpPr>
-        <p:spPr>
-          <a:xfrm>
-            <a:off x="822960" y="3849624"/>
-            <a:ext cx="2834640" cy="777240"/>
-          </a:xfrm>
-          <a:prstGeom prst="rect">
-            <a:avLst/>
-          </a:prstGeom>
-          <a:noFill/>
-        </p:spPr>
-        <p:txBody>
-          <a:bodyPr wrap="square" lIns="0" rIns="0" tIns="0" bIns="0" anchor="t">
-            <a:spAutoFit/>
-          </a:bodyPr>
-          <a:lstStyle/>
-          <a:p>
-            <a:pPr algn="l">
-              <a:spcAft>
-                <a:spcPts val="800"/>
-              </a:spcAft>
-            </a:pPr>
-            <a:r>
-              <a:rPr sz="2800" b="1">
-                <a:solidFill>
-                  <a:srgbClr val="3C8D5A"/>
-                </a:solidFill>
-                <a:latin typeface="Caveat"/>
-              </a:rPr>
-              <a:t>Real knowledge</a:t>
-            </a:r>
-          </a:p>
-        </p:txBody>
-      </p:sp>
-      <p:sp>
-        <p:nvSpPr>
-          <p:cNvPr id="11" name="TextBox 10"/>
-          <p:cNvSpPr txBox="1"/>
-          <p:nvPr/>
-        </p:nvSpPr>
-        <p:spPr>
-          <a:xfrm>
-            <a:off x="3657600" y="3941063"/>
-            <a:ext cx="7863840" cy="777240"/>
-          </a:xfrm>
-          <a:prstGeom prst="rect">
-            <a:avLst/>
-          </a:prstGeom>
-          <a:noFill/>
-        </p:spPr>
-        <p:txBody>
-          <a:bodyPr wrap="square" lIns="0" rIns="0" tIns="0" bIns="0" anchor="t">
-            <a:spAutoFit/>
-          </a:bodyPr>
-          <a:lstStyle/>
-          <a:p>
-            <a:pPr algn="l">
-              <a:spcAft>
-                <a:spcPts val="800"/>
-              </a:spcAft>
-            </a:pPr>
-            <a:r>
-              <a:rPr sz="2000" b="0">
-                <a:solidFill>
-                  <a:srgbClr val="2B2D42"/>
-                </a:solidFill>
-                <a:latin typeface="Patrick Hand"/>
-              </a:rPr>
-              <a:t>The gap is title-specific and grows with citations, so it is not name guessing.</a:t>
-            </a:r>
-          </a:p>
-        </p:txBody>
-      </p:sp>
-      <p:sp>
-        <p:nvSpPr>
-          <p:cNvPr id="12" name="TextBox 11"/>
-          <p:cNvSpPr txBox="1"/>
-          <p:nvPr/>
-        </p:nvSpPr>
-        <p:spPr>
-          <a:xfrm>
-            <a:off x="822960" y="4690872"/>
-            <a:ext cx="2834640" cy="777240"/>
-          </a:xfrm>
-          <a:prstGeom prst="rect">
-            <a:avLst/>
-          </a:prstGeom>
-          <a:noFill/>
-        </p:spPr>
-        <p:txBody>
-          <a:bodyPr wrap="square" lIns="0" rIns="0" tIns="0" bIns="0" anchor="t">
-            <a:spAutoFit/>
-          </a:bodyPr>
-          <a:lstStyle/>
-          <a:p>
-            <a:pPr algn="l">
-              <a:spcAft>
-                <a:spcPts val="800"/>
-              </a:spcAft>
-            </a:pPr>
-            <a:r>
-              <a:rPr sz="2800" b="1">
-                <a:solidFill>
-                  <a:srgbClr val="2B2D42"/>
-                </a:solidFill>
-                <a:latin typeface="Caveat"/>
-              </a:rPr>
-              <a:t>Lenses agree</a:t>
-            </a:r>
-          </a:p>
-        </p:txBody>
-      </p:sp>
-      <p:sp>
-        <p:nvSpPr>
-          <p:cNvPr id="13" name="TextBox 12"/>
-          <p:cNvSpPr txBox="1"/>
-          <p:nvPr/>
-        </p:nvSpPr>
-        <p:spPr>
-          <a:xfrm>
-            <a:off x="3657600" y="4782312"/>
-            <a:ext cx="7863840" cy="777240"/>
-          </a:xfrm>
-          <a:prstGeom prst="rect">
-            <a:avLst/>
-          </a:prstGeom>
-          <a:noFill/>
-        </p:spPr>
-        <p:txBody>
-          <a:bodyPr wrap="square" lIns="0" rIns="0" tIns="0" bIns="0" anchor="t">
-            <a:spAutoFit/>
-          </a:bodyPr>
-          <a:lstStyle/>
-          <a:p>
-            <a:pPr algn="l">
-              <a:spcAft>
-                <a:spcPts val="800"/>
-              </a:spcAft>
-            </a:pPr>
-            <a:r>
-              <a:rPr sz="2000" b="0">
-                <a:solidFill>
-                  <a:srgbClr val="2B2D42"/>
-                </a:solidFill>
-                <a:latin typeface="Patrick Hand"/>
-              </a:rPr>
-              <a:t>Jacobian lenses read more in middle layers, but nothing target-specific.</a:t>
-            </a:r>
-          </a:p>
-        </p:txBody>
-      </p:sp>
-      <p:sp>
-        <p:nvSpPr>
-          <p:cNvPr id="14" name="TextBox 13"/>
-          <p:cNvSpPr txBox="1"/>
-          <p:nvPr/>
-        </p:nvSpPr>
-        <p:spPr>
-          <a:xfrm>
-            <a:off x="822960" y="5532120"/>
-            <a:ext cx="2834640" cy="777240"/>
-          </a:xfrm>
-          <a:prstGeom prst="rect">
-            <a:avLst/>
-          </a:prstGeom>
-          <a:noFill/>
-        </p:spPr>
-        <p:txBody>
-          <a:bodyPr wrap="square" lIns="0" rIns="0" tIns="0" bIns="0" anchor="t">
-            <a:spAutoFit/>
-          </a:bodyPr>
-          <a:lstStyle/>
-          <a:p>
-            <a:pPr algn="l">
-              <a:spcAft>
-                <a:spcPts val="800"/>
-              </a:spcAft>
-            </a:pPr>
-            <a:r>
-              <a:rPr sz="2800" b="1">
-                <a:solidFill>
-                  <a:srgbClr val="E07A2F"/>
-                </a:solidFill>
-                <a:latin typeface="Caveat"/>
-              </a:rPr>
-              <a:t>Name format</a:t>
-            </a:r>
-          </a:p>
-        </p:txBody>
-      </p:sp>
-      <p:sp>
-        <p:nvSpPr>
-          <p:cNvPr id="15" name="TextBox 14"/>
-          <p:cNvSpPr txBox="1"/>
-          <p:nvPr/>
-        </p:nvSpPr>
-        <p:spPr>
-          <a:xfrm>
-            <a:off x="3657600" y="5623560"/>
-            <a:ext cx="7863840" cy="777240"/>
-          </a:xfrm>
-          <a:prstGeom prst="rect">
-            <a:avLst/>
-          </a:prstGeom>
-          <a:noFill/>
-        </p:spPr>
-        <p:txBody>
-          <a:bodyPr wrap="square" lIns="0" rIns="0" tIns="0" bIns="0" anchor="t">
-            <a:spAutoFit/>
-          </a:bodyPr>
-          <a:lstStyle/>
-          <a:p>
-            <a:pPr algn="l">
-              <a:spcAft>
-                <a:spcPts val="800"/>
-              </a:spcAft>
-            </a:pPr>
-            <a:r>
-              <a:rPr sz="2000" b="0">
-                <a:solidFill>
-                  <a:srgbClr val="2B2D42"/>
-                </a:solidFill>
-                <a:latin typeface="Patrick Hand"/>
-              </a:rPr>
-              <a:t>Initials carry little; full given names carry as much as surnames and help predict them.</a:t>
+                <a:latin typeface="Patrick Hand"/>
+              </a:rPr>
+              <a:t>Initial in top 10</a:t>
+            </a:r>
+            <a:r>
+              <a:rPr sz="1900" b="0">
+                <a:solidFill>
+                  <a:srgbClr val="2B2D42"/>
+                </a:solidFill>
+                <a:latin typeface="Patrick Hand"/>
+              </a:rPr>
+              <a:t>: no help</a:t>
             </a:r>
           </a:p>
         </p:txBody>
@@ -8815,6 +8802,762 @@
 </file>
 
 <file path=ppt/slides/slide21.xml><?xml version="1.0" encoding="utf-8"?>
+<p:sld xmlns:a="http://schemas.openxmlformats.org/drawingml/2006/main" xmlns:p="http://schemas.openxmlformats.org/presentationml/2006/main" xmlns:r="http://schemas.openxmlformats.org/officeDocument/2006/relationships">
+  <p:cSld>
+    <p:spTree>
+      <p:nvGrpSpPr>
+        <p:cNvPr id="1" name=""/>
+        <p:cNvGrpSpPr/>
+        <p:nvPr/>
+      </p:nvGrpSpPr>
+      <p:grpSpPr/>
+      <p:pic>
+        <p:nvPicPr>
+          <p:cNvPr id="2" name="Picture 1" descr="paper.png"/>
+          <p:cNvPicPr>
+            <a:picLocks noChangeAspect="1"/>
+          </p:cNvPicPr>
+          <p:nvPr/>
+        </p:nvPicPr>
+        <p:blipFill>
+          <a:blip r:embed="rId2"/>
+          <a:stretch>
+            <a:fillRect/>
+          </a:stretch>
+        </p:blipFill>
+        <p:spPr>
+          <a:xfrm>
+            <a:off x="0" y="0"/>
+            <a:ext cx="12191695" cy="6858000"/>
+          </a:xfrm>
+          <a:prstGeom prst="rect">
+            <a:avLst/>
+          </a:prstGeom>
+        </p:spPr>
+      </p:pic>
+      <p:sp>
+        <p:nvSpPr>
+          <p:cNvPr id="3" name="TextBox 2"/>
+          <p:cNvSpPr txBox="1"/>
+          <p:nvPr/>
+        </p:nvSpPr>
+        <p:spPr>
+          <a:xfrm>
+            <a:off x="685800" y="274320"/>
+            <a:ext cx="10881360" cy="822960"/>
+          </a:xfrm>
+          <a:prstGeom prst="rect">
+            <a:avLst/>
+          </a:prstGeom>
+          <a:noFill/>
+        </p:spPr>
+        <p:txBody>
+          <a:bodyPr wrap="square" lIns="0" rIns="0" tIns="0" bIns="0" anchor="t">
+            <a:spAutoFit/>
+          </a:bodyPr>
+          <a:lstStyle/>
+          <a:p>
+            <a:pPr algn="l">
+              <a:spcAft>
+                <a:spcPts val="800"/>
+              </a:spcAft>
+            </a:pPr>
+            <a:r>
+              <a:rPr sz="4600" b="1">
+                <a:solidFill>
+                  <a:srgbClr val="2B2D42"/>
+                </a:solidFill>
+                <a:latin typeface="Caveat"/>
+              </a:rPr>
+              <a:t>Where the signal sits, and a dose-response</a:t>
+            </a:r>
+          </a:p>
+        </p:txBody>
+      </p:sp>
+      <p:sp>
+        <p:nvSpPr>
+          <p:cNvPr id="4" name="TextBox 3"/>
+          <p:cNvSpPr txBox="1"/>
+          <p:nvPr/>
+        </p:nvSpPr>
+        <p:spPr>
+          <a:xfrm>
+            <a:off x="713232" y="987552"/>
+            <a:ext cx="10881360" cy="411480"/>
+          </a:xfrm>
+          <a:prstGeom prst="rect">
+            <a:avLst/>
+          </a:prstGeom>
+          <a:noFill/>
+        </p:spPr>
+        <p:txBody>
+          <a:bodyPr wrap="square" lIns="0" rIns="0" tIns="0" bIns="0" anchor="t">
+            <a:spAutoFit/>
+          </a:bodyPr>
+          <a:lstStyle/>
+          <a:p>
+            <a:pPr algn="l">
+              <a:spcAft>
+                <a:spcPts val="800"/>
+              </a:spcAft>
+            </a:pPr>
+            <a:r>
+              <a:rPr sz="1900" b="0">
+                <a:solidFill>
+                  <a:srgbClr val="6E7080"/>
+                </a:solidFill>
+                <a:latin typeface="Patrick Hand"/>
+              </a:rPr>
+              <a:t>model output</a:t>
+            </a:r>
+          </a:p>
+        </p:txBody>
+      </p:sp>
+      <p:pic>
+        <p:nvPicPr>
+          <p:cNvPr id="5" name="Picture 4" descr="c9_roles.png"/>
+          <p:cNvPicPr>
+            <a:picLocks noChangeAspect="1"/>
+          </p:cNvPicPr>
+          <p:nvPr/>
+        </p:nvPicPr>
+        <p:blipFill>
+          <a:blip r:embed="rId4"/>
+          <a:stretch>
+            <a:fillRect/>
+          </a:stretch>
+        </p:blipFill>
+        <p:spPr>
+          <a:xfrm>
+            <a:off x="365760" y="1463040"/>
+            <a:ext cx="6675120" cy="3973285"/>
+          </a:xfrm>
+          <a:prstGeom prst="rect">
+            <a:avLst/>
+          </a:prstGeom>
+        </p:spPr>
+      </p:pic>
+      <p:pic>
+        <p:nvPicPr>
+          <p:cNvPr id="6" name="Picture 5" descr="c10_graded.png"/>
+          <p:cNvPicPr>
+            <a:picLocks noChangeAspect="1"/>
+          </p:cNvPicPr>
+          <p:nvPr/>
+        </p:nvPicPr>
+        <p:blipFill>
+          <a:blip r:embed="rId5"/>
+          <a:stretch>
+            <a:fillRect/>
+          </a:stretch>
+        </p:blipFill>
+        <p:spPr>
+          <a:xfrm>
+            <a:off x="7223760" y="1737360"/>
+            <a:ext cx="4572000" cy="3282553"/>
+          </a:xfrm>
+          <a:prstGeom prst="rect">
+            <a:avLst/>
+          </a:prstGeom>
+        </p:spPr>
+      </p:pic>
+      <p:sp>
+        <p:nvSpPr>
+          <p:cNvPr id="7" name="TextBox 6"/>
+          <p:cNvSpPr txBox="1"/>
+          <p:nvPr/>
+        </p:nvSpPr>
+        <p:spPr>
+          <a:xfrm>
+            <a:off x="713232" y="6355080"/>
+            <a:ext cx="10789920" cy="320040"/>
+          </a:xfrm>
+          <a:prstGeom prst="rect">
+            <a:avLst/>
+          </a:prstGeom>
+          <a:noFill/>
+        </p:spPr>
+        <p:txBody>
+          <a:bodyPr wrap="square" lIns="0" rIns="0" tIns="0" bIns="0" anchor="t">
+            <a:spAutoFit/>
+          </a:bodyPr>
+          <a:lstStyle/>
+          <a:p>
+            <a:pPr algn="l">
+              <a:spcAft>
+                <a:spcPts val="800"/>
+              </a:spcAft>
+            </a:pPr>
+            <a:r>
+              <a:rPr sz="1400" b="0">
+                <a:solidFill>
+                  <a:srgbClr val="6E7080"/>
+                </a:solidFill>
+                <a:latin typeface="Patrick Hand"/>
+              </a:rPr>
+              <a:t>Right: R0/R1 papers, centred within citation bin; Spearman rho = 0.27, p &lt; 0.001.</a:t>
+            </a:r>
+          </a:p>
+        </p:txBody>
+      </p:sp>
+    </p:spTree>
+  </p:cSld>
+  <p:clrMapOvr>
+    <a:masterClrMapping/>
+  </p:clrMapOvr>
+</p:sld>
+</file>
+
+<file path=ppt/slides/slide22.xml><?xml version="1.0" encoding="utf-8"?>
+<p:sld xmlns:a="http://schemas.openxmlformats.org/drawingml/2006/main" xmlns:p="http://schemas.openxmlformats.org/presentationml/2006/main" xmlns:r="http://schemas.openxmlformats.org/officeDocument/2006/relationships">
+  <p:cSld>
+    <p:spTree>
+      <p:nvGrpSpPr>
+        <p:cNvPr id="1" name=""/>
+        <p:cNvGrpSpPr/>
+        <p:nvPr/>
+      </p:nvGrpSpPr>
+      <p:grpSpPr/>
+      <p:pic>
+        <p:nvPicPr>
+          <p:cNvPr id="2" name="Picture 1" descr="paper.png"/>
+          <p:cNvPicPr>
+            <a:picLocks noChangeAspect="1"/>
+          </p:cNvPicPr>
+          <p:nvPr/>
+        </p:nvPicPr>
+        <p:blipFill>
+          <a:blip r:embed="rId2"/>
+          <a:stretch>
+            <a:fillRect/>
+          </a:stretch>
+        </p:blipFill>
+        <p:spPr>
+          <a:xfrm>
+            <a:off x="0" y="0"/>
+            <a:ext cx="12191695" cy="6858000"/>
+          </a:xfrm>
+          <a:prstGeom prst="rect">
+            <a:avLst/>
+          </a:prstGeom>
+        </p:spPr>
+      </p:pic>
+      <p:sp>
+        <p:nvSpPr>
+          <p:cNvPr id="3" name="TextBox 2"/>
+          <p:cNvSpPr txBox="1"/>
+          <p:nvPr/>
+        </p:nvSpPr>
+        <p:spPr>
+          <a:xfrm>
+            <a:off x="685800" y="274320"/>
+            <a:ext cx="10881360" cy="822960"/>
+          </a:xfrm>
+          <a:prstGeom prst="rect">
+            <a:avLst/>
+          </a:prstGeom>
+          <a:noFill/>
+        </p:spPr>
+        <p:txBody>
+          <a:bodyPr wrap="square" lIns="0" rIns="0" tIns="0" bIns="0" anchor="t">
+            <a:spAutoFit/>
+          </a:bodyPr>
+          <a:lstStyle/>
+          <a:p>
+            <a:pPr algn="l">
+              <a:spcAft>
+                <a:spcPts val="800"/>
+              </a:spcAft>
+            </a:pPr>
+            <a:r>
+              <a:rPr sz="4600" b="1">
+                <a:solidFill>
+                  <a:srgbClr val="2B2D42"/>
+                </a:solidFill>
+                <a:latin typeface="Caveat"/>
+              </a:rPr>
+              <a:t>What we learned</a:t>
+            </a:r>
+          </a:p>
+        </p:txBody>
+      </p:sp>
+      <p:sp>
+        <p:nvSpPr>
+          <p:cNvPr id="4" name="TextBox 3"/>
+          <p:cNvSpPr txBox="1"/>
+          <p:nvPr/>
+        </p:nvSpPr>
+        <p:spPr>
+          <a:xfrm>
+            <a:off x="822960" y="1325880"/>
+            <a:ext cx="2834640" cy="777240"/>
+          </a:xfrm>
+          <a:prstGeom prst="rect">
+            <a:avLst/>
+          </a:prstGeom>
+          <a:noFill/>
+        </p:spPr>
+        <p:txBody>
+          <a:bodyPr wrap="square" lIns="0" rIns="0" tIns="0" bIns="0" anchor="t">
+            <a:spAutoFit/>
+          </a:bodyPr>
+          <a:lstStyle/>
+          <a:p>
+            <a:pPr algn="l">
+              <a:spcAft>
+                <a:spcPts val="800"/>
+              </a:spcAft>
+            </a:pPr>
+            <a:r>
+              <a:rPr sz="2800" b="1">
+                <a:solidFill>
+                  <a:srgbClr val="E07A2F"/>
+                </a:solidFill>
+                <a:latin typeface="Caveat"/>
+              </a:rPr>
+              <a:t>Late</a:t>
+            </a:r>
+          </a:p>
+        </p:txBody>
+      </p:sp>
+      <p:sp>
+        <p:nvSpPr>
+          <p:cNvPr id="5" name="TextBox 4"/>
+          <p:cNvSpPr txBox="1"/>
+          <p:nvPr/>
+        </p:nvSpPr>
+        <p:spPr>
+          <a:xfrm>
+            <a:off x="3657600" y="1417320"/>
+            <a:ext cx="7863840" cy="777240"/>
+          </a:xfrm>
+          <a:prstGeom prst="rect">
+            <a:avLst/>
+          </a:prstGeom>
+          <a:noFill/>
+        </p:spPr>
+        <p:txBody>
+          <a:bodyPr wrap="square" lIns="0" rIns="0" tIns="0" bIns="0" anchor="t">
+            <a:spAutoFit/>
+          </a:bodyPr>
+          <a:lstStyle/>
+          <a:p>
+            <a:pPr algn="l">
+              <a:spcAft>
+                <a:spcPts val="800"/>
+              </a:spcAft>
+            </a:pPr>
+            <a:r>
+              <a:rPr sz="2000" b="0">
+                <a:solidFill>
+                  <a:srgbClr val="2B2D42"/>
+                </a:solidFill>
+                <a:latin typeface="Patrick Hand"/>
+              </a:rPr>
+              <a:t>Paper-specific author knowledge builds up from about L50, fastest over L57-L61, peaking at L61-L62.</a:t>
+            </a:r>
+          </a:p>
+        </p:txBody>
+      </p:sp>
+      <p:sp>
+        <p:nvSpPr>
+          <p:cNvPr id="6" name="TextBox 5"/>
+          <p:cNvSpPr txBox="1"/>
+          <p:nvPr/>
+        </p:nvSpPr>
+        <p:spPr>
+          <a:xfrm>
+            <a:off x="822960" y="2167128"/>
+            <a:ext cx="2834640" cy="777240"/>
+          </a:xfrm>
+          <a:prstGeom prst="rect">
+            <a:avLst/>
+          </a:prstGeom>
+          <a:noFill/>
+        </p:spPr>
+        <p:txBody>
+          <a:bodyPr wrap="square" lIns="0" rIns="0" tIns="0" bIns="0" anchor="t">
+            <a:spAutoFit/>
+          </a:bodyPr>
+          <a:lstStyle/>
+          <a:p>
+            <a:pPr algn="l">
+              <a:spcAft>
+                <a:spcPts val="800"/>
+              </a:spcAft>
+            </a:pPr>
+            <a:r>
+              <a:rPr sz="2800" b="1">
+                <a:solidFill>
+                  <a:srgbClr val="3C8D5A"/>
+                </a:solidFill>
+                <a:latin typeface="Caveat"/>
+              </a:rPr>
+              <a:t>Read early</a:t>
+            </a:r>
+          </a:p>
+        </p:txBody>
+      </p:sp>
+      <p:sp>
+        <p:nvSpPr>
+          <p:cNvPr id="7" name="TextBox 6"/>
+          <p:cNvSpPr txBox="1"/>
+          <p:nvPr/>
+        </p:nvSpPr>
+        <p:spPr>
+          <a:xfrm>
+            <a:off x="3657600" y="2258568"/>
+            <a:ext cx="7863840" cy="777240"/>
+          </a:xfrm>
+          <a:prstGeom prst="rect">
+            <a:avLst/>
+          </a:prstGeom>
+          <a:noFill/>
+        </p:spPr>
+        <p:txBody>
+          <a:bodyPr wrap="square" lIns="0" rIns="0" tIns="0" bIns="0" anchor="t">
+            <a:spAutoFit/>
+          </a:bodyPr>
+          <a:lstStyle/>
+          <a:p>
+            <a:pPr algn="l">
+              <a:spcAft>
+                <a:spcPts val="800"/>
+              </a:spcAft>
+            </a:pPr>
+            <a:r>
+              <a:rPr sz="2000" b="0">
+                <a:solidFill>
+                  <a:srgbClr val="2B2D42"/>
+                </a:solidFill>
+                <a:latin typeface="Patrick Hand"/>
+              </a:rPr>
+              <a:t>Causally, the title is read in L24-L50 and moved into the tokens after it; after L52 it is no longer needed.</a:t>
+            </a:r>
+          </a:p>
+        </p:txBody>
+      </p:sp>
+      <p:sp>
+        <p:nvSpPr>
+          <p:cNvPr id="8" name="TextBox 7"/>
+          <p:cNvSpPr txBox="1"/>
+          <p:nvPr/>
+        </p:nvSpPr>
+        <p:spPr>
+          <a:xfrm>
+            <a:off x="822960" y="3008376"/>
+            <a:ext cx="2834640" cy="777240"/>
+          </a:xfrm>
+          <a:prstGeom prst="rect">
+            <a:avLst/>
+          </a:prstGeom>
+          <a:noFill/>
+        </p:spPr>
+        <p:txBody>
+          <a:bodyPr wrap="square" lIns="0" rIns="0" tIns="0" bIns="0" anchor="t">
+            <a:spAutoFit/>
+          </a:bodyPr>
+          <a:lstStyle/>
+          <a:p>
+            <a:pPr algn="l">
+              <a:spcAft>
+                <a:spcPts val="800"/>
+              </a:spcAft>
+            </a:pPr>
+            <a:r>
+              <a:rPr sz="2800" b="1">
+                <a:solidFill>
+                  <a:srgbClr val="3A6EA5"/>
+                </a:solidFill>
+                <a:latin typeface="Caveat"/>
+              </a:rPr>
+              <a:t>No head start</a:t>
+            </a:r>
+          </a:p>
+        </p:txBody>
+      </p:sp>
+      <p:sp>
+        <p:nvSpPr>
+          <p:cNvPr id="9" name="TextBox 8"/>
+          <p:cNvSpPr txBox="1"/>
+          <p:nvPr/>
+        </p:nvSpPr>
+        <p:spPr>
+          <a:xfrm>
+            <a:off x="3657600" y="3099816"/>
+            <a:ext cx="7863840" cy="777240"/>
+          </a:xfrm>
+          <a:prstGeom prst="rect">
+            <a:avLst/>
+          </a:prstGeom>
+          <a:noFill/>
+        </p:spPr>
+        <p:txBody>
+          <a:bodyPr wrap="square" lIns="0" rIns="0" tIns="0" bIns="0" anchor="t">
+            <a:spAutoFit/>
+          </a:bodyPr>
+          <a:lstStyle/>
+          <a:p>
+            <a:pPr algn="l">
+              <a:spcAft>
+                <a:spcPts val="800"/>
+              </a:spcAft>
+            </a:pPr>
+            <a:r>
+              <a:rPr sz="2000" b="0">
+                <a:solidFill>
+                  <a:srgbClr val="2B2D42"/>
+                </a:solidFill>
+                <a:latin typeface="Patrick Hand"/>
+              </a:rPr>
+              <a:t>Target papers are not ahead of control in middle layers; the +0.21 gap is at the end.</a:t>
+            </a:r>
+          </a:p>
+        </p:txBody>
+      </p:sp>
+      <p:sp>
+        <p:nvSpPr>
+          <p:cNvPr id="10" name="TextBox 9"/>
+          <p:cNvSpPr txBox="1"/>
+          <p:nvPr/>
+        </p:nvSpPr>
+        <p:spPr>
+          <a:xfrm>
+            <a:off x="822960" y="3849624"/>
+            <a:ext cx="2834640" cy="777240"/>
+          </a:xfrm>
+          <a:prstGeom prst="rect">
+            <a:avLst/>
+          </a:prstGeom>
+          <a:noFill/>
+        </p:spPr>
+        <p:txBody>
+          <a:bodyPr wrap="square" lIns="0" rIns="0" tIns="0" bIns="0" anchor="t">
+            <a:spAutoFit/>
+          </a:bodyPr>
+          <a:lstStyle/>
+          <a:p>
+            <a:pPr algn="l">
+              <a:spcAft>
+                <a:spcPts val="800"/>
+              </a:spcAft>
+            </a:pPr>
+            <a:r>
+              <a:rPr sz="2800" b="1">
+                <a:solidFill>
+                  <a:srgbClr val="3C8D5A"/>
+                </a:solidFill>
+                <a:latin typeface="Caveat"/>
+              </a:rPr>
+              <a:t>Real knowledge</a:t>
+            </a:r>
+          </a:p>
+        </p:txBody>
+      </p:sp>
+      <p:sp>
+        <p:nvSpPr>
+          <p:cNvPr id="11" name="TextBox 10"/>
+          <p:cNvSpPr txBox="1"/>
+          <p:nvPr/>
+        </p:nvSpPr>
+        <p:spPr>
+          <a:xfrm>
+            <a:off x="3657600" y="3941063"/>
+            <a:ext cx="7863840" cy="777240"/>
+          </a:xfrm>
+          <a:prstGeom prst="rect">
+            <a:avLst/>
+          </a:prstGeom>
+          <a:noFill/>
+        </p:spPr>
+        <p:txBody>
+          <a:bodyPr wrap="square" lIns="0" rIns="0" tIns="0" bIns="0" anchor="t">
+            <a:spAutoFit/>
+          </a:bodyPr>
+          <a:lstStyle/>
+          <a:p>
+            <a:pPr algn="l">
+              <a:spcAft>
+                <a:spcPts val="800"/>
+              </a:spcAft>
+            </a:pPr>
+            <a:r>
+              <a:rPr sz="2000" b="0">
+                <a:solidFill>
+                  <a:srgbClr val="2B2D42"/>
+                </a:solidFill>
+                <a:latin typeface="Patrick Hand"/>
+              </a:rPr>
+              <a:t>Name prior is ~1/3 of the gap overall but ~0 on surnames; the rest is paper-specific and grows with citations.</a:t>
+            </a:r>
+          </a:p>
+        </p:txBody>
+      </p:sp>
+      <p:sp>
+        <p:nvSpPr>
+          <p:cNvPr id="12" name="TextBox 11"/>
+          <p:cNvSpPr txBox="1"/>
+          <p:nvPr/>
+        </p:nvSpPr>
+        <p:spPr>
+          <a:xfrm>
+            <a:off x="822960" y="4690872"/>
+            <a:ext cx="2834640" cy="777240"/>
+          </a:xfrm>
+          <a:prstGeom prst="rect">
+            <a:avLst/>
+          </a:prstGeom>
+          <a:noFill/>
+        </p:spPr>
+        <p:txBody>
+          <a:bodyPr wrap="square" lIns="0" rIns="0" tIns="0" bIns="0" anchor="t">
+            <a:spAutoFit/>
+          </a:bodyPr>
+          <a:lstStyle/>
+          <a:p>
+            <a:pPr algn="l">
+              <a:spcAft>
+                <a:spcPts val="800"/>
+              </a:spcAft>
+            </a:pPr>
+            <a:r>
+              <a:rPr sz="2800" b="1">
+                <a:solidFill>
+                  <a:srgbClr val="2B2D42"/>
+                </a:solidFill>
+                <a:latin typeface="Caveat"/>
+              </a:rPr>
+              <a:t>Lenses agree</a:t>
+            </a:r>
+          </a:p>
+        </p:txBody>
+      </p:sp>
+      <p:sp>
+        <p:nvSpPr>
+          <p:cNvPr id="13" name="TextBox 12"/>
+          <p:cNvSpPr txBox="1"/>
+          <p:nvPr/>
+        </p:nvSpPr>
+        <p:spPr>
+          <a:xfrm>
+            <a:off x="3657600" y="4782312"/>
+            <a:ext cx="7863840" cy="777240"/>
+          </a:xfrm>
+          <a:prstGeom prst="rect">
+            <a:avLst/>
+          </a:prstGeom>
+          <a:noFill/>
+        </p:spPr>
+        <p:txBody>
+          <a:bodyPr wrap="square" lIns="0" rIns="0" tIns="0" bIns="0" anchor="t">
+            <a:spAutoFit/>
+          </a:bodyPr>
+          <a:lstStyle/>
+          <a:p>
+            <a:pPr algn="l">
+              <a:spcAft>
+                <a:spcPts val="800"/>
+              </a:spcAft>
+            </a:pPr>
+            <a:r>
+              <a:rPr sz="2000" b="0">
+                <a:solidFill>
+                  <a:srgbClr val="2B2D42"/>
+                </a:solidFill>
+                <a:latin typeface="Patrick Hand"/>
+              </a:rPr>
+              <a:t>Jacobian lenses read more in middle layers, but nothing target-specific.</a:t>
+            </a:r>
+          </a:p>
+        </p:txBody>
+      </p:sp>
+      <p:sp>
+        <p:nvSpPr>
+          <p:cNvPr id="14" name="TextBox 13"/>
+          <p:cNvSpPr txBox="1"/>
+          <p:nvPr/>
+        </p:nvSpPr>
+        <p:spPr>
+          <a:xfrm>
+            <a:off x="822960" y="5532120"/>
+            <a:ext cx="2834640" cy="777240"/>
+          </a:xfrm>
+          <a:prstGeom prst="rect">
+            <a:avLst/>
+          </a:prstGeom>
+          <a:noFill/>
+        </p:spPr>
+        <p:txBody>
+          <a:bodyPr wrap="square" lIns="0" rIns="0" tIns="0" bIns="0" anchor="t">
+            <a:spAutoFit/>
+          </a:bodyPr>
+          <a:lstStyle/>
+          <a:p>
+            <a:pPr algn="l">
+              <a:spcAft>
+                <a:spcPts val="800"/>
+              </a:spcAft>
+            </a:pPr>
+            <a:r>
+              <a:rPr sz="2800" b="1">
+                <a:solidFill>
+                  <a:srgbClr val="E07A2F"/>
+                </a:solidFill>
+                <a:latin typeface="Caveat"/>
+              </a:rPr>
+              <a:t>Name format</a:t>
+            </a:r>
+          </a:p>
+        </p:txBody>
+      </p:sp>
+      <p:sp>
+        <p:nvSpPr>
+          <p:cNvPr id="15" name="TextBox 14"/>
+          <p:cNvSpPr txBox="1"/>
+          <p:nvPr/>
+        </p:nvSpPr>
+        <p:spPr>
+          <a:xfrm>
+            <a:off x="3657600" y="5623560"/>
+            <a:ext cx="7863840" cy="777240"/>
+          </a:xfrm>
+          <a:prstGeom prst="rect">
+            <a:avLst/>
+          </a:prstGeom>
+          <a:noFill/>
+        </p:spPr>
+        <p:txBody>
+          <a:bodyPr wrap="square" lIns="0" rIns="0" tIns="0" bIns="0" anchor="t">
+            <a:spAutoFit/>
+          </a:bodyPr>
+          <a:lstStyle/>
+          <a:p>
+            <a:pPr algn="l">
+              <a:spcAft>
+                <a:spcPts val="800"/>
+              </a:spcAft>
+            </a:pPr>
+            <a:r>
+              <a:rPr sz="2000" b="0">
+                <a:solidFill>
+                  <a:srgbClr val="2B2D42"/>
+                </a:solidFill>
+                <a:latin typeface="Patrick Hand"/>
+              </a:rPr>
+              <a:t>Initials carry little; full given names carry as much as surnames and help predict them.</a:t>
+            </a:r>
+          </a:p>
+        </p:txBody>
+      </p:sp>
+    </p:spTree>
+  </p:cSld>
+  <p:clrMapOvr>
+    <a:masterClrMapping/>
+  </p:clrMapOvr>
+</p:sld>
+</file>
+
+<file path=ppt/slides/slide23.xml><?xml version="1.0" encoding="utf-8"?>
 <p:sld xmlns:a="http://schemas.openxmlformats.org/drawingml/2006/main" xmlns:p="http://schemas.openxmlformats.org/presentationml/2006/main" xmlns:r="http://schemas.openxmlformats.org/officeDocument/2006/relationships">
   <p:cSld>
     <p:spTree>

--- a/experiment_files/351_stage10/reports/talk/Stage10_author_readout_talk.pptx
+++ b/experiment_files/351_stage10/reports/talk/Stage10_author_readout_talk.pptx
@@ -10,16 +10,19 @@
     <p:sldId id="258" r:id="rId10"/>
     <p:sldId id="259" r:id="rId11"/>
     <p:sldId id="260" r:id="rId12"/>
-    <p:sldId id="261" r:id="rId13"/>
-    <p:sldId id="262" r:id="rId14"/>
     <p:sldId id="263" r:id="rId15"/>
     <p:sldId id="264" r:id="rId16"/>
     <p:sldId id="265" r:id="rId17"/>
     <p:sldId id="266" r:id="rId18"/>
     <p:sldId id="267" r:id="rId19"/>
     <p:sldId id="268" r:id="rId20"/>
+    <p:sldId id="270" r:id="rId22"/>
+    <p:sldId id="278" r:id="rId30"/>
+    <p:sldId id="279" r:id="rId31"/>
+    <p:sldId id="280" r:id="rId32"/>
+    <p:sldId id="261" r:id="rId13"/>
+    <p:sldId id="262" r:id="rId14"/>
     <p:sldId id="269" r:id="rId21"/>
-    <p:sldId id="270" r:id="rId22"/>
     <p:sldId id="271" r:id="rId23"/>
     <p:sldId id="272" r:id="rId24"/>
     <p:sldId id="273" r:id="rId25"/>
@@ -27,7 +30,6 @@
     <p:sldId id="275" r:id="rId27"/>
     <p:sldId id="276" r:id="rId28"/>
     <p:sldId id="277" r:id="rId29"/>
-    <p:sldId id="278" r:id="rId30"/>
   </p:sldIdLst>
   <p:sldSz cx="12191695" cy="6858000" type="screen4x3"/>
   <p:notesSz cx="6858000" cy="9144000"/>
@@ -594,7 +596,7 @@
           <a:lstStyle/>
           <a:p>
             <a:r>
-              <a:t>Stage 11 turns the readout question into interventions. 593 target and 593 control papers, matched within citation bins. Patching: run the paper with its true title and with a matched false title, and copy the true run hidden state into the false run at one layer. Knockout: forbid attention to the title tokens from layer l to the end. Probe: train a linear map from the last title token to the output state. Chain: score every author after the previous ones.</a:t>
+              <a:t>Fine layers L50 to L61 were added afterwards for the logit lens and the public lens. The target advantage does not switch on at L62: for the logit lens the title-specific target minus control difference is +0.007 at L50, +0.03 at L54, +0.07 at L56, +0.11 at L58, +0.18 at L60 and +0.23 at L62. The public lens is negative up to L54 and turns positive at L57. The steepest rise is L57 to L61. Both groups peak at L61.</a:t>
             </a:r>
           </a:p>
         </p:txBody>
@@ -664,7 +666,7 @@
           <a:lstStyle/>
           <a:p>
             <a:r>
-              <a:t>Two causal curves. Left: copying the hidden states of the tokens after the title (closing quote, year, Authors:, the name) from the true run into the false run recovers 29 percent at L40, 83 percent at L48 and everything from L52. Copying only the last title token recovers about 12 percent. Right: blocking attention to the title from L0 removes 83 percent of the effect, from L32 37 percent, from L48 6 percent, from L52 nothing. Blocking only the colon and name positions removes at most 15 percent, so the information is routed through the tokens right after the title. Target and control follow the same curves.</a:t>
+              <a:t>Stage 11 turns the readout question into interventions. 593 target and 593 control papers, matched within citation bins. Patching: run the paper with its true title and with a matched false title, and copy the true run hidden state into the false run at one layer. Knockout: forbid attention to the title tokens from layer l to the end. Probe: train a linear map from the last title token to the output state. Chain: score every author after the previous ones.</a:t>
             </a:r>
           </a:p>
         </p:txBody>
@@ -734,7 +736,7 @@
           <a:lstStyle/>
           <a:p>
             <a:r>
-              <a:t>Is the author readable at the title itself? With the lenses, barely: about 0.01 to 0.03 title-specific signal at the last title token. A linear probe trained across papers gets more, 0.04 at L16 rising to 0.08 at L56, and a little more for target papers. The controls on the next slide show this probe signal is specific to the paper, not a topic-to-name association.</a:t>
+              <a:t>Two causal curves. Left: copying the hidden states of the tokens after the title (closing quote, year, Authors:, the name) from the true run into the false run recovers 29 percent at L40, 83 percent at L48 and everything from L52. Copying only the last title token recovers about 12 percent. Right: blocking attention to the title from L0 removes 83 percent of the effect, from L32 37 percent, from L48 6 percent, from L52 nothing. Blocking only the colon and name positions removes at most 15 percent, so the information is routed through the tokens right after the title. Target and control follow the same curves.</a:t>
             </a:r>
           </a:p>
         </p:txBody>
@@ -804,7 +806,7 @@
           <a:lstStyle/>
           <a:p>
             <a:r>
-              <a:t>Author chain. When the earlier authors are in the context, later authors become easier: plus 0.17 to 0.23 for target, 0.12 to 0.18 for control. But the title matters less: the title-specific signal drops from 0.45 to 0.26 for later target authors, because the co-authors already identify the paper. Target still beats control within bins, plus 0.11 to 0.15.</a:t>
+              <a:t>Is the author readable at the title itself? With the lenses, barely: about 0.01 to 0.03 title-specific signal at the last title token. A linear probe trained across papers gets more, 0.04 at L16 rising to 0.08 at L56, and a little more for target papers. The controls (appendix) show this probe signal is specific to the paper, not a topic-to-name association. This is not in conflict with the lens result: the title is read early, at the title token, but names only become readable at the name positions in L57 to L61. Read early, spoken late.</a:t>
             </a:r>
           </a:p>
         </p:txBody>
@@ -874,7 +876,7 @@
           <a:lstStyle/>
           <a:p>
             <a:r>
-              <a:t>How much is just the name prior? We score the same names with no title at all. Without a title the correct name already sits around rank 12 on average: punctuation and the rest of a surname are easy once the prefix is given. The true title improves the surname first token the most: for target papers from about rank 146 to rank 24. Split the target minus control gap within citation bins: about 0.09 is already there without a title (target names are a bit easier to guess), false titles take back 0.05, and 0.21 is paper-specific. On the surname first token the prior part is about zero and 0.42 is paper-specific. The prior barely tracks multiple-choice recognition (Spearman 0.09 vs 0.33 for the paper-specific part).</a:t>
+              <a:t>Author chain. When the earlier authors are in the context, later authors become easier: plus 0.17 to 0.23 for target, 0.12 to 0.18 for control. But the title matters less: the title-specific signal drops from 0.45 to 0.26 for later target authors, because the co-authors already identify the paper. Target still beats control within bins, plus 0.11 to 0.15.</a:t>
             </a:r>
           </a:p>
         </p:txBody>
@@ -944,7 +946,7 @@
           <a:lstStyle/>
           <a:p>
             <a:r>
-              <a:t>Is the probe at the title token reading real paper knowledge, or just topic to name associations? If we score its output against the authors of another paper, or of another paper in the same field, the signal drops to zero. If we train it only on false-title pairs it gets even stronger. So the last title token carries linearly decodable, paper-specific author information already at L24, more for target papers, even though the lenses cannot read it.</a:t>
+              <a:t>How much is just the name prior? We score the same names with no title at all. Without a title the correct name already sits around rank 12 on average: punctuation and the rest of a surname are easy once the prefix is given. The true title improves the surname first token the most: for target papers from about rank 146 to rank 24. Split the target minus control gap within citation bins: about 0.09 is already there without a title (target names are a bit easier to guess), false titles take back 0.05, and 0.21 is paper-specific. On the surname first token the prior part is about zero and 0.42 is paper-specific. The prior barely tracks multiple-choice recognition (Spearman 0.09 vs 0.33 for the paper-specific part).</a:t>
             </a:r>
           </a:p>
         </p:txBody>
@@ -1014,7 +1016,7 @@
           <a:lstStyle/>
           <a:p>
             <a:r>
-              <a:t>Comparing lenses. On readout quality fitA is best in most middle layers, self100 at L40; at L48 the Jacobian lenses put the right token in the top 10 for 15-18% of tokens versus 1% for the logit lens. At L62 the plain logit lens is best.</a:t>
+              <a:t>Is the probe at the title token reading real paper knowledge, or just topic to name associations? If we score its output against the authors of another paper, or of another paper in the same field, the signal drops to zero. If we train it only on false-title pairs it gets even stronger. So the last title token carries linearly decodable, paper-specific author information already at L24, more for target papers, even though the lenses cannot read it.</a:t>
             </a:r>
           </a:p>
         </p:txBody>
@@ -1084,7 +1086,7 @@
           <a:lstStyle/>
           <a:p>
             <a:r>
-              <a:t>Do Jacobian lenses see paper-specific information the logit lens misses? A little: +0.01 to +0.03 more title-specific signal at L24-L48, CIs above zero, but tiny next to 0.44 at L62. And it is not bigger for target: target minus control of that extra is about zero, negative at L48 and L56.</a:t>
+              <a:t>Comparing lenses. On readout quality fitA is best in most middle layers, self100 at L40; at L48 the Jacobian lenses put the right token in the top 10 for 15-18% of tokens versus 1% for the logit lens. At L62 the plain logit lens is best.</a:t>
             </a:r>
           </a:p>
         </p:txBody>
@@ -1154,7 +1156,7 @@
           <a:lstStyle/>
           <a:p>
             <a:r>
-              <a:t>Citations. Within both groups the title-specific signal rises steadily with citation bin: target from +0.35 in bin 0-2 to +0.64 in 4097+. Spearman with log citations: 0.45 overall, 0.33 within target, 0.19 within control. The level itself changes much less - names are not easier to guess for famous papers, the model just knows famous papers better.</a:t>
+              <a:t>Do Jacobian lenses see paper-specific information the logit lens misses? A little: +0.01 to +0.03 more title-specific signal at L24-L48, CIs above zero, but tiny next to 0.44 at L62. And it is not bigger for target: target minus control of that extra is about zero, negative at L48 and L56.</a:t>
             </a:r>
           </a:p>
         </p:txBody>
@@ -1224,7 +1226,7 @@
           <a:lstStyle/>
           <a:p>
             <a:r>
-              <a:t>Is the signal decided by the first token? It depends on the name format. Initial-first names: the initial carries little, the signal is on the later tokens that include the surname. Given-name-first names: the given name carries about as much as the rest. Note teacher forcing: later tokens already see the correct prefix in every condition, so their title-specific signal can only come from the title.</a:t>
+              <a:t>Citations. Within both groups the title-specific signal rises steadily with citation bin: target from +0.35 in bin 0-2 to +0.64 in 4097+. Spearman with log citations: 0.45 overall, 0.33 within target, 0.19 within control. The level itself changes much less - names are not easier to guess for famous papers, the model just knows famous papers better.</a:t>
             </a:r>
           </a:p>
         </p:txBody>
@@ -1364,7 +1366,7 @@
           <a:lstStyle/>
           <a:p>
             <a:r>
-              <a:t>Does knowing the first word make the rest easier? For a full given name, yes: when it is in the top 10 the surname is +0.22 better at the output, +0.32 for the logit lens at L62. For an initial, no. Mixing both formats would even show a negative effect, because initials are easy and the surnames after them are hard.</a:t>
+              <a:t>Is the signal decided by the first token? It depends on the name format. Initial-first names: the initial carries little, the signal is on the later tokens that include the surname. Given-name-first names: the given name carries about as much as the rest. Note teacher forcing: later tokens already see the correct prefix in every condition, so their title-specific signal can only come from the title.</a:t>
             </a:r>
           </a:p>
         </p:txBody>
@@ -1434,7 +1436,7 @@
           <a:lstStyle/>
           <a:p>
             <a:r>
-              <a:t>Left: title-specific signal by token role at the output - surname first token carries most, initials least, punctuation about zero (negative control). Right: across all unrecalled papers, the more multiple-choice orders right, the better the model output (Spearman 0.27).</a:t>
+              <a:t>Does knowing the first word make the rest easier? For a full given name, yes: when it is in the top 10 the surname is +0.22 better at the output, +0.32 for the logit lens at L62. For an initial, no. Mixing both formats would even show a negative effect, because initials are easy and the surnames after them are hard.</a:t>
             </a:r>
           </a:p>
         </p:txBody>
@@ -1504,7 +1506,7 @@
           <a:lstStyle/>
           <a:p>
             <a:r>
-              <a:t>Wrap up the five findings.</a:t>
+              <a:t>Left: title-specific signal by token role at the output - surname first token carries most, initials least, punctuation about zero (negative control). Right: across all unrecalled papers, the more multiple-choice orders right, the better the model output (Spearman 0.27).</a:t>
             </a:r>
           </a:p>
         </p:txBody>
@@ -1574,7 +1576,147 @@
           <a:lstStyle/>
           <a:p>
             <a:r>
-              <a:t>Limits and next steps. Patching and knockout now fix when the title is read (L24-L50) but not what happens inside those layers. Next: patch single positions after the title, localise the computation inside L24-L50, and repeat on a second model.</a:t>
+              <a:t>Wrap up. One line: read early, spoken late. The title is taken in during L24 to L50 (patching, knockout, probe at the title token), but the author names only become readable at the name positions in L57 to L61. The lens result (no middle-layer lead for target) and the probe result (a small target lead at the title token) are about different positions and do not conflict.</a:t>
+            </a:r>
+          </a:p>
+        </p:txBody>
+      </p:sp>
+      <p:sp>
+        <p:nvSpPr>
+          <p:cNvPr id="4" name="Slide Number Placeholder 3"/>
+          <p:cNvSpPr>
+            <a:spLocks noGrp="1"/>
+          </p:cNvSpPr>
+          <p:nvPr>
+            <p:ph type="sldNum" idx="5" sz="quarter"/>
+          </p:nvPr>
+        </p:nvSpPr>
+        <p:spPr/>
+      </p:sp>
+    </p:spTree>
+  </p:cSld>
+  <p:clrMapOvr>
+    <a:masterClrMapping/>
+  </p:clrMapOvr>
+</p:notes>
+</file>
+
+<file path=ppt/notesSlides/notesSlide24.xml><?xml version="1.0" encoding="utf-8"?>
+<p:notes xmlns:a="http://schemas.openxmlformats.org/drawingml/2006/main" xmlns:p="http://schemas.openxmlformats.org/presentationml/2006/main" xmlns:r="http://schemas.openxmlformats.org/officeDocument/2006/relationships">
+  <p:cSld>
+    <p:spTree>
+      <p:nvGrpSpPr>
+        <p:cNvPr id="1" name=""/>
+        <p:cNvGrpSpPr/>
+        <p:nvPr/>
+      </p:nvGrpSpPr>
+      <p:grpSpPr>
+        <a:xfrm>
+          <a:off x="0" y="0"/>
+          <a:ext cx="0" cy="0"/>
+          <a:chOff x="0" y="0"/>
+          <a:chExt cx="0" cy="0"/>
+        </a:xfrm>
+      </p:grpSpPr>
+      <p:sp>
+        <p:nvSpPr>
+          <p:cNvPr id="2" name="Slide Image Placeholder 1"/>
+          <p:cNvSpPr>
+            <a:spLocks noGrp="1"/>
+          </p:cNvSpPr>
+          <p:nvPr>
+            <p:ph type="sldImg" idx="2"/>
+          </p:nvPr>
+        </p:nvSpPr>
+        <p:spPr/>
+      </p:sp>
+      <p:sp>
+        <p:nvSpPr>
+          <p:cNvPr id="3" name="Notes Placeholder 2"/>
+          <p:cNvSpPr>
+            <a:spLocks noGrp="1"/>
+          </p:cNvSpPr>
+          <p:nvPr>
+            <p:ph type="body" idx="3" sz="quarter"/>
+          </p:nvPr>
+        </p:nvSpPr>
+        <p:spPr/>
+        <p:txBody>
+          <a:bodyPr/>
+          <a:lstStyle/>
+          <a:p>
+            <a:r>
+              <a:t>Limits and next steps. Patching and knockout fix when the title is read (L24-L50) but not what happens inside those layers. Stage 12 is running: single-position patching, attention versus MLP patching, a lens fitted on author prompts, and two name-prior baselines. A second model is out of scope: the groups come from the group lead labelling run of Qwen3-32B.</a:t>
+            </a:r>
+          </a:p>
+        </p:txBody>
+      </p:sp>
+      <p:sp>
+        <p:nvSpPr>
+          <p:cNvPr id="4" name="Slide Number Placeholder 3"/>
+          <p:cNvSpPr>
+            <a:spLocks noGrp="1"/>
+          </p:cNvSpPr>
+          <p:nvPr>
+            <p:ph type="sldNum" idx="5" sz="quarter"/>
+          </p:nvPr>
+        </p:nvSpPr>
+        <p:spPr/>
+      </p:sp>
+    </p:spTree>
+  </p:cSld>
+  <p:clrMapOvr>
+    <a:masterClrMapping/>
+  </p:clrMapOvr>
+</p:notes>
+</file>
+
+<file path=ppt/notesSlides/notesSlide25.xml><?xml version="1.0" encoding="utf-8"?>
+<p:notes xmlns:a="http://schemas.openxmlformats.org/drawingml/2006/main" xmlns:p="http://schemas.openxmlformats.org/presentationml/2006/main" xmlns:r="http://schemas.openxmlformats.org/officeDocument/2006/relationships">
+  <p:cSld>
+    <p:spTree>
+      <p:nvGrpSpPr>
+        <p:cNvPr id="1" name=""/>
+        <p:cNvGrpSpPr/>
+        <p:nvPr/>
+      </p:nvGrpSpPr>
+      <p:grpSpPr>
+        <a:xfrm>
+          <a:off x="0" y="0"/>
+          <a:ext cx="0" cy="0"/>
+          <a:chOff x="0" y="0"/>
+          <a:chExt cx="0" cy="0"/>
+        </a:xfrm>
+      </p:grpSpPr>
+      <p:sp>
+        <p:nvSpPr>
+          <p:cNvPr id="2" name="Slide Image Placeholder 1"/>
+          <p:cNvSpPr>
+            <a:spLocks noGrp="1"/>
+          </p:cNvSpPr>
+          <p:nvPr>
+            <p:ph type="sldImg" idx="2"/>
+          </p:nvPr>
+        </p:nvSpPr>
+        <p:spPr/>
+      </p:sp>
+      <p:sp>
+        <p:nvSpPr>
+          <p:cNvPr id="3" name="Notes Placeholder 2"/>
+          <p:cNvSpPr>
+            <a:spLocks noGrp="1"/>
+          </p:cNvSpPr>
+          <p:nvPr>
+            <p:ph type="body" idx="3" sz="quarter"/>
+          </p:nvPr>
+        </p:nvSpPr>
+        <p:spPr/>
+        <p:txBody>
+          <a:bodyPr/>
+          <a:lstStyle/>
+          <a:p>
+            <a:r>
+              <a:t>Appendix: backup slides for questions - checks, readout levels, the author chain, probe controls, lens comparisons, citations and name formats.</a:t>
             </a:r>
           </a:p>
         </p:txBody>
@@ -1644,7 +1786,7 @@
           <a:lstStyle/>
           <a:p>
             <a:r>
-              <a:t>Data: 9,108 papers across 8 fields, years 1817-2020, citations 0 to 63,901 in 13 bins. Each author is scored alone: 33,811 author contexts, 149,999 name tokens.</a:t>
+              <a:t>Data: the evaluation set of the Dreaming Up Authors study, reused as is. It started from 9,999,863 random OAG v2 records, enriched with Semantic Scholar (citations, canonical names, fields, September 2025) and filtered: journal and conference papers, 1 to 19 authors, English (FastText at least 0.8), clean person names, title and first-author surname agreeing between OAG and Semantic Scholar. 1.92 million papers remained. 8 fields chosen by frequency (77 percent of the data), 13 exponential citation bins, up to 100 papers per field and bin: 9,108 papers. Each author is scored alone: 33,811 author contexts, 149,999 name tokens.</a:t>
             </a:r>
           </a:p>
         </p:txBody>
@@ -1714,7 +1856,7 @@
           <a:lstStyle/>
           <a:p>
             <a:r>
-              <a:t>Method. Prompt: Who are the authors of the paper titled "..." (year)? Authors: then one author name. Teacher forcing: at each name token we ask what rank the correct token gets. Readouts: logit lens, three Jacobian lenses (public from Neuronpedia, self100, fitA), and the real model output. Layers 24 to 62. Metric log10(1/rank): 0 = rank 1, -1 = rank 10. Each paper is also run with 5 matched false titles and with no title; title-specific signal = true minus mean of the false titles, so name guessability cancels out.</a:t>
+              <a:t>The rules behind every number. Open answer: greedy decoding inside the chat template; a deterministic fuzzy name match counts matched, hallucinated and unretrieved authors; HR2 = (H+U)/(M+H+U); R2 if HR2 is at most 0.5, otherwise R0 if nothing matched and R1 if something did. No human or model judge. Multiple choice: the true list against the real teams of 3 other papers from the same field, with similar team size, the same citation bin and a similar year; 4 orders; the letter probabilities come from the next-token distribution, A and space-A summed, not renormalised (mass is 1.00 on average). Target: 4 of 4 orders right and mean true-letter probability at least 0.5; control: at most 1 of 4. False titles: 5 per paper from the same field, year kept, minimum-cost matching on year, author count, title length and citation bin, no shared surname, word Jaccard at most 0.6; 79 percent strict tier. Statistics: target versus control only within citation bins with at least 30 papers per group, weighted n_t n_c over n_t plus n_c; bootstrap over papers 2,000 times; sensitivity without bins 0-4.</a:t>
             </a:r>
           </a:p>
         </p:txBody>
@@ -1784,7 +1926,7 @@
           <a:lstStyle/>
           <a:p>
             <a:r>
-              <a:t>Checks before trusting numbers: the fast path matches a per-prefix reference up to bf16 rounding; ranks match a previous stage on 972 tokens; punctuation tokens, which cannot depend on the title, show no title-specific signal. The parity tolerance was raised from 0.25 to 0.5 after seeing the results - say this openly.</a:t>
+              <a:t>Method. Prompt: Who are the authors of the paper titled "..." (year)? Authors: then one author name. Teacher forcing: at each name token we ask what rank the correct token gets. Readouts: logit lens, three Jacobian lenses (public from Neuronpedia, self100, fitA), and the real model output. Layers 24 to 62. Metric log10(1/rank): 0 = rank 1, -1 = rank 10. Each paper is also run with 5 matched false titles and with no title; title-specific signal = true minus mean of the false titles, so name guessability cancels out.</a:t>
             </a:r>
           </a:p>
         </p:txBody>
@@ -1854,7 +1996,7 @@
           <a:lstStyle/>
           <a:p>
             <a:r>
-              <a:t>All readouts get better with depth. The logit lens reads almost nothing before L48 (ranks in the tens of thousands) and jumps at L62. Jacobian lenses read more from L40, fitA the most. The real output is best of all.</a:t>
+              <a:t>Checks before trusting numbers: the fast path matches a per-prefix reference up to bf16 rounding; ranks match a previous stage on 972 tokens; punctuation tokens, which cannot depend on the title, show no title-specific signal. The parity tolerance was raised from 0.25 to 0.5 after seeing the results - say this openly.</a:t>
             </a:r>
           </a:p>
         </p:txBody>
@@ -1924,7 +2066,7 @@
           <a:lstStyle/>
           <a:p>
             <a:r>
-              <a:t>Now remove name guessability: true title minus false titles. Flat up to L48 for both groups. Starts at L56, big at L62 and the output. Target ends roughly twice as high as control.</a:t>
+              <a:t>All readouts get better with depth. The logit lens reads almost nothing before L48 (ranks in the tens of thousands) and jumps at L62. Jacobian lenses read more from L40, fitA the most. The real output is best of all.</a:t>
             </a:r>
           </a:p>
         </p:txBody>
@@ -1994,7 +2136,7 @@
           <a:lstStyle/>
           <a:p>
             <a:r>
-              <a:t>Key slide. Target minus control within citation bins. Left: true title only - middle layers are even slightly negative for the Jacobian lens. Right: title-specific part - about zero until L56, then +0.21 to +0.23 at L62 and the output. The target advantage is late and almost entirely title-specific.</a:t>
+              <a:t>Now remove name guessability: true title minus false titles. Flat up to L48 for both groups. Starts at L56, big at L62 and the output. Target ends roughly twice as high as control.</a:t>
             </a:r>
           </a:p>
         </p:txBody>
@@ -2064,7 +2206,7 @@
           <a:lstStyle/>
           <a:p>
             <a:r>
-              <a:t>Fine layers L50 to L61 were added afterwards for the logit lens and the public lens. The target advantage does not switch on at L62: for the logit lens the title-specific target minus control difference is +0.007 at L50, +0.03 at L54, +0.07 at L56, +0.11 at L58, +0.18 at L60 and +0.23 at L62. The public lens is negative up to L54 and turns positive at L57. The steepest rise is L57 to L61. Both groups peak at L61.</a:t>
+              <a:t>Key slide. Target minus control within citation bins. Left: true title only - middle layers are even slightly negative for the Jacobian lens. Right: title-specific part - about zero until L56, then +0.21 to +0.23 at L62 and the output. The target advantage is late and almost entirely title-specific.</a:t>
             </a:r>
           </a:p>
         </p:txBody>
@@ -5274,7 +5416,7 @@
                 </a:solidFill>
                 <a:latin typeface="Patrick Hand"/>
               </a:rPr>
-              <a:t>Stage 10 · jlens</a:t>
+              <a:t>Stages 10-11 · jlens</a:t>
             </a:r>
           </a:p>
           <a:p>
@@ -5290,7 +5432,7 @@
                 </a:solidFill>
                 <a:latin typeface="Patrick Hand"/>
               </a:rPr>
-              <a:t>Qwen3-32B · 2026-10-26</a:t>
+              <a:t>Qwen3-32B · 2026-10-27</a:t>
             </a:r>
           </a:p>
         </p:txBody>
@@ -5371,7 +5513,7 @@
                 </a:solidFill>
                 <a:latin typeface="Caveat"/>
               </a:rPr>
-              <a:t>Stage 11: intervene, do not just read</a:t>
+              <a:t>It builds up over the last dozen layers</a:t>
             </a:r>
           </a:p>
         </p:txBody>
@@ -5410,33 +5552,58 @@
                 </a:solidFill>
                 <a:latin typeface="Patrick Hand"/>
               </a:rPr>
-              <a:t>593 target + 593 control papers (balanced within citation bins) · all 9,108 for probe and chain</a:t>
-            </a:r>
-          </a:p>
-        </p:txBody>
-      </p:sp>
-      <p:sp>
-        <p:nvSpPr>
-          <p:cNvPr id="5" name="Rounded Rectangle 4"/>
+              <a:t>fine layers L40-L62 · title-specific signal · 95% CI</a:t>
+            </a:r>
+          </a:p>
+        </p:txBody>
+      </p:sp>
+      <p:pic>
+        <p:nvPicPr>
+          <p:cNvPr id="5" name="Picture 4" descr="c11_fine_layers.png"/>
+          <p:cNvPicPr>
+            <a:picLocks noChangeAspect="1"/>
+          </p:cNvPicPr>
+          <p:nvPr/>
+        </p:nvPicPr>
+        <p:blipFill>
+          <a:blip r:embed="rId4"/>
+          <a:stretch>
+            <a:fillRect/>
+          </a:stretch>
+        </p:blipFill>
+        <p:spPr>
+          <a:xfrm>
+            <a:off x="457200" y="1463040"/>
+            <a:ext cx="8412480" cy="3963572"/>
+          </a:xfrm>
+          <a:prstGeom prst="rect">
+            <a:avLst/>
+          </a:prstGeom>
+        </p:spPr>
+      </p:pic>
+      <p:sp>
+        <p:nvSpPr>
+          <p:cNvPr id="6" name="Rectangle 5"/>
           <p:cNvSpPr/>
           <p:nvPr/>
         </p:nvSpPr>
         <p:spPr>
-          <a:xfrm rot="21540000">
-            <a:off x="822960" y="1737360"/>
-            <a:ext cx="5120640" cy="1828800"/>
-          </a:xfrm>
-          <a:prstGeom prst="roundRect">
-            <a:avLst>
-              <a:gd name="adj" fmla="val 8000"/>
-            </a:avLst>
-          </a:prstGeom>
-          <a:noFill/>
-          <a:ln w="28575">
+          <a:xfrm rot="21510000">
+            <a:off x="9098280" y="1737360"/>
+            <a:ext cx="2651760" cy="3108960"/>
+          </a:xfrm>
+          <a:prstGeom prst="rect">
+            <a:avLst/>
+          </a:prstGeom>
+          <a:solidFill>
+            <a:srgbClr val="FFF1A8"/>
+          </a:solidFill>
+          <a:ln w="12700">
             <a:solidFill>
-              <a:srgbClr val="E07A2F"/>
+              <a:srgbClr val="E2D37A"/>
             </a:solidFill>
           </a:ln>
+          <a:effectLst/>
         </p:spPr>
         <p:style>
           <a:lnRef idx="1">
@@ -5453,299 +5620,79 @@
           </a:fontRef>
         </p:style>
         <p:txBody>
-          <a:bodyPr rtlCol="0" anchor="ctr" wrap="square" lIns="164592" rIns="164592"/>
-          <a:lstStyle/>
-          <a:p>
-            <a:pPr algn="ctr">
-              <a:spcAft>
-                <a:spcPts val="400"/>
-              </a:spcAft>
-            </a:pPr>
-            <a:r>
-              <a:rPr sz="2000" b="1">
+          <a:bodyPr rtlCol="0" anchor="t" wrap="square" lIns="201168" rIns="201168" tIns="164592" bIns="164592"/>
+          <a:lstStyle/>
+          <a:p>
+            <a:pPr algn="l">
+              <a:spcAft>
+                <a:spcPts val="900"/>
+              </a:spcAft>
+            </a:pPr>
+            <a:r>
+              <a:rPr sz="1900" b="0">
+                <a:solidFill>
+                  <a:srgbClr val="2B2D42"/>
+                </a:solidFill>
+                <a:latin typeface="Patrick Hand"/>
+              </a:rPr>
+              <a:t>Logit lens: target - control</a:t>
+            </a:r>
+          </a:p>
+          <a:p>
+            <a:pPr algn="l">
+              <a:spcAft>
+                <a:spcPts val="900"/>
+              </a:spcAft>
+            </a:pPr>
+            <a:r>
+              <a:rPr sz="1900" b="1">
+                <a:solidFill>
+                  <a:srgbClr val="3A6EA5"/>
+                </a:solidFill>
+                <a:latin typeface="Patrick Hand"/>
+              </a:rPr>
+              <a:t>+0.007 at L50</a:t>
+            </a:r>
+          </a:p>
+          <a:p>
+            <a:pPr algn="l">
+              <a:spcAft>
+                <a:spcPts val="900"/>
+              </a:spcAft>
+            </a:pPr>
+            <a:r>
+              <a:rPr sz="1900" b="1">
                 <a:solidFill>
                   <a:srgbClr val="E07A2F"/>
                 </a:solidFill>
                 <a:latin typeface="Patrick Hand"/>
               </a:rPr>
-              <a:t>patch</a:t>
-            </a:r>
-          </a:p>
-          <a:p>
-            <a:pPr algn="ctr">
-              <a:spcAft>
-                <a:spcPts val="400"/>
-              </a:spcAft>
-            </a:pPr>
-            <a:r>
-              <a:rPr sz="2000" b="0">
-                <a:solidFill>
-                  <a:srgbClr val="E07A2F"/>
-                </a:solidFill>
-                <a:latin typeface="Patrick Hand"/>
-              </a:rPr>
-              <a:t>copy the true-title hidden state into the false-title run at one layer</a:t>
-            </a:r>
-          </a:p>
-        </p:txBody>
-      </p:sp>
-      <p:sp>
-        <p:nvSpPr>
-          <p:cNvPr id="6" name="Rounded Rectangle 5"/>
-          <p:cNvSpPr/>
-          <p:nvPr/>
-        </p:nvSpPr>
-        <p:spPr>
-          <a:xfrm rot="60000">
-            <a:off x="6400800" y="1737360"/>
-            <a:ext cx="5120640" cy="1828800"/>
-          </a:xfrm>
-          <a:prstGeom prst="roundRect">
-            <a:avLst>
-              <a:gd name="adj" fmla="val 8000"/>
-            </a:avLst>
-          </a:prstGeom>
-          <a:noFill/>
-          <a:ln w="28575">
-            <a:solidFill>
-              <a:srgbClr val="3A6EA5"/>
-            </a:solidFill>
-          </a:ln>
-        </p:spPr>
-        <p:style>
-          <a:lnRef idx="1">
-            <a:schemeClr val="accent1"/>
-          </a:lnRef>
-          <a:fillRef idx="3">
-            <a:schemeClr val="accent1"/>
-          </a:fillRef>
-          <a:effectRef idx="2">
-            <a:schemeClr val="accent1"/>
-          </a:effectRef>
-          <a:fontRef idx="minor">
-            <a:schemeClr val="lt1"/>
-          </a:fontRef>
-        </p:style>
-        <p:txBody>
-          <a:bodyPr rtlCol="0" anchor="ctr" wrap="square" lIns="164592" rIns="164592"/>
-          <a:lstStyle/>
-          <a:p>
-            <a:pPr algn="ctr">
-              <a:spcAft>
-                <a:spcPts val="400"/>
-              </a:spcAft>
-            </a:pPr>
-            <a:r>
-              <a:rPr sz="2000" b="1">
-                <a:solidFill>
-                  <a:srgbClr val="3A6EA5"/>
-                </a:solidFill>
-                <a:latin typeface="Patrick Hand"/>
-              </a:rPr>
-              <a:t>knock out</a:t>
-            </a:r>
-          </a:p>
-          <a:p>
-            <a:pPr algn="ctr">
-              <a:spcAft>
-                <a:spcPts val="400"/>
-              </a:spcAft>
-            </a:pPr>
-            <a:r>
-              <a:rPr sz="2000" b="0">
-                <a:solidFill>
-                  <a:srgbClr val="3A6EA5"/>
-                </a:solidFill>
-                <a:latin typeface="Patrick Hand"/>
-              </a:rPr>
-              <a:t>block attention to the title tokens from layer l on</a:t>
-            </a:r>
-          </a:p>
-        </p:txBody>
-      </p:sp>
-      <p:sp>
-        <p:nvSpPr>
-          <p:cNvPr id="7" name="Rounded Rectangle 6"/>
-          <p:cNvSpPr/>
-          <p:nvPr/>
-        </p:nvSpPr>
-        <p:spPr>
-          <a:xfrm rot="21570000">
-            <a:off x="822960" y="3886200"/>
-            <a:ext cx="5120640" cy="1828800"/>
-          </a:xfrm>
-          <a:prstGeom prst="roundRect">
-            <a:avLst>
-              <a:gd name="adj" fmla="val 8000"/>
-            </a:avLst>
-          </a:prstGeom>
-          <a:noFill/>
-          <a:ln w="28575">
-            <a:solidFill>
-              <a:srgbClr val="3C8D5A"/>
-            </a:solidFill>
-          </a:ln>
-        </p:spPr>
-        <p:style>
-          <a:lnRef idx="1">
-            <a:schemeClr val="accent1"/>
-          </a:lnRef>
-          <a:fillRef idx="3">
-            <a:schemeClr val="accent1"/>
-          </a:fillRef>
-          <a:effectRef idx="2">
-            <a:schemeClr val="accent1"/>
-          </a:effectRef>
-          <a:fontRef idx="minor">
-            <a:schemeClr val="lt1"/>
-          </a:fontRef>
-        </p:style>
-        <p:txBody>
-          <a:bodyPr rtlCol="0" anchor="ctr" wrap="square" lIns="164592" rIns="164592"/>
-          <a:lstStyle/>
-          <a:p>
-            <a:pPr algn="ctr">
-              <a:spcAft>
-                <a:spcPts val="400"/>
-              </a:spcAft>
-            </a:pPr>
-            <a:r>
-              <a:rPr sz="2000" b="1">
-                <a:solidFill>
-                  <a:srgbClr val="3C8D5A"/>
-                </a:solidFill>
-                <a:latin typeface="Patrick Hand"/>
-              </a:rPr>
-              <a:t>probe</a:t>
-            </a:r>
-          </a:p>
-          <a:p>
-            <a:pPr algn="ctr">
-              <a:spcAft>
-                <a:spcPts val="400"/>
-              </a:spcAft>
-            </a:pPr>
-            <a:r>
-              <a:rPr sz="2000" b="0">
-                <a:solidFill>
-                  <a:srgbClr val="3C8D5A"/>
-                </a:solidFill>
-                <a:latin typeface="Patrick Hand"/>
-              </a:rPr>
-              <a:t>linear map from the last title token to the output state</a:t>
-            </a:r>
-          </a:p>
-        </p:txBody>
-      </p:sp>
-      <p:sp>
-        <p:nvSpPr>
-          <p:cNvPr id="8" name="Rounded Rectangle 7"/>
-          <p:cNvSpPr/>
-          <p:nvPr/>
-        </p:nvSpPr>
-        <p:spPr>
-          <a:xfrm rot="48000">
-            <a:off x="6400800" y="3886200"/>
-            <a:ext cx="5120640" cy="1828800"/>
-          </a:xfrm>
-          <a:prstGeom prst="roundRect">
-            <a:avLst>
-              <a:gd name="adj" fmla="val 8000"/>
-            </a:avLst>
-          </a:prstGeom>
-          <a:noFill/>
-          <a:ln w="28575">
-            <a:solidFill>
-              <a:srgbClr val="2B2D42"/>
-            </a:solidFill>
-          </a:ln>
-        </p:spPr>
-        <p:style>
-          <a:lnRef idx="1">
-            <a:schemeClr val="accent1"/>
-          </a:lnRef>
-          <a:fillRef idx="3">
-            <a:schemeClr val="accent1"/>
-          </a:fillRef>
-          <a:effectRef idx="2">
-            <a:schemeClr val="accent1"/>
-          </a:effectRef>
-          <a:fontRef idx="minor">
-            <a:schemeClr val="lt1"/>
-          </a:fontRef>
-        </p:style>
-        <p:txBody>
-          <a:bodyPr rtlCol="0" anchor="ctr" wrap="square" lIns="164592" rIns="164592"/>
-          <a:lstStyle/>
-          <a:p>
-            <a:pPr algn="ctr">
-              <a:spcAft>
-                <a:spcPts val="400"/>
-              </a:spcAft>
-            </a:pPr>
-            <a:r>
-              <a:rPr sz="2000" b="1">
-                <a:solidFill>
-                  <a:srgbClr val="2B2D42"/>
-                </a:solidFill>
-                <a:latin typeface="Patrick Hand"/>
-              </a:rPr>
-              <a:t>chain</a:t>
-            </a:r>
-          </a:p>
-          <a:p>
-            <a:pPr algn="ctr">
-              <a:spcAft>
-                <a:spcPts val="400"/>
-              </a:spcAft>
-            </a:pPr>
-            <a:r>
-              <a:rPr sz="2000" b="0">
-                <a:solidFill>
-                  <a:srgbClr val="2B2D42"/>
-                </a:solidFill>
-                <a:latin typeface="Patrick Hand"/>
-              </a:rPr>
-              <a:t>"Authors: A1, A2, ..." instead of each author alone</a:t>
-            </a:r>
-          </a:p>
-        </p:txBody>
-      </p:sp>
-      <p:sp>
-        <p:nvSpPr>
-          <p:cNvPr id="9" name="TextBox 8"/>
-          <p:cNvSpPr txBox="1"/>
-          <p:nvPr/>
-        </p:nvSpPr>
-        <p:spPr>
-          <a:xfrm>
-            <a:off x="713232" y="6355080"/>
-            <a:ext cx="10789920" cy="320040"/>
-          </a:xfrm>
-          <a:prstGeom prst="rect">
-            <a:avLst/>
-          </a:prstGeom>
-          <a:noFill/>
-        </p:spPr>
-        <p:txBody>
-          <a:bodyPr wrap="square" lIns="0" rIns="0" tIns="0" bIns="0" anchor="t">
-            <a:spAutoFit/>
-          </a:bodyPr>
-          <a:lstStyle/>
-          <a:p>
-            <a:pPr algn="l">
-              <a:spcAft>
-                <a:spcPts val="800"/>
-              </a:spcAft>
-            </a:pPr>
-            <a:r>
-              <a:rPr sz="1400" b="0">
-                <a:solidFill>
-                  <a:srgbClr val="6E7080"/>
-                </a:solidFill>
-                <a:latin typeface="Patrick Hand"/>
-              </a:rPr>
-              <a:t>Score: rank of the correct name token at the model output; "share of the true-false gap" = (intervened - false) / (true - false).</a:t>
+              <a:t>+0.23 at L62</a:t>
+            </a:r>
+          </a:p>
+          <a:p>
+            <a:pPr algn="l">
+              <a:spcAft>
+                <a:spcPts val="900"/>
+              </a:spcAft>
+            </a:pPr>
+            <a:r>
+              <a:rPr sz="1900" b="0">
+                <a:solidFill>
+                  <a:srgbClr val="2B2D42"/>
+                </a:solidFill>
+                <a:latin typeface="Patrick Hand"/>
+              </a:rPr>
+              <a:t>steepest rise </a:t>
+            </a:r>
+            <a:r>
+              <a:rPr sz="1900" b="1">
+                <a:solidFill>
+                  <a:srgbClr val="2B2D42"/>
+                </a:solidFill>
+                <a:latin typeface="Patrick Hand"/>
+              </a:rPr>
+              <a:t>L57-L61</a:t>
             </a:r>
           </a:p>
         </p:txBody>
@@ -5826,7 +5773,7 @@
                 </a:solidFill>
                 <a:latin typeface="Caveat"/>
               </a:rPr>
-              <a:t>The title is read in L24-L50, early</a:t>
+              <a:t>Stage 11: intervene, do not just read</a:t>
             </a:r>
           </a:p>
         </p:txBody>
@@ -5865,58 +5812,33 @@
                 </a:solidFill>
                 <a:latin typeface="Patrick Hand"/>
               </a:rPr>
-              <a:t>model output · share of the true-false gap · CIs about +/-0.02</a:t>
-            </a:r>
-          </a:p>
-        </p:txBody>
-      </p:sp>
-      <p:pic>
-        <p:nvPicPr>
-          <p:cNvPr id="5" name="Picture 4" descr="c12_patch_knockout.png"/>
-          <p:cNvPicPr>
-            <a:picLocks noChangeAspect="1"/>
-          </p:cNvPicPr>
-          <p:nvPr/>
-        </p:nvPicPr>
-        <p:blipFill>
-          <a:blip r:embed="rId4"/>
-          <a:stretch>
-            <a:fillRect/>
-          </a:stretch>
-        </p:blipFill>
-        <p:spPr>
-          <a:xfrm>
-            <a:off x="457200" y="1463040"/>
-            <a:ext cx="8412480" cy="3968150"/>
-          </a:xfrm>
-          <a:prstGeom prst="rect">
-            <a:avLst/>
-          </a:prstGeom>
-        </p:spPr>
-      </p:pic>
-      <p:sp>
-        <p:nvSpPr>
-          <p:cNvPr id="6" name="Rectangle 5"/>
+              <a:t>593 + 593 papers: min(60, n_t, n_c) per citation bin, seed 11 · patch uses false_0 · knockout masks all heads · all 9,108 for probe and chain</a:t>
+            </a:r>
+          </a:p>
+        </p:txBody>
+      </p:sp>
+      <p:sp>
+        <p:nvSpPr>
+          <p:cNvPr id="5" name="Rounded Rectangle 4"/>
           <p:cNvSpPr/>
           <p:nvPr/>
         </p:nvSpPr>
         <p:spPr>
-          <a:xfrm rot="90000">
-            <a:off x="9098280" y="1737360"/>
-            <a:ext cx="2651760" cy="3291840"/>
-          </a:xfrm>
-          <a:prstGeom prst="rect">
-            <a:avLst/>
-          </a:prstGeom>
-          <a:solidFill>
-            <a:srgbClr val="FFF1A8"/>
-          </a:solidFill>
-          <a:ln w="12700">
+          <a:xfrm rot="21540000">
+            <a:off x="822960" y="1737360"/>
+            <a:ext cx="5120640" cy="1828800"/>
+          </a:xfrm>
+          <a:prstGeom prst="roundRect">
+            <a:avLst>
+              <a:gd name="adj" fmla="val 8000"/>
+            </a:avLst>
+          </a:prstGeom>
+          <a:noFill/>
+          <a:ln w="28575">
             <a:solidFill>
-              <a:srgbClr val="E2D37A"/>
+              <a:srgbClr val="E07A2F"/>
             </a:solidFill>
           </a:ln>
-          <a:effectLst/>
         </p:spPr>
         <p:style>
           <a:lnRef idx="1">
@@ -5933,81 +5855,299 @@
           </a:fontRef>
         </p:style>
         <p:txBody>
-          <a:bodyPr rtlCol="0" anchor="t" wrap="square" lIns="201168" rIns="201168" tIns="164592" bIns="164592"/>
-          <a:lstStyle/>
-          <a:p>
-            <a:pPr algn="l">
-              <a:spcAft>
-                <a:spcPts val="900"/>
-              </a:spcAft>
-            </a:pPr>
-            <a:r>
-              <a:rPr sz="1800" b="1">
+          <a:bodyPr rtlCol="0" anchor="ctr" wrap="square" lIns="164592" rIns="164592"/>
+          <a:lstStyle/>
+          <a:p>
+            <a:pPr algn="ctr">
+              <a:spcAft>
+                <a:spcPts val="400"/>
+              </a:spcAft>
+            </a:pPr>
+            <a:r>
+              <a:rPr sz="2000" b="1">
                 <a:solidFill>
                   <a:srgbClr val="E07A2F"/>
                 </a:solidFill>
                 <a:latin typeface="Patrick Hand"/>
               </a:rPr>
-              <a:t>L52+</a:t>
-            </a:r>
-            <a:r>
-              <a:rPr sz="1800" b="0">
-                <a:solidFill>
-                  <a:srgbClr val="2B2D42"/>
-                </a:solidFill>
-                <a:latin typeface="Patrick Hand"/>
-              </a:rPr>
-              <a:t>: title no longer needed</a:t>
-            </a:r>
-          </a:p>
-          <a:p>
-            <a:pPr algn="l">
-              <a:spcAft>
-                <a:spcPts val="900"/>
-              </a:spcAft>
-            </a:pPr>
-            <a:r>
-              <a:rPr sz="1800" b="0">
-                <a:solidFill>
-                  <a:srgbClr val="2B2D42"/>
-                </a:solidFill>
-                <a:latin typeface="Patrick Hand"/>
-              </a:rPr>
-              <a:t>info moved to the tokens </a:t>
-            </a:r>
-            <a:r>
-              <a:rPr sz="1800" b="1">
-                <a:solidFill>
-                  <a:srgbClr val="2B2D42"/>
-                </a:solidFill>
-                <a:latin typeface="Patrick Hand"/>
-              </a:rPr>
-              <a:t>right after</a:t>
-            </a:r>
-            <a:r>
-              <a:rPr sz="1800" b="0">
-                <a:solidFill>
-                  <a:srgbClr val="2B2D42"/>
-                </a:solidFill>
-                <a:latin typeface="Patrick Hand"/>
-              </a:rPr>
-              <a:t> the title</a:t>
-            </a:r>
-          </a:p>
-          <a:p>
-            <a:pPr algn="l">
-              <a:spcAft>
-                <a:spcPts val="900"/>
-              </a:spcAft>
-            </a:pPr>
-            <a:r>
-              <a:rPr sz="1800" b="0">
-                <a:solidFill>
-                  <a:srgbClr val="2B2D42"/>
-                </a:solidFill>
-                <a:latin typeface="Patrick Hand"/>
-              </a:rPr>
-              <a:t>same timing for target and control</a:t>
+              <a:t>patch</a:t>
+            </a:r>
+          </a:p>
+          <a:p>
+            <a:pPr algn="ctr">
+              <a:spcAft>
+                <a:spcPts val="400"/>
+              </a:spcAft>
+            </a:pPr>
+            <a:r>
+              <a:rPr sz="2000" b="0">
+                <a:solidFill>
+                  <a:srgbClr val="E07A2F"/>
+                </a:solidFill>
+                <a:latin typeface="Patrick Hand"/>
+              </a:rPr>
+              <a:t>copy the true-title hidden state into the false-title run at one layer</a:t>
+            </a:r>
+          </a:p>
+        </p:txBody>
+      </p:sp>
+      <p:sp>
+        <p:nvSpPr>
+          <p:cNvPr id="6" name="Rounded Rectangle 5"/>
+          <p:cNvSpPr/>
+          <p:nvPr/>
+        </p:nvSpPr>
+        <p:spPr>
+          <a:xfrm rot="60000">
+            <a:off x="6400800" y="1737360"/>
+            <a:ext cx="5120640" cy="1828800"/>
+          </a:xfrm>
+          <a:prstGeom prst="roundRect">
+            <a:avLst>
+              <a:gd name="adj" fmla="val 8000"/>
+            </a:avLst>
+          </a:prstGeom>
+          <a:noFill/>
+          <a:ln w="28575">
+            <a:solidFill>
+              <a:srgbClr val="3A6EA5"/>
+            </a:solidFill>
+          </a:ln>
+        </p:spPr>
+        <p:style>
+          <a:lnRef idx="1">
+            <a:schemeClr val="accent1"/>
+          </a:lnRef>
+          <a:fillRef idx="3">
+            <a:schemeClr val="accent1"/>
+          </a:fillRef>
+          <a:effectRef idx="2">
+            <a:schemeClr val="accent1"/>
+          </a:effectRef>
+          <a:fontRef idx="minor">
+            <a:schemeClr val="lt1"/>
+          </a:fontRef>
+        </p:style>
+        <p:txBody>
+          <a:bodyPr rtlCol="0" anchor="ctr" wrap="square" lIns="164592" rIns="164592"/>
+          <a:lstStyle/>
+          <a:p>
+            <a:pPr algn="ctr">
+              <a:spcAft>
+                <a:spcPts val="400"/>
+              </a:spcAft>
+            </a:pPr>
+            <a:r>
+              <a:rPr sz="2000" b="1">
+                <a:solidFill>
+                  <a:srgbClr val="3A6EA5"/>
+                </a:solidFill>
+                <a:latin typeface="Patrick Hand"/>
+              </a:rPr>
+              <a:t>knock out</a:t>
+            </a:r>
+          </a:p>
+          <a:p>
+            <a:pPr algn="ctr">
+              <a:spcAft>
+                <a:spcPts val="400"/>
+              </a:spcAft>
+            </a:pPr>
+            <a:r>
+              <a:rPr sz="2000" b="0">
+                <a:solidFill>
+                  <a:srgbClr val="3A6EA5"/>
+                </a:solidFill>
+                <a:latin typeface="Patrick Hand"/>
+              </a:rPr>
+              <a:t>block attention to the title tokens (all heads) from layer l to the last layer</a:t>
+            </a:r>
+          </a:p>
+        </p:txBody>
+      </p:sp>
+      <p:sp>
+        <p:nvSpPr>
+          <p:cNvPr id="7" name="Rounded Rectangle 6"/>
+          <p:cNvSpPr/>
+          <p:nvPr/>
+        </p:nvSpPr>
+        <p:spPr>
+          <a:xfrm rot="21570000">
+            <a:off x="822960" y="3886200"/>
+            <a:ext cx="5120640" cy="1828800"/>
+          </a:xfrm>
+          <a:prstGeom prst="roundRect">
+            <a:avLst>
+              <a:gd name="adj" fmla="val 8000"/>
+            </a:avLst>
+          </a:prstGeom>
+          <a:noFill/>
+          <a:ln w="28575">
+            <a:solidFill>
+              <a:srgbClr val="3C8D5A"/>
+            </a:solidFill>
+          </a:ln>
+        </p:spPr>
+        <p:style>
+          <a:lnRef idx="1">
+            <a:schemeClr val="accent1"/>
+          </a:lnRef>
+          <a:fillRef idx="3">
+            <a:schemeClr val="accent1"/>
+          </a:fillRef>
+          <a:effectRef idx="2">
+            <a:schemeClr val="accent1"/>
+          </a:effectRef>
+          <a:fontRef idx="minor">
+            <a:schemeClr val="lt1"/>
+          </a:fontRef>
+        </p:style>
+        <p:txBody>
+          <a:bodyPr rtlCol="0" anchor="ctr" wrap="square" lIns="164592" rIns="164592"/>
+          <a:lstStyle/>
+          <a:p>
+            <a:pPr algn="ctr">
+              <a:spcAft>
+                <a:spcPts val="400"/>
+              </a:spcAft>
+            </a:pPr>
+            <a:r>
+              <a:rPr sz="2000" b="1">
+                <a:solidFill>
+                  <a:srgbClr val="3C8D5A"/>
+                </a:solidFill>
+                <a:latin typeface="Patrick Hand"/>
+              </a:rPr>
+              <a:t>probe</a:t>
+            </a:r>
+          </a:p>
+          <a:p>
+            <a:pPr algn="ctr">
+              <a:spcAft>
+                <a:spcPts val="400"/>
+              </a:spcAft>
+            </a:pPr>
+            <a:r>
+              <a:rPr sz="2000" b="0">
+                <a:solidFill>
+                  <a:srgbClr val="3C8D5A"/>
+                </a:solidFill>
+                <a:latin typeface="Patrick Hand"/>
+              </a:rPr>
+              <a:t>linear map from the last title token to the output state</a:t>
+            </a:r>
+          </a:p>
+        </p:txBody>
+      </p:sp>
+      <p:sp>
+        <p:nvSpPr>
+          <p:cNvPr id="8" name="Rounded Rectangle 7"/>
+          <p:cNvSpPr/>
+          <p:nvPr/>
+        </p:nvSpPr>
+        <p:spPr>
+          <a:xfrm rot="48000">
+            <a:off x="6400800" y="3886200"/>
+            <a:ext cx="5120640" cy="1828800"/>
+          </a:xfrm>
+          <a:prstGeom prst="roundRect">
+            <a:avLst>
+              <a:gd name="adj" fmla="val 8000"/>
+            </a:avLst>
+          </a:prstGeom>
+          <a:noFill/>
+          <a:ln w="28575">
+            <a:solidFill>
+              <a:srgbClr val="2B2D42"/>
+            </a:solidFill>
+          </a:ln>
+        </p:spPr>
+        <p:style>
+          <a:lnRef idx="1">
+            <a:schemeClr val="accent1"/>
+          </a:lnRef>
+          <a:fillRef idx="3">
+            <a:schemeClr val="accent1"/>
+          </a:fillRef>
+          <a:effectRef idx="2">
+            <a:schemeClr val="accent1"/>
+          </a:effectRef>
+          <a:fontRef idx="minor">
+            <a:schemeClr val="lt1"/>
+          </a:fontRef>
+        </p:style>
+        <p:txBody>
+          <a:bodyPr rtlCol="0" anchor="ctr" wrap="square" lIns="164592" rIns="164592"/>
+          <a:lstStyle/>
+          <a:p>
+            <a:pPr algn="ctr">
+              <a:spcAft>
+                <a:spcPts val="400"/>
+              </a:spcAft>
+            </a:pPr>
+            <a:r>
+              <a:rPr sz="2000" b="1">
+                <a:solidFill>
+                  <a:srgbClr val="2B2D42"/>
+                </a:solidFill>
+                <a:latin typeface="Patrick Hand"/>
+              </a:rPr>
+              <a:t>chain</a:t>
+            </a:r>
+          </a:p>
+          <a:p>
+            <a:pPr algn="ctr">
+              <a:spcAft>
+                <a:spcPts val="400"/>
+              </a:spcAft>
+            </a:pPr>
+            <a:r>
+              <a:rPr sz="2000" b="0">
+                <a:solidFill>
+                  <a:srgbClr val="2B2D42"/>
+                </a:solidFill>
+                <a:latin typeface="Patrick Hand"/>
+              </a:rPr>
+              <a:t>"Authors: A1, A2, ..." instead of each author alone</a:t>
+            </a:r>
+          </a:p>
+        </p:txBody>
+      </p:sp>
+      <p:sp>
+        <p:nvSpPr>
+          <p:cNvPr id="9" name="TextBox 8"/>
+          <p:cNvSpPr txBox="1"/>
+          <p:nvPr/>
+        </p:nvSpPr>
+        <p:spPr>
+          <a:xfrm>
+            <a:off x="713232" y="6355080"/>
+            <a:ext cx="10789920" cy="320040"/>
+          </a:xfrm>
+          <a:prstGeom prst="rect">
+            <a:avLst/>
+          </a:prstGeom>
+          <a:noFill/>
+        </p:spPr>
+        <p:txBody>
+          <a:bodyPr wrap="square" lIns="0" rIns="0" tIns="0" bIns="0" anchor="t">
+            <a:spAutoFit/>
+          </a:bodyPr>
+          <a:lstStyle/>
+          <a:p>
+            <a:pPr algn="l">
+              <a:spcAft>
+                <a:spcPts val="800"/>
+              </a:spcAft>
+            </a:pPr>
+            <a:r>
+              <a:rPr sz="1400" b="0">
+                <a:solidFill>
+                  <a:srgbClr val="6E7080"/>
+                </a:solidFill>
+                <a:latin typeface="Patrick Hand"/>
+              </a:rPr>
+              <a:t>Score: rank of the correct name token at the model output; "share of the true-false gap" = (intervened - false) / (true - false).</a:t>
             </a:r>
           </a:p>
         </p:txBody>
@@ -6088,7 +6228,7 @@
                 </a:solidFill>
                 <a:latin typeface="Caveat"/>
               </a:rPr>
-              <a:t>Lenses cannot read it at the title token</a:t>
+              <a:t>The title is read in L24-L50, early</a:t>
             </a:r>
           </a:p>
         </p:txBody>
@@ -6127,14 +6267,14 @@
                 </a:solidFill>
                 <a:latin typeface="Patrick Hand"/>
               </a:rPr>
-              <a:t>title-specific signal at the last title token · all 9,108 papers</a:t>
+              <a:t>model output · share of the true-false gap · CIs about +/-0.02</a:t>
             </a:r>
           </a:p>
         </p:txBody>
       </p:sp>
       <p:pic>
         <p:nvPicPr>
-          <p:cNvPr id="5" name="Picture 4" descr="c13_title_position.png"/>
+          <p:cNvPr id="5" name="Picture 4" descr="c12_patch_knockout.png"/>
           <p:cNvPicPr>
             <a:picLocks noChangeAspect="1"/>
           </p:cNvPicPr>
@@ -6163,7 +6303,7 @@
           <p:nvPr/>
         </p:nvSpPr>
         <p:spPr>
-          <a:xfrm rot="21510000">
+          <a:xfrm rot="90000">
             <a:off x="9098280" y="1737360"/>
             <a:ext cx="2651760" cy="3291840"/>
           </a:xfrm>
@@ -6204,13 +6344,38 @@
               </a:spcAft>
             </a:pPr>
             <a:r>
+              <a:rPr sz="1800" b="1">
+                <a:solidFill>
+                  <a:srgbClr val="E07A2F"/>
+                </a:solidFill>
+                <a:latin typeface="Patrick Hand"/>
+              </a:rPr>
+              <a:t>L52+</a:t>
+            </a:r>
+            <a:r>
               <a:rPr sz="1800" b="0">
                 <a:solidFill>
                   <a:srgbClr val="2B2D42"/>
                 </a:solidFill>
                 <a:latin typeface="Patrick Hand"/>
               </a:rPr>
-              <a:t>lenses: </a:t>
+              <a:t>: title no longer needed</a:t>
+            </a:r>
+          </a:p>
+          <a:p>
+            <a:pPr algn="l">
+              <a:spcAft>
+                <a:spcPts val="900"/>
+              </a:spcAft>
+            </a:pPr>
+            <a:r>
+              <a:rPr sz="1800" b="0">
+                <a:solidFill>
+                  <a:srgbClr val="2B2D42"/>
+                </a:solidFill>
+                <a:latin typeface="Patrick Hand"/>
+              </a:rPr>
+              <a:t>info moved to the tokens </a:t>
             </a:r>
             <a:r>
               <a:rPr sz="1800" b="1">
@@ -6219,7 +6384,16 @@
                 </a:solidFill>
                 <a:latin typeface="Patrick Hand"/>
               </a:rPr>
-              <a:t>~0.01-0.03</a:t>
+              <a:t>right after</a:t>
+            </a:r>
+            <a:r>
+              <a:rPr sz="1800" b="0">
+                <a:solidFill>
+                  <a:srgbClr val="2B2D42"/>
+                </a:solidFill>
+                <a:latin typeface="Patrick Hand"/>
+              </a:rPr>
+              <a:t> the title</a:t>
             </a:r>
           </a:p>
           <a:p>
@@ -6235,32 +6409,7 @@
                 </a:solidFill>
                 <a:latin typeface="Patrick Hand"/>
               </a:rPr>
-              <a:t>probe: </a:t>
-            </a:r>
-            <a:r>
-              <a:rPr sz="1800" b="1">
-                <a:solidFill>
-                  <a:srgbClr val="3C8D5A"/>
-                </a:solidFill>
-                <a:latin typeface="Patrick Hand"/>
-              </a:rPr>
-              <a:t>0.04 -&gt; 0.08</a:t>
-            </a:r>
-          </a:p>
-          <a:p>
-            <a:pPr algn="l">
-              <a:spcAft>
-                <a:spcPts val="900"/>
-              </a:spcAft>
-            </a:pPr>
-            <a:r>
-              <a:rPr sz="1800" b="0">
-                <a:solidFill>
-                  <a:srgbClr val="2B2D42"/>
-                </a:solidFill>
-                <a:latin typeface="Patrick Hand"/>
-              </a:rPr>
-              <a:t>target higher; paper-specific (next slide)</a:t>
+              <a:t>same timing for target and control</a:t>
             </a:r>
           </a:p>
         </p:txBody>
@@ -6341,7 +6490,7 @@
                 </a:solidFill>
                 <a:latin typeface="Caveat"/>
               </a:rPr>
-              <a:t>Co-authors help, and partly replace the title</a:t>
+              <a:t>Read early: a probe finds it at the title</a:t>
             </a:r>
           </a:p>
         </p:txBody>
@@ -6380,14 +6529,14 @@
                 </a:solidFill>
                 <a:latin typeface="Patrick Hand"/>
               </a:rPr>
-              <a:t>model output · all 9,108 papers · 95% CI</a:t>
+              <a:t>title-specific signal at the last title token · all 9,108 papers</a:t>
             </a:r>
           </a:p>
         </p:txBody>
       </p:sp>
       <p:pic>
         <p:nvPicPr>
-          <p:cNvPr id="5" name="Picture 4" descr="c14_author_chain.png"/>
+          <p:cNvPr id="5" name="Picture 4" descr="c13_title_position.png"/>
           <p:cNvPicPr>
             <a:picLocks noChangeAspect="1"/>
           </p:cNvPicPr>
@@ -6416,9 +6565,9 @@
           <p:nvPr/>
         </p:nvSpPr>
         <p:spPr>
-          <a:xfrm rot="90000">
+          <a:xfrm rot="21510000">
             <a:off x="9098280" y="1737360"/>
-            <a:ext cx="2651760" cy="3291840"/>
+            <a:ext cx="2651760" cy="3840480"/>
           </a:xfrm>
           <a:prstGeom prst="rect">
             <a:avLst/>
@@ -6463,16 +6612,66 @@
                 </a:solidFill>
                 <a:latin typeface="Patrick Hand"/>
               </a:rPr>
-              <a:t>later authors </a:t>
+              <a:t>lenses: </a:t>
             </a:r>
             <a:r>
               <a:rPr sz="1800" b="1">
                 <a:solidFill>
+                  <a:srgbClr val="2B2D42"/>
+                </a:solidFill>
+                <a:latin typeface="Patrick Hand"/>
+              </a:rPr>
+              <a:t>~0.01-0.03</a:t>
+            </a:r>
+          </a:p>
+          <a:p>
+            <a:pPr algn="l">
+              <a:spcAft>
+                <a:spcPts val="900"/>
+              </a:spcAft>
+            </a:pPr>
+            <a:r>
+              <a:rPr sz="1800" b="0">
+                <a:solidFill>
+                  <a:srgbClr val="2B2D42"/>
+                </a:solidFill>
+                <a:latin typeface="Patrick Hand"/>
+              </a:rPr>
+              <a:t>probe: </a:t>
+            </a:r>
+            <a:r>
+              <a:rPr sz="1800" b="1">
+                <a:solidFill>
+                  <a:srgbClr val="3C8D5A"/>
+                </a:solidFill>
+                <a:latin typeface="Patrick Hand"/>
+              </a:rPr>
+              <a:t>0.04 -&gt; 0.08</a:t>
+            </a:r>
+          </a:p>
+          <a:p>
+            <a:pPr algn="l">
+              <a:spcAft>
+                <a:spcPts val="900"/>
+              </a:spcAft>
+            </a:pPr>
+            <a:r>
+              <a:rPr sz="1800" b="0">
+                <a:solidFill>
+                  <a:srgbClr val="2B2D42"/>
+                </a:solidFill>
+                <a:latin typeface="Patrick Hand"/>
+              </a:rPr>
+              <a:t>target &gt; control by </a:t>
+            </a:r>
+            <a:r>
+              <a:rPr sz="1800" b="1">
+                <a:solidFill>
                   <a:srgbClr val="E07A2F"/>
                 </a:solidFill>
                 <a:latin typeface="Patrick Hand"/>
               </a:rPr>
-              <a:t>+0.17 to +0.23</a:t>
+              <a:t>+0.02-0.04</a:t>
             </a:r>
           </a:p>
           <a:p>
@@ -6482,30 +6681,32 @@
               </a:spcAft>
             </a:pPr>
             <a:r>
+              <a:rPr sz="1800" b="1">
+                <a:solidFill>
+                  <a:srgbClr val="3C8D5A"/>
+                </a:solidFill>
+                <a:latin typeface="Patrick Hand"/>
+              </a:rPr>
+              <a:t>read early</a:t>
+            </a:r>
+            <a:r>
               <a:rPr sz="1800" b="0">
                 <a:solidFill>
                   <a:srgbClr val="2B2D42"/>
                 </a:solidFill>
                 <a:latin typeface="Patrick Hand"/>
               </a:rPr>
-              <a:t>title-specific part </a:t>
+              <a:t> (title, L16-24), </a:t>
             </a:r>
             <a:r>
               <a:rPr sz="1800" b="1">
                 <a:solidFill>
-                  <a:srgbClr val="2B2D42"/>
-                </a:solidFill>
-                <a:latin typeface="Patrick Hand"/>
-              </a:rPr>
-              <a:t>shrinks</a:t>
-            </a:r>
-          </a:p>
-          <a:p>
-            <a:pPr algn="l">
-              <a:spcAft>
-                <a:spcPts val="900"/>
-              </a:spcAft>
-            </a:pPr>
+                  <a:srgbClr val="E07A2F"/>
+                </a:solidFill>
+                <a:latin typeface="Patrick Hand"/>
+              </a:rPr>
+              <a:t>spoken late</a:t>
+            </a:r>
             <a:r>
               <a:rPr sz="1800" b="0">
                 <a:solidFill>
@@ -6513,7 +6714,7 @@
                 </a:solidFill>
                 <a:latin typeface="Patrick Hand"/>
               </a:rPr>
-              <a:t>target &gt; control still</a:t>
+              <a:t> (names, L57-61)</a:t>
             </a:r>
           </a:p>
         </p:txBody>
@@ -6594,7 +6795,7 @@
                 </a:solidFill>
                 <a:latin typeface="Caveat"/>
               </a:rPr>
-              <a:t>How much is just the name prior?</a:t>
+              <a:t>Co-authors help, and partly replace the title</a:t>
             </a:r>
           </a:p>
         </p:txBody>
@@ -6633,14 +6834,14 @@
                 </a:solidFill>
                 <a:latin typeface="Patrick Hand"/>
               </a:rPr>
-              <a:t>model output · no title vs false title vs true title · all 9,108 papers</a:t>
+              <a:t>model output · all 9,108 papers · 95% CI</a:t>
             </a:r>
           </a:p>
         </p:txBody>
       </p:sp>
       <p:pic>
         <p:nvPicPr>
-          <p:cNvPr id="5" name="Picture 4" descr="c15_name_prior.png"/>
+          <p:cNvPr id="5" name="Picture 4" descr="c14_author_chain.png"/>
           <p:cNvPicPr>
             <a:picLocks noChangeAspect="1"/>
           </p:cNvPicPr>
@@ -6671,7 +6872,7 @@
         <p:spPr>
           <a:xfrm rot="90000">
             <a:off x="9098280" y="1737360"/>
-            <a:ext cx="2651760" cy="3566160"/>
+            <a:ext cx="2651760" cy="3291840"/>
           </a:xfrm>
           <a:prstGeom prst="rect">
             <a:avLst/>
@@ -6710,22 +6911,22 @@
               </a:spcAft>
             </a:pPr>
             <a:r>
-              <a:rPr sz="1700" b="0">
-                <a:solidFill>
-                  <a:srgbClr val="2B2D42"/>
-                </a:solidFill>
-                <a:latin typeface="Patrick Hand"/>
-              </a:rPr>
-              <a:t>no title: rank </a:t>
-            </a:r>
-            <a:r>
-              <a:rPr sz="1700" b="1">
-                <a:solidFill>
-                  <a:srgbClr val="2B2D42"/>
-                </a:solidFill>
-                <a:latin typeface="Patrick Hand"/>
-              </a:rPr>
-              <a:t>~12</a:t>
+              <a:rPr sz="1800" b="0">
+                <a:solidFill>
+                  <a:srgbClr val="2B2D42"/>
+                </a:solidFill>
+                <a:latin typeface="Patrick Hand"/>
+              </a:rPr>
+              <a:t>later authors </a:t>
+            </a:r>
+            <a:r>
+              <a:rPr sz="1800" b="1">
+                <a:solidFill>
+                  <a:srgbClr val="E07A2F"/>
+                </a:solidFill>
+                <a:latin typeface="Patrick Hand"/>
+              </a:rPr>
+              <a:t>+0.17 to +0.23</a:t>
             </a:r>
           </a:p>
           <a:p>
@@ -6735,49 +6936,22 @@
               </a:spcAft>
             </a:pPr>
             <a:r>
-              <a:rPr sz="1700" b="0">
-                <a:solidFill>
-                  <a:srgbClr val="2B2D42"/>
-                </a:solidFill>
-                <a:latin typeface="Patrick Hand"/>
-              </a:rPr>
-              <a:t>target - control: </a:t>
-            </a:r>
-            <a:r>
-              <a:rPr sz="1700" b="1">
-                <a:solidFill>
-                  <a:srgbClr val="6E7080"/>
-                </a:solidFill>
-                <a:latin typeface="Patrick Hand"/>
-              </a:rPr>
-              <a:t>+0.09</a:t>
-            </a:r>
-            <a:r>
-              <a:rPr sz="1700" b="0">
-                <a:solidFill>
-                  <a:srgbClr val="2B2D42"/>
-                </a:solidFill>
-                <a:latin typeface="Patrick Hand"/>
-              </a:rPr>
-              <a:t> prior, </a:t>
-            </a:r>
-            <a:r>
-              <a:rPr sz="1700" b="1">
-                <a:solidFill>
-                  <a:srgbClr val="E07A2F"/>
-                </a:solidFill>
-                <a:latin typeface="Patrick Hand"/>
-              </a:rPr>
-              <a:t>+0.21</a:t>
-            </a:r>
-            <a:r>
-              <a:rPr sz="1700" b="0">
-                <a:solidFill>
-                  <a:srgbClr val="2B2D42"/>
-                </a:solidFill>
-                <a:latin typeface="Patrick Hand"/>
-              </a:rPr>
-              <a:t> paper</a:t>
+              <a:rPr sz="1800" b="0">
+                <a:solidFill>
+                  <a:srgbClr val="2B2D42"/>
+                </a:solidFill>
+                <a:latin typeface="Patrick Hand"/>
+              </a:rPr>
+              <a:t>title-specific part </a:t>
+            </a:r>
+            <a:r>
+              <a:rPr sz="1800" b="1">
+                <a:solidFill>
+                  <a:srgbClr val="2B2D42"/>
+                </a:solidFill>
+                <a:latin typeface="Patrick Hand"/>
+              </a:rPr>
+              <a:t>shrinks</a:t>
             </a:r>
           </a:p>
           <a:p>
@@ -6787,47 +6961,13 @@
               </a:spcAft>
             </a:pPr>
             <a:r>
-              <a:rPr sz="1700" b="0">
-                <a:solidFill>
-                  <a:srgbClr val="2B2D42"/>
-                </a:solidFill>
-                <a:latin typeface="Patrick Hand"/>
-              </a:rPr>
-              <a:t>surname 1st: prior ~0, paper </a:t>
-            </a:r>
-            <a:r>
-              <a:rPr sz="1700" b="1">
-                <a:solidFill>
-                  <a:srgbClr val="E07A2F"/>
-                </a:solidFill>
-                <a:latin typeface="Patrick Hand"/>
-              </a:rPr>
-              <a:t>+0.42</a:t>
-            </a:r>
-          </a:p>
-          <a:p>
-            <a:pPr algn="l">
-              <a:spcAft>
-                <a:spcPts val="900"/>
-              </a:spcAft>
-            </a:pPr>
-            <a:r>
-              <a:rPr sz="1700" b="0">
-                <a:solidFill>
-                  <a:srgbClr val="2B2D42"/>
-                </a:solidFill>
-                <a:latin typeface="Patrick Hand"/>
-              </a:rPr>
-              <a:t>prior vs recognition rho </a:t>
-            </a:r>
-            <a:r>
-              <a:rPr sz="1700" b="1">
-                <a:solidFill>
-                  <a:srgbClr val="2B2D42"/>
-                </a:solidFill>
-                <a:latin typeface="Patrick Hand"/>
-              </a:rPr>
-              <a:t>0.09</a:t>
+              <a:rPr sz="1800" b="0">
+                <a:solidFill>
+                  <a:srgbClr val="2B2D42"/>
+                </a:solidFill>
+                <a:latin typeface="Patrick Hand"/>
+              </a:rPr>
+              <a:t>target &gt; control still</a:t>
             </a:r>
           </a:p>
         </p:txBody>
@@ -6908,7 +7048,7 @@
                 </a:solidFill>
                 <a:latin typeface="Caveat"/>
               </a:rPr>
-              <a:t>The probe signal is paper-specific</a:t>
+              <a:t>How much is just the name prior?</a:t>
             </a:r>
           </a:p>
         </p:txBody>
@@ -6947,14 +7087,14 @@
                 </a:solidFill>
                 <a:latin typeface="Patrick Hand"/>
               </a:rPr>
-              <a:t>last title token · 5-fold ridge probe · controls · all 9,108 papers</a:t>
+              <a:t>model output · no title vs false title vs true title · all 9,108 papers</a:t>
             </a:r>
           </a:p>
         </p:txBody>
       </p:sp>
       <p:pic>
         <p:nvPicPr>
-          <p:cNvPr id="5" name="Picture 4" descr="c16_probe_controls.png"/>
+          <p:cNvPr id="5" name="Picture 4" descr="c15_name_prior.png"/>
           <p:cNvPicPr>
             <a:picLocks noChangeAspect="1"/>
           </p:cNvPicPr>
@@ -6968,8 +7108,8 @@
         </p:blipFill>
         <p:spPr>
           <a:xfrm>
-            <a:off x="548640" y="1463040"/>
-            <a:ext cx="7315200" cy="4167962"/>
+            <a:off x="457200" y="1463040"/>
+            <a:ext cx="8412480" cy="3968150"/>
           </a:xfrm>
           <a:prstGeom prst="rect">
             <a:avLst/>
@@ -6983,9 +7123,9 @@
           <p:nvPr/>
         </p:nvSpPr>
         <p:spPr>
-          <a:xfrm rot="21510000">
-            <a:off x="8229600" y="1737360"/>
-            <a:ext cx="3383280" cy="3291840"/>
+          <a:xfrm rot="90000">
+            <a:off x="9098280" y="1737360"/>
+            <a:ext cx="2651760" cy="3566160"/>
           </a:xfrm>
           <a:prstGeom prst="rect">
             <a:avLst/>
@@ -7024,22 +7164,22 @@
               </a:spcAft>
             </a:pPr>
             <a:r>
-              <a:rPr sz="1800" b="0">
-                <a:solidFill>
-                  <a:srgbClr val="2B2D42"/>
-                </a:solidFill>
-                <a:latin typeface="Patrick Hand"/>
-              </a:rPr>
-              <a:t>another paper's authors: </a:t>
-            </a:r>
-            <a:r>
-              <a:rPr sz="1800" b="1">
-                <a:solidFill>
-                  <a:srgbClr val="2B2D42"/>
-                </a:solidFill>
-                <a:latin typeface="Patrick Hand"/>
-              </a:rPr>
-              <a:t>0</a:t>
+              <a:rPr sz="1700" b="0">
+                <a:solidFill>
+                  <a:srgbClr val="2B2D42"/>
+                </a:solidFill>
+                <a:latin typeface="Patrick Hand"/>
+              </a:rPr>
+              <a:t>no title: rank </a:t>
+            </a:r>
+            <a:r>
+              <a:rPr sz="1700" b="1">
+                <a:solidFill>
+                  <a:srgbClr val="2B2D42"/>
+                </a:solidFill>
+                <a:latin typeface="Patrick Hand"/>
+              </a:rPr>
+              <a:t>~12</a:t>
             </a:r>
           </a:p>
           <a:p>
@@ -7049,22 +7189,49 @@
               </a:spcAft>
             </a:pPr>
             <a:r>
-              <a:rPr sz="1800" b="0">
-                <a:solidFill>
-                  <a:srgbClr val="2B2D42"/>
-                </a:solidFill>
-                <a:latin typeface="Patrick Hand"/>
-              </a:rPr>
-              <a:t>same-field paper: </a:t>
-            </a:r>
-            <a:r>
-              <a:rPr sz="1800" b="1">
-                <a:solidFill>
-                  <a:srgbClr val="2B2D42"/>
-                </a:solidFill>
-                <a:latin typeface="Patrick Hand"/>
-              </a:rPr>
-              <a:t>0</a:t>
+              <a:rPr sz="1700" b="0">
+                <a:solidFill>
+                  <a:srgbClr val="2B2D42"/>
+                </a:solidFill>
+                <a:latin typeface="Patrick Hand"/>
+              </a:rPr>
+              <a:t>target - control: </a:t>
+            </a:r>
+            <a:r>
+              <a:rPr sz="1700" b="1">
+                <a:solidFill>
+                  <a:srgbClr val="6E7080"/>
+                </a:solidFill>
+                <a:latin typeface="Patrick Hand"/>
+              </a:rPr>
+              <a:t>+0.09</a:t>
+            </a:r>
+            <a:r>
+              <a:rPr sz="1700" b="0">
+                <a:solidFill>
+                  <a:srgbClr val="2B2D42"/>
+                </a:solidFill>
+                <a:latin typeface="Patrick Hand"/>
+              </a:rPr>
+              <a:t> prior, </a:t>
+            </a:r>
+            <a:r>
+              <a:rPr sz="1700" b="1">
+                <a:solidFill>
+                  <a:srgbClr val="E07A2F"/>
+                </a:solidFill>
+                <a:latin typeface="Patrick Hand"/>
+              </a:rPr>
+              <a:t>+0.21</a:t>
+            </a:r>
+            <a:r>
+              <a:rPr sz="1700" b="0">
+                <a:solidFill>
+                  <a:srgbClr val="2B2D42"/>
+                </a:solidFill>
+                <a:latin typeface="Patrick Hand"/>
+              </a:rPr>
+              <a:t> paper</a:t>
             </a:r>
           </a:p>
           <a:p>
@@ -7074,31 +7241,22 @@
               </a:spcAft>
             </a:pPr>
             <a:r>
-              <a:rPr sz="1800" b="0">
-                <a:solidFill>
-                  <a:srgbClr val="2B2D42"/>
-                </a:solidFill>
-                <a:latin typeface="Patrick Hand"/>
-              </a:rPr>
-              <a:t>so it is </a:t>
-            </a:r>
-            <a:r>
-              <a:rPr sz="1800" b="1">
+              <a:rPr sz="1700" b="0">
+                <a:solidFill>
+                  <a:srgbClr val="2B2D42"/>
+                </a:solidFill>
+                <a:latin typeface="Patrick Hand"/>
+              </a:rPr>
+              <a:t>surname 1st: prior ~0, paper </a:t>
+            </a:r>
+            <a:r>
+              <a:rPr sz="1700" b="1">
                 <a:solidFill>
                   <a:srgbClr val="E07A2F"/>
                 </a:solidFill>
                 <a:latin typeface="Patrick Hand"/>
               </a:rPr>
-              <a:t>this paper</a:t>
-            </a:r>
-            <a:r>
-              <a:rPr sz="1800" b="0">
-                <a:solidFill>
-                  <a:srgbClr val="2B2D42"/>
-                </a:solidFill>
-                <a:latin typeface="Patrick Hand"/>
-              </a:rPr>
-              <a:t>, already at L24</a:t>
+              <a:t>+0.42</a:t>
             </a:r>
           </a:p>
           <a:p>
@@ -7108,13 +7266,22 @@
               </a:spcAft>
             </a:pPr>
             <a:r>
-              <a:rPr sz="1800" b="0">
-                <a:solidFill>
-                  <a:srgbClr val="2B2D42"/>
-                </a:solidFill>
-                <a:latin typeface="Patrick Hand"/>
-              </a:rPr>
-              <a:t>lenses cannot read it</a:t>
+              <a:rPr sz="1700" b="0">
+                <a:solidFill>
+                  <a:srgbClr val="2B2D42"/>
+                </a:solidFill>
+                <a:latin typeface="Patrick Hand"/>
+              </a:rPr>
+              <a:t>prior vs recognition rho </a:t>
+            </a:r>
+            <a:r>
+              <a:rPr sz="1700" b="1">
+                <a:solidFill>
+                  <a:srgbClr val="2B2D42"/>
+                </a:solidFill>
+                <a:latin typeface="Patrick Hand"/>
+              </a:rPr>
+              <a:t>0.09</a:t>
             </a:r>
           </a:p>
         </p:txBody>
@@ -7195,7 +7362,7 @@
                 </a:solidFill>
                 <a:latin typeface="Caveat"/>
               </a:rPr>
-              <a:t>Which lens reads best?</a:t>
+              <a:t>The probe signal is paper-specific</a:t>
             </a:r>
           </a:p>
         </p:txBody>
@@ -7234,14 +7401,14 @@
                 </a:solidFill>
                 <a:latin typeface="Patrick Hand"/>
               </a:rPr>
-              <a:t>all papers · true title</a:t>
+              <a:t>last title token · 5-fold ridge probe · controls · all 9,108 papers</a:t>
             </a:r>
           </a:p>
         </p:txBody>
       </p:sp>
       <p:pic>
         <p:nvPicPr>
-          <p:cNvPr id="5" name="Picture 4" descr="c4_lens_quality.png"/>
+          <p:cNvPr id="5" name="Picture 4" descr="c16_probe_controls.png"/>
           <p:cNvPicPr>
             <a:picLocks noChangeAspect="1"/>
           </p:cNvPicPr>
@@ -7255,8 +7422,8 @@
         </p:blipFill>
         <p:spPr>
           <a:xfrm>
-            <a:off x="457200" y="1463040"/>
-            <a:ext cx="8412480" cy="3963572"/>
+            <a:off x="548640" y="1463040"/>
+            <a:ext cx="7315200" cy="4167962"/>
           </a:xfrm>
           <a:prstGeom prst="rect">
             <a:avLst/>
@@ -7271,8 +7438,8 @@
         </p:nvSpPr>
         <p:spPr>
           <a:xfrm rot="21510000">
-            <a:off x="9098280" y="1737360"/>
-            <a:ext cx="2651760" cy="3108960"/>
+            <a:off x="8229600" y="1737360"/>
+            <a:ext cx="3383280" cy="3291840"/>
           </a:xfrm>
           <a:prstGeom prst="rect">
             <a:avLst/>
@@ -7311,13 +7478,22 @@
               </a:spcAft>
             </a:pPr>
             <a:r>
-              <a:rPr sz="1900" b="1">
-                <a:solidFill>
-                  <a:srgbClr val="3C8D5A"/>
-                </a:solidFill>
-                <a:latin typeface="Patrick Hand"/>
-              </a:rPr>
-              <a:t>Middle layers:</a:t>
+              <a:rPr sz="1800" b="0">
+                <a:solidFill>
+                  <a:srgbClr val="2B2D42"/>
+                </a:solidFill>
+                <a:latin typeface="Patrick Hand"/>
+              </a:rPr>
+              <a:t>another paper's authors: </a:t>
+            </a:r>
+            <a:r>
+              <a:rPr sz="1800" b="1">
+                <a:solidFill>
+                  <a:srgbClr val="2B2D42"/>
+                </a:solidFill>
+                <a:latin typeface="Patrick Hand"/>
+              </a:rPr>
+              <a:t>0</a:t>
             </a:r>
           </a:p>
           <a:p>
@@ -7327,13 +7503,22 @@
               </a:spcAft>
             </a:pPr>
             <a:r>
-              <a:rPr sz="1900" b="0">
-                <a:solidFill>
-                  <a:srgbClr val="2B2D42"/>
-                </a:solidFill>
-                <a:latin typeface="Patrick Hand"/>
-              </a:rPr>
-              <a:t>fitA best; at L48 15-18% top-10 vs 1% for logit</a:t>
+              <a:rPr sz="1800" b="0">
+                <a:solidFill>
+                  <a:srgbClr val="2B2D42"/>
+                </a:solidFill>
+                <a:latin typeface="Patrick Hand"/>
+              </a:rPr>
+              <a:t>same-field paper: </a:t>
+            </a:r>
+            <a:r>
+              <a:rPr sz="1800" b="1">
+                <a:solidFill>
+                  <a:srgbClr val="2B2D42"/>
+                </a:solidFill>
+                <a:latin typeface="Patrick Hand"/>
+              </a:rPr>
+              <a:t>0</a:t>
             </a:r>
           </a:p>
           <a:p>
@@ -7343,22 +7528,47 @@
               </a:spcAft>
             </a:pPr>
             <a:r>
-              <a:rPr sz="1900" b="1">
-                <a:solidFill>
-                  <a:srgbClr val="3A6EA5"/>
-                </a:solidFill>
-                <a:latin typeface="Patrick Hand"/>
-              </a:rPr>
-              <a:t>L62:</a:t>
-            </a:r>
-            <a:r>
-              <a:rPr sz="1900" b="0">
-                <a:solidFill>
-                  <a:srgbClr val="2B2D42"/>
-                </a:solidFill>
-                <a:latin typeface="Patrick Hand"/>
-              </a:rPr>
-              <a:t> logit lens best (59%)</a:t>
+              <a:rPr sz="1800" b="0">
+                <a:solidFill>
+                  <a:srgbClr val="2B2D42"/>
+                </a:solidFill>
+                <a:latin typeface="Patrick Hand"/>
+              </a:rPr>
+              <a:t>so it is </a:t>
+            </a:r>
+            <a:r>
+              <a:rPr sz="1800" b="1">
+                <a:solidFill>
+                  <a:srgbClr val="E07A2F"/>
+                </a:solidFill>
+                <a:latin typeface="Patrick Hand"/>
+              </a:rPr>
+              <a:t>this paper</a:t>
+            </a:r>
+            <a:r>
+              <a:rPr sz="1800" b="0">
+                <a:solidFill>
+                  <a:srgbClr val="2B2D42"/>
+                </a:solidFill>
+                <a:latin typeface="Patrick Hand"/>
+              </a:rPr>
+              <a:t>, already at L24</a:t>
+            </a:r>
+          </a:p>
+          <a:p>
+            <a:pPr algn="l">
+              <a:spcAft>
+                <a:spcPts val="900"/>
+              </a:spcAft>
+            </a:pPr>
+            <a:r>
+              <a:rPr sz="1800" b="0">
+                <a:solidFill>
+                  <a:srgbClr val="2B2D42"/>
+                </a:solidFill>
+                <a:latin typeface="Patrick Hand"/>
+              </a:rPr>
+              <a:t>lenses cannot read it</a:t>
             </a:r>
           </a:p>
         </p:txBody>
@@ -7439,7 +7649,7 @@
                 </a:solidFill>
                 <a:latin typeface="Caveat"/>
               </a:rPr>
-              <a:t>Do lenses reveal hidden paper knowledge?</a:t>
+              <a:t>Which lens reads best?</a:t>
             </a:r>
           </a:p>
         </p:txBody>
@@ -7478,14 +7688,14 @@
                 </a:solidFill>
                 <a:latin typeface="Patrick Hand"/>
               </a:rPr>
-              <a:t>paired differences, 95% CI</a:t>
+              <a:t>all papers · true title</a:t>
             </a:r>
           </a:p>
         </p:txBody>
       </p:sp>
       <p:pic>
         <p:nvPicPr>
-          <p:cNvPr id="5" name="Picture 4" descr="c5_lens_extra.png"/>
+          <p:cNvPr id="5" name="Picture 4" descr="c4_lens_quality.png"/>
           <p:cNvPicPr>
             <a:picLocks noChangeAspect="1"/>
           </p:cNvPicPr>
@@ -7514,7 +7724,7 @@
           <p:nvPr/>
         </p:nvSpPr>
         <p:spPr>
-          <a:xfrm rot="90000">
+          <a:xfrm rot="21510000">
             <a:off x="9098280" y="1737360"/>
             <a:ext cx="2651760" cy="3108960"/>
           </a:xfrm>
@@ -7555,30 +7765,46 @@
               </a:spcAft>
             </a:pPr>
             <a:r>
+              <a:rPr sz="1900" b="1">
+                <a:solidFill>
+                  <a:srgbClr val="3C8D5A"/>
+                </a:solidFill>
+                <a:latin typeface="Patrick Hand"/>
+              </a:rPr>
+              <a:t>Middle layers:</a:t>
+            </a:r>
+          </a:p>
+          <a:p>
+            <a:pPr algn="l">
+              <a:spcAft>
+                <a:spcPts val="900"/>
+              </a:spcAft>
+            </a:pPr>
+            <a:r>
               <a:rPr sz="1900" b="0">
                 <a:solidFill>
                   <a:srgbClr val="2B2D42"/>
                 </a:solidFill>
                 <a:latin typeface="Patrick Hand"/>
               </a:rPr>
-              <a:t>Extra signal: </a:t>
-            </a:r>
+              <a:t>fitA best; at L48 15-18% top-10 vs 1% for logit</a:t>
+            </a:r>
+          </a:p>
+          <a:p>
+            <a:pPr algn="l">
+              <a:spcAft>
+                <a:spcPts val="900"/>
+              </a:spcAft>
+            </a:pPr>
             <a:r>
               <a:rPr sz="1900" b="1">
                 <a:solidFill>
-                  <a:srgbClr val="2B2D42"/>
-                </a:solidFill>
-                <a:latin typeface="Patrick Hand"/>
-              </a:rPr>
-              <a:t>+0.01 to +0.03</a:t>
-            </a:r>
-          </a:p>
-          <a:p>
-            <a:pPr algn="l">
-              <a:spcAft>
-                <a:spcPts val="900"/>
-              </a:spcAft>
-            </a:pPr>
+                  <a:srgbClr val="3A6EA5"/>
+                </a:solidFill>
+                <a:latin typeface="Patrick Hand"/>
+              </a:rPr>
+              <a:t>L62:</a:t>
+            </a:r>
             <a:r>
               <a:rPr sz="1900" b="0">
                 <a:solidFill>
@@ -7586,32 +7812,7 @@
                 </a:solidFill>
                 <a:latin typeface="Patrick Hand"/>
               </a:rPr>
-              <a:t>vs ~0.44 at L62</a:t>
-            </a:r>
-          </a:p>
-          <a:p>
-            <a:pPr algn="l">
-              <a:spcAft>
-                <a:spcPts val="900"/>
-              </a:spcAft>
-            </a:pPr>
-            <a:r>
-              <a:rPr sz="1900" b="1">
-                <a:solidFill>
-                  <a:srgbClr val="E07A2F"/>
-                </a:solidFill>
-                <a:latin typeface="Patrick Hand"/>
-              </a:rPr>
-              <a:t>Not bigger for target</a:t>
-            </a:r>
-            <a:r>
-              <a:rPr sz="1900" b="0">
-                <a:solidFill>
-                  <a:srgbClr val="2B2D42"/>
-                </a:solidFill>
-                <a:latin typeface="Patrick Hand"/>
-              </a:rPr>
-              <a:t> (even negative at L48-56)</a:t>
+              <a:t> logit lens best (59%)</a:t>
             </a:r>
           </a:p>
         </p:txBody>
@@ -7692,7 +7893,7 @@
                 </a:solidFill>
                 <a:latin typeface="Caveat"/>
               </a:rPr>
-              <a:t>More citations, more paper knowledge</a:t>
+              <a:t>Do lenses reveal hidden paper knowledge?</a:t>
             </a:r>
           </a:p>
         </p:txBody>
@@ -7731,14 +7932,14 @@
                 </a:solidFill>
                 <a:latin typeface="Patrick Hand"/>
               </a:rPr>
-              <a:t>model output · bins with &lt; 10 papers omitted</a:t>
+              <a:t>paired differences, 95% CI</a:t>
             </a:r>
           </a:p>
         </p:txBody>
       </p:sp>
       <p:pic>
         <p:nvPicPr>
-          <p:cNvPr id="5" name="Picture 4" descr="c6_citation.png"/>
+          <p:cNvPr id="5" name="Picture 4" descr="c5_lens_extra.png"/>
           <p:cNvPicPr>
             <a:picLocks noChangeAspect="1"/>
           </p:cNvPicPr>
@@ -7753,7 +7954,7 @@
         <p:spPr>
           <a:xfrm>
             <a:off x="457200" y="1463040"/>
-            <a:ext cx="8412480" cy="3894666"/>
+            <a:ext cx="8412480" cy="3963572"/>
           </a:xfrm>
           <a:prstGeom prst="rect">
             <a:avLst/>
@@ -7767,7 +7968,7 @@
           <p:nvPr/>
         </p:nvSpPr>
         <p:spPr>
-          <a:xfrm rot="21510000">
+          <a:xfrm rot="90000">
             <a:off x="9098280" y="1737360"/>
             <a:ext cx="2651760" cy="3108960"/>
           </a:xfrm>
@@ -7808,79 +8009,63 @@
               </a:spcAft>
             </a:pPr>
             <a:r>
-              <a:rPr sz="1800" b="0">
-                <a:solidFill>
-                  <a:srgbClr val="2B2D42"/>
-                </a:solidFill>
-                <a:latin typeface="Patrick Hand"/>
-              </a:rPr>
-              <a:t>Target: </a:t>
-            </a:r>
-            <a:r>
-              <a:rPr sz="1800" b="1">
+              <a:rPr sz="1900" b="0">
+                <a:solidFill>
+                  <a:srgbClr val="2B2D42"/>
+                </a:solidFill>
+                <a:latin typeface="Patrick Hand"/>
+              </a:rPr>
+              <a:t>Extra signal: </a:t>
+            </a:r>
+            <a:r>
+              <a:rPr sz="1900" b="1">
+                <a:solidFill>
+                  <a:srgbClr val="2B2D42"/>
+                </a:solidFill>
+                <a:latin typeface="Patrick Hand"/>
+              </a:rPr>
+              <a:t>+0.01 to +0.03</a:t>
+            </a:r>
+          </a:p>
+          <a:p>
+            <a:pPr algn="l">
+              <a:spcAft>
+                <a:spcPts val="900"/>
+              </a:spcAft>
+            </a:pPr>
+            <a:r>
+              <a:rPr sz="1900" b="0">
+                <a:solidFill>
+                  <a:srgbClr val="2B2D42"/>
+                </a:solidFill>
+                <a:latin typeface="Patrick Hand"/>
+              </a:rPr>
+              <a:t>vs ~0.44 at L62</a:t>
+            </a:r>
+          </a:p>
+          <a:p>
+            <a:pPr algn="l">
+              <a:spcAft>
+                <a:spcPts val="900"/>
+              </a:spcAft>
+            </a:pPr>
+            <a:r>
+              <a:rPr sz="1900" b="1">
                 <a:solidFill>
                   <a:srgbClr val="E07A2F"/>
                 </a:solidFill>
                 <a:latin typeface="Patrick Hand"/>
               </a:rPr>
-              <a:t>+0.35 -&gt; +0.64</a:t>
-            </a:r>
-          </a:p>
-          <a:p>
-            <a:pPr algn="l">
-              <a:spcAft>
-                <a:spcPts val="900"/>
-              </a:spcAft>
-            </a:pPr>
-            <a:r>
-              <a:rPr sz="1800" b="0">
-                <a:solidFill>
-                  <a:srgbClr val="2B2D42"/>
-                </a:solidFill>
-                <a:latin typeface="Patrick Hand"/>
-              </a:rPr>
-              <a:t>Spearman (title-specific)</a:t>
-            </a:r>
-          </a:p>
-          <a:p>
-            <a:pPr algn="l">
-              <a:spcAft>
-                <a:spcPts val="900"/>
-              </a:spcAft>
-            </a:pPr>
-            <a:r>
-              <a:rPr sz="1800" b="1">
-                <a:solidFill>
-                  <a:srgbClr val="2B2D42"/>
-                </a:solidFill>
-                <a:latin typeface="Patrick Hand"/>
-              </a:rPr>
-              <a:t>0.45</a:t>
-            </a:r>
-            <a:r>
-              <a:rPr sz="1800" b="0">
-                <a:solidFill>
-                  <a:srgbClr val="2B2D42"/>
-                </a:solidFill>
-                <a:latin typeface="Patrick Hand"/>
-              </a:rPr>
-              <a:t> all · 0.33 target · 0.19 control</a:t>
-            </a:r>
-          </a:p>
-          <a:p>
-            <a:pPr algn="l">
-              <a:spcAft>
-                <a:spcPts val="900"/>
-              </a:spcAft>
-            </a:pPr>
-            <a:r>
-              <a:rPr sz="1800" b="0">
-                <a:solidFill>
-                  <a:srgbClr val="2B2D42"/>
-                </a:solidFill>
-                <a:latin typeface="Patrick Hand"/>
-              </a:rPr>
-              <a:t>Target &gt; control in every bin</a:t>
+              <a:t>Not bigger for target</a:t>
+            </a:r>
+            <a:r>
+              <a:rPr sz="1900" b="0">
+                <a:solidFill>
+                  <a:srgbClr val="2B2D42"/>
+                </a:solidFill>
+                <a:latin typeface="Patrick Hand"/>
+              </a:rPr>
+              <a:t> (even negative at L48-56)</a:t>
             </a:r>
           </a:p>
         </p:txBody>
@@ -7961,7 +8146,7 @@
                 </a:solidFill>
                 <a:latin typeface="Caveat"/>
               </a:rPr>
-              <a:t>First token or the rest of the name?</a:t>
+              <a:t>More citations, more paper knowledge</a:t>
             </a:r>
           </a:p>
         </p:txBody>
@@ -8000,14 +8185,14 @@
                 </a:solidFill>
                 <a:latin typeface="Patrick Hand"/>
               </a:rPr>
-              <a:t>model output · split by name format</a:t>
+              <a:t>model output · bins with &lt; 10 papers omitted</a:t>
             </a:r>
           </a:p>
         </p:txBody>
       </p:sp>
       <p:pic>
         <p:nvPicPr>
-          <p:cNvPr id="5" name="Picture 4" descr="c7_format_position.png"/>
+          <p:cNvPr id="5" name="Picture 4" descr="c6_citation.png"/>
           <p:cNvPicPr>
             <a:picLocks noChangeAspect="1"/>
           </p:cNvPicPr>
@@ -8022,7 +8207,7 @@
         <p:spPr>
           <a:xfrm>
             <a:off x="457200" y="1463040"/>
-            <a:ext cx="8412480" cy="3963572"/>
+            <a:ext cx="8412480" cy="3894666"/>
           </a:xfrm>
           <a:prstGeom prst="rect">
             <a:avLst/>
@@ -8036,7 +8221,7 @@
           <p:nvPr/>
         </p:nvSpPr>
         <p:spPr>
-          <a:xfrm rot="90000">
+          <a:xfrm rot="21510000">
             <a:off x="9098280" y="1737360"/>
             <a:ext cx="2651760" cy="3108960"/>
           </a:xfrm>
@@ -8077,22 +8262,22 @@
               </a:spcAft>
             </a:pPr>
             <a:r>
-              <a:rPr sz="1900" b="1">
-                <a:solidFill>
-                  <a:srgbClr val="3A6EA5"/>
-                </a:solidFill>
-                <a:latin typeface="Patrick Hand"/>
-              </a:rPr>
-              <a:t>Initial:</a:t>
-            </a:r>
-            <a:r>
-              <a:rPr sz="1900" b="0">
-                <a:solidFill>
-                  <a:srgbClr val="2B2D42"/>
-                </a:solidFill>
-                <a:latin typeface="Patrick Hand"/>
-              </a:rPr>
-              <a:t> carries little; signal is on the surname</a:t>
+              <a:rPr sz="1800" b="0">
+                <a:solidFill>
+                  <a:srgbClr val="2B2D42"/>
+                </a:solidFill>
+                <a:latin typeface="Patrick Hand"/>
+              </a:rPr>
+              <a:t>Target: </a:t>
+            </a:r>
+            <a:r>
+              <a:rPr sz="1800" b="1">
+                <a:solidFill>
+                  <a:srgbClr val="E07A2F"/>
+                </a:solidFill>
+                <a:latin typeface="Patrick Hand"/>
+              </a:rPr>
+              <a:t>+0.35 -&gt; +0.64</a:t>
             </a:r>
           </a:p>
           <a:p>
@@ -8102,22 +8287,54 @@
               </a:spcAft>
             </a:pPr>
             <a:r>
-              <a:rPr sz="1900" b="1">
-                <a:solidFill>
-                  <a:srgbClr val="E07A2F"/>
-                </a:solidFill>
-                <a:latin typeface="Patrick Hand"/>
-              </a:rPr>
-              <a:t>Full given name:</a:t>
-            </a:r>
-            <a:r>
-              <a:rPr sz="1900" b="0">
-                <a:solidFill>
-                  <a:srgbClr val="2B2D42"/>
-                </a:solidFill>
-                <a:latin typeface="Patrick Hand"/>
-              </a:rPr>
-              <a:t> carries about as much as the surname</a:t>
+              <a:rPr sz="1800" b="0">
+                <a:solidFill>
+                  <a:srgbClr val="2B2D42"/>
+                </a:solidFill>
+                <a:latin typeface="Patrick Hand"/>
+              </a:rPr>
+              <a:t>Spearman (title-specific)</a:t>
+            </a:r>
+          </a:p>
+          <a:p>
+            <a:pPr algn="l">
+              <a:spcAft>
+                <a:spcPts val="900"/>
+              </a:spcAft>
+            </a:pPr>
+            <a:r>
+              <a:rPr sz="1800" b="1">
+                <a:solidFill>
+                  <a:srgbClr val="2B2D42"/>
+                </a:solidFill>
+                <a:latin typeface="Patrick Hand"/>
+              </a:rPr>
+              <a:t>0.45</a:t>
+            </a:r>
+            <a:r>
+              <a:rPr sz="1800" b="0">
+                <a:solidFill>
+                  <a:srgbClr val="2B2D42"/>
+                </a:solidFill>
+                <a:latin typeface="Patrick Hand"/>
+              </a:rPr>
+              <a:t> all · 0.33 target · 0.19 control</a:t>
+            </a:r>
+          </a:p>
+          <a:p>
+            <a:pPr algn="l">
+              <a:spcAft>
+                <a:spcPts val="900"/>
+              </a:spcAft>
+            </a:pPr>
+            <a:r>
+              <a:rPr sz="1800" b="0">
+                <a:solidFill>
+                  <a:srgbClr val="2B2D42"/>
+                </a:solidFill>
+                <a:latin typeface="Patrick Hand"/>
+              </a:rPr>
+              <a:t>Target &gt; control in every bin</a:t>
             </a:r>
           </a:p>
         </p:txBody>
@@ -8609,7 +8826,7 @@
                 </a:solidFill>
                 <a:latin typeface="Caveat"/>
               </a:rPr>
-              <a:t>Knowing the given name helps with the surname</a:t>
+              <a:t>First token or the rest of the name?</a:t>
             </a:r>
           </a:p>
         </p:txBody>
@@ -8648,14 +8865,14 @@
                 </a:solidFill>
                 <a:latin typeface="Patrick Hand"/>
               </a:rPr>
-              <a:t>true title · later words when the first word is / is not in the top 10</a:t>
+              <a:t>model output · split by name format</a:t>
             </a:r>
           </a:p>
         </p:txBody>
       </p:sp>
       <p:pic>
         <p:nvPicPr>
-          <p:cNvPr id="5" name="Picture 4" descr="c8_first_word_helps.png"/>
+          <p:cNvPr id="5" name="Picture 4" descr="c7_format_position.png"/>
           <p:cNvPicPr>
             <a:picLocks noChangeAspect="1"/>
           </p:cNvPicPr>
@@ -8669,8 +8886,8 @@
         </p:blipFill>
         <p:spPr>
           <a:xfrm>
-            <a:off x="548640" y="1463040"/>
-            <a:ext cx="7315200" cy="4354285"/>
+            <a:off x="457200" y="1463040"/>
+            <a:ext cx="8412480" cy="3963572"/>
           </a:xfrm>
           <a:prstGeom prst="rect">
             <a:avLst/>
@@ -8684,9 +8901,9 @@
           <p:nvPr/>
         </p:nvSpPr>
         <p:spPr>
-          <a:xfrm rot="21510000">
-            <a:off x="8229600" y="1737360"/>
-            <a:ext cx="3383280" cy="3108960"/>
+          <a:xfrm rot="90000">
+            <a:off x="9098280" y="1737360"/>
+            <a:ext cx="2651760" cy="3108960"/>
           </a:xfrm>
           <a:prstGeom prst="rect">
             <a:avLst/>
@@ -8727,19 +8944,37 @@
             <a:r>
               <a:rPr sz="1900" b="1">
                 <a:solidFill>
+                  <a:srgbClr val="3A6EA5"/>
+                </a:solidFill>
+                <a:latin typeface="Patrick Hand"/>
+              </a:rPr>
+              <a:t>Initial:</a:t>
+            </a:r>
+            <a:r>
+              <a:rPr sz="1900" b="0">
+                <a:solidFill>
+                  <a:srgbClr val="2B2D42"/>
+                </a:solidFill>
+                <a:latin typeface="Patrick Hand"/>
+              </a:rPr>
+              <a:t> carries little; signal is on the surname</a:t>
+            </a:r>
+          </a:p>
+          <a:p>
+            <a:pPr algn="l">
+              <a:spcAft>
+                <a:spcPts val="900"/>
+              </a:spcAft>
+            </a:pPr>
+            <a:r>
+              <a:rPr sz="1900" b="1">
+                <a:solidFill>
                   <a:srgbClr val="E07A2F"/>
                 </a:solidFill>
                 <a:latin typeface="Patrick Hand"/>
               </a:rPr>
-              <a:t>Given name in top 10</a:t>
-            </a:r>
-          </a:p>
-          <a:p>
-            <a:pPr algn="l">
-              <a:spcAft>
-                <a:spcPts val="900"/>
-              </a:spcAft>
-            </a:pPr>
+              <a:t>Full given name:</a:t>
+            </a:r>
             <a:r>
               <a:rPr sz="1900" b="0">
                 <a:solidFill>
@@ -8747,48 +8982,7 @@
                 </a:solidFill>
                 <a:latin typeface="Patrick Hand"/>
               </a:rPr>
-              <a:t>surname +0.22 (output)</a:t>
-            </a:r>
-          </a:p>
-          <a:p>
-            <a:pPr algn="l">
-              <a:spcAft>
-                <a:spcPts val="900"/>
-              </a:spcAft>
-            </a:pPr>
-            <a:r>
-              <a:rPr sz="1900" b="0">
-                <a:solidFill>
-                  <a:srgbClr val="2B2D42"/>
-                </a:solidFill>
-                <a:latin typeface="Patrick Hand"/>
-              </a:rPr>
-              <a:t>+0.32 (logit L62)</a:t>
-            </a:r>
-          </a:p>
-          <a:p>
-            <a:pPr algn="l">
-              <a:spcAft>
-                <a:spcPts val="900"/>
-              </a:spcAft>
-            </a:pPr>
-            <a:r>
-              <a:rPr sz="1900" b="1">
-                <a:solidFill>
-                  <a:srgbClr val="3A6EA5"/>
-                </a:solidFill>
-                <a:latin typeface="Patrick Hand"/>
-              </a:rPr>
-              <a:t>Initial in top 10</a:t>
-            </a:r>
-            <a:r>
-              <a:rPr sz="1900" b="0">
-                <a:solidFill>
-                  <a:srgbClr val="2B2D42"/>
-                </a:solidFill>
-                <a:latin typeface="Patrick Hand"/>
-              </a:rPr>
-              <a:t>: no help</a:t>
+              <a:t> carries about as much as the surname</a:t>
             </a:r>
           </a:p>
         </p:txBody>
@@ -8869,7 +9063,7 @@
                 </a:solidFill>
                 <a:latin typeface="Caveat"/>
               </a:rPr>
-              <a:t>Where the signal sits, and a dose-response</a:t>
+              <a:t>Knowing the given name helps with the surname</a:t>
             </a:r>
           </a:p>
         </p:txBody>
@@ -8908,14 +9102,14 @@
                 </a:solidFill>
                 <a:latin typeface="Patrick Hand"/>
               </a:rPr>
-              <a:t>model output</a:t>
+              <a:t>true title · later words when the first word is / is not in the top 10</a:t>
             </a:r>
           </a:p>
         </p:txBody>
       </p:sp>
       <p:pic>
         <p:nvPicPr>
-          <p:cNvPr id="5" name="Picture 4" descr="c9_roles.png"/>
+          <p:cNvPr id="5" name="Picture 4" descr="c8_first_word_helps.png"/>
           <p:cNvPicPr>
             <a:picLocks noChangeAspect="1"/>
           </p:cNvPicPr>
@@ -8929,73 +9123,126 @@
         </p:blipFill>
         <p:spPr>
           <a:xfrm>
-            <a:off x="365760" y="1463040"/>
-            <a:ext cx="6675120" cy="3973285"/>
+            <a:off x="548640" y="1463040"/>
+            <a:ext cx="7315200" cy="4354285"/>
           </a:xfrm>
           <a:prstGeom prst="rect">
             <a:avLst/>
           </a:prstGeom>
         </p:spPr>
       </p:pic>
-      <p:pic>
-        <p:nvPicPr>
-          <p:cNvPr id="6" name="Picture 5" descr="c10_graded.png"/>
-          <p:cNvPicPr>
-            <a:picLocks noChangeAspect="1"/>
-          </p:cNvPicPr>
-          <p:nvPr/>
-        </p:nvPicPr>
-        <p:blipFill>
-          <a:blip r:embed="rId5"/>
-          <a:stretch>
-            <a:fillRect/>
-          </a:stretch>
-        </p:blipFill>
-        <p:spPr>
-          <a:xfrm>
-            <a:off x="7223760" y="1737360"/>
-            <a:ext cx="4572000" cy="3282553"/>
-          </a:xfrm>
-          <a:prstGeom prst="rect">
-            <a:avLst/>
-          </a:prstGeom>
-        </p:spPr>
-      </p:pic>
-      <p:sp>
-        <p:nvSpPr>
-          <p:cNvPr id="7" name="TextBox 6"/>
-          <p:cNvSpPr txBox="1"/>
-          <p:nvPr/>
-        </p:nvSpPr>
-        <p:spPr>
-          <a:xfrm>
-            <a:off x="713232" y="6355080"/>
-            <a:ext cx="10789920" cy="320040"/>
-          </a:xfrm>
-          <a:prstGeom prst="rect">
-            <a:avLst/>
-          </a:prstGeom>
-          <a:noFill/>
-        </p:spPr>
-        <p:txBody>
-          <a:bodyPr wrap="square" lIns="0" rIns="0" tIns="0" bIns="0" anchor="t">
-            <a:spAutoFit/>
-          </a:bodyPr>
-          <a:lstStyle/>
-          <a:p>
-            <a:pPr algn="l">
-              <a:spcAft>
-                <a:spcPts val="800"/>
-              </a:spcAft>
-            </a:pPr>
-            <a:r>
-              <a:rPr sz="1400" b="0">
-                <a:solidFill>
-                  <a:srgbClr val="6E7080"/>
-                </a:solidFill>
-                <a:latin typeface="Patrick Hand"/>
-              </a:rPr>
-              <a:t>Right: R0/R1 papers, centred within citation bin; Spearman rho = 0.27, p &lt; 0.001.</a:t>
+      <p:sp>
+        <p:nvSpPr>
+          <p:cNvPr id="6" name="Rectangle 5"/>
+          <p:cNvSpPr/>
+          <p:nvPr/>
+        </p:nvSpPr>
+        <p:spPr>
+          <a:xfrm rot="21510000">
+            <a:off x="8229600" y="1737360"/>
+            <a:ext cx="3383280" cy="3108960"/>
+          </a:xfrm>
+          <a:prstGeom prst="rect">
+            <a:avLst/>
+          </a:prstGeom>
+          <a:solidFill>
+            <a:srgbClr val="FFF1A8"/>
+          </a:solidFill>
+          <a:ln w="12700">
+            <a:solidFill>
+              <a:srgbClr val="E2D37A"/>
+            </a:solidFill>
+          </a:ln>
+          <a:effectLst/>
+        </p:spPr>
+        <p:style>
+          <a:lnRef idx="1">
+            <a:schemeClr val="accent1"/>
+          </a:lnRef>
+          <a:fillRef idx="3">
+            <a:schemeClr val="accent1"/>
+          </a:fillRef>
+          <a:effectRef idx="2">
+            <a:schemeClr val="accent1"/>
+          </a:effectRef>
+          <a:fontRef idx="minor">
+            <a:schemeClr val="lt1"/>
+          </a:fontRef>
+        </p:style>
+        <p:txBody>
+          <a:bodyPr rtlCol="0" anchor="t" wrap="square" lIns="201168" rIns="201168" tIns="164592" bIns="164592"/>
+          <a:lstStyle/>
+          <a:p>
+            <a:pPr algn="l">
+              <a:spcAft>
+                <a:spcPts val="900"/>
+              </a:spcAft>
+            </a:pPr>
+            <a:r>
+              <a:rPr sz="1900" b="1">
+                <a:solidFill>
+                  <a:srgbClr val="E07A2F"/>
+                </a:solidFill>
+                <a:latin typeface="Patrick Hand"/>
+              </a:rPr>
+              <a:t>Given name in top 10</a:t>
+            </a:r>
+          </a:p>
+          <a:p>
+            <a:pPr algn="l">
+              <a:spcAft>
+                <a:spcPts val="900"/>
+              </a:spcAft>
+            </a:pPr>
+            <a:r>
+              <a:rPr sz="1900" b="0">
+                <a:solidFill>
+                  <a:srgbClr val="2B2D42"/>
+                </a:solidFill>
+                <a:latin typeface="Patrick Hand"/>
+              </a:rPr>
+              <a:t>surname +0.22 (output)</a:t>
+            </a:r>
+          </a:p>
+          <a:p>
+            <a:pPr algn="l">
+              <a:spcAft>
+                <a:spcPts val="900"/>
+              </a:spcAft>
+            </a:pPr>
+            <a:r>
+              <a:rPr sz="1900" b="0">
+                <a:solidFill>
+                  <a:srgbClr val="2B2D42"/>
+                </a:solidFill>
+                <a:latin typeface="Patrick Hand"/>
+              </a:rPr>
+              <a:t>+0.32 (logit L62)</a:t>
+            </a:r>
+          </a:p>
+          <a:p>
+            <a:pPr algn="l">
+              <a:spcAft>
+                <a:spcPts val="900"/>
+              </a:spcAft>
+            </a:pPr>
+            <a:r>
+              <a:rPr sz="1900" b="1">
+                <a:solidFill>
+                  <a:srgbClr val="3A6EA5"/>
+                </a:solidFill>
+                <a:latin typeface="Patrick Hand"/>
+              </a:rPr>
+              <a:t>Initial in top 10</a:t>
+            </a:r>
+            <a:r>
+              <a:rPr sz="1900" b="0">
+                <a:solidFill>
+                  <a:srgbClr val="2B2D42"/>
+                </a:solidFill>
+                <a:latin typeface="Patrick Hand"/>
+              </a:rPr>
+              <a:t>: no help</a:t>
             </a:r>
           </a:p>
         </p:txBody>
@@ -9076,7 +9323,7 @@
                 </a:solidFill>
                 <a:latin typeface="Caveat"/>
               </a:rPr>
-              <a:t>What we learned</a:t>
+              <a:t>Where the signal sits, and a dose-response</a:t>
             </a:r>
           </a:p>
         </p:txBody>
@@ -9089,8 +9336,8 @@
         </p:nvSpPr>
         <p:spPr>
           <a:xfrm>
-            <a:off x="822960" y="1325880"/>
-            <a:ext cx="2834640" cy="777240"/>
+            <a:off x="713232" y="987552"/>
+            <a:ext cx="10881360" cy="411480"/>
           </a:xfrm>
           <a:prstGeom prst="rect">
             <a:avLst/>
@@ -9109,27 +9356,75 @@
               </a:spcAft>
             </a:pPr>
             <a:r>
-              <a:rPr sz="2800" b="1">
-                <a:solidFill>
-                  <a:srgbClr val="E07A2F"/>
-                </a:solidFill>
-                <a:latin typeface="Caveat"/>
-              </a:rPr>
-              <a:t>Late</a:t>
-            </a:r>
-          </a:p>
-        </p:txBody>
-      </p:sp>
-      <p:sp>
-        <p:nvSpPr>
-          <p:cNvPr id="5" name="TextBox 4"/>
+              <a:rPr sz="1900" b="0">
+                <a:solidFill>
+                  <a:srgbClr val="6E7080"/>
+                </a:solidFill>
+                <a:latin typeface="Patrick Hand"/>
+              </a:rPr>
+              <a:t>model output</a:t>
+            </a:r>
+          </a:p>
+        </p:txBody>
+      </p:sp>
+      <p:pic>
+        <p:nvPicPr>
+          <p:cNvPr id="5" name="Picture 4" descr="c9_roles.png"/>
+          <p:cNvPicPr>
+            <a:picLocks noChangeAspect="1"/>
+          </p:cNvPicPr>
+          <p:nvPr/>
+        </p:nvPicPr>
+        <p:blipFill>
+          <a:blip r:embed="rId4"/>
+          <a:stretch>
+            <a:fillRect/>
+          </a:stretch>
+        </p:blipFill>
+        <p:spPr>
+          <a:xfrm>
+            <a:off x="365760" y="1463040"/>
+            <a:ext cx="6675120" cy="3973285"/>
+          </a:xfrm>
+          <a:prstGeom prst="rect">
+            <a:avLst/>
+          </a:prstGeom>
+        </p:spPr>
+      </p:pic>
+      <p:pic>
+        <p:nvPicPr>
+          <p:cNvPr id="6" name="Picture 5" descr="c10_graded.png"/>
+          <p:cNvPicPr>
+            <a:picLocks noChangeAspect="1"/>
+          </p:cNvPicPr>
+          <p:nvPr/>
+        </p:nvPicPr>
+        <p:blipFill>
+          <a:blip r:embed="rId5"/>
+          <a:stretch>
+            <a:fillRect/>
+          </a:stretch>
+        </p:blipFill>
+        <p:spPr>
+          <a:xfrm>
+            <a:off x="7223760" y="1737360"/>
+            <a:ext cx="4572000" cy="3282553"/>
+          </a:xfrm>
+          <a:prstGeom prst="rect">
+            <a:avLst/>
+          </a:prstGeom>
+        </p:spPr>
+      </p:pic>
+      <p:sp>
+        <p:nvSpPr>
+          <p:cNvPr id="7" name="TextBox 6"/>
           <p:cNvSpPr txBox="1"/>
           <p:nvPr/>
         </p:nvSpPr>
         <p:spPr>
           <a:xfrm>
-            <a:off x="3657600" y="1417320"/>
-            <a:ext cx="7863840" cy="777240"/>
+            <a:off x="713232" y="6355080"/>
+            <a:ext cx="10789920" cy="320040"/>
           </a:xfrm>
           <a:prstGeom prst="rect">
             <a:avLst/>
@@ -9148,403 +9443,13 @@
               </a:spcAft>
             </a:pPr>
             <a:r>
-              <a:rPr sz="2000" b="0">
-                <a:solidFill>
-                  <a:srgbClr val="2B2D42"/>
-                </a:solidFill>
-                <a:latin typeface="Patrick Hand"/>
-              </a:rPr>
-              <a:t>Paper-specific author knowledge builds up from about L50, fastest over L57-L61, peaking at L61-L62.</a:t>
-            </a:r>
-          </a:p>
-        </p:txBody>
-      </p:sp>
-      <p:sp>
-        <p:nvSpPr>
-          <p:cNvPr id="6" name="TextBox 5"/>
-          <p:cNvSpPr txBox="1"/>
-          <p:nvPr/>
-        </p:nvSpPr>
-        <p:spPr>
-          <a:xfrm>
-            <a:off x="822960" y="2167128"/>
-            <a:ext cx="2834640" cy="777240"/>
-          </a:xfrm>
-          <a:prstGeom prst="rect">
-            <a:avLst/>
-          </a:prstGeom>
-          <a:noFill/>
-        </p:spPr>
-        <p:txBody>
-          <a:bodyPr wrap="square" lIns="0" rIns="0" tIns="0" bIns="0" anchor="t">
-            <a:spAutoFit/>
-          </a:bodyPr>
-          <a:lstStyle/>
-          <a:p>
-            <a:pPr algn="l">
-              <a:spcAft>
-                <a:spcPts val="800"/>
-              </a:spcAft>
-            </a:pPr>
-            <a:r>
-              <a:rPr sz="2800" b="1">
-                <a:solidFill>
-                  <a:srgbClr val="3C8D5A"/>
-                </a:solidFill>
-                <a:latin typeface="Caveat"/>
-              </a:rPr>
-              <a:t>Read early</a:t>
-            </a:r>
-          </a:p>
-        </p:txBody>
-      </p:sp>
-      <p:sp>
-        <p:nvSpPr>
-          <p:cNvPr id="7" name="TextBox 6"/>
-          <p:cNvSpPr txBox="1"/>
-          <p:nvPr/>
-        </p:nvSpPr>
-        <p:spPr>
-          <a:xfrm>
-            <a:off x="3657600" y="2258568"/>
-            <a:ext cx="7863840" cy="777240"/>
-          </a:xfrm>
-          <a:prstGeom prst="rect">
-            <a:avLst/>
-          </a:prstGeom>
-          <a:noFill/>
-        </p:spPr>
-        <p:txBody>
-          <a:bodyPr wrap="square" lIns="0" rIns="0" tIns="0" bIns="0" anchor="t">
-            <a:spAutoFit/>
-          </a:bodyPr>
-          <a:lstStyle/>
-          <a:p>
-            <a:pPr algn="l">
-              <a:spcAft>
-                <a:spcPts val="800"/>
-              </a:spcAft>
-            </a:pPr>
-            <a:r>
-              <a:rPr sz="2000" b="0">
-                <a:solidFill>
-                  <a:srgbClr val="2B2D42"/>
-                </a:solidFill>
-                <a:latin typeface="Patrick Hand"/>
-              </a:rPr>
-              <a:t>Causally, the title is read in L24-L50 and moved into the tokens after it; after L52 it is no longer needed.</a:t>
-            </a:r>
-          </a:p>
-        </p:txBody>
-      </p:sp>
-      <p:sp>
-        <p:nvSpPr>
-          <p:cNvPr id="8" name="TextBox 7"/>
-          <p:cNvSpPr txBox="1"/>
-          <p:nvPr/>
-        </p:nvSpPr>
-        <p:spPr>
-          <a:xfrm>
-            <a:off x="822960" y="3008376"/>
-            <a:ext cx="2834640" cy="777240"/>
-          </a:xfrm>
-          <a:prstGeom prst="rect">
-            <a:avLst/>
-          </a:prstGeom>
-          <a:noFill/>
-        </p:spPr>
-        <p:txBody>
-          <a:bodyPr wrap="square" lIns="0" rIns="0" tIns="0" bIns="0" anchor="t">
-            <a:spAutoFit/>
-          </a:bodyPr>
-          <a:lstStyle/>
-          <a:p>
-            <a:pPr algn="l">
-              <a:spcAft>
-                <a:spcPts val="800"/>
-              </a:spcAft>
-            </a:pPr>
-            <a:r>
-              <a:rPr sz="2800" b="1">
-                <a:solidFill>
-                  <a:srgbClr val="3A6EA5"/>
-                </a:solidFill>
-                <a:latin typeface="Caveat"/>
-              </a:rPr>
-              <a:t>No head start</a:t>
-            </a:r>
-          </a:p>
-        </p:txBody>
-      </p:sp>
-      <p:sp>
-        <p:nvSpPr>
-          <p:cNvPr id="9" name="TextBox 8"/>
-          <p:cNvSpPr txBox="1"/>
-          <p:nvPr/>
-        </p:nvSpPr>
-        <p:spPr>
-          <a:xfrm>
-            <a:off x="3657600" y="3099816"/>
-            <a:ext cx="7863840" cy="777240"/>
-          </a:xfrm>
-          <a:prstGeom prst="rect">
-            <a:avLst/>
-          </a:prstGeom>
-          <a:noFill/>
-        </p:spPr>
-        <p:txBody>
-          <a:bodyPr wrap="square" lIns="0" rIns="0" tIns="0" bIns="0" anchor="t">
-            <a:spAutoFit/>
-          </a:bodyPr>
-          <a:lstStyle/>
-          <a:p>
-            <a:pPr algn="l">
-              <a:spcAft>
-                <a:spcPts val="800"/>
-              </a:spcAft>
-            </a:pPr>
-            <a:r>
-              <a:rPr sz="2000" b="0">
-                <a:solidFill>
-                  <a:srgbClr val="2B2D42"/>
-                </a:solidFill>
-                <a:latin typeface="Patrick Hand"/>
-              </a:rPr>
-              <a:t>Target papers are not ahead of control in middle layers; the +0.21 gap is at the end.</a:t>
-            </a:r>
-          </a:p>
-        </p:txBody>
-      </p:sp>
-      <p:sp>
-        <p:nvSpPr>
-          <p:cNvPr id="10" name="TextBox 9"/>
-          <p:cNvSpPr txBox="1"/>
-          <p:nvPr/>
-        </p:nvSpPr>
-        <p:spPr>
-          <a:xfrm>
-            <a:off x="822960" y="3849624"/>
-            <a:ext cx="2834640" cy="777240"/>
-          </a:xfrm>
-          <a:prstGeom prst="rect">
-            <a:avLst/>
-          </a:prstGeom>
-          <a:noFill/>
-        </p:spPr>
-        <p:txBody>
-          <a:bodyPr wrap="square" lIns="0" rIns="0" tIns="0" bIns="0" anchor="t">
-            <a:spAutoFit/>
-          </a:bodyPr>
-          <a:lstStyle/>
-          <a:p>
-            <a:pPr algn="l">
-              <a:spcAft>
-                <a:spcPts val="800"/>
-              </a:spcAft>
-            </a:pPr>
-            <a:r>
-              <a:rPr sz="2800" b="1">
-                <a:solidFill>
-                  <a:srgbClr val="3C8D5A"/>
-                </a:solidFill>
-                <a:latin typeface="Caveat"/>
-              </a:rPr>
-              <a:t>Real knowledge</a:t>
-            </a:r>
-          </a:p>
-        </p:txBody>
-      </p:sp>
-      <p:sp>
-        <p:nvSpPr>
-          <p:cNvPr id="11" name="TextBox 10"/>
-          <p:cNvSpPr txBox="1"/>
-          <p:nvPr/>
-        </p:nvSpPr>
-        <p:spPr>
-          <a:xfrm>
-            <a:off x="3657600" y="3941063"/>
-            <a:ext cx="7863840" cy="777240"/>
-          </a:xfrm>
-          <a:prstGeom prst="rect">
-            <a:avLst/>
-          </a:prstGeom>
-          <a:noFill/>
-        </p:spPr>
-        <p:txBody>
-          <a:bodyPr wrap="square" lIns="0" rIns="0" tIns="0" bIns="0" anchor="t">
-            <a:spAutoFit/>
-          </a:bodyPr>
-          <a:lstStyle/>
-          <a:p>
-            <a:pPr algn="l">
-              <a:spcAft>
-                <a:spcPts val="800"/>
-              </a:spcAft>
-            </a:pPr>
-            <a:r>
-              <a:rPr sz="2000" b="0">
-                <a:solidFill>
-                  <a:srgbClr val="2B2D42"/>
-                </a:solidFill>
-                <a:latin typeface="Patrick Hand"/>
-              </a:rPr>
-              <a:t>Name prior is ~1/3 of the gap overall but ~0 on surnames; the rest is paper-specific and grows with citations.</a:t>
-            </a:r>
-          </a:p>
-        </p:txBody>
-      </p:sp>
-      <p:sp>
-        <p:nvSpPr>
-          <p:cNvPr id="12" name="TextBox 11"/>
-          <p:cNvSpPr txBox="1"/>
-          <p:nvPr/>
-        </p:nvSpPr>
-        <p:spPr>
-          <a:xfrm>
-            <a:off x="822960" y="4690872"/>
-            <a:ext cx="2834640" cy="777240"/>
-          </a:xfrm>
-          <a:prstGeom prst="rect">
-            <a:avLst/>
-          </a:prstGeom>
-          <a:noFill/>
-        </p:spPr>
-        <p:txBody>
-          <a:bodyPr wrap="square" lIns="0" rIns="0" tIns="0" bIns="0" anchor="t">
-            <a:spAutoFit/>
-          </a:bodyPr>
-          <a:lstStyle/>
-          <a:p>
-            <a:pPr algn="l">
-              <a:spcAft>
-                <a:spcPts val="800"/>
-              </a:spcAft>
-            </a:pPr>
-            <a:r>
-              <a:rPr sz="2800" b="1">
-                <a:solidFill>
-                  <a:srgbClr val="2B2D42"/>
-                </a:solidFill>
-                <a:latin typeface="Caveat"/>
-              </a:rPr>
-              <a:t>Lenses agree</a:t>
-            </a:r>
-          </a:p>
-        </p:txBody>
-      </p:sp>
-      <p:sp>
-        <p:nvSpPr>
-          <p:cNvPr id="13" name="TextBox 12"/>
-          <p:cNvSpPr txBox="1"/>
-          <p:nvPr/>
-        </p:nvSpPr>
-        <p:spPr>
-          <a:xfrm>
-            <a:off x="3657600" y="4782312"/>
-            <a:ext cx="7863840" cy="777240"/>
-          </a:xfrm>
-          <a:prstGeom prst="rect">
-            <a:avLst/>
-          </a:prstGeom>
-          <a:noFill/>
-        </p:spPr>
-        <p:txBody>
-          <a:bodyPr wrap="square" lIns="0" rIns="0" tIns="0" bIns="0" anchor="t">
-            <a:spAutoFit/>
-          </a:bodyPr>
-          <a:lstStyle/>
-          <a:p>
-            <a:pPr algn="l">
-              <a:spcAft>
-                <a:spcPts val="800"/>
-              </a:spcAft>
-            </a:pPr>
-            <a:r>
-              <a:rPr sz="2000" b="0">
-                <a:solidFill>
-                  <a:srgbClr val="2B2D42"/>
-                </a:solidFill>
-                <a:latin typeface="Patrick Hand"/>
-              </a:rPr>
-              <a:t>Jacobian lenses read more in middle layers, but nothing target-specific.</a:t>
-            </a:r>
-          </a:p>
-        </p:txBody>
-      </p:sp>
-      <p:sp>
-        <p:nvSpPr>
-          <p:cNvPr id="14" name="TextBox 13"/>
-          <p:cNvSpPr txBox="1"/>
-          <p:nvPr/>
-        </p:nvSpPr>
-        <p:spPr>
-          <a:xfrm>
-            <a:off x="822960" y="5532120"/>
-            <a:ext cx="2834640" cy="777240"/>
-          </a:xfrm>
-          <a:prstGeom prst="rect">
-            <a:avLst/>
-          </a:prstGeom>
-          <a:noFill/>
-        </p:spPr>
-        <p:txBody>
-          <a:bodyPr wrap="square" lIns="0" rIns="0" tIns="0" bIns="0" anchor="t">
-            <a:spAutoFit/>
-          </a:bodyPr>
-          <a:lstStyle/>
-          <a:p>
-            <a:pPr algn="l">
-              <a:spcAft>
-                <a:spcPts val="800"/>
-              </a:spcAft>
-            </a:pPr>
-            <a:r>
-              <a:rPr sz="2800" b="1">
-                <a:solidFill>
-                  <a:srgbClr val="E07A2F"/>
-                </a:solidFill>
-                <a:latin typeface="Caveat"/>
-              </a:rPr>
-              <a:t>Name format</a:t>
-            </a:r>
-          </a:p>
-        </p:txBody>
-      </p:sp>
-      <p:sp>
-        <p:nvSpPr>
-          <p:cNvPr id="15" name="TextBox 14"/>
-          <p:cNvSpPr txBox="1"/>
-          <p:nvPr/>
-        </p:nvSpPr>
-        <p:spPr>
-          <a:xfrm>
-            <a:off x="3657600" y="5623560"/>
-            <a:ext cx="7863840" cy="777240"/>
-          </a:xfrm>
-          <a:prstGeom prst="rect">
-            <a:avLst/>
-          </a:prstGeom>
-          <a:noFill/>
-        </p:spPr>
-        <p:txBody>
-          <a:bodyPr wrap="square" lIns="0" rIns="0" tIns="0" bIns="0" anchor="t">
-            <a:spAutoFit/>
-          </a:bodyPr>
-          <a:lstStyle/>
-          <a:p>
-            <a:pPr algn="l">
-              <a:spcAft>
-                <a:spcPts val="800"/>
-              </a:spcAft>
-            </a:pPr>
-            <a:r>
-              <a:rPr sz="2000" b="0">
-                <a:solidFill>
-                  <a:srgbClr val="2B2D42"/>
-                </a:solidFill>
-                <a:latin typeface="Patrick Hand"/>
-              </a:rPr>
-              <a:t>Initials carry little; full given names carry as much as surnames and help predict them.</a:t>
+              <a:rPr sz="1400" b="0">
+                <a:solidFill>
+                  <a:srgbClr val="6E7080"/>
+                </a:solidFill>
+                <a:latin typeface="Patrick Hand"/>
+              </a:rPr>
+              <a:t>Right: R0/R1 papers, centred within citation bin; Spearman rho = 0.27, p &lt; 0.001.</a:t>
             </a:r>
           </a:p>
         </p:txBody>
@@ -9625,7 +9530,7 @@
                 </a:solidFill>
                 <a:latin typeface="Caveat"/>
               </a:rPr>
-              <a:t>Caveats and next steps</a:t>
+              <a:t>What we learned: read early, spoken late</a:t>
             </a:r>
           </a:p>
         </p:txBody>
@@ -9638,8 +9543,8 @@
         </p:nvSpPr>
         <p:spPr>
           <a:xfrm>
-            <a:off x="822960" y="1463040"/>
-            <a:ext cx="5486400" cy="4389120"/>
+            <a:off x="822960" y="1325880"/>
+            <a:ext cx="2834640" cy="777240"/>
           </a:xfrm>
           <a:prstGeom prst="rect">
             <a:avLst/>
@@ -9654,6 +9559,555 @@
           <a:p>
             <a:pPr algn="l">
               <a:spcAft>
+                <a:spcPts val="800"/>
+              </a:spcAft>
+            </a:pPr>
+            <a:r>
+              <a:rPr sz="2800" b="1">
+                <a:solidFill>
+                  <a:srgbClr val="E07A2F"/>
+                </a:solidFill>
+                <a:latin typeface="Caveat"/>
+              </a:rPr>
+              <a:t>Read early</a:t>
+            </a:r>
+          </a:p>
+        </p:txBody>
+      </p:sp>
+      <p:sp>
+        <p:nvSpPr>
+          <p:cNvPr id="5" name="TextBox 4"/>
+          <p:cNvSpPr txBox="1"/>
+          <p:nvPr/>
+        </p:nvSpPr>
+        <p:spPr>
+          <a:xfrm>
+            <a:off x="3657600" y="1417320"/>
+            <a:ext cx="7863840" cy="777240"/>
+          </a:xfrm>
+          <a:prstGeom prst="rect">
+            <a:avLst/>
+          </a:prstGeom>
+          <a:noFill/>
+        </p:spPr>
+        <p:txBody>
+          <a:bodyPr wrap="square" lIns="0" rIns="0" tIns="0" bIns="0" anchor="t">
+            <a:spAutoFit/>
+          </a:bodyPr>
+          <a:lstStyle/>
+          <a:p>
+            <a:pPr algn="l">
+              <a:spcAft>
+                <a:spcPts val="800"/>
+              </a:spcAft>
+            </a:pPr>
+            <a:r>
+              <a:rPr sz="2000" b="0">
+                <a:solidFill>
+                  <a:srgbClr val="2B2D42"/>
+                </a:solidFill>
+                <a:latin typeface="Patrick Hand"/>
+              </a:rPr>
+              <a:t>Causally the title is read in L24-L50 and moved into the tokens after it; after L52 it is no longer needed. A probe at the title token reads a little of it from L16-L24.</a:t>
+            </a:r>
+          </a:p>
+        </p:txBody>
+      </p:sp>
+      <p:sp>
+        <p:nvSpPr>
+          <p:cNvPr id="6" name="TextBox 5"/>
+          <p:cNvSpPr txBox="1"/>
+          <p:nvPr/>
+        </p:nvSpPr>
+        <p:spPr>
+          <a:xfrm>
+            <a:off x="822960" y="2167128"/>
+            <a:ext cx="2834640" cy="777240"/>
+          </a:xfrm>
+          <a:prstGeom prst="rect">
+            <a:avLst/>
+          </a:prstGeom>
+          <a:noFill/>
+        </p:spPr>
+        <p:txBody>
+          <a:bodyPr wrap="square" lIns="0" rIns="0" tIns="0" bIns="0" anchor="t">
+            <a:spAutoFit/>
+          </a:bodyPr>
+          <a:lstStyle/>
+          <a:p>
+            <a:pPr algn="l">
+              <a:spcAft>
+                <a:spcPts val="800"/>
+              </a:spcAft>
+            </a:pPr>
+            <a:r>
+              <a:rPr sz="2800" b="1">
+                <a:solidFill>
+                  <a:srgbClr val="3C8D5A"/>
+                </a:solidFill>
+                <a:latin typeface="Caveat"/>
+              </a:rPr>
+              <a:t>Spoken late</a:t>
+            </a:r>
+          </a:p>
+        </p:txBody>
+      </p:sp>
+      <p:sp>
+        <p:nvSpPr>
+          <p:cNvPr id="7" name="TextBox 6"/>
+          <p:cNvSpPr txBox="1"/>
+          <p:nvPr/>
+        </p:nvSpPr>
+        <p:spPr>
+          <a:xfrm>
+            <a:off x="3657600" y="2258568"/>
+            <a:ext cx="7863840" cy="777240"/>
+          </a:xfrm>
+          <a:prstGeom prst="rect">
+            <a:avLst/>
+          </a:prstGeom>
+          <a:noFill/>
+        </p:spPr>
+        <p:txBody>
+          <a:bodyPr wrap="square" lIns="0" rIns="0" tIns="0" bIns="0" anchor="t">
+            <a:spAutoFit/>
+          </a:bodyPr>
+          <a:lstStyle/>
+          <a:p>
+            <a:pPr algn="l">
+              <a:spcAft>
+                <a:spcPts val="800"/>
+              </a:spcAft>
+            </a:pPr>
+            <a:r>
+              <a:rPr sz="2000" b="0">
+                <a:solidFill>
+                  <a:srgbClr val="2B2D42"/>
+                </a:solidFill>
+                <a:latin typeface="Patrick Hand"/>
+              </a:rPr>
+              <a:t>At the name positions, paper-specific author knowledge becomes lens-readable only from ~L50, fastest over L57-L61.</a:t>
+            </a:r>
+          </a:p>
+        </p:txBody>
+      </p:sp>
+      <p:sp>
+        <p:nvSpPr>
+          <p:cNvPr id="8" name="TextBox 7"/>
+          <p:cNvSpPr txBox="1"/>
+          <p:nvPr/>
+        </p:nvSpPr>
+        <p:spPr>
+          <a:xfrm>
+            <a:off x="822960" y="3008376"/>
+            <a:ext cx="2834640" cy="777240"/>
+          </a:xfrm>
+          <a:prstGeom prst="rect">
+            <a:avLst/>
+          </a:prstGeom>
+          <a:noFill/>
+        </p:spPr>
+        <p:txBody>
+          <a:bodyPr wrap="square" lIns="0" rIns="0" tIns="0" bIns="0" anchor="t">
+            <a:spAutoFit/>
+          </a:bodyPr>
+          <a:lstStyle/>
+          <a:p>
+            <a:pPr algn="l">
+              <a:spcAft>
+                <a:spcPts val="800"/>
+              </a:spcAft>
+            </a:pPr>
+            <a:r>
+              <a:rPr sz="2800" b="1">
+                <a:solidFill>
+                  <a:srgbClr val="3A6EA5"/>
+                </a:solidFill>
+                <a:latin typeface="Caveat"/>
+              </a:rPr>
+              <a:t>No lens lead</a:t>
+            </a:r>
+          </a:p>
+        </p:txBody>
+      </p:sp>
+      <p:sp>
+        <p:nvSpPr>
+          <p:cNvPr id="9" name="TextBox 8"/>
+          <p:cNvSpPr txBox="1"/>
+          <p:nvPr/>
+        </p:nvSpPr>
+        <p:spPr>
+          <a:xfrm>
+            <a:off x="3657600" y="3099816"/>
+            <a:ext cx="7863840" cy="777240"/>
+          </a:xfrm>
+          <a:prstGeom prst="rect">
+            <a:avLst/>
+          </a:prstGeom>
+          <a:noFill/>
+        </p:spPr>
+        <p:txBody>
+          <a:bodyPr wrap="square" lIns="0" rIns="0" tIns="0" bIns="0" anchor="t">
+            <a:spAutoFit/>
+          </a:bodyPr>
+          <a:lstStyle/>
+          <a:p>
+            <a:pPr algn="l">
+              <a:spcAft>
+                <a:spcPts val="800"/>
+              </a:spcAft>
+            </a:pPr>
+            <a:r>
+              <a:rPr sz="2000" b="0">
+                <a:solidFill>
+                  <a:srgbClr val="2B2D42"/>
+                </a:solidFill>
+                <a:latin typeface="Patrick Hand"/>
+              </a:rPr>
+              <a:t>Read with a lens at the names, target is not ahead of control in middle layers; the +0.21 gap is at the end (probe at the title: +0.02-0.04).</a:t>
+            </a:r>
+          </a:p>
+        </p:txBody>
+      </p:sp>
+      <p:sp>
+        <p:nvSpPr>
+          <p:cNvPr id="10" name="TextBox 9"/>
+          <p:cNvSpPr txBox="1"/>
+          <p:nvPr/>
+        </p:nvSpPr>
+        <p:spPr>
+          <a:xfrm>
+            <a:off x="822960" y="3849624"/>
+            <a:ext cx="2834640" cy="777240"/>
+          </a:xfrm>
+          <a:prstGeom prst="rect">
+            <a:avLst/>
+          </a:prstGeom>
+          <a:noFill/>
+        </p:spPr>
+        <p:txBody>
+          <a:bodyPr wrap="square" lIns="0" rIns="0" tIns="0" bIns="0" anchor="t">
+            <a:spAutoFit/>
+          </a:bodyPr>
+          <a:lstStyle/>
+          <a:p>
+            <a:pPr algn="l">
+              <a:spcAft>
+                <a:spcPts val="800"/>
+              </a:spcAft>
+            </a:pPr>
+            <a:r>
+              <a:rPr sz="2800" b="1">
+                <a:solidFill>
+                  <a:srgbClr val="3C8D5A"/>
+                </a:solidFill>
+                <a:latin typeface="Caveat"/>
+              </a:rPr>
+              <a:t>Real knowledge</a:t>
+            </a:r>
+          </a:p>
+        </p:txBody>
+      </p:sp>
+      <p:sp>
+        <p:nvSpPr>
+          <p:cNvPr id="11" name="TextBox 10"/>
+          <p:cNvSpPr txBox="1"/>
+          <p:nvPr/>
+        </p:nvSpPr>
+        <p:spPr>
+          <a:xfrm>
+            <a:off x="3657600" y="3941063"/>
+            <a:ext cx="7863840" cy="777240"/>
+          </a:xfrm>
+          <a:prstGeom prst="rect">
+            <a:avLst/>
+          </a:prstGeom>
+          <a:noFill/>
+        </p:spPr>
+        <p:txBody>
+          <a:bodyPr wrap="square" lIns="0" rIns="0" tIns="0" bIns="0" anchor="t">
+            <a:spAutoFit/>
+          </a:bodyPr>
+          <a:lstStyle/>
+          <a:p>
+            <a:pPr algn="l">
+              <a:spcAft>
+                <a:spcPts val="800"/>
+              </a:spcAft>
+            </a:pPr>
+            <a:r>
+              <a:rPr sz="2000" b="0">
+                <a:solidFill>
+                  <a:srgbClr val="2B2D42"/>
+                </a:solidFill>
+                <a:latin typeface="Patrick Hand"/>
+              </a:rPr>
+              <a:t>Name prior is ~1/3 of the gap overall but ~0 on surnames; the rest is paper-specific and grows with citations.</a:t>
+            </a:r>
+          </a:p>
+        </p:txBody>
+      </p:sp>
+      <p:sp>
+        <p:nvSpPr>
+          <p:cNvPr id="12" name="TextBox 11"/>
+          <p:cNvSpPr txBox="1"/>
+          <p:nvPr/>
+        </p:nvSpPr>
+        <p:spPr>
+          <a:xfrm>
+            <a:off x="822960" y="4690872"/>
+            <a:ext cx="2834640" cy="777240"/>
+          </a:xfrm>
+          <a:prstGeom prst="rect">
+            <a:avLst/>
+          </a:prstGeom>
+          <a:noFill/>
+        </p:spPr>
+        <p:txBody>
+          <a:bodyPr wrap="square" lIns="0" rIns="0" tIns="0" bIns="0" anchor="t">
+            <a:spAutoFit/>
+          </a:bodyPr>
+          <a:lstStyle/>
+          <a:p>
+            <a:pPr algn="l">
+              <a:spcAft>
+                <a:spcPts val="800"/>
+              </a:spcAft>
+            </a:pPr>
+            <a:r>
+              <a:rPr sz="2800" b="1">
+                <a:solidFill>
+                  <a:srgbClr val="2B2D42"/>
+                </a:solidFill>
+                <a:latin typeface="Caveat"/>
+              </a:rPr>
+              <a:t>Lenses agree</a:t>
+            </a:r>
+          </a:p>
+        </p:txBody>
+      </p:sp>
+      <p:sp>
+        <p:nvSpPr>
+          <p:cNvPr id="13" name="TextBox 12"/>
+          <p:cNvSpPr txBox="1"/>
+          <p:nvPr/>
+        </p:nvSpPr>
+        <p:spPr>
+          <a:xfrm>
+            <a:off x="3657600" y="4782312"/>
+            <a:ext cx="7863840" cy="777240"/>
+          </a:xfrm>
+          <a:prstGeom prst="rect">
+            <a:avLst/>
+          </a:prstGeom>
+          <a:noFill/>
+        </p:spPr>
+        <p:txBody>
+          <a:bodyPr wrap="square" lIns="0" rIns="0" tIns="0" bIns="0" anchor="t">
+            <a:spAutoFit/>
+          </a:bodyPr>
+          <a:lstStyle/>
+          <a:p>
+            <a:pPr algn="l">
+              <a:spcAft>
+                <a:spcPts val="800"/>
+              </a:spcAft>
+            </a:pPr>
+            <a:r>
+              <a:rPr sz="2000" b="0">
+                <a:solidFill>
+                  <a:srgbClr val="2B2D42"/>
+                </a:solidFill>
+                <a:latin typeface="Patrick Hand"/>
+              </a:rPr>
+              <a:t>Jacobian lenses read more in middle layers, but nothing target-specific.</a:t>
+            </a:r>
+          </a:p>
+        </p:txBody>
+      </p:sp>
+      <p:sp>
+        <p:nvSpPr>
+          <p:cNvPr id="14" name="TextBox 13"/>
+          <p:cNvSpPr txBox="1"/>
+          <p:nvPr/>
+        </p:nvSpPr>
+        <p:spPr>
+          <a:xfrm>
+            <a:off x="822960" y="5532120"/>
+            <a:ext cx="2834640" cy="777240"/>
+          </a:xfrm>
+          <a:prstGeom prst="rect">
+            <a:avLst/>
+          </a:prstGeom>
+          <a:noFill/>
+        </p:spPr>
+        <p:txBody>
+          <a:bodyPr wrap="square" lIns="0" rIns="0" tIns="0" bIns="0" anchor="t">
+            <a:spAutoFit/>
+          </a:bodyPr>
+          <a:lstStyle/>
+          <a:p>
+            <a:pPr algn="l">
+              <a:spcAft>
+                <a:spcPts val="800"/>
+              </a:spcAft>
+            </a:pPr>
+            <a:r>
+              <a:rPr sz="2800" b="1">
+                <a:solidFill>
+                  <a:srgbClr val="E07A2F"/>
+                </a:solidFill>
+                <a:latin typeface="Caveat"/>
+              </a:rPr>
+              <a:t>Name format</a:t>
+            </a:r>
+          </a:p>
+        </p:txBody>
+      </p:sp>
+      <p:sp>
+        <p:nvSpPr>
+          <p:cNvPr id="15" name="TextBox 14"/>
+          <p:cNvSpPr txBox="1"/>
+          <p:nvPr/>
+        </p:nvSpPr>
+        <p:spPr>
+          <a:xfrm>
+            <a:off x="3657600" y="5623560"/>
+            <a:ext cx="7863840" cy="777240"/>
+          </a:xfrm>
+          <a:prstGeom prst="rect">
+            <a:avLst/>
+          </a:prstGeom>
+          <a:noFill/>
+        </p:spPr>
+        <p:txBody>
+          <a:bodyPr wrap="square" lIns="0" rIns="0" tIns="0" bIns="0" anchor="t">
+            <a:spAutoFit/>
+          </a:bodyPr>
+          <a:lstStyle/>
+          <a:p>
+            <a:pPr algn="l">
+              <a:spcAft>
+                <a:spcPts val="800"/>
+              </a:spcAft>
+            </a:pPr>
+            <a:r>
+              <a:rPr sz="2000" b="0">
+                <a:solidFill>
+                  <a:srgbClr val="2B2D42"/>
+                </a:solidFill>
+                <a:latin typeface="Patrick Hand"/>
+              </a:rPr>
+              <a:t>Initials carry little; full given names carry as much as surnames and help predict them.</a:t>
+            </a:r>
+          </a:p>
+        </p:txBody>
+      </p:sp>
+    </p:spTree>
+  </p:cSld>
+  <p:clrMapOvr>
+    <a:masterClrMapping/>
+  </p:clrMapOvr>
+</p:sld>
+</file>
+
+<file path=ppt/slides/slide24.xml><?xml version="1.0" encoding="utf-8"?>
+<p:sld xmlns:a="http://schemas.openxmlformats.org/drawingml/2006/main" xmlns:p="http://schemas.openxmlformats.org/presentationml/2006/main" xmlns:r="http://schemas.openxmlformats.org/officeDocument/2006/relationships">
+  <p:cSld>
+    <p:spTree>
+      <p:nvGrpSpPr>
+        <p:cNvPr id="1" name=""/>
+        <p:cNvGrpSpPr/>
+        <p:nvPr/>
+      </p:nvGrpSpPr>
+      <p:grpSpPr/>
+      <p:pic>
+        <p:nvPicPr>
+          <p:cNvPr id="2" name="Picture 1" descr="paper.png"/>
+          <p:cNvPicPr>
+            <a:picLocks noChangeAspect="1"/>
+          </p:cNvPicPr>
+          <p:nvPr/>
+        </p:nvPicPr>
+        <p:blipFill>
+          <a:blip r:embed="rId2"/>
+          <a:stretch>
+            <a:fillRect/>
+          </a:stretch>
+        </p:blipFill>
+        <p:spPr>
+          <a:xfrm>
+            <a:off x="0" y="0"/>
+            <a:ext cx="12191695" cy="6858000"/>
+          </a:xfrm>
+          <a:prstGeom prst="rect">
+            <a:avLst/>
+          </a:prstGeom>
+        </p:spPr>
+      </p:pic>
+      <p:sp>
+        <p:nvSpPr>
+          <p:cNvPr id="3" name="TextBox 2"/>
+          <p:cNvSpPr txBox="1"/>
+          <p:nvPr/>
+        </p:nvSpPr>
+        <p:spPr>
+          <a:xfrm>
+            <a:off x="685800" y="274320"/>
+            <a:ext cx="10881360" cy="822960"/>
+          </a:xfrm>
+          <a:prstGeom prst="rect">
+            <a:avLst/>
+          </a:prstGeom>
+          <a:noFill/>
+        </p:spPr>
+        <p:txBody>
+          <a:bodyPr wrap="square" lIns="0" rIns="0" tIns="0" bIns="0" anchor="t">
+            <a:spAutoFit/>
+          </a:bodyPr>
+          <a:lstStyle/>
+          <a:p>
+            <a:pPr algn="l">
+              <a:spcAft>
+                <a:spcPts val="800"/>
+              </a:spcAft>
+            </a:pPr>
+            <a:r>
+              <a:rPr sz="4600" b="1">
+                <a:solidFill>
+                  <a:srgbClr val="2B2D42"/>
+                </a:solidFill>
+                <a:latin typeface="Caveat"/>
+              </a:rPr>
+              <a:t>Caveats and next steps</a:t>
+            </a:r>
+          </a:p>
+        </p:txBody>
+      </p:sp>
+      <p:sp>
+        <p:nvSpPr>
+          <p:cNvPr id="4" name="TextBox 3"/>
+          <p:cNvSpPr txBox="1"/>
+          <p:nvPr/>
+        </p:nvSpPr>
+        <p:spPr>
+          <a:xfrm>
+            <a:off x="822960" y="1463040"/>
+            <a:ext cx="5486400" cy="4389120"/>
+          </a:xfrm>
+          <a:prstGeom prst="rect">
+            <a:avLst/>
+          </a:prstGeom>
+          <a:noFill/>
+        </p:spPr>
+        <p:txBody>
+          <a:bodyPr wrap="square" lIns="0" rIns="0" tIns="0" bIns="0" anchor="t">
+            <a:spAutoFit/>
+          </a:bodyPr>
+          <a:lstStyle/>
+          <a:p>
+            <a:pPr algn="l">
+              <a:spcAft>
                 <a:spcPts val="1000"/>
               </a:spcAft>
             </a:pPr>
@@ -9729,6 +10183,22 @@
                 <a:latin typeface="Patrick Hand"/>
               </a:rPr>
               <a:t>- Few control papers above 1,000 citations</a:t>
+            </a:r>
+          </a:p>
+          <a:p>
+            <a:pPr algn="l">
+              <a:spcAft>
+                <a:spcPts val="1000"/>
+              </a:spcAft>
+            </a:pPr>
+            <a:r>
+              <a:rPr sz="2100" b="0">
+                <a:solidFill>
+                  <a:srgbClr val="2B2D42"/>
+                </a:solidFill>
+                <a:latin typeface="Patrick Hand"/>
+              </a:rPr>
+              <a:t>- Label run settings (max length, thinking mode) not in the package</a:t>
             </a:r>
           </a:p>
         </p:txBody>
@@ -9742,7 +10212,7 @@
         <p:spPr>
           <a:xfrm rot="90000">
             <a:off x="6766560" y="1554480"/>
-            <a:ext cx="4663440" cy="3291840"/>
+            <a:ext cx="4663440" cy="3566160"/>
           </a:xfrm>
           <a:prstGeom prst="rect">
             <a:avLst/>
@@ -9787,7 +10257,7 @@
                 </a:solidFill>
                 <a:latin typeface="Patrick Hand"/>
               </a:rPr>
-              <a:t>Next</a:t>
+              <a:t>Stage 12 (running)</a:t>
             </a:r>
           </a:p>
           <a:p>
@@ -9803,7 +10273,7 @@
                 </a:solidFill>
                 <a:latin typeface="Patrick Hand"/>
               </a:rPr>
-              <a:t>1. Patch single positions (quote, year, "Authors:") to find which token carries the paper</a:t>
+              <a:t>1. Patch single positions (quote, year, "Authors:") - done, analysing</a:t>
             </a:r>
           </a:p>
           <a:p>
@@ -9819,7 +10289,7 @@
                 </a:solidFill>
                 <a:latin typeface="Patrick Hand"/>
               </a:rPr>
-              <a:t>2. Patch / probe per layer inside L24-L50 to see when it is computed</a:t>
+              <a:t>2. Attention vs MLP patching in L8-L56</a:t>
             </a:r>
           </a:p>
           <a:p>
@@ -9835,7 +10305,143 @@
                 </a:solidFill>
                 <a:latin typeface="Patrick Hand"/>
               </a:rPr>
-              <a:t>3. Repeat on a second model</a:t>
+              <a:t>3. A lens fitted on author prompts, read at L24-L62</a:t>
+            </a:r>
+          </a:p>
+          <a:p>
+            <a:pPr algn="l">
+              <a:spcAft>
+                <a:spcPts val="900"/>
+              </a:spcAft>
+            </a:pPr>
+            <a:r>
+              <a:rPr sz="1900" b="0">
+                <a:solidFill>
+                  <a:srgbClr val="2B2D42"/>
+                </a:solidFill>
+                <a:latin typeface="Patrick Hand"/>
+              </a:rPr>
+              <a:t>4. Name-prior baselines: distractor lists without a title; a prompt with no paper</a:t>
+            </a:r>
+          </a:p>
+        </p:txBody>
+      </p:sp>
+    </p:spTree>
+  </p:cSld>
+  <p:clrMapOvr>
+    <a:masterClrMapping/>
+  </p:clrMapOvr>
+</p:sld>
+</file>
+
+<file path=ppt/slides/slide25.xml><?xml version="1.0" encoding="utf-8"?>
+<p:sld xmlns:a="http://schemas.openxmlformats.org/drawingml/2006/main" xmlns:p="http://schemas.openxmlformats.org/presentationml/2006/main" xmlns:r="http://schemas.openxmlformats.org/officeDocument/2006/relationships">
+  <p:cSld>
+    <p:spTree>
+      <p:nvGrpSpPr>
+        <p:cNvPr id="1" name=""/>
+        <p:cNvGrpSpPr/>
+        <p:nvPr/>
+      </p:nvGrpSpPr>
+      <p:grpSpPr/>
+      <p:pic>
+        <p:nvPicPr>
+          <p:cNvPr id="2" name="Picture 1" descr="paper.png"/>
+          <p:cNvPicPr>
+            <a:picLocks noChangeAspect="1"/>
+          </p:cNvPicPr>
+          <p:nvPr/>
+        </p:nvPicPr>
+        <p:blipFill>
+          <a:blip r:embed="rId2"/>
+          <a:stretch>
+            <a:fillRect/>
+          </a:stretch>
+        </p:blipFill>
+        <p:spPr>
+          <a:xfrm>
+            <a:off x="0" y="0"/>
+            <a:ext cx="12191695" cy="6858000"/>
+          </a:xfrm>
+          <a:prstGeom prst="rect">
+            <a:avLst/>
+          </a:prstGeom>
+        </p:spPr>
+      </p:pic>
+      <p:sp>
+        <p:nvSpPr>
+          <p:cNvPr id="3" name="TextBox 2"/>
+          <p:cNvSpPr txBox="1"/>
+          <p:nvPr/>
+        </p:nvSpPr>
+        <p:spPr>
+          <a:xfrm>
+            <a:off x="822960" y="2377440"/>
+            <a:ext cx="10515600" cy="1097280"/>
+          </a:xfrm>
+          <a:prstGeom prst="rect">
+            <a:avLst/>
+          </a:prstGeom>
+          <a:noFill/>
+        </p:spPr>
+        <p:txBody>
+          <a:bodyPr wrap="square" lIns="0" rIns="0" tIns="0" bIns="0" anchor="t">
+            <a:spAutoFit/>
+          </a:bodyPr>
+          <a:lstStyle/>
+          <a:p>
+            <a:pPr algn="l">
+              <a:spcAft>
+                <a:spcPts val="800"/>
+              </a:spcAft>
+            </a:pPr>
+            <a:r>
+              <a:rPr sz="7200" b="1">
+                <a:solidFill>
+                  <a:srgbClr val="2B2D42"/>
+                </a:solidFill>
+                <a:latin typeface="Caveat"/>
+              </a:rPr>
+              <a:t>Appendix</a:t>
+            </a:r>
+          </a:p>
+        </p:txBody>
+      </p:sp>
+      <p:sp>
+        <p:nvSpPr>
+          <p:cNvPr id="4" name="TextBox 3"/>
+          <p:cNvSpPr txBox="1"/>
+          <p:nvPr/>
+        </p:nvSpPr>
+        <p:spPr>
+          <a:xfrm>
+            <a:off x="868680" y="3566160"/>
+            <a:ext cx="10058400" cy="731520"/>
+          </a:xfrm>
+          <a:prstGeom prst="rect">
+            <a:avLst/>
+          </a:prstGeom>
+          <a:noFill/>
+        </p:spPr>
+        <p:txBody>
+          <a:bodyPr wrap="square" lIns="0" rIns="0" tIns="0" bIns="0" anchor="t">
+            <a:spAutoFit/>
+          </a:bodyPr>
+          <a:lstStyle/>
+          <a:p>
+            <a:pPr algn="l">
+              <a:spcAft>
+                <a:spcPts val="800"/>
+              </a:spcAft>
+            </a:pPr>
+            <a:r>
+              <a:rPr sz="2400" b="0">
+                <a:solidFill>
+                  <a:srgbClr val="6E7080"/>
+                </a:solidFill>
+                <a:latin typeface="Patrick Hand"/>
+              </a:rPr>
+              <a:t>checks · readout levels · author chain · probe controls · lenses · citations · name formats</a:t>
             </a:r>
           </a:p>
         </p:txBody>
@@ -10241,8 +10847,8 @@
         </p:nvSpPr>
         <p:spPr>
           <a:xfrm>
-            <a:off x="822960" y="3566160"/>
-            <a:ext cx="6035040" cy="2560320"/>
+            <a:off x="822960" y="3246120"/>
+            <a:ext cx="10607040" cy="731520"/>
           </a:xfrm>
           <a:prstGeom prst="rect">
             <a:avLst/>
@@ -10257,6 +10863,72 @@
           <a:p>
             <a:pPr algn="l">
               <a:spcAft>
+                <a:spcPts val="800"/>
+              </a:spcAft>
+            </a:pPr>
+            <a:r>
+              <a:rPr sz="1800" b="1">
+                <a:solidFill>
+                  <a:srgbClr val="2B2D42"/>
+                </a:solidFill>
+                <a:latin typeface="Patrick Hand"/>
+              </a:rPr>
+              <a:t>Source: </a:t>
+            </a:r>
+            <a:r>
+              <a:rPr sz="1800" b="0">
+                <a:solidFill>
+                  <a:srgbClr val="2B2D42"/>
+                </a:solidFill>
+                <a:latin typeface="Patrick Hand"/>
+              </a:rPr>
+              <a:t>the </a:t>
+            </a:r>
+            <a:r>
+              <a:rPr sz="1800" b="1">
+                <a:solidFill>
+                  <a:srgbClr val="2B2D42"/>
+                </a:solidFill>
+                <a:latin typeface="Patrick Hand"/>
+              </a:rPr>
+              <a:t>Dreaming Up Authors</a:t>
+            </a:r>
+            <a:r>
+              <a:rPr sz="1800" b="0">
+                <a:solidFill>
+                  <a:srgbClr val="2B2D42"/>
+                </a:solidFill>
+                <a:latin typeface="Patrick Hand"/>
+              </a:rPr>
+              <a:t> evaluation set. 9,999,863 random OAG v2 records + Semantic Scholar metadata (Sep 2025) -&gt; quality filters -&gt; 1.92 M papers -&gt; up to 100 per field x citation bin</a:t>
+            </a:r>
+          </a:p>
+        </p:txBody>
+      </p:sp>
+      <p:sp>
+        <p:nvSpPr>
+          <p:cNvPr id="13" name="TextBox 12"/>
+          <p:cNvSpPr txBox="1"/>
+          <p:nvPr/>
+        </p:nvSpPr>
+        <p:spPr>
+          <a:xfrm>
+            <a:off x="822960" y="4069080"/>
+            <a:ext cx="6035040" cy="2194560"/>
+          </a:xfrm>
+          <a:prstGeom prst="rect">
+            <a:avLst/>
+          </a:prstGeom>
+          <a:noFill/>
+        </p:spPr>
+        <p:txBody>
+          <a:bodyPr wrap="square" lIns="0" rIns="0" tIns="0" bIns="0" anchor="t">
+            <a:spAutoFit/>
+          </a:bodyPr>
+          <a:lstStyle/>
+          <a:p>
+            <a:pPr algn="l">
+              <a:spcAft>
                 <a:spcPts val="1200"/>
               </a:spcAft>
             </a:pPr>
@@ -10276,7 +10948,7 @@
                 </a:solidFill>
                 <a:latin typeface="Patrick Hand"/>
               </a:rPr>
-              <a:t> (from an earlier labelling run of the same model)</a:t>
+              <a:t> (group lead's labelling run, same model)</a:t>
             </a:r>
           </a:p>
           <a:p>
@@ -10358,14 +11030,14 @@
       </p:sp>
       <p:sp>
         <p:nvSpPr>
-          <p:cNvPr id="13" name="Rectangle 12"/>
+          <p:cNvPr id="14" name="Rectangle 13"/>
           <p:cNvSpPr/>
           <p:nvPr/>
         </p:nvSpPr>
         <p:spPr>
           <a:xfrm rot="90000">
-            <a:off x="7498079" y="3749039"/>
-            <a:ext cx="3931920" cy="2103120"/>
+            <a:off x="7498079" y="4160520"/>
+            <a:ext cx="3931920" cy="1920240"/>
           </a:xfrm>
           <a:prstGeom prst="rect">
             <a:avLst/>
@@ -10523,21 +11195,60 @@
                 </a:solidFill>
                 <a:latin typeface="Caveat"/>
               </a:rPr>
-              <a:t>How we read the model</a:t>
-            </a:r>
-          </a:p>
-        </p:txBody>
-      </p:sp>
-      <p:sp>
-        <p:nvSpPr>
-          <p:cNvPr id="4" name="Rounded Rectangle 3"/>
+              <a:t>How groups and contrasts are built</a:t>
+            </a:r>
+          </a:p>
+        </p:txBody>
+      </p:sp>
+      <p:sp>
+        <p:nvSpPr>
+          <p:cNvPr id="4" name="TextBox 3"/>
+          <p:cNvSpPr txBox="1"/>
+          <p:nvPr/>
+        </p:nvSpPr>
+        <p:spPr>
+          <a:xfrm>
+            <a:off x="713232" y="987552"/>
+            <a:ext cx="10881360" cy="411480"/>
+          </a:xfrm>
+          <a:prstGeom prst="rect">
+            <a:avLst/>
+          </a:prstGeom>
+          <a:noFill/>
+        </p:spPr>
+        <p:txBody>
+          <a:bodyPr wrap="square" lIns="0" rIns="0" tIns="0" bIns="0" anchor="t">
+            <a:spAutoFit/>
+          </a:bodyPr>
+          <a:lstStyle/>
+          <a:p>
+            <a:pPr algn="l">
+              <a:spcAft>
+                <a:spcPts val="800"/>
+              </a:spcAft>
+            </a:pPr>
+            <a:r>
+              <a:rPr sz="1900" b="0">
+                <a:solidFill>
+                  <a:srgbClr val="6E7080"/>
+                </a:solidFill>
+                <a:latin typeface="Patrick Hand"/>
+              </a:rPr>
+              <a:t>labels: group lead's pipeline on the same Qwen3-32B · we use them unchanged</a:t>
+            </a:r>
+          </a:p>
+        </p:txBody>
+      </p:sp>
+      <p:sp>
+        <p:nvSpPr>
+          <p:cNvPr id="5" name="Rounded Rectangle 4"/>
           <p:cNvSpPr/>
           <p:nvPr/>
         </p:nvSpPr>
         <p:spPr>
-          <a:xfrm rot="21540000">
-            <a:off x="731520" y="1554480"/>
-            <a:ext cx="3291840" cy="1463040"/>
+          <a:xfrm rot="21564000">
+            <a:off x="685800" y="1508760"/>
+            <a:ext cx="5349240" cy="2286000"/>
           </a:xfrm>
           <a:prstGeom prst="roundRect">
             <a:avLst>
@@ -10575,13 +11286,13 @@
               </a:spcAft>
             </a:pPr>
             <a:r>
-              <a:rPr sz="1800" b="0">
-                <a:solidFill>
-                  <a:srgbClr val="2B2D42"/>
-                </a:solidFill>
-                <a:latin typeface="Patrick Hand"/>
-              </a:rPr>
-              <a:t>"Who are the authors of the paper titled </a:t>
+              <a:rPr sz="1600" b="1">
+                <a:solidFill>
+                  <a:srgbClr val="2B2D42"/>
+                </a:solidFill>
+                <a:latin typeface="Patrick Hand"/>
+              </a:rPr>
+              <a:t>open answer -&gt; R0 / R1 / R2</a:t>
             </a:r>
           </a:p>
           <a:p>
@@ -10591,22 +11302,13 @@
               </a:spcAft>
             </a:pPr>
             <a:r>
-              <a:rPr sz="1800" b="1">
-                <a:solidFill>
-                  <a:srgbClr val="E07A2F"/>
-                </a:solidFill>
-                <a:latin typeface="Patrick Hand"/>
-              </a:rPr>
-              <a:t>"{title}"</a:t>
-            </a:r>
-            <a:r>
-              <a:rPr sz="1800" b="0">
-                <a:solidFill>
-                  <a:srgbClr val="2B2D42"/>
-                </a:solidFill>
-                <a:latin typeface="Patrick Hand"/>
-              </a:rPr>
-              <a:t> ({year})? Authors: </a:t>
+              <a:rPr sz="1600" b="0">
+                <a:solidFill>
+                  <a:srgbClr val="2B2D42"/>
+                </a:solidFill>
+                <a:latin typeface="Patrick Hand"/>
+              </a:rPr>
+              <a:t>greedy, chat template</a:t>
             </a:r>
           </a:p>
           <a:p>
@@ -10616,53 +11318,65 @@
               </a:spcAft>
             </a:pPr>
             <a:r>
-              <a:rPr sz="1800" b="1">
-                <a:solidFill>
-                  <a:srgbClr val="3A6EA5"/>
-                </a:solidFill>
-                <a:latin typeface="Patrick Hand"/>
-              </a:rPr>
-              <a:t>S. Bree</a:t>
-            </a:r>
-          </a:p>
-        </p:txBody>
-      </p:sp>
-      <p:cxnSp>
-        <p:nvCxnSpPr>
-          <p:cNvPr id="5" name="Connector 4"/>
-          <p:cNvCxnSpPr/>
-          <p:nvPr/>
-        </p:nvCxnSpPr>
-        <p:spPr>
-          <a:xfrm>
-            <a:off x="4114800" y="2286000"/>
-            <a:ext cx="731520" cy="0"/>
-          </a:xfrm>
-          <a:prstGeom prst="line">
-            <a:avLst/>
-          </a:prstGeom>
-          <a:ln w="28575">
-            <a:solidFill>
-              <a:srgbClr val="2B2D42"/>
-            </a:solidFill>
-            <a:tailEnd type="triangle" w="med" len="med"/>
-          </a:ln>
-        </p:spPr>
-        <p:style>
-          <a:lnRef idx="2">
-            <a:schemeClr val="accent1"/>
-          </a:lnRef>
-          <a:fillRef idx="0">
-            <a:schemeClr val="accent1"/>
-          </a:fillRef>
-          <a:effectRef idx="1">
-            <a:schemeClr val="accent1"/>
-          </a:effectRef>
-          <a:fontRef idx="minor">
-            <a:schemeClr val="tx1"/>
-          </a:fontRef>
-        </p:style>
-      </p:cxnSp>
+              <a:rPr sz="1600" b="0">
+                <a:solidFill>
+                  <a:srgbClr val="2B2D42"/>
+                </a:solidFill>
+                <a:latin typeface="Patrick Hand"/>
+              </a:rPr>
+              <a:t>fuzzy name match: M, H, U</a:t>
+            </a:r>
+          </a:p>
+          <a:p>
+            <a:pPr algn="ctr">
+              <a:spcAft>
+                <a:spcPts val="400"/>
+              </a:spcAft>
+            </a:pPr>
+            <a:r>
+              <a:rPr sz="1600" b="0">
+                <a:solidFill>
+                  <a:srgbClr val="2B2D42"/>
+                </a:solidFill>
+                <a:latin typeface="Patrick Hand"/>
+              </a:rPr>
+              <a:t>HR2 = (H+U) / (M+H+U)</a:t>
+            </a:r>
+          </a:p>
+          <a:p>
+            <a:pPr algn="ctr">
+              <a:spcAft>
+                <a:spcPts val="400"/>
+              </a:spcAft>
+            </a:pPr>
+            <a:r>
+              <a:rPr sz="1600" b="0">
+                <a:solidFill>
+                  <a:srgbClr val="2B2D42"/>
+                </a:solidFill>
+                <a:latin typeface="Patrick Hand"/>
+              </a:rPr>
+              <a:t>R2: HR2 &lt;= 0.5 · R0: M = 0 · R1: M &gt; 0</a:t>
+            </a:r>
+          </a:p>
+          <a:p>
+            <a:pPr algn="ctr">
+              <a:spcAft>
+                <a:spcPts val="400"/>
+              </a:spcAft>
+            </a:pPr>
+            <a:r>
+              <a:rPr sz="1600" b="0">
+                <a:solidFill>
+                  <a:srgbClr val="2B2D42"/>
+                </a:solidFill>
+                <a:latin typeface="Patrick Hand"/>
+              </a:rPr>
+              <a:t>a fixed rule, no human or model judge</a:t>
+            </a:r>
+          </a:p>
+        </p:txBody>
+      </p:sp>
       <p:sp>
         <p:nvSpPr>
           <p:cNvPr id="6" name="Rounded Rectangle 5"/>
@@ -10670,9 +11384,9 @@
           <p:nvPr/>
         </p:nvSpPr>
         <p:spPr>
-          <a:xfrm>
-            <a:off x="4937760" y="1554480"/>
-            <a:ext cx="2743200" cy="1463040"/>
+          <a:xfrm rot="36000">
+            <a:off x="6309360" y="1508760"/>
+            <a:ext cx="5349240" cy="2286000"/>
           </a:xfrm>
           <a:prstGeom prst="roundRect">
             <a:avLst>
@@ -10682,7 +11396,7 @@
           <a:noFill/>
           <a:ln w="28575">
             <a:solidFill>
-              <a:srgbClr val="2B2D42"/>
+              <a:srgbClr val="E07A2F"/>
             </a:solidFill>
           </a:ln>
         </p:spPr>
@@ -10710,13 +11424,13 @@
               </a:spcAft>
             </a:pPr>
             <a:r>
-              <a:rPr sz="1900" b="1">
-                <a:solidFill>
-                  <a:srgbClr val="2B2D42"/>
-                </a:solidFill>
-                <a:latin typeface="Patrick Hand"/>
-              </a:rPr>
-              <a:t>hidden state</a:t>
+              <a:rPr sz="1600" b="1">
+                <a:solidFill>
+                  <a:srgbClr val="E07A2F"/>
+                </a:solidFill>
+                <a:latin typeface="Patrick Hand"/>
+              </a:rPr>
+              <a:t>multiple choice -&gt; target / control</a:t>
             </a:r>
           </a:p>
           <a:p>
@@ -10726,13 +11440,13 @@
               </a:spcAft>
             </a:pPr>
             <a:r>
-              <a:rPr sz="1900" b="0">
-                <a:solidFill>
-                  <a:srgbClr val="2B2D42"/>
-                </a:solidFill>
-                <a:latin typeface="Patrick Hand"/>
-              </a:rPr>
-              <a:t>layers 24 · 32 · 40</a:t>
+              <a:rPr sz="1600" b="0">
+                <a:solidFill>
+                  <a:srgbClr val="E07A2F"/>
+                </a:solidFill>
+                <a:latin typeface="Patrick Hand"/>
+              </a:rPr>
+              <a:t>true list + 3 real teams of other papers</a:t>
             </a:r>
           </a:p>
           <a:p>
@@ -10742,63 +11456,75 @@
               </a:spcAft>
             </a:pPr>
             <a:r>
-              <a:rPr sz="1900" b="0">
-                <a:solidFill>
-                  <a:srgbClr val="2B2D42"/>
-                </a:solidFill>
-                <a:latin typeface="Patrick Hand"/>
-              </a:rPr>
-              <a:t>48 · 56 · 62</a:t>
-            </a:r>
-          </a:p>
-        </p:txBody>
-      </p:sp>
-      <p:cxnSp>
-        <p:nvCxnSpPr>
-          <p:cNvPr id="7" name="Connector 6"/>
-          <p:cNvCxnSpPr/>
-          <p:nvPr/>
-        </p:nvCxnSpPr>
-        <p:spPr>
-          <a:xfrm>
-            <a:off x="7772400" y="2286000"/>
-            <a:ext cx="731520" cy="0"/>
-          </a:xfrm>
-          <a:prstGeom prst="line">
-            <a:avLst/>
-          </a:prstGeom>
-          <a:ln w="28575">
-            <a:solidFill>
-              <a:srgbClr val="2B2D42"/>
-            </a:solidFill>
-            <a:tailEnd type="triangle" w="med" len="med"/>
-          </a:ln>
-        </p:spPr>
-        <p:style>
-          <a:lnRef idx="2">
-            <a:schemeClr val="accent1"/>
-          </a:lnRef>
-          <a:fillRef idx="0">
-            <a:schemeClr val="accent1"/>
-          </a:fillRef>
-          <a:effectRef idx="1">
-            <a:schemeClr val="accent1"/>
-          </a:effectRef>
-          <a:fontRef idx="minor">
-            <a:schemeClr val="tx1"/>
-          </a:fontRef>
-        </p:style>
-      </p:cxnSp>
-      <p:sp>
-        <p:nvSpPr>
-          <p:cNvPr id="8" name="Rounded Rectangle 7"/>
+              <a:rPr sz="1600" b="0">
+                <a:solidFill>
+                  <a:srgbClr val="E07A2F"/>
+                </a:solidFill>
+                <a:latin typeface="Patrick Hand"/>
+              </a:rPr>
+              <a:t>(same field, team size, citation bin, ~year)</a:t>
+            </a:r>
+          </a:p>
+          <a:p>
+            <a:pPr algn="ctr">
+              <a:spcAft>
+                <a:spcPts val="400"/>
+              </a:spcAft>
+            </a:pPr>
+            <a:r>
+              <a:rPr sz="1600" b="0">
+                <a:solidFill>
+                  <a:srgbClr val="E07A2F"/>
+                </a:solidFill>
+                <a:latin typeface="Patrick Hand"/>
+              </a:rPr>
+              <a:t>4 orders · p(letter) from next token</a:t>
+            </a:r>
+          </a:p>
+          <a:p>
+            <a:pPr algn="ctr">
+              <a:spcAft>
+                <a:spcPts val="400"/>
+              </a:spcAft>
+            </a:pPr>
+            <a:r>
+              <a:rPr sz="1600" b="0">
+                <a:solidFill>
+                  <a:srgbClr val="E07A2F"/>
+                </a:solidFill>
+                <a:latin typeface="Patrick Hand"/>
+              </a:rPr>
+              <a:t>target: 4/4 and mean p(true) &gt;= 0.5</a:t>
+            </a:r>
+          </a:p>
+          <a:p>
+            <a:pPr algn="ctr">
+              <a:spcAft>
+                <a:spcPts val="400"/>
+              </a:spcAft>
+            </a:pPr>
+            <a:r>
+              <a:rPr sz="1600" b="0">
+                <a:solidFill>
+                  <a:srgbClr val="E07A2F"/>
+                </a:solidFill>
+                <a:latin typeface="Patrick Hand"/>
+              </a:rPr>
+              <a:t>control: &lt;= 1/4</a:t>
+            </a:r>
+          </a:p>
+        </p:txBody>
+      </p:sp>
+      <p:sp>
+        <p:nvSpPr>
+          <p:cNvPr id="7" name="Rounded Rectangle 6"/>
           <p:cNvSpPr/>
           <p:nvPr/>
         </p:nvSpPr>
         <p:spPr>
-          <a:xfrm rot="60000">
-            <a:off x="8595360" y="1417320"/>
-            <a:ext cx="3017520" cy="1737360"/>
+          <a:xfrm rot="30000">
+            <a:off x="685800" y="3977639"/>
+            <a:ext cx="5349240" cy="2286000"/>
           </a:xfrm>
           <a:prstGeom prst="roundRect">
             <a:avLst>
@@ -10808,7 +11534,7 @@
           <a:noFill/>
           <a:ln w="28575">
             <a:solidFill>
-              <a:srgbClr val="2B2D42"/>
+              <a:srgbClr val="3A6EA5"/>
             </a:solidFill>
           </a:ln>
         </p:spPr>
@@ -10836,13 +11562,13 @@
               </a:spcAft>
             </a:pPr>
             <a:r>
-              <a:rPr sz="1800" b="1">
-                <a:solidFill>
-                  <a:srgbClr val="2B2D42"/>
-                </a:solidFill>
-                <a:latin typeface="Patrick Hand"/>
-              </a:rPr>
-              <a:t>readouts</a:t>
+              <a:rPr sz="1600" b="1">
+                <a:solidFill>
+                  <a:srgbClr val="3A6EA5"/>
+                </a:solidFill>
+                <a:latin typeface="Patrick Hand"/>
+              </a:rPr>
+              <a:t>5 false titles per paper</a:t>
             </a:r>
           </a:p>
           <a:p>
@@ -10852,13 +11578,13 @@
               </a:spcAft>
             </a:pPr>
             <a:r>
-              <a:rPr sz="1800" b="0">
-                <a:solidFill>
-                  <a:srgbClr val="2B2D42"/>
-                </a:solidFill>
-                <a:latin typeface="Patrick Hand"/>
-              </a:rPr>
-              <a:t>logit lens</a:t>
+              <a:rPr sz="1600" b="0">
+                <a:solidFill>
+                  <a:srgbClr val="3A6EA5"/>
+                </a:solidFill>
+                <a:latin typeface="Patrick Hand"/>
+              </a:rPr>
+              <a:t>same field, own year kept</a:t>
             </a:r>
           </a:p>
           <a:p>
@@ -10868,13 +11594,13 @@
               </a:spcAft>
             </a:pPr>
             <a:r>
-              <a:rPr sz="1800" b="0">
-                <a:solidFill>
-                  <a:srgbClr val="2B2D42"/>
-                </a:solidFill>
-                <a:latin typeface="Patrick Hand"/>
-              </a:rPr>
-              <a:t>3 Jacobian lenses</a:t>
+              <a:rPr sz="1600" b="0">
+                <a:solidFill>
+                  <a:srgbClr val="3A6EA5"/>
+                </a:solidFill>
+                <a:latin typeface="Patrick Hand"/>
+              </a:rPr>
+              <a:t>min-cost on |dyear|/5 + |dauthors|</a:t>
             </a:r>
           </a:p>
           <a:p>
@@ -10884,129 +11610,71 @@
               </a:spcAft>
             </a:pPr>
             <a:r>
-              <a:rPr sz="1800" b="0">
-                <a:solidFill>
-                  <a:srgbClr val="2B2D42"/>
-                </a:solidFill>
-                <a:latin typeface="Patrick Hand"/>
-              </a:rPr>
-              <a:t>real output (L63)</a:t>
-            </a:r>
-          </a:p>
-        </p:txBody>
-      </p:sp>
-      <p:sp>
-        <p:nvSpPr>
-          <p:cNvPr id="9" name="TextBox 8"/>
-          <p:cNvSpPr txBox="1"/>
-          <p:nvPr/>
-        </p:nvSpPr>
-        <p:spPr>
-          <a:xfrm>
-            <a:off x="777240" y="3520440"/>
-            <a:ext cx="5394960" cy="2377440"/>
-          </a:xfrm>
-          <a:prstGeom prst="rect">
-            <a:avLst/>
+              <a:rPr sz="1600" b="0">
+                <a:solidFill>
+                  <a:srgbClr val="3A6EA5"/>
+                </a:solidFill>
+                <a:latin typeface="Patrick Hand"/>
+              </a:rPr>
+              <a:t>+ |dtitle tokens| + 1.5 |dcitation bin|</a:t>
+            </a:r>
+          </a:p>
+          <a:p>
+            <a:pPr algn="ctr">
+              <a:spcAft>
+                <a:spcPts val="400"/>
+              </a:spcAft>
+            </a:pPr>
+            <a:r>
+              <a:rPr sz="1600" b="0">
+                <a:solidFill>
+                  <a:srgbClr val="3A6EA5"/>
+                </a:solidFill>
+                <a:latin typeface="Patrick Hand"/>
+              </a:rPr>
+              <a:t>no shared surname, Jaccard &lt;= 0.6</a:t>
+            </a:r>
+          </a:p>
+          <a:p>
+            <a:pPr algn="ctr">
+              <a:spcAft>
+                <a:spcPts val="400"/>
+              </a:spcAft>
+            </a:pPr>
+            <a:r>
+              <a:rPr sz="1600" b="0">
+                <a:solidFill>
+                  <a:srgbClr val="3A6EA5"/>
+                </a:solidFill>
+                <a:latin typeface="Patrick Hand"/>
+              </a:rPr>
+              <a:t>79% strict tier</a:t>
+            </a:r>
+          </a:p>
+        </p:txBody>
+      </p:sp>
+      <p:sp>
+        <p:nvSpPr>
+          <p:cNvPr id="8" name="Rounded Rectangle 7"/>
+          <p:cNvSpPr/>
+          <p:nvPr/>
+        </p:nvSpPr>
+        <p:spPr>
+          <a:xfrm rot="21570000">
+            <a:off x="6309360" y="3977639"/>
+            <a:ext cx="5349240" cy="2286000"/>
+          </a:xfrm>
+          <a:prstGeom prst="roundRect">
+            <a:avLst>
+              <a:gd name="adj" fmla="val 8000"/>
+            </a:avLst>
           </a:prstGeom>
           <a:noFill/>
-        </p:spPr>
-        <p:txBody>
-          <a:bodyPr wrap="square" lIns="0" rIns="0" tIns="0" bIns="0" anchor="t">
-            <a:spAutoFit/>
-          </a:bodyPr>
-          <a:lstStyle/>
-          <a:p>
-            <a:pPr algn="l">
-              <a:spcAft>
-                <a:spcPts val="1200"/>
-              </a:spcAft>
-            </a:pPr>
-            <a:r>
-              <a:rPr sz="2000" b="1">
-                <a:solidFill>
-                  <a:srgbClr val="2B2D42"/>
-                </a:solidFill>
-                <a:latin typeface="Patrick Hand"/>
-              </a:rPr>
-              <a:t>Score</a:t>
-            </a:r>
-            <a:r>
-              <a:rPr sz="2000" b="0">
-                <a:solidFill>
-                  <a:srgbClr val="2B2D42"/>
-                </a:solidFill>
-                <a:latin typeface="Patrick Hand"/>
-              </a:rPr>
-              <a:t> = rank of the correct next name token,</a:t>
-            </a:r>
-          </a:p>
-          <a:p>
-            <a:pPr algn="l">
-              <a:spcAft>
-                <a:spcPts val="1200"/>
-              </a:spcAft>
-            </a:pPr>
-            <a:r>
-              <a:rPr sz="2000" b="0">
-                <a:solidFill>
-                  <a:srgbClr val="2B2D42"/>
-                </a:solidFill>
-                <a:latin typeface="Patrick Hand"/>
-              </a:rPr>
-              <a:t>as log10(1 / rank):  0 = rank 1,  -1 = rank 10</a:t>
-            </a:r>
-          </a:p>
-          <a:p>
-            <a:pPr algn="l">
-              <a:spcAft>
-                <a:spcPts val="1200"/>
-              </a:spcAft>
-            </a:pPr>
-            <a:r>
-              <a:rPr sz="2000" b="1">
-                <a:solidFill>
-                  <a:srgbClr val="2B2D42"/>
-                </a:solidFill>
-                <a:latin typeface="Patrick Hand"/>
-              </a:rPr>
-              <a:t>7 title conditions</a:t>
-            </a:r>
-            <a:r>
-              <a:rPr sz="2000" b="0">
-                <a:solidFill>
-                  <a:srgbClr val="2B2D42"/>
-                </a:solidFill>
-                <a:latin typeface="Patrick Hand"/>
-              </a:rPr>
-              <a:t>: the true title, 5 matched false titles, no title</a:t>
-            </a:r>
-          </a:p>
-        </p:txBody>
-      </p:sp>
-      <p:sp>
-        <p:nvSpPr>
-          <p:cNvPr id="10" name="Rectangle 9"/>
-          <p:cNvSpPr/>
-          <p:nvPr/>
-        </p:nvSpPr>
-        <p:spPr>
-          <a:xfrm rot="21510000">
-            <a:off x="6675120" y="3657600"/>
-            <a:ext cx="4754880" cy="2103120"/>
-          </a:xfrm>
-          <a:prstGeom prst="rect">
-            <a:avLst/>
-          </a:prstGeom>
-          <a:solidFill>
-            <a:srgbClr val="FFF1A8"/>
-          </a:solidFill>
-          <a:ln w="12700">
+          <a:ln w="28575">
             <a:solidFill>
-              <a:srgbClr val="E2D37A"/>
+              <a:srgbClr val="3C8D5A"/>
             </a:solidFill>
           </a:ln>
-          <a:effectLst/>
         </p:spPr>
         <p:style>
           <a:lnRef idx="1">
@@ -11023,109 +11691,102 @@
           </a:fontRef>
         </p:style>
         <p:txBody>
-          <a:bodyPr rtlCol="0" anchor="t" wrap="square" lIns="201168" rIns="201168" tIns="164592" bIns="164592"/>
-          <a:lstStyle/>
-          <a:p>
-            <a:pPr algn="l">
-              <a:spcAft>
-                <a:spcPts val="900"/>
-              </a:spcAft>
-            </a:pPr>
-            <a:r>
-              <a:rPr sz="2000" b="1">
-                <a:solidFill>
-                  <a:srgbClr val="2B2D42"/>
-                </a:solidFill>
-                <a:latin typeface="Patrick Hand"/>
-              </a:rPr>
-              <a:t>title-specific signal</a:t>
-            </a:r>
-          </a:p>
-          <a:p>
-            <a:pPr algn="l">
-              <a:spcAft>
-                <a:spcPts val="900"/>
-              </a:spcAft>
-            </a:pPr>
-            <a:r>
-              <a:rPr sz="2000" b="0">
-                <a:solidFill>
-                  <a:srgbClr val="2B2D42"/>
-                </a:solidFill>
-                <a:latin typeface="Patrick Hand"/>
-              </a:rPr>
-              <a:t>= true title  -  mean(5 false titles)</a:t>
-            </a:r>
-          </a:p>
-          <a:p>
-            <a:pPr algn="l">
-              <a:spcAft>
-                <a:spcPts val="900"/>
-              </a:spcAft>
-            </a:pPr>
-            <a:r>
-              <a:rPr sz="2000" b="0">
-                <a:solidFill>
-                  <a:srgbClr val="2B2D42"/>
-                </a:solidFill>
-                <a:latin typeface="Patrick Hand"/>
-              </a:rPr>
-              <a:t>Same name, same tokens: what is left is knowing </a:t>
-            </a:r>
-          </a:p>
-          <a:p>
-            <a:pPr algn="l">
-              <a:spcAft>
-                <a:spcPts val="900"/>
-              </a:spcAft>
-            </a:pPr>
-            <a:r>
-              <a:rPr sz="2000" b="1">
-                <a:solidFill>
-                  <a:srgbClr val="E07A2F"/>
-                </a:solidFill>
-                <a:latin typeface="Patrick Hand"/>
-              </a:rPr>
-              <a:t>this paper</a:t>
-            </a:r>
-          </a:p>
-        </p:txBody>
-      </p:sp>
-      <p:sp>
-        <p:nvSpPr>
-          <p:cNvPr id="11" name="TextBox 10"/>
-          <p:cNvSpPr txBox="1"/>
-          <p:nvPr/>
-        </p:nvSpPr>
-        <p:spPr>
-          <a:xfrm>
-            <a:off x="713232" y="6355080"/>
-            <a:ext cx="10789920" cy="320040"/>
-          </a:xfrm>
-          <a:prstGeom prst="rect">
-            <a:avLst/>
-          </a:prstGeom>
-          <a:noFill/>
-        </p:spPr>
-        <p:txBody>
-          <a:bodyPr wrap="square" lIns="0" rIns="0" tIns="0" bIns="0" anchor="t">
-            <a:spAutoFit/>
-          </a:bodyPr>
-          <a:lstStyle/>
-          <a:p>
-            <a:pPr algn="l">
-              <a:spcAft>
-                <a:spcPts val="800"/>
-              </a:spcAft>
-            </a:pPr>
-            <a:r>
-              <a:rPr sz="1400" b="0">
-                <a:solidFill>
-                  <a:srgbClr val="6E7080"/>
-                </a:solidFill>
-                <a:latin typeface="Patrick Hand"/>
-              </a:rPr>
-              <a:t>Target vs control is always compared within a citation bin. 95% bootstrap CIs over papers (2,000 draws).</a:t>
+          <a:bodyPr rtlCol="0" anchor="ctr" wrap="square" lIns="164592" rIns="164592"/>
+          <a:lstStyle/>
+          <a:p>
+            <a:pPr algn="ctr">
+              <a:spcAft>
+                <a:spcPts val="400"/>
+              </a:spcAft>
+            </a:pPr>
+            <a:r>
+              <a:rPr sz="1600" b="1">
+                <a:solidFill>
+                  <a:srgbClr val="3C8D5A"/>
+                </a:solidFill>
+                <a:latin typeface="Patrick Hand"/>
+              </a:rPr>
+              <a:t>statistics</a:t>
+            </a:r>
+          </a:p>
+          <a:p>
+            <a:pPr algn="ctr">
+              <a:spcAft>
+                <a:spcPts val="400"/>
+              </a:spcAft>
+            </a:pPr>
+            <a:r>
+              <a:rPr sz="1600" b="0">
+                <a:solidFill>
+                  <a:srgbClr val="3C8D5A"/>
+                </a:solidFill>
+                <a:latin typeface="Patrick Hand"/>
+              </a:rPr>
+              <a:t>target vs control only within citation bin</a:t>
+            </a:r>
+          </a:p>
+          <a:p>
+            <a:pPr algn="ctr">
+              <a:spcAft>
+                <a:spcPts val="400"/>
+              </a:spcAft>
+            </a:pPr>
+            <a:r>
+              <a:rPr sz="1600" b="0">
+                <a:solidFill>
+                  <a:srgbClr val="3C8D5A"/>
+                </a:solidFill>
+                <a:latin typeface="Patrick Hand"/>
+              </a:rPr>
+              <a:t>10 bins with &gt;= 30 per group</a:t>
+            </a:r>
+          </a:p>
+          <a:p>
+            <a:pPr algn="ctr">
+              <a:spcAft>
+                <a:spcPts val="400"/>
+              </a:spcAft>
+            </a:pPr>
+            <a:r>
+              <a:rPr sz="1600" b="0">
+                <a:solidFill>
+                  <a:srgbClr val="3C8D5A"/>
+                </a:solidFill>
+                <a:latin typeface="Patrick Hand"/>
+              </a:rPr>
+              <a:t>weight n_t n_c / (n_t + n_c)</a:t>
+            </a:r>
+          </a:p>
+          <a:p>
+            <a:pPr algn="ctr">
+              <a:spcAft>
+                <a:spcPts val="400"/>
+              </a:spcAft>
+            </a:pPr>
+            <a:r>
+              <a:rPr sz="1600" b="0">
+                <a:solidFill>
+                  <a:srgbClr val="3C8D5A"/>
+                </a:solidFill>
+                <a:latin typeface="Patrick Hand"/>
+              </a:rPr>
+              <a:t>95% bootstrap over papers, 2,000</a:t>
+            </a:r>
+          </a:p>
+          <a:p>
+            <a:pPr algn="ctr">
+              <a:spcAft>
+                <a:spcPts val="400"/>
+              </a:spcAft>
+            </a:pPr>
+            <a:r>
+              <a:rPr sz="1600" b="0">
+                <a:solidFill>
+                  <a:srgbClr val="3C8D5A"/>
+                </a:solidFill>
+                <a:latin typeface="Patrick Hand"/>
+              </a:rPr>
+              <a:t>sensitivity: drop bins 0-4</a:t>
             </a:r>
           </a:p>
         </p:txBody>
@@ -11206,7 +11867,7 @@
                 </a:solidFill>
                 <a:latin typeface="Caveat"/>
               </a:rPr>
-              <a:t>Can we trust the numbers?</a:t>
+              <a:t>How we read the model</a:t>
             </a:r>
           </a:p>
         </p:txBody>
@@ -11219,8 +11880,8 @@
         </p:nvSpPr>
         <p:spPr>
           <a:xfrm rot="21540000">
-            <a:off x="822960" y="1828800"/>
-            <a:ext cx="3383280" cy="2377440"/>
+            <a:off x="731520" y="1554480"/>
+            <a:ext cx="3291840" cy="1463040"/>
           </a:xfrm>
           <a:prstGeom prst="roundRect">
             <a:avLst>
@@ -11230,7 +11891,7 @@
           <a:noFill/>
           <a:ln w="28575">
             <a:solidFill>
-              <a:srgbClr val="3A6EA5"/>
+              <a:srgbClr val="2B2D42"/>
             </a:solidFill>
           </a:ln>
         </p:spPr>
@@ -11258,43 +11919,104 @@
               </a:spcAft>
             </a:pPr>
             <a:r>
-              <a:rPr sz="1900" b="1">
+              <a:rPr sz="1800" b="0">
+                <a:solidFill>
+                  <a:srgbClr val="2B2D42"/>
+                </a:solidFill>
+                <a:latin typeface="Patrick Hand"/>
+              </a:rPr>
+              <a:t>"Who are the authors of the paper titled </a:t>
+            </a:r>
+          </a:p>
+          <a:p>
+            <a:pPr algn="ctr">
+              <a:spcAft>
+                <a:spcPts val="400"/>
+              </a:spcAft>
+            </a:pPr>
+            <a:r>
+              <a:rPr sz="1800" b="1">
+                <a:solidFill>
+                  <a:srgbClr val="E07A2F"/>
+                </a:solidFill>
+                <a:latin typeface="Patrick Hand"/>
+              </a:rPr>
+              <a:t>"{title}"</a:t>
+            </a:r>
+            <a:r>
+              <a:rPr sz="1800" b="0">
+                <a:solidFill>
+                  <a:srgbClr val="2B2D42"/>
+                </a:solidFill>
+                <a:latin typeface="Patrick Hand"/>
+              </a:rPr>
+              <a:t> ({year})? Authors: </a:t>
+            </a:r>
+          </a:p>
+          <a:p>
+            <a:pPr algn="ctr">
+              <a:spcAft>
+                <a:spcPts val="400"/>
+              </a:spcAft>
+            </a:pPr>
+            <a:r>
+              <a:rPr sz="1800" b="1">
                 <a:solidFill>
                   <a:srgbClr val="3A6EA5"/>
                 </a:solidFill>
                 <a:latin typeface="Patrick Hand"/>
               </a:rPr>
-              <a:t>fast = slow</a:t>
-            </a:r>
-          </a:p>
-          <a:p>
-            <a:pPr algn="ctr">
-              <a:spcAft>
-                <a:spcPts val="400"/>
-              </a:spcAft>
-            </a:pPr>
-            <a:r>
-              <a:rPr sz="1900" b="0">
-                <a:solidFill>
-                  <a:srgbClr val="3A6EA5"/>
-                </a:solidFill>
-                <a:latin typeface="Patrick Hand"/>
-              </a:rPr>
-              <a:t>One forward pass vs one per prefix: max gap 0.37 logit (bf16 rounding); ranks 1-41 identical</a:t>
-            </a:r>
-          </a:p>
-        </p:txBody>
-      </p:sp>
-      <p:sp>
-        <p:nvSpPr>
-          <p:cNvPr id="5" name="Rounded Rectangle 4"/>
+              <a:t>S. Bree</a:t>
+            </a:r>
+          </a:p>
+        </p:txBody>
+      </p:sp>
+      <p:cxnSp>
+        <p:nvCxnSpPr>
+          <p:cNvPr id="5" name="Connector 4"/>
+          <p:cNvCxnSpPr/>
+          <p:nvPr/>
+        </p:nvCxnSpPr>
+        <p:spPr>
+          <a:xfrm>
+            <a:off x="4114800" y="2286000"/>
+            <a:ext cx="731520" cy="0"/>
+          </a:xfrm>
+          <a:prstGeom prst="line">
+            <a:avLst/>
+          </a:prstGeom>
+          <a:ln w="28575">
+            <a:solidFill>
+              <a:srgbClr val="2B2D42"/>
+            </a:solidFill>
+            <a:tailEnd type="triangle" w="med" len="med"/>
+          </a:ln>
+        </p:spPr>
+        <p:style>
+          <a:lnRef idx="2">
+            <a:schemeClr val="accent1"/>
+          </a:lnRef>
+          <a:fillRef idx="0">
+            <a:schemeClr val="accent1"/>
+          </a:fillRef>
+          <a:effectRef idx="1">
+            <a:schemeClr val="accent1"/>
+          </a:effectRef>
+          <a:fontRef idx="minor">
+            <a:schemeClr val="tx1"/>
+          </a:fontRef>
+        </p:style>
+      </p:cxnSp>
+      <p:sp>
+        <p:nvSpPr>
+          <p:cNvPr id="6" name="Rounded Rectangle 5"/>
           <p:cNvSpPr/>
           <p:nvPr/>
         </p:nvSpPr>
         <p:spPr>
-          <a:xfrm rot="60000">
-            <a:off x="4572000" y="1828800"/>
-            <a:ext cx="3383280" cy="2377440"/>
+          <a:xfrm>
+            <a:off x="4937760" y="1554480"/>
+            <a:ext cx="2743200" cy="1463040"/>
           </a:xfrm>
           <a:prstGeom prst="roundRect">
             <a:avLst>
@@ -11304,7 +12026,7 @@
           <a:noFill/>
           <a:ln w="28575">
             <a:solidFill>
-              <a:srgbClr val="3C8D5A"/>
+              <a:srgbClr val="2B2D42"/>
             </a:solidFill>
           </a:ln>
         </p:spPr>
@@ -11334,11 +12056,11 @@
             <a:r>
               <a:rPr sz="1900" b="1">
                 <a:solidFill>
-                  <a:srgbClr val="3C8D5A"/>
-                </a:solidFill>
-                <a:latin typeface="Patrick Hand"/>
-              </a:rPr>
-              <a:t>matches Stage 6</a:t>
+                  <a:srgbClr val="2B2D42"/>
+                </a:solidFill>
+                <a:latin typeface="Patrick Hand"/>
+              </a:rPr>
+              <a:t>hidden state</a:t>
             </a:r>
           </a:p>
           <a:p>
@@ -11350,25 +12072,77 @@
             <a:r>
               <a:rPr sz="1900" b="0">
                 <a:solidFill>
-                  <a:srgbClr val="3C8D5A"/>
-                </a:solidFill>
-                <a:latin typeface="Patrick Hand"/>
-              </a:rPr>
-              <a:t>972 tokens: same token ids, median log-prob gap ~1e-5</a:t>
-            </a:r>
-          </a:p>
-        </p:txBody>
-      </p:sp>
-      <p:sp>
-        <p:nvSpPr>
-          <p:cNvPr id="6" name="Rounded Rectangle 5"/>
+                  <a:srgbClr val="2B2D42"/>
+                </a:solidFill>
+                <a:latin typeface="Patrick Hand"/>
+              </a:rPr>
+              <a:t>layers 24 · 32 · 40</a:t>
+            </a:r>
+          </a:p>
+          <a:p>
+            <a:pPr algn="ctr">
+              <a:spcAft>
+                <a:spcPts val="400"/>
+              </a:spcAft>
+            </a:pPr>
+            <a:r>
+              <a:rPr sz="1900" b="0">
+                <a:solidFill>
+                  <a:srgbClr val="2B2D42"/>
+                </a:solidFill>
+                <a:latin typeface="Patrick Hand"/>
+              </a:rPr>
+              <a:t>48 · 56 · 62</a:t>
+            </a:r>
+          </a:p>
+        </p:txBody>
+      </p:sp>
+      <p:cxnSp>
+        <p:nvCxnSpPr>
+          <p:cNvPr id="7" name="Connector 6"/>
+          <p:cNvCxnSpPr/>
+          <p:nvPr/>
+        </p:nvCxnSpPr>
+        <p:spPr>
+          <a:xfrm>
+            <a:off x="7772400" y="2286000"/>
+            <a:ext cx="731520" cy="0"/>
+          </a:xfrm>
+          <a:prstGeom prst="line">
+            <a:avLst/>
+          </a:prstGeom>
+          <a:ln w="28575">
+            <a:solidFill>
+              <a:srgbClr val="2B2D42"/>
+            </a:solidFill>
+            <a:tailEnd type="triangle" w="med" len="med"/>
+          </a:ln>
+        </p:spPr>
+        <p:style>
+          <a:lnRef idx="2">
+            <a:schemeClr val="accent1"/>
+          </a:lnRef>
+          <a:fillRef idx="0">
+            <a:schemeClr val="accent1"/>
+          </a:fillRef>
+          <a:effectRef idx="1">
+            <a:schemeClr val="accent1"/>
+          </a:effectRef>
+          <a:fontRef idx="minor">
+            <a:schemeClr val="tx1"/>
+          </a:fontRef>
+        </p:style>
+      </p:cxnSp>
+      <p:sp>
+        <p:nvSpPr>
+          <p:cNvPr id="8" name="Rounded Rectangle 7"/>
           <p:cNvSpPr/>
           <p:nvPr/>
         </p:nvSpPr>
         <p:spPr>
-          <a:xfrm rot="21570000">
-            <a:off x="8321040" y="1828800"/>
-            <a:ext cx="3383280" cy="2377440"/>
+          <a:xfrm rot="60000">
+            <a:off x="8595360" y="1417320"/>
+            <a:ext cx="3017520" cy="1737360"/>
           </a:xfrm>
           <a:prstGeom prst="roundRect">
             <a:avLst>
@@ -11378,7 +12152,7 @@
           <a:noFill/>
           <a:ln w="28575">
             <a:solidFill>
-              <a:srgbClr val="E07A2F"/>
+              <a:srgbClr val="2B2D42"/>
             </a:solidFill>
           </a:ln>
         </p:spPr>
@@ -11406,13 +12180,13 @@
               </a:spcAft>
             </a:pPr>
             <a:r>
-              <a:rPr sz="1900" b="1">
-                <a:solidFill>
-                  <a:srgbClr val="E07A2F"/>
-                </a:solidFill>
-                <a:latin typeface="Patrick Hand"/>
-              </a:rPr>
-              <a:t>negative control</a:t>
+              <a:rPr sz="1800" b="1">
+                <a:solidFill>
+                  <a:srgbClr val="2B2D42"/>
+                </a:solidFill>
+                <a:latin typeface="Patrick Hand"/>
+              </a:rPr>
+              <a:t>readouts</a:t>
             </a:r>
           </a:p>
           <a:p>
@@ -11422,27 +12196,148 @@
               </a:spcAft>
             </a:pPr>
             <a:r>
-              <a:rPr sz="1900" b="0">
-                <a:solidFill>
-                  <a:srgbClr val="E07A2F"/>
-                </a:solidFill>
-                <a:latin typeface="Patrick Hand"/>
-              </a:rPr>
-              <a:t>Punctuation tokens show ~0 title-specific signal at every layer</a:t>
-            </a:r>
-          </a:p>
-        </p:txBody>
-      </p:sp>
-      <p:sp>
-        <p:nvSpPr>
-          <p:cNvPr id="7" name="Rectangle 6"/>
+              <a:rPr sz="1800" b="0">
+                <a:solidFill>
+                  <a:srgbClr val="2B2D42"/>
+                </a:solidFill>
+                <a:latin typeface="Patrick Hand"/>
+              </a:rPr>
+              <a:t>logit lens</a:t>
+            </a:r>
+          </a:p>
+          <a:p>
+            <a:pPr algn="ctr">
+              <a:spcAft>
+                <a:spcPts val="400"/>
+              </a:spcAft>
+            </a:pPr>
+            <a:r>
+              <a:rPr sz="1800" b="0">
+                <a:solidFill>
+                  <a:srgbClr val="2B2D42"/>
+                </a:solidFill>
+                <a:latin typeface="Patrick Hand"/>
+              </a:rPr>
+              <a:t>3 Jacobian lenses</a:t>
+            </a:r>
+          </a:p>
+          <a:p>
+            <a:pPr algn="ctr">
+              <a:spcAft>
+                <a:spcPts val="400"/>
+              </a:spcAft>
+            </a:pPr>
+            <a:r>
+              <a:rPr sz="1800" b="0">
+                <a:solidFill>
+                  <a:srgbClr val="2B2D42"/>
+                </a:solidFill>
+                <a:latin typeface="Patrick Hand"/>
+              </a:rPr>
+              <a:t>real output (L63)</a:t>
+            </a:r>
+          </a:p>
+        </p:txBody>
+      </p:sp>
+      <p:sp>
+        <p:nvSpPr>
+          <p:cNvPr id="9" name="TextBox 8"/>
+          <p:cNvSpPr txBox="1"/>
+          <p:nvPr/>
+        </p:nvSpPr>
+        <p:spPr>
+          <a:xfrm>
+            <a:off x="777240" y="3520440"/>
+            <a:ext cx="5394960" cy="2377440"/>
+          </a:xfrm>
+          <a:prstGeom prst="rect">
+            <a:avLst/>
+          </a:prstGeom>
+          <a:noFill/>
+        </p:spPr>
+        <p:txBody>
+          <a:bodyPr wrap="square" lIns="0" rIns="0" tIns="0" bIns="0" anchor="t">
+            <a:spAutoFit/>
+          </a:bodyPr>
+          <a:lstStyle/>
+          <a:p>
+            <a:pPr algn="l">
+              <a:spcAft>
+                <a:spcPts val="1200"/>
+              </a:spcAft>
+            </a:pPr>
+            <a:r>
+              <a:rPr sz="2000" b="1">
+                <a:solidFill>
+                  <a:srgbClr val="2B2D42"/>
+                </a:solidFill>
+                <a:latin typeface="Patrick Hand"/>
+              </a:rPr>
+              <a:t>Score</a:t>
+            </a:r>
+            <a:r>
+              <a:rPr sz="2000" b="0">
+                <a:solidFill>
+                  <a:srgbClr val="2B2D42"/>
+                </a:solidFill>
+                <a:latin typeface="Patrick Hand"/>
+              </a:rPr>
+              <a:t> = rank of the correct next name token,</a:t>
+            </a:r>
+          </a:p>
+          <a:p>
+            <a:pPr algn="l">
+              <a:spcAft>
+                <a:spcPts val="1200"/>
+              </a:spcAft>
+            </a:pPr>
+            <a:r>
+              <a:rPr sz="2000" b="0">
+                <a:solidFill>
+                  <a:srgbClr val="2B2D42"/>
+                </a:solidFill>
+                <a:latin typeface="Patrick Hand"/>
+              </a:rPr>
+              <a:t>as log10(1 / rank):  0 = rank 1,  -1 = rank 10</a:t>
+            </a:r>
+          </a:p>
+          <a:p>
+            <a:pPr algn="l">
+              <a:spcAft>
+                <a:spcPts val="1200"/>
+              </a:spcAft>
+            </a:pPr>
+            <a:r>
+              <a:rPr sz="2000" b="1">
+                <a:solidFill>
+                  <a:srgbClr val="2B2D42"/>
+                </a:solidFill>
+                <a:latin typeface="Patrick Hand"/>
+              </a:rPr>
+              <a:t>7 title conditions</a:t>
+            </a:r>
+            <a:r>
+              <a:rPr sz="2000" b="0">
+                <a:solidFill>
+                  <a:srgbClr val="2B2D42"/>
+                </a:solidFill>
+                <a:latin typeface="Patrick Hand"/>
+              </a:rPr>
+              <a:t>: the true title, 5 matched false titles, no title</a:t>
+            </a:r>
+          </a:p>
+        </p:txBody>
+      </p:sp>
+      <p:sp>
+        <p:nvSpPr>
+          <p:cNvPr id="10" name="Rectangle 9"/>
           <p:cNvSpPr/>
           <p:nvPr/>
         </p:nvSpPr>
         <p:spPr>
-          <a:xfrm rot="21540000">
-            <a:off x="2743200" y="4709160"/>
-            <a:ext cx="6583680" cy="1143000"/>
+          <a:xfrm rot="21510000">
+            <a:off x="6675120" y="3657600"/>
+            <a:ext cx="4754880" cy="2103120"/>
           </a:xfrm>
           <a:prstGeom prst="rect">
             <a:avLst/>
@@ -11481,22 +12376,100 @@
               </a:spcAft>
             </a:pPr>
             <a:r>
-              <a:rPr sz="1900" b="1">
-                <a:solidFill>
-                  <a:srgbClr val="2B2D42"/>
-                </a:solidFill>
-                <a:latin typeface="Patrick Hand"/>
-              </a:rPr>
-              <a:t>Caveat: </a:t>
-            </a:r>
-            <a:r>
-              <a:rPr sz="1900" b="0">
-                <a:solidFill>
-                  <a:srgbClr val="2B2D42"/>
-                </a:solidFill>
-                <a:latin typeface="Patrick Hand"/>
-              </a:rPr>
-              <a:t>the parity tolerance was raised 0.25 -&gt; 0.5 after seeing these bf16 gaps.</a:t>
+              <a:rPr sz="2000" b="1">
+                <a:solidFill>
+                  <a:srgbClr val="2B2D42"/>
+                </a:solidFill>
+                <a:latin typeface="Patrick Hand"/>
+              </a:rPr>
+              <a:t>title-specific signal</a:t>
+            </a:r>
+          </a:p>
+          <a:p>
+            <a:pPr algn="l">
+              <a:spcAft>
+                <a:spcPts val="900"/>
+              </a:spcAft>
+            </a:pPr>
+            <a:r>
+              <a:rPr sz="2000" b="0">
+                <a:solidFill>
+                  <a:srgbClr val="2B2D42"/>
+                </a:solidFill>
+                <a:latin typeface="Patrick Hand"/>
+              </a:rPr>
+              <a:t>= true title  -  mean(5 false titles)</a:t>
+            </a:r>
+          </a:p>
+          <a:p>
+            <a:pPr algn="l">
+              <a:spcAft>
+                <a:spcPts val="900"/>
+              </a:spcAft>
+            </a:pPr>
+            <a:r>
+              <a:rPr sz="2000" b="0">
+                <a:solidFill>
+                  <a:srgbClr val="2B2D42"/>
+                </a:solidFill>
+                <a:latin typeface="Patrick Hand"/>
+              </a:rPr>
+              <a:t>Same name, same tokens: what is left is knowing </a:t>
+            </a:r>
+          </a:p>
+          <a:p>
+            <a:pPr algn="l">
+              <a:spcAft>
+                <a:spcPts val="900"/>
+              </a:spcAft>
+            </a:pPr>
+            <a:r>
+              <a:rPr sz="2000" b="1">
+                <a:solidFill>
+                  <a:srgbClr val="E07A2F"/>
+                </a:solidFill>
+                <a:latin typeface="Patrick Hand"/>
+              </a:rPr>
+              <a:t>this paper</a:t>
+            </a:r>
+          </a:p>
+        </p:txBody>
+      </p:sp>
+      <p:sp>
+        <p:nvSpPr>
+          <p:cNvPr id="11" name="TextBox 10"/>
+          <p:cNvSpPr txBox="1"/>
+          <p:nvPr/>
+        </p:nvSpPr>
+        <p:spPr>
+          <a:xfrm>
+            <a:off x="713232" y="6126480"/>
+            <a:ext cx="10789920" cy="320040"/>
+          </a:xfrm>
+          <a:prstGeom prst="rect">
+            <a:avLst/>
+          </a:prstGeom>
+          <a:noFill/>
+        </p:spPr>
+        <p:txBody>
+          <a:bodyPr wrap="square" lIns="0" rIns="0" tIns="0" bIns="0" anchor="t">
+            <a:spAutoFit/>
+          </a:bodyPr>
+          <a:lstStyle/>
+          <a:p>
+            <a:pPr algn="l">
+              <a:spcAft>
+                <a:spcPts val="800"/>
+              </a:spcAft>
+            </a:pPr>
+            <a:r>
+              <a:rPr sz="1400" b="0">
+                <a:solidFill>
+                  <a:srgbClr val="6E7080"/>
+                </a:solidFill>
+                <a:latin typeface="Patrick Hand"/>
+              </a:rPr>
+              <a:t>Lenses (model weights never change; Jacobians to L63 averaged over prompts): public = 557 WikiText-103 prompts (Neuronpedia) · self100 = 100 frozen WikiText-103 prompts · fitA = 100 other WikiText-103 prompts (Stage 9: one skipped prompt replaced -&gt; 100 valid)</a:t>
             </a:r>
           </a:p>
         </p:txBody>
@@ -11577,97 +12550,33 @@
                 </a:solidFill>
                 <a:latin typeface="Caveat"/>
               </a:rPr>
-              <a:t>Names become readable late</a:t>
-            </a:r>
-          </a:p>
-        </p:txBody>
-      </p:sp>
-      <p:sp>
-        <p:nvSpPr>
-          <p:cNvPr id="4" name="TextBox 3"/>
-          <p:cNvSpPr txBox="1"/>
-          <p:nvPr/>
-        </p:nvSpPr>
-        <p:spPr>
-          <a:xfrm>
-            <a:off x="713232" y="987552"/>
-            <a:ext cx="10881360" cy="411480"/>
-          </a:xfrm>
-          <a:prstGeom prst="rect">
-            <a:avLst/>
+              <a:t>Can we trust the numbers?</a:t>
+            </a:r>
+          </a:p>
+        </p:txBody>
+      </p:sp>
+      <p:sp>
+        <p:nvSpPr>
+          <p:cNvPr id="4" name="Rounded Rectangle 3"/>
+          <p:cNvSpPr/>
+          <p:nvPr/>
+        </p:nvSpPr>
+        <p:spPr>
+          <a:xfrm rot="21540000">
+            <a:off x="822960" y="1828800"/>
+            <a:ext cx="3383280" cy="2377440"/>
+          </a:xfrm>
+          <a:prstGeom prst="roundRect">
+            <a:avLst>
+              <a:gd name="adj" fmla="val 8000"/>
+            </a:avLst>
           </a:prstGeom>
           <a:noFill/>
-        </p:spPr>
-        <p:txBody>
-          <a:bodyPr wrap="square" lIns="0" rIns="0" tIns="0" bIns="0" anchor="t">
-            <a:spAutoFit/>
-          </a:bodyPr>
-          <a:lstStyle/>
-          <a:p>
-            <a:pPr algn="l">
-              <a:spcAft>
-                <a:spcPts val="800"/>
-              </a:spcAft>
-            </a:pPr>
-            <a:r>
-              <a:rPr sz="1900" b="0">
-                <a:solidFill>
-                  <a:srgbClr val="6E7080"/>
-                </a:solidFill>
-                <a:latin typeface="Patrick Hand"/>
-              </a:rPr>
-              <a:t>all 9,108 papers · true title</a:t>
-            </a:r>
-          </a:p>
-        </p:txBody>
-      </p:sp>
-      <p:pic>
-        <p:nvPicPr>
-          <p:cNvPr id="5" name="Picture 4" descr="c1_level_by_layer.png"/>
-          <p:cNvPicPr>
-            <a:picLocks noChangeAspect="1"/>
-          </p:cNvPicPr>
-          <p:nvPr/>
-        </p:nvPicPr>
-        <p:blipFill>
-          <a:blip r:embed="rId4"/>
-          <a:stretch>
-            <a:fillRect/>
-          </a:stretch>
-        </p:blipFill>
-        <p:spPr>
-          <a:xfrm>
-            <a:off x="548640" y="1417320"/>
-            <a:ext cx="7315200" cy="4528457"/>
-          </a:xfrm>
-          <a:prstGeom prst="rect">
-            <a:avLst/>
-          </a:prstGeom>
-        </p:spPr>
-      </p:pic>
-      <p:sp>
-        <p:nvSpPr>
-          <p:cNvPr id="6" name="Rectangle 5"/>
-          <p:cNvSpPr/>
-          <p:nvPr/>
-        </p:nvSpPr>
-        <p:spPr>
-          <a:xfrm rot="90000">
-            <a:off x="8229600" y="1737360"/>
-            <a:ext cx="3383280" cy="3108960"/>
-          </a:xfrm>
-          <a:prstGeom prst="rect">
-            <a:avLst/>
-          </a:prstGeom>
-          <a:solidFill>
-            <a:srgbClr val="FFF1A8"/>
-          </a:solidFill>
-          <a:ln w="12700">
+          <a:ln w="28575">
             <a:solidFill>
-              <a:srgbClr val="E2D37A"/>
+              <a:srgbClr val="3A6EA5"/>
             </a:solidFill>
           </a:ln>
-          <a:effectLst/>
         </p:spPr>
         <p:style>
           <a:lnRef idx="1">
@@ -11684,6 +12593,229 @@
           </a:fontRef>
         </p:style>
         <p:txBody>
+          <a:bodyPr rtlCol="0" anchor="ctr" wrap="square" lIns="164592" rIns="164592"/>
+          <a:lstStyle/>
+          <a:p>
+            <a:pPr algn="ctr">
+              <a:spcAft>
+                <a:spcPts val="400"/>
+              </a:spcAft>
+            </a:pPr>
+            <a:r>
+              <a:rPr sz="1900" b="1">
+                <a:solidFill>
+                  <a:srgbClr val="3A6EA5"/>
+                </a:solidFill>
+                <a:latin typeface="Patrick Hand"/>
+              </a:rPr>
+              <a:t>fast = slow</a:t>
+            </a:r>
+          </a:p>
+          <a:p>
+            <a:pPr algn="ctr">
+              <a:spcAft>
+                <a:spcPts val="400"/>
+              </a:spcAft>
+            </a:pPr>
+            <a:r>
+              <a:rPr sz="1900" b="0">
+                <a:solidFill>
+                  <a:srgbClr val="3A6EA5"/>
+                </a:solidFill>
+                <a:latin typeface="Patrick Hand"/>
+              </a:rPr>
+              <a:t>One forward pass vs one per prefix: max gap 0.37 logit (bf16 rounding); ranks 1-41 identical</a:t>
+            </a:r>
+          </a:p>
+        </p:txBody>
+      </p:sp>
+      <p:sp>
+        <p:nvSpPr>
+          <p:cNvPr id="5" name="Rounded Rectangle 4"/>
+          <p:cNvSpPr/>
+          <p:nvPr/>
+        </p:nvSpPr>
+        <p:spPr>
+          <a:xfrm rot="60000">
+            <a:off x="4572000" y="1828800"/>
+            <a:ext cx="3383280" cy="2377440"/>
+          </a:xfrm>
+          <a:prstGeom prst="roundRect">
+            <a:avLst>
+              <a:gd name="adj" fmla="val 8000"/>
+            </a:avLst>
+          </a:prstGeom>
+          <a:noFill/>
+          <a:ln w="28575">
+            <a:solidFill>
+              <a:srgbClr val="3C8D5A"/>
+            </a:solidFill>
+          </a:ln>
+        </p:spPr>
+        <p:style>
+          <a:lnRef idx="1">
+            <a:schemeClr val="accent1"/>
+          </a:lnRef>
+          <a:fillRef idx="3">
+            <a:schemeClr val="accent1"/>
+          </a:fillRef>
+          <a:effectRef idx="2">
+            <a:schemeClr val="accent1"/>
+          </a:effectRef>
+          <a:fontRef idx="minor">
+            <a:schemeClr val="lt1"/>
+          </a:fontRef>
+        </p:style>
+        <p:txBody>
+          <a:bodyPr rtlCol="0" anchor="ctr" wrap="square" lIns="164592" rIns="164592"/>
+          <a:lstStyle/>
+          <a:p>
+            <a:pPr algn="ctr">
+              <a:spcAft>
+                <a:spcPts val="400"/>
+              </a:spcAft>
+            </a:pPr>
+            <a:r>
+              <a:rPr sz="1900" b="1">
+                <a:solidFill>
+                  <a:srgbClr val="3C8D5A"/>
+                </a:solidFill>
+                <a:latin typeface="Patrick Hand"/>
+              </a:rPr>
+              <a:t>matches Stage 6</a:t>
+            </a:r>
+          </a:p>
+          <a:p>
+            <a:pPr algn="ctr">
+              <a:spcAft>
+                <a:spcPts val="400"/>
+              </a:spcAft>
+            </a:pPr>
+            <a:r>
+              <a:rPr sz="1900" b="0">
+                <a:solidFill>
+                  <a:srgbClr val="3C8D5A"/>
+                </a:solidFill>
+                <a:latin typeface="Patrick Hand"/>
+              </a:rPr>
+              <a:t>972 tokens: same token ids, median log-prob gap ~1e-5</a:t>
+            </a:r>
+          </a:p>
+        </p:txBody>
+      </p:sp>
+      <p:sp>
+        <p:nvSpPr>
+          <p:cNvPr id="6" name="Rounded Rectangle 5"/>
+          <p:cNvSpPr/>
+          <p:nvPr/>
+        </p:nvSpPr>
+        <p:spPr>
+          <a:xfrm rot="21570000">
+            <a:off x="8321040" y="1828800"/>
+            <a:ext cx="3383280" cy="2377440"/>
+          </a:xfrm>
+          <a:prstGeom prst="roundRect">
+            <a:avLst>
+              <a:gd name="adj" fmla="val 8000"/>
+            </a:avLst>
+          </a:prstGeom>
+          <a:noFill/>
+          <a:ln w="28575">
+            <a:solidFill>
+              <a:srgbClr val="E07A2F"/>
+            </a:solidFill>
+          </a:ln>
+        </p:spPr>
+        <p:style>
+          <a:lnRef idx="1">
+            <a:schemeClr val="accent1"/>
+          </a:lnRef>
+          <a:fillRef idx="3">
+            <a:schemeClr val="accent1"/>
+          </a:fillRef>
+          <a:effectRef idx="2">
+            <a:schemeClr val="accent1"/>
+          </a:effectRef>
+          <a:fontRef idx="minor">
+            <a:schemeClr val="lt1"/>
+          </a:fontRef>
+        </p:style>
+        <p:txBody>
+          <a:bodyPr rtlCol="0" anchor="ctr" wrap="square" lIns="164592" rIns="164592"/>
+          <a:lstStyle/>
+          <a:p>
+            <a:pPr algn="ctr">
+              <a:spcAft>
+                <a:spcPts val="400"/>
+              </a:spcAft>
+            </a:pPr>
+            <a:r>
+              <a:rPr sz="1900" b="1">
+                <a:solidFill>
+                  <a:srgbClr val="E07A2F"/>
+                </a:solidFill>
+                <a:latin typeface="Patrick Hand"/>
+              </a:rPr>
+              <a:t>negative control</a:t>
+            </a:r>
+          </a:p>
+          <a:p>
+            <a:pPr algn="ctr">
+              <a:spcAft>
+                <a:spcPts val="400"/>
+              </a:spcAft>
+            </a:pPr>
+            <a:r>
+              <a:rPr sz="1900" b="0">
+                <a:solidFill>
+                  <a:srgbClr val="E07A2F"/>
+                </a:solidFill>
+                <a:latin typeface="Patrick Hand"/>
+              </a:rPr>
+              <a:t>Punctuation tokens show ~0 title-specific signal at every layer</a:t>
+            </a:r>
+          </a:p>
+        </p:txBody>
+      </p:sp>
+      <p:sp>
+        <p:nvSpPr>
+          <p:cNvPr id="7" name="Rectangle 6"/>
+          <p:cNvSpPr/>
+          <p:nvPr/>
+        </p:nvSpPr>
+        <p:spPr>
+          <a:xfrm rot="21540000">
+            <a:off x="2743200" y="4709160"/>
+            <a:ext cx="6583680" cy="1143000"/>
+          </a:xfrm>
+          <a:prstGeom prst="rect">
+            <a:avLst/>
+          </a:prstGeom>
+          <a:solidFill>
+            <a:srgbClr val="FFF1A8"/>
+          </a:solidFill>
+          <a:ln w="12700">
+            <a:solidFill>
+              <a:srgbClr val="E2D37A"/>
+            </a:solidFill>
+          </a:ln>
+          <a:effectLst/>
+        </p:spPr>
+        <p:style>
+          <a:lnRef idx="1">
+            <a:schemeClr val="accent1"/>
+          </a:lnRef>
+          <a:fillRef idx="3">
+            <a:schemeClr val="accent1"/>
+          </a:fillRef>
+          <a:effectRef idx="2">
+            <a:schemeClr val="accent1"/>
+          </a:effectRef>
+          <a:fontRef idx="minor">
+            <a:schemeClr val="lt1"/>
+          </a:fontRef>
+        </p:style>
+        <p:txBody>
           <a:bodyPr rtlCol="0" anchor="t" wrap="square" lIns="201168" rIns="201168" tIns="164592" bIns="164592"/>
           <a:lstStyle/>
           <a:p>
@@ -11693,81 +12825,22 @@
               </a:spcAft>
             </a:pPr>
             <a:r>
+              <a:rPr sz="1900" b="1">
+                <a:solidFill>
+                  <a:srgbClr val="2B2D42"/>
+                </a:solidFill>
+                <a:latin typeface="Patrick Hand"/>
+              </a:rPr>
+              <a:t>Caveat: </a:t>
+            </a:r>
+            <a:r>
               <a:rPr sz="1900" b="0">
                 <a:solidFill>
                   <a:srgbClr val="2B2D42"/>
                 </a:solidFill>
                 <a:latin typeface="Patrick Hand"/>
               </a:rPr>
-              <a:t>Logit lens: almost nothing until </a:t>
-            </a:r>
-            <a:r>
-              <a:rPr sz="1900" b="1">
-                <a:solidFill>
-                  <a:srgbClr val="3A6EA5"/>
-                </a:solidFill>
-                <a:latin typeface="Patrick Hand"/>
-              </a:rPr>
-              <a:t>L48</a:t>
-            </a:r>
-          </a:p>
-          <a:p>
-            <a:pPr algn="l">
-              <a:spcAft>
-                <a:spcPts val="900"/>
-              </a:spcAft>
-            </a:pPr>
-            <a:r>
-              <a:rPr sz="1900" b="0">
-                <a:solidFill>
-                  <a:srgbClr val="2B2D42"/>
-                </a:solidFill>
-                <a:latin typeface="Patrick Hand"/>
-              </a:rPr>
-              <a:t>Jacobian lenses read more from </a:t>
-            </a:r>
-            <a:r>
-              <a:rPr sz="1900" b="1">
-                <a:solidFill>
-                  <a:srgbClr val="3C8D5A"/>
-                </a:solidFill>
-                <a:latin typeface="Patrick Hand"/>
-              </a:rPr>
-              <a:t>L40</a:t>
-            </a:r>
-          </a:p>
-          <a:p>
-            <a:pPr algn="l">
-              <a:spcAft>
-                <a:spcPts val="900"/>
-              </a:spcAft>
-            </a:pPr>
-            <a:r>
-              <a:rPr sz="1900" b="0">
-                <a:solidFill>
-                  <a:srgbClr val="2B2D42"/>
-                </a:solidFill>
-                <a:latin typeface="Patrick Hand"/>
-              </a:rPr>
-              <a:t>Everything jumps at </a:t>
-            </a:r>
-            <a:r>
-              <a:rPr sz="1900" b="1">
-                <a:solidFill>
-                  <a:srgbClr val="E07A2F"/>
-                </a:solidFill>
-                <a:latin typeface="Patrick Hand"/>
-              </a:rPr>
-              <a:t>L62</a:t>
-            </a:r>
-            <a:r>
-              <a:rPr sz="1900" b="0">
-                <a:solidFill>
-                  <a:srgbClr val="2B2D42"/>
-                </a:solidFill>
-                <a:latin typeface="Patrick Hand"/>
-              </a:rPr>
-              <a:t> (rank ~10)</a:t>
+              <a:t>the parity tolerance was raised 0.25 -&gt; 0.5 after seeing these bf16 gaps.</a:t>
             </a:r>
           </a:p>
         </p:txBody>
@@ -11848,7 +12921,7 @@
                 </a:solidFill>
                 <a:latin typeface="Caveat"/>
               </a:rPr>
-              <a:t>Knowing the paper shows up only at the end</a:t>
+              <a:t>Names become readable late</a:t>
             </a:r>
           </a:p>
         </p:txBody>
@@ -11887,14 +12960,14 @@
                 </a:solidFill>
                 <a:latin typeface="Patrick Hand"/>
               </a:rPr>
-              <a:t>title-specific signal · public Jacobian lens (lines) and model output (diamonds)</a:t>
+              <a:t>all 9,108 papers · true title</a:t>
             </a:r>
           </a:p>
         </p:txBody>
       </p:sp>
       <p:pic>
         <p:nvPicPr>
-          <p:cNvPr id="5" name="Picture 4" descr="c2_spec_by_layer.png"/>
+          <p:cNvPr id="5" name="Picture 4" descr="c1_level_by_layer.png"/>
           <p:cNvPicPr>
             <a:picLocks noChangeAspect="1"/>
           </p:cNvPicPr>
@@ -11908,7 +12981,7 @@
         </p:blipFill>
         <p:spPr>
           <a:xfrm>
-            <a:off x="548640" y="1463040"/>
+            <a:off x="548640" y="1417320"/>
             <a:ext cx="7315200" cy="4528457"/>
           </a:xfrm>
           <a:prstGeom prst="rect">
@@ -11923,7 +12996,7 @@
           <p:nvPr/>
         </p:nvSpPr>
         <p:spPr>
-          <a:xfrm rot="21510000">
+          <a:xfrm rot="90000">
             <a:off x="8229600" y="1737360"/>
             <a:ext cx="3383280" cy="3108960"/>
           </a:xfrm>
@@ -11964,14 +13037,30 @@
               </a:spcAft>
             </a:pPr>
             <a:r>
+              <a:rPr sz="1900" b="0">
+                <a:solidFill>
+                  <a:srgbClr val="2B2D42"/>
+                </a:solidFill>
+                <a:latin typeface="Patrick Hand"/>
+              </a:rPr>
+              <a:t>Logit lens: almost nothing until </a:t>
+            </a:r>
+            <a:r>
               <a:rPr sz="1900" b="1">
                 <a:solidFill>
-                  <a:srgbClr val="2B2D42"/>
-                </a:solidFill>
-                <a:latin typeface="Patrick Hand"/>
-              </a:rPr>
-              <a:t>L24-L48: ~0</a:t>
-            </a:r>
+                  <a:srgbClr val="3A6EA5"/>
+                </a:solidFill>
+                <a:latin typeface="Patrick Hand"/>
+              </a:rPr>
+              <a:t>L48</a:t>
+            </a:r>
+          </a:p>
+          <a:p>
+            <a:pPr algn="l">
+              <a:spcAft>
+                <a:spcPts val="900"/>
+              </a:spcAft>
+            </a:pPr>
             <a:r>
               <a:rPr sz="1900" b="0">
                 <a:solidFill>
@@ -11979,7 +13068,16 @@
                 </a:solidFill>
                 <a:latin typeface="Patrick Hand"/>
               </a:rPr>
-              <a:t> for both groups</a:t>
+              <a:t>Jacobian lenses read more from </a:t>
+            </a:r>
+            <a:r>
+              <a:rPr sz="1900" b="1">
+                <a:solidFill>
+                  <a:srgbClr val="3C8D5A"/>
+                </a:solidFill>
+                <a:latin typeface="Patrick Hand"/>
+              </a:rPr>
+              <a:t>L40</a:t>
             </a:r>
           </a:p>
           <a:p>
@@ -11995,24 +13093,17 @@
                 </a:solidFill>
                 <a:latin typeface="Patrick Hand"/>
               </a:rPr>
-              <a:t>rises at </a:t>
+              <a:t>Everything jumps at </a:t>
             </a:r>
             <a:r>
               <a:rPr sz="1900" b="1">
                 <a:solidFill>
-                  <a:srgbClr val="2B2D42"/>
-                </a:solidFill>
-                <a:latin typeface="Patrick Hand"/>
-              </a:rPr>
-              <a:t>L56</a:t>
-            </a:r>
-          </a:p>
-          <a:p>
-            <a:pPr algn="l">
-              <a:spcAft>
-                <a:spcPts val="900"/>
-              </a:spcAft>
-            </a:pPr>
+                  <a:srgbClr val="E07A2F"/>
+                </a:solidFill>
+                <a:latin typeface="Patrick Hand"/>
+              </a:rPr>
+              <a:t>L62</a:t>
+            </a:r>
             <a:r>
               <a:rPr sz="1900" b="0">
                 <a:solidFill>
@@ -12020,34 +13111,7 @@
                 </a:solidFill>
                 <a:latin typeface="Patrick Hand"/>
               </a:rPr>
-              <a:t>L62: </a:t>
-            </a:r>
-            <a:r>
-              <a:rPr sz="1900" b="1">
-                <a:solidFill>
-                  <a:srgbClr val="E07A2F"/>
-                </a:solidFill>
-                <a:latin typeface="Patrick Hand"/>
-              </a:rPr>
-              <a:t>target +0.56</a:t>
-            </a:r>
-            <a:r>
-              <a:rPr sz="1900" b="0">
-                <a:solidFill>
-                  <a:srgbClr val="2B2D42"/>
-                </a:solidFill>
-                <a:latin typeface="Patrick Hand"/>
-              </a:rPr>
-              <a:t> vs </a:t>
-            </a:r>
-            <a:r>
-              <a:rPr sz="1900" b="1">
-                <a:solidFill>
-                  <a:srgbClr val="3A6EA5"/>
-                </a:solidFill>
-                <a:latin typeface="Patrick Hand"/>
-              </a:rPr>
-              <a:t>control +0.24</a:t>
+              <a:t> (rank ~10)</a:t>
             </a:r>
           </a:p>
         </p:txBody>
@@ -12128,7 +13192,7 @@
                 </a:solidFill>
                 <a:latin typeface="Caveat"/>
               </a:rPr>
-              <a:t>Target pulls ahead only in the last layers</a:t>
+              <a:t>Knowing the paper shows up only at the end</a:t>
             </a:r>
           </a:p>
         </p:txBody>
@@ -12167,14 +13231,14 @@
                 </a:solidFill>
                 <a:latin typeface="Patrick Hand"/>
               </a:rPr>
-              <a:t>target - control, within citation bin, 95% CI</a:t>
+              <a:t>title-specific signal · public Jacobian lens (lines) and model output (diamonds)</a:t>
             </a:r>
           </a:p>
         </p:txBody>
       </p:sp>
       <p:pic>
         <p:nvPicPr>
-          <p:cNvPr id="5" name="Picture 4" descr="c3_tc_by_layer.png"/>
+          <p:cNvPr id="5" name="Picture 4" descr="c2_spec_by_layer.png"/>
           <p:cNvPicPr>
             <a:picLocks noChangeAspect="1"/>
           </p:cNvPicPr>
@@ -12188,8 +13252,8 @@
         </p:blipFill>
         <p:spPr>
           <a:xfrm>
-            <a:off x="457200" y="1463040"/>
-            <a:ext cx="8412480" cy="3963572"/>
+            <a:off x="548640" y="1463040"/>
+            <a:ext cx="7315200" cy="4528457"/>
           </a:xfrm>
           <a:prstGeom prst="rect">
             <a:avLst/>
@@ -12203,9 +13267,9 @@
           <p:nvPr/>
         </p:nvSpPr>
         <p:spPr>
-          <a:xfrm rot="90000">
-            <a:off x="9098280" y="1737360"/>
-            <a:ext cx="2651760" cy="3108960"/>
+          <a:xfrm rot="21510000">
+            <a:off x="8229600" y="1737360"/>
+            <a:ext cx="3383280" cy="3108960"/>
           </a:xfrm>
           <a:prstGeom prst="rect">
             <a:avLst/>
@@ -12244,13 +13308,38 @@
               </a:spcAft>
             </a:pPr>
             <a:r>
+              <a:rPr sz="1900" b="1">
+                <a:solidFill>
+                  <a:srgbClr val="2B2D42"/>
+                </a:solidFill>
+                <a:latin typeface="Patrick Hand"/>
+              </a:rPr>
+              <a:t>L24-L48: ~0</a:t>
+            </a:r>
+            <a:r>
               <a:rPr sz="1900" b="0">
                 <a:solidFill>
                   <a:srgbClr val="2B2D42"/>
                 </a:solidFill>
                 <a:latin typeface="Patrick Hand"/>
               </a:rPr>
-              <a:t>Middle layers: </a:t>
+              <a:t> for both groups</a:t>
+            </a:r>
+          </a:p>
+          <a:p>
+            <a:pPr algn="l">
+              <a:spcAft>
+                <a:spcPts val="900"/>
+              </a:spcAft>
+            </a:pPr>
+            <a:r>
+              <a:rPr sz="1900" b="0">
+                <a:solidFill>
+                  <a:srgbClr val="2B2D42"/>
+                </a:solidFill>
+                <a:latin typeface="Patrick Hand"/>
+              </a:rPr>
+              <a:t>rises at </a:t>
             </a:r>
             <a:r>
               <a:rPr sz="1900" b="1">
@@ -12259,7 +13348,7 @@
                 </a:solidFill>
                 <a:latin typeface="Patrick Hand"/>
               </a:rPr>
-              <a:t>no head start</a:t>
+              <a:t>L56</a:t>
             </a:r>
           </a:p>
           <a:p>
@@ -12275,15 +13364,8 @@
                 </a:solidFill>
                 <a:latin typeface="Patrick Hand"/>
               </a:rPr>
-              <a:t>L62 / output:</a:t>
-            </a:r>
-          </a:p>
-          <a:p>
-            <a:pPr algn="l">
-              <a:spcAft>
-                <a:spcPts val="900"/>
-              </a:spcAft>
-            </a:pPr>
+              <a:t>L62: </a:t>
+            </a:r>
             <a:r>
               <a:rPr sz="1900" b="1">
                 <a:solidFill>
@@ -12291,15 +13373,8 @@
                 </a:solidFill>
                 <a:latin typeface="Patrick Hand"/>
               </a:rPr>
-              <a:t>+0.21 to +0.23</a:t>
-            </a:r>
-          </a:p>
-          <a:p>
-            <a:pPr algn="l">
-              <a:spcAft>
-                <a:spcPts val="900"/>
-              </a:spcAft>
-            </a:pPr>
+              <a:t>target +0.56</a:t>
+            </a:r>
             <a:r>
               <a:rPr sz="1900" b="0">
                 <a:solidFill>
@@ -12307,7 +13382,16 @@
                 </a:solidFill>
                 <a:latin typeface="Patrick Hand"/>
               </a:rPr>
-              <a:t>almost all title-specific</a:t>
+              <a:t> vs </a:t>
+            </a:r>
+            <a:r>
+              <a:rPr sz="1900" b="1">
+                <a:solidFill>
+                  <a:srgbClr val="3A6EA5"/>
+                </a:solidFill>
+                <a:latin typeface="Patrick Hand"/>
+              </a:rPr>
+              <a:t>control +0.24</a:t>
             </a:r>
           </a:p>
         </p:txBody>
@@ -12388,7 +13472,7 @@
                 </a:solidFill>
                 <a:latin typeface="Caveat"/>
               </a:rPr>
-              <a:t>It builds up over the last dozen layers</a:t>
+              <a:t>Target pulls ahead only in the last layers</a:t>
             </a:r>
           </a:p>
         </p:txBody>
@@ -12427,14 +13511,14 @@
                 </a:solidFill>
                 <a:latin typeface="Patrick Hand"/>
               </a:rPr>
-              <a:t>fine layers L40-L62 · title-specific signal · 95% CI</a:t>
+              <a:t>target - control, within citation bin, 95% CI</a:t>
             </a:r>
           </a:p>
         </p:txBody>
       </p:sp>
       <p:pic>
         <p:nvPicPr>
-          <p:cNvPr id="5" name="Picture 4" descr="c11_fine_layers.png"/>
+          <p:cNvPr id="5" name="Picture 4" descr="c3_tc_by_layer.png"/>
           <p:cNvPicPr>
             <a:picLocks noChangeAspect="1"/>
           </p:cNvPicPr>
@@ -12463,7 +13547,7 @@
           <p:nvPr/>
         </p:nvSpPr>
         <p:spPr>
-          <a:xfrm rot="21510000">
+          <a:xfrm rot="90000">
             <a:off x="9098280" y="1737360"/>
             <a:ext cx="2651760" cy="3108960"/>
           </a:xfrm>
@@ -12510,7 +13594,16 @@
                 </a:solidFill>
                 <a:latin typeface="Patrick Hand"/>
               </a:rPr>
-              <a:t>Logit lens: target - control</a:t>
+              <a:t>Middle layers: </a:t>
+            </a:r>
+            <a:r>
+              <a:rPr sz="1900" b="1">
+                <a:solidFill>
+                  <a:srgbClr val="2B2D42"/>
+                </a:solidFill>
+                <a:latin typeface="Patrick Hand"/>
+              </a:rPr>
+              <a:t>no head start</a:t>
             </a:r>
           </a:p>
           <a:p>
@@ -12520,13 +13613,29 @@
               </a:spcAft>
             </a:pPr>
             <a:r>
+              <a:rPr sz="1900" b="0">
+                <a:solidFill>
+                  <a:srgbClr val="2B2D42"/>
+                </a:solidFill>
+                <a:latin typeface="Patrick Hand"/>
+              </a:rPr>
+              <a:t>L62 / output:</a:t>
+            </a:r>
+          </a:p>
+          <a:p>
+            <a:pPr algn="l">
+              <a:spcAft>
+                <a:spcPts val="900"/>
+              </a:spcAft>
+            </a:pPr>
+            <a:r>
               <a:rPr sz="1900" b="1">
                 <a:solidFill>
-                  <a:srgbClr val="3A6EA5"/>
-                </a:solidFill>
-                <a:latin typeface="Patrick Hand"/>
-              </a:rPr>
-              <a:t>+0.007 at L50</a:t>
+                  <a:srgbClr val="E07A2F"/>
+                </a:solidFill>
+                <a:latin typeface="Patrick Hand"/>
+              </a:rPr>
+              <a:t>+0.21 to +0.23</a:t>
             </a:r>
           </a:p>
           <a:p>
@@ -12536,38 +13645,13 @@
               </a:spcAft>
             </a:pPr>
             <a:r>
-              <a:rPr sz="1900" b="1">
-                <a:solidFill>
-                  <a:srgbClr val="E07A2F"/>
-                </a:solidFill>
-                <a:latin typeface="Patrick Hand"/>
-              </a:rPr>
-              <a:t>+0.23 at L62</a:t>
-            </a:r>
-          </a:p>
-          <a:p>
-            <a:pPr algn="l">
-              <a:spcAft>
-                <a:spcPts val="900"/>
-              </a:spcAft>
-            </a:pPr>
-            <a:r>
               <a:rPr sz="1900" b="0">
                 <a:solidFill>
                   <a:srgbClr val="2B2D42"/>
                 </a:solidFill>
                 <a:latin typeface="Patrick Hand"/>
               </a:rPr>
-              <a:t>steepest rise </a:t>
-            </a:r>
-            <a:r>
-              <a:rPr sz="1900" b="1">
-                <a:solidFill>
-                  <a:srgbClr val="2B2D42"/>
-                </a:solidFill>
-                <a:latin typeface="Patrick Hand"/>
-              </a:rPr>
-              <a:t>L57-L61</a:t>
+              <a:t>almost all title-specific</a:t>
             </a:r>
           </a:p>
         </p:txBody>

--- a/experiment_files/351_stage10/reports/talk/Stage10_author_readout_talk.pptx
+++ b/experiment_files/351_stage10/reports/talk/Stage10_author_readout_talk.pptx
@@ -1296,7 +1296,7 @@
           <a:lstStyle/>
           <a:p>
             <a:r>
-              <a:t>Earlier labels: for about half of the papers the model cannot write the authors when asked openly, but picks the true author list in a 4-option multiple choice. We call these target papers. Control papers: cannot write, cannot pick. If recognition is already computed in middle layers, a lens should read the right names better for target than control there.</a:t>
+              <a:t>Earlier labels: for about half of the papers the model cannot write the author list when asked openly (R0: no true author, or R1: a few right but HR2 above 0.5), but picks the true author list in a 4-option multiple choice. We call these target papers. Control papers: cannot write, cannot pick. If recognition is already computed in middle layers, a lens should read the right names better for target than control there.</a:t>
             </a:r>
           </a:p>
         </p:txBody>
@@ -2206,7 +2206,7 @@
           <a:lstStyle/>
           <a:p>
             <a:r>
-              <a:t>Key slide. Target minus control within citation bins. Left: true title only - middle layers are even slightly negative for the Jacobian lens. Right: title-specific part - about zero until L56, then +0.21 to +0.23 at L62 and the output. The target advantage is late and almost entirely title-specific.</a:t>
+              <a:t>Key slide. Target minus control within citation bins. Left: true title only - middle layers are even slightly negative for the Jacobian lens. Right: title-specific part - about zero until L56, then +0.21 to +0.23 at L62 and the output. Robustness: 11 percent of target papers are R1 (a few authors right) against 1.5 percent of controls; keeping R0 papers only in both groups, the output difference is +0.199 instead of +0.207 and every layer looks the same, and the Stage 11 curves do not change either. The target advantage is late and almost entirely title-specific.</a:t>
             </a:r>
           </a:p>
         </p:txBody>
@@ -5697,6 +5697,63 @@
           </a:p>
         </p:txBody>
       </p:sp>
+      <p:sp>
+        <p:nvSpPr>
+          <p:cNvPr id="7" name="Rounded Rectangle 6"/>
+          <p:cNvSpPr/>
+          <p:nvPr/>
+        </p:nvSpPr>
+        <p:spPr>
+          <a:xfrm>
+            <a:off x="10241280" y="182880"/>
+            <a:ext cx="1691640" cy="384048"/>
+          </a:xfrm>
+          <a:prstGeom prst="roundRect">
+            <a:avLst>
+              <a:gd name="adj" fmla="val 30000"/>
+            </a:avLst>
+          </a:prstGeom>
+          <a:solidFill>
+            <a:srgbClr val="FFFFFF"/>
+          </a:solidFill>
+          <a:ln w="22225">
+            <a:solidFill>
+              <a:srgbClr val="3A6EA5"/>
+            </a:solidFill>
+          </a:ln>
+          <a:effectLst/>
+        </p:spPr>
+        <p:style>
+          <a:lnRef idx="1">
+            <a:schemeClr val="accent1"/>
+          </a:lnRef>
+          <a:fillRef idx="3">
+            <a:schemeClr val="accent1"/>
+          </a:fillRef>
+          <a:effectRef idx="2">
+            <a:schemeClr val="accent1"/>
+          </a:effectRef>
+          <a:fontRef idx="minor">
+            <a:schemeClr val="lt1"/>
+          </a:fontRef>
+        </p:style>
+        <p:txBody>
+          <a:bodyPr rtlCol="0" anchor="ctr" lIns="0" rIns="0" tIns="0" bIns="0"/>
+          <a:lstStyle/>
+          <a:p>
+            <a:pPr algn="ctr"/>
+            <a:r>
+              <a:rPr sz="1500" b="1">
+                <a:solidFill>
+                  <a:srgbClr val="3A6EA5"/>
+                </a:solidFill>
+                <a:latin typeface="Patrick Hand"/>
+              </a:rPr>
+              <a:t>Stage 10</a:t>
+            </a:r>
+          </a:p>
+        </p:txBody>
+      </p:sp>
     </p:spTree>
   </p:cSld>
   <p:clrMapOvr>
@@ -6152,6 +6209,63 @@
           </a:p>
         </p:txBody>
       </p:sp>
+      <p:sp>
+        <p:nvSpPr>
+          <p:cNvPr id="10" name="Rounded Rectangle 9"/>
+          <p:cNvSpPr/>
+          <p:nvPr/>
+        </p:nvSpPr>
+        <p:spPr>
+          <a:xfrm>
+            <a:off x="10241280" y="182880"/>
+            <a:ext cx="1691640" cy="384048"/>
+          </a:xfrm>
+          <a:prstGeom prst="roundRect">
+            <a:avLst>
+              <a:gd name="adj" fmla="val 30000"/>
+            </a:avLst>
+          </a:prstGeom>
+          <a:solidFill>
+            <a:srgbClr val="FFFFFF"/>
+          </a:solidFill>
+          <a:ln w="22225">
+            <a:solidFill>
+              <a:srgbClr val="E07A2F"/>
+            </a:solidFill>
+          </a:ln>
+          <a:effectLst/>
+        </p:spPr>
+        <p:style>
+          <a:lnRef idx="1">
+            <a:schemeClr val="accent1"/>
+          </a:lnRef>
+          <a:fillRef idx="3">
+            <a:schemeClr val="accent1"/>
+          </a:fillRef>
+          <a:effectRef idx="2">
+            <a:schemeClr val="accent1"/>
+          </a:effectRef>
+          <a:fontRef idx="minor">
+            <a:schemeClr val="lt1"/>
+          </a:fontRef>
+        </p:style>
+        <p:txBody>
+          <a:bodyPr rtlCol="0" anchor="ctr" lIns="0" rIns="0" tIns="0" bIns="0"/>
+          <a:lstStyle/>
+          <a:p>
+            <a:pPr algn="ctr"/>
+            <a:r>
+              <a:rPr sz="1500" b="1">
+                <a:solidFill>
+                  <a:srgbClr val="E07A2F"/>
+                </a:solidFill>
+                <a:latin typeface="Patrick Hand"/>
+              </a:rPr>
+              <a:t>Stage 11</a:t>
+            </a:r>
+          </a:p>
+        </p:txBody>
+      </p:sp>
     </p:spTree>
   </p:cSld>
   <p:clrMapOvr>
@@ -6414,6 +6528,63 @@
           </a:p>
         </p:txBody>
       </p:sp>
+      <p:sp>
+        <p:nvSpPr>
+          <p:cNvPr id="7" name="Rounded Rectangle 6"/>
+          <p:cNvSpPr/>
+          <p:nvPr/>
+        </p:nvSpPr>
+        <p:spPr>
+          <a:xfrm>
+            <a:off x="10241280" y="182880"/>
+            <a:ext cx="1691640" cy="384048"/>
+          </a:xfrm>
+          <a:prstGeom prst="roundRect">
+            <a:avLst>
+              <a:gd name="adj" fmla="val 30000"/>
+            </a:avLst>
+          </a:prstGeom>
+          <a:solidFill>
+            <a:srgbClr val="FFFFFF"/>
+          </a:solidFill>
+          <a:ln w="22225">
+            <a:solidFill>
+              <a:srgbClr val="E07A2F"/>
+            </a:solidFill>
+          </a:ln>
+          <a:effectLst/>
+        </p:spPr>
+        <p:style>
+          <a:lnRef idx="1">
+            <a:schemeClr val="accent1"/>
+          </a:lnRef>
+          <a:fillRef idx="3">
+            <a:schemeClr val="accent1"/>
+          </a:fillRef>
+          <a:effectRef idx="2">
+            <a:schemeClr val="accent1"/>
+          </a:effectRef>
+          <a:fontRef idx="minor">
+            <a:schemeClr val="lt1"/>
+          </a:fontRef>
+        </p:style>
+        <p:txBody>
+          <a:bodyPr rtlCol="0" anchor="ctr" lIns="0" rIns="0" tIns="0" bIns="0"/>
+          <a:lstStyle/>
+          <a:p>
+            <a:pPr algn="ctr"/>
+            <a:r>
+              <a:rPr sz="1500" b="1">
+                <a:solidFill>
+                  <a:srgbClr val="E07A2F"/>
+                </a:solidFill>
+                <a:latin typeface="Patrick Hand"/>
+              </a:rPr>
+              <a:t>Stage 11</a:t>
+            </a:r>
+          </a:p>
+        </p:txBody>
+      </p:sp>
     </p:spTree>
   </p:cSld>
   <p:clrMapOvr>
@@ -6719,6 +6890,63 @@
           </a:p>
         </p:txBody>
       </p:sp>
+      <p:sp>
+        <p:nvSpPr>
+          <p:cNvPr id="7" name="Rounded Rectangle 6"/>
+          <p:cNvSpPr/>
+          <p:nvPr/>
+        </p:nvSpPr>
+        <p:spPr>
+          <a:xfrm>
+            <a:off x="10241280" y="182880"/>
+            <a:ext cx="1691640" cy="384048"/>
+          </a:xfrm>
+          <a:prstGeom prst="roundRect">
+            <a:avLst>
+              <a:gd name="adj" fmla="val 30000"/>
+            </a:avLst>
+          </a:prstGeom>
+          <a:solidFill>
+            <a:srgbClr val="FFFFFF"/>
+          </a:solidFill>
+          <a:ln w="22225">
+            <a:solidFill>
+              <a:srgbClr val="E07A2F"/>
+            </a:solidFill>
+          </a:ln>
+          <a:effectLst/>
+        </p:spPr>
+        <p:style>
+          <a:lnRef idx="1">
+            <a:schemeClr val="accent1"/>
+          </a:lnRef>
+          <a:fillRef idx="3">
+            <a:schemeClr val="accent1"/>
+          </a:fillRef>
+          <a:effectRef idx="2">
+            <a:schemeClr val="accent1"/>
+          </a:effectRef>
+          <a:fontRef idx="minor">
+            <a:schemeClr val="lt1"/>
+          </a:fontRef>
+        </p:style>
+        <p:txBody>
+          <a:bodyPr rtlCol="0" anchor="ctr" lIns="0" rIns="0" tIns="0" bIns="0"/>
+          <a:lstStyle/>
+          <a:p>
+            <a:pPr algn="ctr"/>
+            <a:r>
+              <a:rPr sz="1500" b="1">
+                <a:solidFill>
+                  <a:srgbClr val="E07A2F"/>
+                </a:solidFill>
+                <a:latin typeface="Patrick Hand"/>
+              </a:rPr>
+              <a:t>Stage 11</a:t>
+            </a:r>
+          </a:p>
+        </p:txBody>
+      </p:sp>
     </p:spTree>
   </p:cSld>
   <p:clrMapOvr>
@@ -6972,6 +7200,63 @@
           </a:p>
         </p:txBody>
       </p:sp>
+      <p:sp>
+        <p:nvSpPr>
+          <p:cNvPr id="7" name="Rounded Rectangle 6"/>
+          <p:cNvSpPr/>
+          <p:nvPr/>
+        </p:nvSpPr>
+        <p:spPr>
+          <a:xfrm>
+            <a:off x="10241280" y="182880"/>
+            <a:ext cx="1691640" cy="384048"/>
+          </a:xfrm>
+          <a:prstGeom prst="roundRect">
+            <a:avLst>
+              <a:gd name="adj" fmla="val 30000"/>
+            </a:avLst>
+          </a:prstGeom>
+          <a:solidFill>
+            <a:srgbClr val="FFFFFF"/>
+          </a:solidFill>
+          <a:ln w="22225">
+            <a:solidFill>
+              <a:srgbClr val="E07A2F"/>
+            </a:solidFill>
+          </a:ln>
+          <a:effectLst/>
+        </p:spPr>
+        <p:style>
+          <a:lnRef idx="1">
+            <a:schemeClr val="accent1"/>
+          </a:lnRef>
+          <a:fillRef idx="3">
+            <a:schemeClr val="accent1"/>
+          </a:fillRef>
+          <a:effectRef idx="2">
+            <a:schemeClr val="accent1"/>
+          </a:effectRef>
+          <a:fontRef idx="minor">
+            <a:schemeClr val="lt1"/>
+          </a:fontRef>
+        </p:style>
+        <p:txBody>
+          <a:bodyPr rtlCol="0" anchor="ctr" lIns="0" rIns="0" tIns="0" bIns="0"/>
+          <a:lstStyle/>
+          <a:p>
+            <a:pPr algn="ctr"/>
+            <a:r>
+              <a:rPr sz="1500" b="1">
+                <a:solidFill>
+                  <a:srgbClr val="E07A2F"/>
+                </a:solidFill>
+                <a:latin typeface="Patrick Hand"/>
+              </a:rPr>
+              <a:t>Stage 11</a:t>
+            </a:r>
+          </a:p>
+        </p:txBody>
+      </p:sp>
     </p:spTree>
   </p:cSld>
   <p:clrMapOvr>
@@ -7286,6 +7571,63 @@
           </a:p>
         </p:txBody>
       </p:sp>
+      <p:sp>
+        <p:nvSpPr>
+          <p:cNvPr id="7" name="Rounded Rectangle 6"/>
+          <p:cNvSpPr/>
+          <p:nvPr/>
+        </p:nvSpPr>
+        <p:spPr>
+          <a:xfrm>
+            <a:off x="10241280" y="182880"/>
+            <a:ext cx="1691640" cy="384048"/>
+          </a:xfrm>
+          <a:prstGeom prst="roundRect">
+            <a:avLst>
+              <a:gd name="adj" fmla="val 30000"/>
+            </a:avLst>
+          </a:prstGeom>
+          <a:solidFill>
+            <a:srgbClr val="FFFFFF"/>
+          </a:solidFill>
+          <a:ln w="22225">
+            <a:solidFill>
+              <a:srgbClr val="3C8D5A"/>
+            </a:solidFill>
+          </a:ln>
+          <a:effectLst/>
+        </p:spPr>
+        <p:style>
+          <a:lnRef idx="1">
+            <a:schemeClr val="accent1"/>
+          </a:lnRef>
+          <a:fillRef idx="3">
+            <a:schemeClr val="accent1"/>
+          </a:fillRef>
+          <a:effectRef idx="2">
+            <a:schemeClr val="accent1"/>
+          </a:effectRef>
+          <a:fontRef idx="minor">
+            <a:schemeClr val="lt1"/>
+          </a:fontRef>
+        </p:style>
+        <p:txBody>
+          <a:bodyPr rtlCol="0" anchor="ctr" lIns="0" rIns="0" tIns="0" bIns="0"/>
+          <a:lstStyle/>
+          <a:p>
+            <a:pPr algn="ctr"/>
+            <a:r>
+              <a:rPr sz="1500" b="1">
+                <a:solidFill>
+                  <a:srgbClr val="3C8D5A"/>
+                </a:solidFill>
+                <a:latin typeface="Patrick Hand"/>
+              </a:rPr>
+              <a:t>Stage 12</a:t>
+            </a:r>
+          </a:p>
+        </p:txBody>
+      </p:sp>
     </p:spTree>
   </p:cSld>
   <p:clrMapOvr>
@@ -7573,6 +7915,63 @@
           </a:p>
         </p:txBody>
       </p:sp>
+      <p:sp>
+        <p:nvSpPr>
+          <p:cNvPr id="7" name="Rounded Rectangle 6"/>
+          <p:cNvSpPr/>
+          <p:nvPr/>
+        </p:nvSpPr>
+        <p:spPr>
+          <a:xfrm>
+            <a:off x="10241280" y="182880"/>
+            <a:ext cx="1691640" cy="384048"/>
+          </a:xfrm>
+          <a:prstGeom prst="roundRect">
+            <a:avLst>
+              <a:gd name="adj" fmla="val 30000"/>
+            </a:avLst>
+          </a:prstGeom>
+          <a:solidFill>
+            <a:srgbClr val="FFFFFF"/>
+          </a:solidFill>
+          <a:ln w="22225">
+            <a:solidFill>
+              <a:srgbClr val="3C8D5A"/>
+            </a:solidFill>
+          </a:ln>
+          <a:effectLst/>
+        </p:spPr>
+        <p:style>
+          <a:lnRef idx="1">
+            <a:schemeClr val="accent1"/>
+          </a:lnRef>
+          <a:fillRef idx="3">
+            <a:schemeClr val="accent1"/>
+          </a:fillRef>
+          <a:effectRef idx="2">
+            <a:schemeClr val="accent1"/>
+          </a:effectRef>
+          <a:fontRef idx="minor">
+            <a:schemeClr val="lt1"/>
+          </a:fontRef>
+        </p:style>
+        <p:txBody>
+          <a:bodyPr rtlCol="0" anchor="ctr" lIns="0" rIns="0" tIns="0" bIns="0"/>
+          <a:lstStyle/>
+          <a:p>
+            <a:pPr algn="ctr"/>
+            <a:r>
+              <a:rPr sz="1500" b="1">
+                <a:solidFill>
+                  <a:srgbClr val="3C8D5A"/>
+                </a:solidFill>
+                <a:latin typeface="Patrick Hand"/>
+              </a:rPr>
+              <a:t>Stage 12</a:t>
+            </a:r>
+          </a:p>
+        </p:txBody>
+      </p:sp>
     </p:spTree>
   </p:cSld>
   <p:clrMapOvr>
@@ -7817,6 +8216,63 @@
           </a:p>
         </p:txBody>
       </p:sp>
+      <p:sp>
+        <p:nvSpPr>
+          <p:cNvPr id="7" name="Rounded Rectangle 6"/>
+          <p:cNvSpPr/>
+          <p:nvPr/>
+        </p:nvSpPr>
+        <p:spPr>
+          <a:xfrm>
+            <a:off x="10241280" y="182880"/>
+            <a:ext cx="1691640" cy="384048"/>
+          </a:xfrm>
+          <a:prstGeom prst="roundRect">
+            <a:avLst>
+              <a:gd name="adj" fmla="val 30000"/>
+            </a:avLst>
+          </a:prstGeom>
+          <a:solidFill>
+            <a:srgbClr val="FFFFFF"/>
+          </a:solidFill>
+          <a:ln w="22225">
+            <a:solidFill>
+              <a:srgbClr val="3A6EA5"/>
+            </a:solidFill>
+          </a:ln>
+          <a:effectLst/>
+        </p:spPr>
+        <p:style>
+          <a:lnRef idx="1">
+            <a:schemeClr val="accent1"/>
+          </a:lnRef>
+          <a:fillRef idx="3">
+            <a:schemeClr val="accent1"/>
+          </a:fillRef>
+          <a:effectRef idx="2">
+            <a:schemeClr val="accent1"/>
+          </a:effectRef>
+          <a:fontRef idx="minor">
+            <a:schemeClr val="lt1"/>
+          </a:fontRef>
+        </p:style>
+        <p:txBody>
+          <a:bodyPr rtlCol="0" anchor="ctr" lIns="0" rIns="0" tIns="0" bIns="0"/>
+          <a:lstStyle/>
+          <a:p>
+            <a:pPr algn="ctr"/>
+            <a:r>
+              <a:rPr sz="1500" b="1">
+                <a:solidFill>
+                  <a:srgbClr val="3A6EA5"/>
+                </a:solidFill>
+                <a:latin typeface="Patrick Hand"/>
+              </a:rPr>
+              <a:t>Stage 10</a:t>
+            </a:r>
+          </a:p>
+        </p:txBody>
+      </p:sp>
     </p:spTree>
   </p:cSld>
   <p:clrMapOvr>
@@ -8070,6 +8526,63 @@
           </a:p>
         </p:txBody>
       </p:sp>
+      <p:sp>
+        <p:nvSpPr>
+          <p:cNvPr id="7" name="Rounded Rectangle 6"/>
+          <p:cNvSpPr/>
+          <p:nvPr/>
+        </p:nvSpPr>
+        <p:spPr>
+          <a:xfrm>
+            <a:off x="10241280" y="182880"/>
+            <a:ext cx="1691640" cy="384048"/>
+          </a:xfrm>
+          <a:prstGeom prst="roundRect">
+            <a:avLst>
+              <a:gd name="adj" fmla="val 30000"/>
+            </a:avLst>
+          </a:prstGeom>
+          <a:solidFill>
+            <a:srgbClr val="FFFFFF"/>
+          </a:solidFill>
+          <a:ln w="22225">
+            <a:solidFill>
+              <a:srgbClr val="3A6EA5"/>
+            </a:solidFill>
+          </a:ln>
+          <a:effectLst/>
+        </p:spPr>
+        <p:style>
+          <a:lnRef idx="1">
+            <a:schemeClr val="accent1"/>
+          </a:lnRef>
+          <a:fillRef idx="3">
+            <a:schemeClr val="accent1"/>
+          </a:fillRef>
+          <a:effectRef idx="2">
+            <a:schemeClr val="accent1"/>
+          </a:effectRef>
+          <a:fontRef idx="minor">
+            <a:schemeClr val="lt1"/>
+          </a:fontRef>
+        </p:style>
+        <p:txBody>
+          <a:bodyPr rtlCol="0" anchor="ctr" lIns="0" rIns="0" tIns="0" bIns="0"/>
+          <a:lstStyle/>
+          <a:p>
+            <a:pPr algn="ctr"/>
+            <a:r>
+              <a:rPr sz="1500" b="1">
+                <a:solidFill>
+                  <a:srgbClr val="3A6EA5"/>
+                </a:solidFill>
+                <a:latin typeface="Patrick Hand"/>
+              </a:rPr>
+              <a:t>Stage 10</a:t>
+            </a:r>
+          </a:p>
+        </p:txBody>
+      </p:sp>
     </p:spTree>
   </p:cSld>
   <p:clrMapOvr>
@@ -8339,6 +8852,63 @@
           </a:p>
         </p:txBody>
       </p:sp>
+      <p:sp>
+        <p:nvSpPr>
+          <p:cNvPr id="7" name="Rounded Rectangle 6"/>
+          <p:cNvSpPr/>
+          <p:nvPr/>
+        </p:nvSpPr>
+        <p:spPr>
+          <a:xfrm>
+            <a:off x="10241280" y="182880"/>
+            <a:ext cx="1691640" cy="384048"/>
+          </a:xfrm>
+          <a:prstGeom prst="roundRect">
+            <a:avLst>
+              <a:gd name="adj" fmla="val 30000"/>
+            </a:avLst>
+          </a:prstGeom>
+          <a:solidFill>
+            <a:srgbClr val="FFFFFF"/>
+          </a:solidFill>
+          <a:ln w="22225">
+            <a:solidFill>
+              <a:srgbClr val="3A6EA5"/>
+            </a:solidFill>
+          </a:ln>
+          <a:effectLst/>
+        </p:spPr>
+        <p:style>
+          <a:lnRef idx="1">
+            <a:schemeClr val="accent1"/>
+          </a:lnRef>
+          <a:fillRef idx="3">
+            <a:schemeClr val="accent1"/>
+          </a:fillRef>
+          <a:effectRef idx="2">
+            <a:schemeClr val="accent1"/>
+          </a:effectRef>
+          <a:fontRef idx="minor">
+            <a:schemeClr val="lt1"/>
+          </a:fontRef>
+        </p:style>
+        <p:txBody>
+          <a:bodyPr rtlCol="0" anchor="ctr" lIns="0" rIns="0" tIns="0" bIns="0"/>
+          <a:lstStyle/>
+          <a:p>
+            <a:pPr algn="ctr"/>
+            <a:r>
+              <a:rPr sz="1500" b="1">
+                <a:solidFill>
+                  <a:srgbClr val="3A6EA5"/>
+                </a:solidFill>
+                <a:latin typeface="Patrick Hand"/>
+              </a:rPr>
+              <a:t>Stage 10</a:t>
+            </a:r>
+          </a:p>
+        </p:txBody>
+      </p:sp>
     </p:spTree>
   </p:cSld>
   <p:clrMapOvr>
@@ -8489,7 +9059,7 @@
                 </a:solidFill>
                 <a:latin typeface="Patrick Hand"/>
               </a:rPr>
-              <a:t>can't write the authors</a:t>
+              <a:t>can't write the list (R0/R1)</a:t>
             </a:r>
           </a:p>
           <a:p>
@@ -8579,7 +9149,7 @@
                 </a:solidFill>
                 <a:latin typeface="Patrick Hand"/>
               </a:rPr>
-              <a:t>can't write the authors</a:t>
+              <a:t>can't write the list (R0/R1)</a:t>
             </a:r>
           </a:p>
           <a:p>
@@ -8746,6 +9316,63 @@
                 <a:latin typeface="Patrick Hand"/>
               </a:rPr>
               <a:t>So: at which layer does target pull ahead of control?</a:t>
+            </a:r>
+          </a:p>
+        </p:txBody>
+      </p:sp>
+      <p:sp>
+        <p:nvSpPr>
+          <p:cNvPr id="8" name="Rounded Rectangle 7"/>
+          <p:cNvSpPr/>
+          <p:nvPr/>
+        </p:nvSpPr>
+        <p:spPr>
+          <a:xfrm>
+            <a:off x="10241280" y="182880"/>
+            <a:ext cx="1691640" cy="384048"/>
+          </a:xfrm>
+          <a:prstGeom prst="roundRect">
+            <a:avLst>
+              <a:gd name="adj" fmla="val 30000"/>
+            </a:avLst>
+          </a:prstGeom>
+          <a:solidFill>
+            <a:srgbClr val="FFFFFF"/>
+          </a:solidFill>
+          <a:ln w="22225">
+            <a:solidFill>
+              <a:srgbClr val="3A6EA5"/>
+            </a:solidFill>
+          </a:ln>
+          <a:effectLst/>
+        </p:spPr>
+        <p:style>
+          <a:lnRef idx="1">
+            <a:schemeClr val="accent1"/>
+          </a:lnRef>
+          <a:fillRef idx="3">
+            <a:schemeClr val="accent1"/>
+          </a:fillRef>
+          <a:effectRef idx="2">
+            <a:schemeClr val="accent1"/>
+          </a:effectRef>
+          <a:fontRef idx="minor">
+            <a:schemeClr val="lt1"/>
+          </a:fontRef>
+        </p:style>
+        <p:txBody>
+          <a:bodyPr rtlCol="0" anchor="ctr" lIns="0" rIns="0" tIns="0" bIns="0"/>
+          <a:lstStyle/>
+          <a:p>
+            <a:pPr algn="ctr"/>
+            <a:r>
+              <a:rPr sz="1500" b="1">
+                <a:solidFill>
+                  <a:srgbClr val="3A6EA5"/>
+                </a:solidFill>
+                <a:latin typeface="Patrick Hand"/>
+              </a:rPr>
+              <a:t>Stage 10</a:t>
             </a:r>
           </a:p>
         </p:txBody>
@@ -8987,6 +9614,63 @@
           </a:p>
         </p:txBody>
       </p:sp>
+      <p:sp>
+        <p:nvSpPr>
+          <p:cNvPr id="7" name="Rounded Rectangle 6"/>
+          <p:cNvSpPr/>
+          <p:nvPr/>
+        </p:nvSpPr>
+        <p:spPr>
+          <a:xfrm>
+            <a:off x="10241280" y="182880"/>
+            <a:ext cx="1691640" cy="384048"/>
+          </a:xfrm>
+          <a:prstGeom prst="roundRect">
+            <a:avLst>
+              <a:gd name="adj" fmla="val 30000"/>
+            </a:avLst>
+          </a:prstGeom>
+          <a:solidFill>
+            <a:srgbClr val="FFFFFF"/>
+          </a:solidFill>
+          <a:ln w="22225">
+            <a:solidFill>
+              <a:srgbClr val="3A6EA5"/>
+            </a:solidFill>
+          </a:ln>
+          <a:effectLst/>
+        </p:spPr>
+        <p:style>
+          <a:lnRef idx="1">
+            <a:schemeClr val="accent1"/>
+          </a:lnRef>
+          <a:fillRef idx="3">
+            <a:schemeClr val="accent1"/>
+          </a:fillRef>
+          <a:effectRef idx="2">
+            <a:schemeClr val="accent1"/>
+          </a:effectRef>
+          <a:fontRef idx="minor">
+            <a:schemeClr val="lt1"/>
+          </a:fontRef>
+        </p:style>
+        <p:txBody>
+          <a:bodyPr rtlCol="0" anchor="ctr" lIns="0" rIns="0" tIns="0" bIns="0"/>
+          <a:lstStyle/>
+          <a:p>
+            <a:pPr algn="ctr"/>
+            <a:r>
+              <a:rPr sz="1500" b="1">
+                <a:solidFill>
+                  <a:srgbClr val="3A6EA5"/>
+                </a:solidFill>
+                <a:latin typeface="Patrick Hand"/>
+              </a:rPr>
+              <a:t>Stage 10</a:t>
+            </a:r>
+          </a:p>
+        </p:txBody>
+      </p:sp>
     </p:spTree>
   </p:cSld>
   <p:clrMapOvr>
@@ -9247,6 +9931,63 @@
           </a:p>
         </p:txBody>
       </p:sp>
+      <p:sp>
+        <p:nvSpPr>
+          <p:cNvPr id="7" name="Rounded Rectangle 6"/>
+          <p:cNvSpPr/>
+          <p:nvPr/>
+        </p:nvSpPr>
+        <p:spPr>
+          <a:xfrm>
+            <a:off x="10241280" y="182880"/>
+            <a:ext cx="1691640" cy="384048"/>
+          </a:xfrm>
+          <a:prstGeom prst="roundRect">
+            <a:avLst>
+              <a:gd name="adj" fmla="val 30000"/>
+            </a:avLst>
+          </a:prstGeom>
+          <a:solidFill>
+            <a:srgbClr val="FFFFFF"/>
+          </a:solidFill>
+          <a:ln w="22225">
+            <a:solidFill>
+              <a:srgbClr val="3A6EA5"/>
+            </a:solidFill>
+          </a:ln>
+          <a:effectLst/>
+        </p:spPr>
+        <p:style>
+          <a:lnRef idx="1">
+            <a:schemeClr val="accent1"/>
+          </a:lnRef>
+          <a:fillRef idx="3">
+            <a:schemeClr val="accent1"/>
+          </a:fillRef>
+          <a:effectRef idx="2">
+            <a:schemeClr val="accent1"/>
+          </a:effectRef>
+          <a:fontRef idx="minor">
+            <a:schemeClr val="lt1"/>
+          </a:fontRef>
+        </p:style>
+        <p:txBody>
+          <a:bodyPr rtlCol="0" anchor="ctr" lIns="0" rIns="0" tIns="0" bIns="0"/>
+          <a:lstStyle/>
+          <a:p>
+            <a:pPr algn="ctr"/>
+            <a:r>
+              <a:rPr sz="1500" b="1">
+                <a:solidFill>
+                  <a:srgbClr val="3A6EA5"/>
+                </a:solidFill>
+                <a:latin typeface="Patrick Hand"/>
+              </a:rPr>
+              <a:t>Stage 10</a:t>
+            </a:r>
+          </a:p>
+        </p:txBody>
+      </p:sp>
     </p:spTree>
   </p:cSld>
   <p:clrMapOvr>
@@ -9454,6 +10195,63 @@
           </a:p>
         </p:txBody>
       </p:sp>
+      <p:sp>
+        <p:nvSpPr>
+          <p:cNvPr id="8" name="Rounded Rectangle 7"/>
+          <p:cNvSpPr/>
+          <p:nvPr/>
+        </p:nvSpPr>
+        <p:spPr>
+          <a:xfrm>
+            <a:off x="10241280" y="182880"/>
+            <a:ext cx="1691640" cy="384048"/>
+          </a:xfrm>
+          <a:prstGeom prst="roundRect">
+            <a:avLst>
+              <a:gd name="adj" fmla="val 30000"/>
+            </a:avLst>
+          </a:prstGeom>
+          <a:solidFill>
+            <a:srgbClr val="FFFFFF"/>
+          </a:solidFill>
+          <a:ln w="22225">
+            <a:solidFill>
+              <a:srgbClr val="3A6EA5"/>
+            </a:solidFill>
+          </a:ln>
+          <a:effectLst/>
+        </p:spPr>
+        <p:style>
+          <a:lnRef idx="1">
+            <a:schemeClr val="accent1"/>
+          </a:lnRef>
+          <a:fillRef idx="3">
+            <a:schemeClr val="accent1"/>
+          </a:fillRef>
+          <a:effectRef idx="2">
+            <a:schemeClr val="accent1"/>
+          </a:effectRef>
+          <a:fontRef idx="minor">
+            <a:schemeClr val="lt1"/>
+          </a:fontRef>
+        </p:style>
+        <p:txBody>
+          <a:bodyPr rtlCol="0" anchor="ctr" lIns="0" rIns="0" tIns="0" bIns="0"/>
+          <a:lstStyle/>
+          <a:p>
+            <a:pPr algn="ctr"/>
+            <a:r>
+              <a:rPr sz="1500" b="1">
+                <a:solidFill>
+                  <a:srgbClr val="3A6EA5"/>
+                </a:solidFill>
+                <a:latin typeface="Patrick Hand"/>
+              </a:rPr>
+              <a:t>Stage 10</a:t>
+            </a:r>
+          </a:p>
+        </p:txBody>
+      </p:sp>
     </p:spTree>
   </p:cSld>
   <p:clrMapOvr>
@@ -10326,6 +11124,63 @@
           </a:p>
         </p:txBody>
       </p:sp>
+      <p:sp>
+        <p:nvSpPr>
+          <p:cNvPr id="6" name="Rounded Rectangle 5"/>
+          <p:cNvSpPr/>
+          <p:nvPr/>
+        </p:nvSpPr>
+        <p:spPr>
+          <a:xfrm>
+            <a:off x="10241280" y="182880"/>
+            <a:ext cx="1691640" cy="384048"/>
+          </a:xfrm>
+          <a:prstGeom prst="roundRect">
+            <a:avLst>
+              <a:gd name="adj" fmla="val 30000"/>
+            </a:avLst>
+          </a:prstGeom>
+          <a:solidFill>
+            <a:srgbClr val="FFFFFF"/>
+          </a:solidFill>
+          <a:ln w="22225">
+            <a:solidFill>
+              <a:srgbClr val="3C8D5A"/>
+            </a:solidFill>
+          </a:ln>
+          <a:effectLst/>
+        </p:spPr>
+        <p:style>
+          <a:lnRef idx="1">
+            <a:schemeClr val="accent1"/>
+          </a:lnRef>
+          <a:fillRef idx="3">
+            <a:schemeClr val="accent1"/>
+          </a:fillRef>
+          <a:effectRef idx="2">
+            <a:schemeClr val="accent1"/>
+          </a:effectRef>
+          <a:fontRef idx="minor">
+            <a:schemeClr val="lt1"/>
+          </a:fontRef>
+        </p:style>
+        <p:txBody>
+          <a:bodyPr rtlCol="0" anchor="ctr" lIns="0" rIns="0" tIns="0" bIns="0"/>
+          <a:lstStyle/>
+          <a:p>
+            <a:pPr algn="ctr"/>
+            <a:r>
+              <a:rPr sz="1500" b="1">
+                <a:solidFill>
+                  <a:srgbClr val="3C8D5A"/>
+                </a:solidFill>
+                <a:latin typeface="Patrick Hand"/>
+              </a:rPr>
+              <a:t>Stage 12 plan</a:t>
+            </a:r>
+          </a:p>
+        </p:txBody>
+      </p:sp>
     </p:spTree>
   </p:cSld>
   <p:clrMapOvr>
@@ -11119,6 +11974,63 @@
           </a:p>
         </p:txBody>
       </p:sp>
+      <p:sp>
+        <p:nvSpPr>
+          <p:cNvPr id="15" name="Rounded Rectangle 14"/>
+          <p:cNvSpPr/>
+          <p:nvPr/>
+        </p:nvSpPr>
+        <p:spPr>
+          <a:xfrm>
+            <a:off x="10241280" y="182880"/>
+            <a:ext cx="1691640" cy="384048"/>
+          </a:xfrm>
+          <a:prstGeom prst="roundRect">
+            <a:avLst>
+              <a:gd name="adj" fmla="val 30000"/>
+            </a:avLst>
+          </a:prstGeom>
+          <a:solidFill>
+            <a:srgbClr val="FFFFFF"/>
+          </a:solidFill>
+          <a:ln w="22225">
+            <a:solidFill>
+              <a:srgbClr val="3A6EA5"/>
+            </a:solidFill>
+          </a:ln>
+          <a:effectLst/>
+        </p:spPr>
+        <p:style>
+          <a:lnRef idx="1">
+            <a:schemeClr val="accent1"/>
+          </a:lnRef>
+          <a:fillRef idx="3">
+            <a:schemeClr val="accent1"/>
+          </a:fillRef>
+          <a:effectRef idx="2">
+            <a:schemeClr val="accent1"/>
+          </a:effectRef>
+          <a:fontRef idx="minor">
+            <a:schemeClr val="lt1"/>
+          </a:fontRef>
+        </p:style>
+        <p:txBody>
+          <a:bodyPr rtlCol="0" anchor="ctr" lIns="0" rIns="0" tIns="0" bIns="0"/>
+          <a:lstStyle/>
+          <a:p>
+            <a:pPr algn="ctr"/>
+            <a:r>
+              <a:rPr sz="1500" b="1">
+                <a:solidFill>
+                  <a:srgbClr val="3A6EA5"/>
+                </a:solidFill>
+                <a:latin typeface="Patrick Hand"/>
+              </a:rPr>
+              <a:t>Stage 10</a:t>
+            </a:r>
+          </a:p>
+        </p:txBody>
+      </p:sp>
     </p:spTree>
   </p:cSld>
   <p:clrMapOvr>
@@ -11791,6 +12703,63 @@
           </a:p>
         </p:txBody>
       </p:sp>
+      <p:sp>
+        <p:nvSpPr>
+          <p:cNvPr id="9" name="Rounded Rectangle 8"/>
+          <p:cNvSpPr/>
+          <p:nvPr/>
+        </p:nvSpPr>
+        <p:spPr>
+          <a:xfrm>
+            <a:off x="10241280" y="182880"/>
+            <a:ext cx="1691640" cy="384048"/>
+          </a:xfrm>
+          <a:prstGeom prst="roundRect">
+            <a:avLst>
+              <a:gd name="adj" fmla="val 30000"/>
+            </a:avLst>
+          </a:prstGeom>
+          <a:solidFill>
+            <a:srgbClr val="FFFFFF"/>
+          </a:solidFill>
+          <a:ln w="22225">
+            <a:solidFill>
+              <a:srgbClr val="3A6EA5"/>
+            </a:solidFill>
+          </a:ln>
+          <a:effectLst/>
+        </p:spPr>
+        <p:style>
+          <a:lnRef idx="1">
+            <a:schemeClr val="accent1"/>
+          </a:lnRef>
+          <a:fillRef idx="3">
+            <a:schemeClr val="accent1"/>
+          </a:fillRef>
+          <a:effectRef idx="2">
+            <a:schemeClr val="accent1"/>
+          </a:effectRef>
+          <a:fontRef idx="minor">
+            <a:schemeClr val="lt1"/>
+          </a:fontRef>
+        </p:style>
+        <p:txBody>
+          <a:bodyPr rtlCol="0" anchor="ctr" lIns="0" rIns="0" tIns="0" bIns="0"/>
+          <a:lstStyle/>
+          <a:p>
+            <a:pPr algn="ctr"/>
+            <a:r>
+              <a:rPr sz="1500" b="1">
+                <a:solidFill>
+                  <a:srgbClr val="3A6EA5"/>
+                </a:solidFill>
+                <a:latin typeface="Patrick Hand"/>
+              </a:rPr>
+              <a:t>Stage 10</a:t>
+            </a:r>
+          </a:p>
+        </p:txBody>
+      </p:sp>
     </p:spTree>
   </p:cSld>
   <p:clrMapOvr>
@@ -12474,6 +13443,63 @@
           </a:p>
         </p:txBody>
       </p:sp>
+      <p:sp>
+        <p:nvSpPr>
+          <p:cNvPr id="12" name="Rounded Rectangle 11"/>
+          <p:cNvSpPr/>
+          <p:nvPr/>
+        </p:nvSpPr>
+        <p:spPr>
+          <a:xfrm>
+            <a:off x="10241280" y="182880"/>
+            <a:ext cx="1691640" cy="384048"/>
+          </a:xfrm>
+          <a:prstGeom prst="roundRect">
+            <a:avLst>
+              <a:gd name="adj" fmla="val 30000"/>
+            </a:avLst>
+          </a:prstGeom>
+          <a:solidFill>
+            <a:srgbClr val="FFFFFF"/>
+          </a:solidFill>
+          <a:ln w="22225">
+            <a:solidFill>
+              <a:srgbClr val="3A6EA5"/>
+            </a:solidFill>
+          </a:ln>
+          <a:effectLst/>
+        </p:spPr>
+        <p:style>
+          <a:lnRef idx="1">
+            <a:schemeClr val="accent1"/>
+          </a:lnRef>
+          <a:fillRef idx="3">
+            <a:schemeClr val="accent1"/>
+          </a:fillRef>
+          <a:effectRef idx="2">
+            <a:schemeClr val="accent1"/>
+          </a:effectRef>
+          <a:fontRef idx="minor">
+            <a:schemeClr val="lt1"/>
+          </a:fontRef>
+        </p:style>
+        <p:txBody>
+          <a:bodyPr rtlCol="0" anchor="ctr" lIns="0" rIns="0" tIns="0" bIns="0"/>
+          <a:lstStyle/>
+          <a:p>
+            <a:pPr algn="ctr"/>
+            <a:r>
+              <a:rPr sz="1500" b="1">
+                <a:solidFill>
+                  <a:srgbClr val="3A6EA5"/>
+                </a:solidFill>
+                <a:latin typeface="Patrick Hand"/>
+              </a:rPr>
+              <a:t>Stage 10</a:t>
+            </a:r>
+          </a:p>
+        </p:txBody>
+      </p:sp>
     </p:spTree>
   </p:cSld>
   <p:clrMapOvr>
@@ -12845,6 +13871,63 @@
           </a:p>
         </p:txBody>
       </p:sp>
+      <p:sp>
+        <p:nvSpPr>
+          <p:cNvPr id="8" name="Rounded Rectangle 7"/>
+          <p:cNvSpPr/>
+          <p:nvPr/>
+        </p:nvSpPr>
+        <p:spPr>
+          <a:xfrm>
+            <a:off x="10241280" y="182880"/>
+            <a:ext cx="1691640" cy="384048"/>
+          </a:xfrm>
+          <a:prstGeom prst="roundRect">
+            <a:avLst>
+              <a:gd name="adj" fmla="val 30000"/>
+            </a:avLst>
+          </a:prstGeom>
+          <a:solidFill>
+            <a:srgbClr val="FFFFFF"/>
+          </a:solidFill>
+          <a:ln w="22225">
+            <a:solidFill>
+              <a:srgbClr val="3A6EA5"/>
+            </a:solidFill>
+          </a:ln>
+          <a:effectLst/>
+        </p:spPr>
+        <p:style>
+          <a:lnRef idx="1">
+            <a:schemeClr val="accent1"/>
+          </a:lnRef>
+          <a:fillRef idx="3">
+            <a:schemeClr val="accent1"/>
+          </a:fillRef>
+          <a:effectRef idx="2">
+            <a:schemeClr val="accent1"/>
+          </a:effectRef>
+          <a:fontRef idx="minor">
+            <a:schemeClr val="lt1"/>
+          </a:fontRef>
+        </p:style>
+        <p:txBody>
+          <a:bodyPr rtlCol="0" anchor="ctr" lIns="0" rIns="0" tIns="0" bIns="0"/>
+          <a:lstStyle/>
+          <a:p>
+            <a:pPr algn="ctr"/>
+            <a:r>
+              <a:rPr sz="1500" b="1">
+                <a:solidFill>
+                  <a:srgbClr val="3A6EA5"/>
+                </a:solidFill>
+                <a:latin typeface="Patrick Hand"/>
+              </a:rPr>
+              <a:t>Stage 10</a:t>
+            </a:r>
+          </a:p>
+        </p:txBody>
+      </p:sp>
     </p:spTree>
   </p:cSld>
   <p:clrMapOvr>
@@ -13116,6 +14199,63 @@
           </a:p>
         </p:txBody>
       </p:sp>
+      <p:sp>
+        <p:nvSpPr>
+          <p:cNvPr id="7" name="Rounded Rectangle 6"/>
+          <p:cNvSpPr/>
+          <p:nvPr/>
+        </p:nvSpPr>
+        <p:spPr>
+          <a:xfrm>
+            <a:off x="10241280" y="182880"/>
+            <a:ext cx="1691640" cy="384048"/>
+          </a:xfrm>
+          <a:prstGeom prst="roundRect">
+            <a:avLst>
+              <a:gd name="adj" fmla="val 30000"/>
+            </a:avLst>
+          </a:prstGeom>
+          <a:solidFill>
+            <a:srgbClr val="FFFFFF"/>
+          </a:solidFill>
+          <a:ln w="22225">
+            <a:solidFill>
+              <a:srgbClr val="3A6EA5"/>
+            </a:solidFill>
+          </a:ln>
+          <a:effectLst/>
+        </p:spPr>
+        <p:style>
+          <a:lnRef idx="1">
+            <a:schemeClr val="accent1"/>
+          </a:lnRef>
+          <a:fillRef idx="3">
+            <a:schemeClr val="accent1"/>
+          </a:fillRef>
+          <a:effectRef idx="2">
+            <a:schemeClr val="accent1"/>
+          </a:effectRef>
+          <a:fontRef idx="minor">
+            <a:schemeClr val="lt1"/>
+          </a:fontRef>
+        </p:style>
+        <p:txBody>
+          <a:bodyPr rtlCol="0" anchor="ctr" lIns="0" rIns="0" tIns="0" bIns="0"/>
+          <a:lstStyle/>
+          <a:p>
+            <a:pPr algn="ctr"/>
+            <a:r>
+              <a:rPr sz="1500" b="1">
+                <a:solidFill>
+                  <a:srgbClr val="3A6EA5"/>
+                </a:solidFill>
+                <a:latin typeface="Patrick Hand"/>
+              </a:rPr>
+              <a:t>Stage 10</a:t>
+            </a:r>
+          </a:p>
+        </p:txBody>
+      </p:sp>
     </p:spTree>
   </p:cSld>
   <p:clrMapOvr>
@@ -13396,6 +14536,63 @@
           </a:p>
         </p:txBody>
       </p:sp>
+      <p:sp>
+        <p:nvSpPr>
+          <p:cNvPr id="7" name="Rounded Rectangle 6"/>
+          <p:cNvSpPr/>
+          <p:nvPr/>
+        </p:nvSpPr>
+        <p:spPr>
+          <a:xfrm>
+            <a:off x="10241280" y="182880"/>
+            <a:ext cx="1691640" cy="384048"/>
+          </a:xfrm>
+          <a:prstGeom prst="roundRect">
+            <a:avLst>
+              <a:gd name="adj" fmla="val 30000"/>
+            </a:avLst>
+          </a:prstGeom>
+          <a:solidFill>
+            <a:srgbClr val="FFFFFF"/>
+          </a:solidFill>
+          <a:ln w="22225">
+            <a:solidFill>
+              <a:srgbClr val="3A6EA5"/>
+            </a:solidFill>
+          </a:ln>
+          <a:effectLst/>
+        </p:spPr>
+        <p:style>
+          <a:lnRef idx="1">
+            <a:schemeClr val="accent1"/>
+          </a:lnRef>
+          <a:fillRef idx="3">
+            <a:schemeClr val="accent1"/>
+          </a:fillRef>
+          <a:effectRef idx="2">
+            <a:schemeClr val="accent1"/>
+          </a:effectRef>
+          <a:fontRef idx="minor">
+            <a:schemeClr val="lt1"/>
+          </a:fontRef>
+        </p:style>
+        <p:txBody>
+          <a:bodyPr rtlCol="0" anchor="ctr" lIns="0" rIns="0" tIns="0" bIns="0"/>
+          <a:lstStyle/>
+          <a:p>
+            <a:pPr algn="ctr"/>
+            <a:r>
+              <a:rPr sz="1500" b="1">
+                <a:solidFill>
+                  <a:srgbClr val="3A6EA5"/>
+                </a:solidFill>
+                <a:latin typeface="Patrick Hand"/>
+              </a:rPr>
+              <a:t>Stage 10</a:t>
+            </a:r>
+          </a:p>
+        </p:txBody>
+      </p:sp>
     </p:spTree>
   </p:cSld>
   <p:clrMapOvr>
@@ -13549,7 +14746,7 @@
         <p:spPr>
           <a:xfrm rot="90000">
             <a:off x="9098280" y="1737360"/>
-            <a:ext cx="2651760" cy="3108960"/>
+            <a:ext cx="2651760" cy="3931920"/>
           </a:xfrm>
           <a:prstGeom prst="rect">
             <a:avLst/>
@@ -13588,7 +14785,7 @@
               </a:spcAft>
             </a:pPr>
             <a:r>
-              <a:rPr sz="1900" b="0">
+              <a:rPr sz="1800" b="0">
                 <a:solidFill>
                   <a:srgbClr val="2B2D42"/>
                 </a:solidFill>
@@ -13597,7 +14794,7 @@
               <a:t>Middle layers: </a:t>
             </a:r>
             <a:r>
-              <a:rPr sz="1900" b="1">
+              <a:rPr sz="1800" b="1">
                 <a:solidFill>
                   <a:srgbClr val="2B2D42"/>
                 </a:solidFill>
@@ -13613,7 +14810,7 @@
               </a:spcAft>
             </a:pPr>
             <a:r>
-              <a:rPr sz="1900" b="0">
+              <a:rPr sz="1800" b="0">
                 <a:solidFill>
                   <a:srgbClr val="2B2D42"/>
                 </a:solidFill>
@@ -13629,7 +14826,7 @@
               </a:spcAft>
             </a:pPr>
             <a:r>
-              <a:rPr sz="1900" b="1">
+              <a:rPr sz="1800" b="1">
                 <a:solidFill>
                   <a:srgbClr val="E07A2F"/>
                 </a:solidFill>
@@ -13645,13 +14842,95 @@
               </a:spcAft>
             </a:pPr>
             <a:r>
-              <a:rPr sz="1900" b="0">
+              <a:rPr sz="1800" b="0">
                 <a:solidFill>
                   <a:srgbClr val="2B2D42"/>
                 </a:solidFill>
                 <a:latin typeface="Patrick Hand"/>
               </a:rPr>
               <a:t>almost all title-specific</a:t>
+            </a:r>
+          </a:p>
+          <a:p>
+            <a:pPr algn="l">
+              <a:spcAft>
+                <a:spcPts val="900"/>
+              </a:spcAft>
+            </a:pPr>
+            <a:r>
+              <a:rPr sz="1800" b="1">
+                <a:solidFill>
+                  <a:srgbClr val="2B2D42"/>
+                </a:solidFill>
+                <a:latin typeface="Patrick Hand"/>
+              </a:rPr>
+              <a:t>R0 only</a:t>
+            </a:r>
+            <a:r>
+              <a:rPr sz="1800" b="0">
+                <a:solidFill>
+                  <a:srgbClr val="2B2D42"/>
+                </a:solidFill>
+                <a:latin typeface="Patrick Hand"/>
+              </a:rPr>
+              <a:t> (no author written): output +0.199 vs +0.207</a:t>
+            </a:r>
+          </a:p>
+        </p:txBody>
+      </p:sp>
+      <p:sp>
+        <p:nvSpPr>
+          <p:cNvPr id="7" name="Rounded Rectangle 6"/>
+          <p:cNvSpPr/>
+          <p:nvPr/>
+        </p:nvSpPr>
+        <p:spPr>
+          <a:xfrm>
+            <a:off x="10241280" y="182880"/>
+            <a:ext cx="1691640" cy="384048"/>
+          </a:xfrm>
+          <a:prstGeom prst="roundRect">
+            <a:avLst>
+              <a:gd name="adj" fmla="val 30000"/>
+            </a:avLst>
+          </a:prstGeom>
+          <a:solidFill>
+            <a:srgbClr val="FFFFFF"/>
+          </a:solidFill>
+          <a:ln w="22225">
+            <a:solidFill>
+              <a:srgbClr val="3A6EA5"/>
+            </a:solidFill>
+          </a:ln>
+          <a:effectLst/>
+        </p:spPr>
+        <p:style>
+          <a:lnRef idx="1">
+            <a:schemeClr val="accent1"/>
+          </a:lnRef>
+          <a:fillRef idx="3">
+            <a:schemeClr val="accent1"/>
+          </a:fillRef>
+          <a:effectRef idx="2">
+            <a:schemeClr val="accent1"/>
+          </a:effectRef>
+          <a:fontRef idx="minor">
+            <a:schemeClr val="lt1"/>
+          </a:fontRef>
+        </p:style>
+        <p:txBody>
+          <a:bodyPr rtlCol="0" anchor="ctr" lIns="0" rIns="0" tIns="0" bIns="0"/>
+          <a:lstStyle/>
+          <a:p>
+            <a:pPr algn="ctr"/>
+            <a:r>
+              <a:rPr sz="1500" b="1">
+                <a:solidFill>
+                  <a:srgbClr val="3A6EA5"/>
+                </a:solidFill>
+                <a:latin typeface="Patrick Hand"/>
+              </a:rPr>
+              <a:t>Stage 10</a:t>
             </a:r>
           </a:p>
         </p:txBody>

--- a/experiment_files/351_stage10/reports/talk/Stage10_author_readout_talk.pptx
+++ b/experiment_files/351_stage10/reports/talk/Stage10_author_readout_talk.pptx
@@ -17,12 +17,14 @@
     <p:sldId id="267" r:id="rId19"/>
     <p:sldId id="268" r:id="rId20"/>
     <p:sldId id="270" r:id="rId22"/>
+    <p:sldId id="280" r:id="rId32"/>
     <p:sldId id="278" r:id="rId30"/>
     <p:sldId id="279" r:id="rId31"/>
-    <p:sldId id="280" r:id="rId32"/>
+    <p:sldId id="282" r:id="rId34"/>
     <p:sldId id="261" r:id="rId13"/>
     <p:sldId id="262" r:id="rId14"/>
     <p:sldId id="269" r:id="rId21"/>
+    <p:sldId id="281" r:id="rId33"/>
     <p:sldId id="271" r:id="rId23"/>
     <p:sldId id="272" r:id="rId24"/>
     <p:sldId id="273" r:id="rId25"/>
@@ -1672,6 +1674,146 @@
 </file>
 
 <file path=ppt/notesSlides/notesSlide25.xml><?xml version="1.0" encoding="utf-8"?>
+<p:notes xmlns:a="http://schemas.openxmlformats.org/drawingml/2006/main" xmlns:p="http://schemas.openxmlformats.org/presentationml/2006/main" xmlns:r="http://schemas.openxmlformats.org/officeDocument/2006/relationships">
+  <p:cSld>
+    <p:spTree>
+      <p:nvGrpSpPr>
+        <p:cNvPr id="1" name=""/>
+        <p:cNvGrpSpPr/>
+        <p:nvPr/>
+      </p:nvGrpSpPr>
+      <p:grpSpPr>
+        <a:xfrm>
+          <a:off x="0" y="0"/>
+          <a:ext cx="0" cy="0"/>
+          <a:chOff x="0" y="0"/>
+          <a:chExt cx="0" cy="0"/>
+        </a:xfrm>
+      </p:grpSpPr>
+      <p:sp>
+        <p:nvSpPr>
+          <p:cNvPr id="2" name="Slide Image Placeholder 1"/>
+          <p:cNvSpPr>
+            <a:spLocks noGrp="1"/>
+          </p:cNvSpPr>
+          <p:nvPr>
+            <p:ph type="sldImg" idx="2"/>
+          </p:nvPr>
+        </p:nvSpPr>
+        <p:spPr/>
+      </p:sp>
+      <p:sp>
+        <p:nvSpPr>
+          <p:cNvPr id="3" name="Notes Placeholder 2"/>
+          <p:cNvSpPr>
+            <a:spLocks noGrp="1"/>
+          </p:cNvSpPr>
+          <p:nvPr>
+            <p:ph type="body" idx="3" sz="quarter"/>
+          </p:nvPr>
+        </p:nvSpPr>
+        <p:spPr/>
+        <p:txBody>
+          <a:bodyPr/>
+          <a:lstStyle/>
+          <a:p>
+            <a:r>
+              <a:t>Is the target advantage just the R1 papers? Target pools R0 papers, where the open answer named no true author, and R1 papers, where it named a few; 11 percent of target papers are R1 but only 1.5 percent of controls. Left: three views of target minus control within citation bins. R0 only (groups A versus B, the Stage 1 to 9 comparison) gives +0.199 at the output against +0.207 pooled, and the curve has the same shape. R1 target papers against R0 controls give +0.37: they know their papers better, but they also only pull ahead after L52. Control R1 has only 34 papers, so it is described, not tested. Right: Stage 11 patching by recall level; R1 targets (36 papers) recover a little later but are complete by L52. The title-position probe gives the same picture: R0 view +0.02 to +0.04. Conclusion unchanged.</a:t>
+            </a:r>
+          </a:p>
+        </p:txBody>
+      </p:sp>
+      <p:sp>
+        <p:nvSpPr>
+          <p:cNvPr id="4" name="Slide Number Placeholder 3"/>
+          <p:cNvSpPr>
+            <a:spLocks noGrp="1"/>
+          </p:cNvSpPr>
+          <p:nvPr>
+            <p:ph type="sldNum" idx="5" sz="quarter"/>
+          </p:nvPr>
+        </p:nvSpPr>
+        <p:spPr/>
+      </p:sp>
+    </p:spTree>
+  </p:cSld>
+  <p:clrMapOvr>
+    <a:masterClrMapping/>
+  </p:clrMapOvr>
+</p:notes>
+</file>
+
+<file path=ppt/notesSlides/notesSlide26.xml><?xml version="1.0" encoding="utf-8"?>
+<p:notes xmlns:a="http://schemas.openxmlformats.org/drawingml/2006/main" xmlns:p="http://schemas.openxmlformats.org/presentationml/2006/main" xmlns:r="http://schemas.openxmlformats.org/officeDocument/2006/relationships">
+  <p:cSld>
+    <p:spTree>
+      <p:nvGrpSpPr>
+        <p:cNvPr id="1" name=""/>
+        <p:cNvGrpSpPr/>
+        <p:nvPr/>
+      </p:nvGrpSpPr>
+      <p:grpSpPr>
+        <a:xfrm>
+          <a:off x="0" y="0"/>
+          <a:ext cx="0" cy="0"/>
+          <a:chOff x="0" y="0"/>
+          <a:chExt cx="0" cy="0"/>
+        </a:xfrm>
+      </p:grpSpPr>
+      <p:sp>
+        <p:nvSpPr>
+          <p:cNvPr id="2" name="Slide Image Placeholder 1"/>
+          <p:cNvSpPr>
+            <a:spLocks noGrp="1"/>
+          </p:cNvSpPr>
+          <p:nvPr>
+            <p:ph type="sldImg" idx="2"/>
+          </p:nvPr>
+        </p:nvSpPr>
+        <p:spPr/>
+      </p:sp>
+      <p:sp>
+        <p:nvSpPr>
+          <p:cNvPr id="3" name="Notes Placeholder 2"/>
+          <p:cNvSpPr>
+            <a:spLocks noGrp="1"/>
+          </p:cNvSpPr>
+          <p:nvPr>
+            <p:ph type="body" idx="3" sz="quarter"/>
+          </p:nvPr>
+        </p:nvSpPr>
+        <p:spPr/>
+        <p:txBody>
+          <a:bodyPr/>
+          <a:lstStyle/>
+          <a:p>
+            <a:r>
+              <a:t>Inside R1 papers the open answer got some authors right and missed others. The label package only counts matches, so we rebuilt which authors matched; the rebuilt count equals the package count for 99.3 percent of R1 papers. In 495 papers with both kinds, the authors the model wrote correctly carry more title-specific signal at the output, +0.20, and the same holds without first authors. But the difference is zero up to L52 and grows from L54: even for authors the model actually produces, the paper-specific signal appears only in the last layers. They are also somewhat easier to guess without a title, +0.10.</a:t>
+            </a:r>
+          </a:p>
+        </p:txBody>
+      </p:sp>
+      <p:sp>
+        <p:nvSpPr>
+          <p:cNvPr id="4" name="Slide Number Placeholder 3"/>
+          <p:cNvSpPr>
+            <a:spLocks noGrp="1"/>
+          </p:cNvSpPr>
+          <p:nvPr>
+            <p:ph type="sldNum" idx="5" sz="quarter"/>
+          </p:nvPr>
+        </p:nvSpPr>
+        <p:spPr/>
+      </p:sp>
+    </p:spTree>
+  </p:cSld>
+  <p:clrMapOvr>
+    <a:masterClrMapping/>
+  </p:clrMapOvr>
+</p:notes>
+</file>
+
+<file path=ppt/notesSlides/notesSlide27.xml><?xml version="1.0" encoding="utf-8"?>
 <p:notes xmlns:a="http://schemas.openxmlformats.org/drawingml/2006/main" xmlns:p="http://schemas.openxmlformats.org/presentationml/2006/main" xmlns:r="http://schemas.openxmlformats.org/officeDocument/2006/relationships">
   <p:cSld>
     <p:spTree>
@@ -7592,7 +7734,7 @@
           </a:solidFill>
           <a:ln w="22225">
             <a:solidFill>
-              <a:srgbClr val="3C8D5A"/>
+              <a:srgbClr val="E07A2F"/>
             </a:solidFill>
           </a:ln>
           <a:effectLst/>
@@ -7619,11 +7761,11 @@
             <a:r>
               <a:rPr sz="1500" b="1">
                 <a:solidFill>
-                  <a:srgbClr val="3C8D5A"/>
-                </a:solidFill>
-                <a:latin typeface="Patrick Hand"/>
-              </a:rPr>
-              <a:t>Stage 12</a:t>
+                  <a:srgbClr val="E07A2F"/>
+                </a:solidFill>
+                <a:latin typeface="Patrick Hand"/>
+              </a:rPr>
+              <a:t>Stage 11</a:t>
             </a:r>
           </a:p>
         </p:txBody>
@@ -11190,6 +11332,674 @@
 </file>
 
 <file path=ppt/slides/slide25.xml><?xml version="1.0" encoding="utf-8"?>
+<p:sld xmlns:a="http://schemas.openxmlformats.org/drawingml/2006/main" xmlns:p="http://schemas.openxmlformats.org/presentationml/2006/main" xmlns:r="http://schemas.openxmlformats.org/officeDocument/2006/relationships">
+  <p:cSld>
+    <p:spTree>
+      <p:nvGrpSpPr>
+        <p:cNvPr id="1" name=""/>
+        <p:cNvGrpSpPr/>
+        <p:nvPr/>
+      </p:nvGrpSpPr>
+      <p:grpSpPr/>
+      <p:pic>
+        <p:nvPicPr>
+          <p:cNvPr id="2" name="Picture 1" descr="paper.png"/>
+          <p:cNvPicPr>
+            <a:picLocks noChangeAspect="1"/>
+          </p:cNvPicPr>
+          <p:nvPr/>
+        </p:nvPicPr>
+        <p:blipFill>
+          <a:blip r:embed="rId2"/>
+          <a:stretch>
+            <a:fillRect/>
+          </a:stretch>
+        </p:blipFill>
+        <p:spPr>
+          <a:xfrm>
+            <a:off x="0" y="0"/>
+            <a:ext cx="12191695" cy="6858000"/>
+          </a:xfrm>
+          <a:prstGeom prst="rect">
+            <a:avLst/>
+          </a:prstGeom>
+        </p:spPr>
+      </p:pic>
+      <p:sp>
+        <p:nvSpPr>
+          <p:cNvPr id="3" name="TextBox 2"/>
+          <p:cNvSpPr txBox="1"/>
+          <p:nvPr/>
+        </p:nvSpPr>
+        <p:spPr>
+          <a:xfrm>
+            <a:off x="685800" y="274320"/>
+            <a:ext cx="10881360" cy="822960"/>
+          </a:xfrm>
+          <a:prstGeom prst="rect">
+            <a:avLst/>
+          </a:prstGeom>
+          <a:noFill/>
+        </p:spPr>
+        <p:txBody>
+          <a:bodyPr wrap="square" lIns="0" rIns="0" tIns="0" bIns="0" anchor="t">
+            <a:spAutoFit/>
+          </a:bodyPr>
+          <a:lstStyle/>
+          <a:p>
+            <a:pPr algn="l">
+              <a:spcAft>
+                <a:spcPts val="800"/>
+              </a:spcAft>
+            </a:pPr>
+            <a:r>
+              <a:rPr sz="4600" b="1">
+                <a:solidFill>
+                  <a:srgbClr val="2B2D42"/>
+                </a:solidFill>
+                <a:latin typeface="Caveat"/>
+              </a:rPr>
+              <a:t>Is it just the R1 papers? No.</a:t>
+            </a:r>
+          </a:p>
+        </p:txBody>
+      </p:sp>
+      <p:sp>
+        <p:nvSpPr>
+          <p:cNvPr id="4" name="TextBox 3"/>
+          <p:cNvSpPr txBox="1"/>
+          <p:nvPr/>
+        </p:nvSpPr>
+        <p:spPr>
+          <a:xfrm>
+            <a:off x="713232" y="987552"/>
+            <a:ext cx="10881360" cy="411480"/>
+          </a:xfrm>
+          <a:prstGeom prst="rect">
+            <a:avLst/>
+          </a:prstGeom>
+          <a:noFill/>
+        </p:spPr>
+        <p:txBody>
+          <a:bodyPr wrap="square" lIns="0" rIns="0" tIns="0" bIns="0" anchor="t">
+            <a:spAutoFit/>
+          </a:bodyPr>
+          <a:lstStyle/>
+          <a:p>
+            <a:pPr algn="l">
+              <a:spcAft>
+                <a:spcPts val="800"/>
+              </a:spcAft>
+            </a:pPr>
+            <a:r>
+              <a:rPr sz="1900" b="0">
+                <a:solidFill>
+                  <a:srgbClr val="6E7080"/>
+                </a:solidFill>
+                <a:latin typeface="Patrick Hand"/>
+              </a:rPr>
+              <a:t>R0 = no true author written · R1 = a few written · A/B/C/D = target/control x R0/R1</a:t>
+            </a:r>
+          </a:p>
+        </p:txBody>
+      </p:sp>
+      <p:pic>
+        <p:nvPicPr>
+          <p:cNvPr id="5" name="Picture 4" descr="c17_r0_r1.png"/>
+          <p:cNvPicPr>
+            <a:picLocks noChangeAspect="1"/>
+          </p:cNvPicPr>
+          <p:nvPr/>
+        </p:nvPicPr>
+        <p:blipFill>
+          <a:blip r:embed="rId4"/>
+          <a:stretch>
+            <a:fillRect/>
+          </a:stretch>
+        </p:blipFill>
+        <p:spPr>
+          <a:xfrm>
+            <a:off x="457200" y="1463040"/>
+            <a:ext cx="8412480" cy="3968150"/>
+          </a:xfrm>
+          <a:prstGeom prst="rect">
+            <a:avLst/>
+          </a:prstGeom>
+        </p:spPr>
+      </p:pic>
+      <p:sp>
+        <p:nvSpPr>
+          <p:cNvPr id="6" name="Rectangle 5"/>
+          <p:cNvSpPr/>
+          <p:nvPr/>
+        </p:nvSpPr>
+        <p:spPr>
+          <a:xfrm rot="90000">
+            <a:off x="9098280" y="1737360"/>
+            <a:ext cx="2651760" cy="4023360"/>
+          </a:xfrm>
+          <a:prstGeom prst="rect">
+            <a:avLst/>
+          </a:prstGeom>
+          <a:solidFill>
+            <a:srgbClr val="FFF1A8"/>
+          </a:solidFill>
+          <a:ln w="12700">
+            <a:solidFill>
+              <a:srgbClr val="E2D37A"/>
+            </a:solidFill>
+          </a:ln>
+          <a:effectLst/>
+        </p:spPr>
+        <p:style>
+          <a:lnRef idx="1">
+            <a:schemeClr val="accent1"/>
+          </a:lnRef>
+          <a:fillRef idx="3">
+            <a:schemeClr val="accent1"/>
+          </a:fillRef>
+          <a:effectRef idx="2">
+            <a:schemeClr val="accent1"/>
+          </a:effectRef>
+          <a:fontRef idx="minor">
+            <a:schemeClr val="lt1"/>
+          </a:fontRef>
+        </p:style>
+        <p:txBody>
+          <a:bodyPr rtlCol="0" anchor="t" wrap="square" lIns="201168" rIns="201168" tIns="164592" bIns="164592"/>
+          <a:lstStyle/>
+          <a:p>
+            <a:pPr algn="l">
+              <a:spcAft>
+                <a:spcPts val="900"/>
+              </a:spcAft>
+            </a:pPr>
+            <a:r>
+              <a:rPr sz="1700" b="1">
+                <a:solidFill>
+                  <a:srgbClr val="E07A2F"/>
+                </a:solidFill>
+                <a:latin typeface="Patrick Hand"/>
+              </a:rPr>
+              <a:t>R0 only (A - B):</a:t>
+            </a:r>
+          </a:p>
+          <a:p>
+            <a:pPr algn="l">
+              <a:spcAft>
+                <a:spcPts val="900"/>
+              </a:spcAft>
+            </a:pPr>
+            <a:r>
+              <a:rPr sz="1700" b="0">
+                <a:solidFill>
+                  <a:srgbClr val="2B2D42"/>
+                </a:solidFill>
+                <a:latin typeface="Patrick Hand"/>
+              </a:rPr>
+              <a:t>output +0.199 vs +0.207, same shape</a:t>
+            </a:r>
+          </a:p>
+          <a:p>
+            <a:pPr algn="l">
+              <a:spcAft>
+                <a:spcPts val="900"/>
+              </a:spcAft>
+            </a:pPr>
+            <a:r>
+              <a:rPr sz="1700" b="1">
+                <a:solidFill>
+                  <a:srgbClr val="8A4FA3"/>
+                </a:solidFill>
+                <a:latin typeface="Patrick Hand"/>
+              </a:rPr>
+              <a:t>R1 (C - B):</a:t>
+            </a:r>
+            <a:r>
+              <a:rPr sz="1700" b="0">
+                <a:solidFill>
+                  <a:srgbClr val="2B2D42"/>
+                </a:solidFill>
+                <a:latin typeface="Patrick Hand"/>
+              </a:rPr>
+              <a:t> +0.37, also late</a:t>
+            </a:r>
+          </a:p>
+          <a:p>
+            <a:pPr algn="l">
+              <a:spcAft>
+                <a:spcPts val="900"/>
+              </a:spcAft>
+            </a:pPr>
+            <a:r>
+              <a:rPr sz="1700" b="0">
+                <a:solidFill>
+                  <a:srgbClr val="2B2D42"/>
+                </a:solidFill>
+                <a:latin typeface="Patrick Hand"/>
+              </a:rPr>
+              <a:t>C - A within target: +0.11, from L56</a:t>
+            </a:r>
+          </a:p>
+          <a:p>
+            <a:pPr algn="l">
+              <a:spcAft>
+                <a:spcPts val="900"/>
+              </a:spcAft>
+            </a:pPr>
+            <a:r>
+              <a:rPr sz="1700" b="1">
+                <a:solidFill>
+                  <a:srgbClr val="2B2D42"/>
+                </a:solidFill>
+                <a:latin typeface="Patrick Hand"/>
+              </a:rPr>
+              <a:t>patching:</a:t>
+            </a:r>
+            <a:r>
+              <a:rPr sz="1700" b="0">
+                <a:solidFill>
+                  <a:srgbClr val="2B2D42"/>
+                </a:solidFill>
+                <a:latin typeface="Patrick Hand"/>
+              </a:rPr>
+              <a:t> R1 a bit later, done by L52</a:t>
+            </a:r>
+          </a:p>
+        </p:txBody>
+      </p:sp>
+      <p:sp>
+        <p:nvSpPr>
+          <p:cNvPr id="7" name="Rounded Rectangle 6"/>
+          <p:cNvSpPr/>
+          <p:nvPr/>
+        </p:nvSpPr>
+        <p:spPr>
+          <a:xfrm>
+            <a:off x="10241280" y="182880"/>
+            <a:ext cx="1691640" cy="384048"/>
+          </a:xfrm>
+          <a:prstGeom prst="roundRect">
+            <a:avLst>
+              <a:gd name="adj" fmla="val 30000"/>
+            </a:avLst>
+          </a:prstGeom>
+          <a:solidFill>
+            <a:srgbClr val="FFFFFF"/>
+          </a:solidFill>
+          <a:ln w="22225">
+            <a:solidFill>
+              <a:srgbClr val="8A4FA3"/>
+            </a:solidFill>
+          </a:ln>
+          <a:effectLst/>
+        </p:spPr>
+        <p:style>
+          <a:lnRef idx="1">
+            <a:schemeClr val="accent1"/>
+          </a:lnRef>
+          <a:fillRef idx="3">
+            <a:schemeClr val="accent1"/>
+          </a:fillRef>
+          <a:effectRef idx="2">
+            <a:schemeClr val="accent1"/>
+          </a:effectRef>
+          <a:fontRef idx="minor">
+            <a:schemeClr val="lt1"/>
+          </a:fontRef>
+        </p:style>
+        <p:txBody>
+          <a:bodyPr rtlCol="0" anchor="ctr" lIns="0" rIns="0" tIns="0" bIns="0"/>
+          <a:lstStyle/>
+          <a:p>
+            <a:pPr algn="ctr"/>
+            <a:r>
+              <a:rPr sz="1500" b="1">
+                <a:solidFill>
+                  <a:srgbClr val="8A4FA3"/>
+                </a:solidFill>
+                <a:latin typeface="Patrick Hand"/>
+              </a:rPr>
+              <a:t>Stage 10-11</a:t>
+            </a:r>
+          </a:p>
+        </p:txBody>
+      </p:sp>
+    </p:spTree>
+  </p:cSld>
+  <p:clrMapOvr>
+    <a:masterClrMapping/>
+  </p:clrMapOvr>
+</p:sld>
+</file>
+
+<file path=ppt/slides/slide26.xml><?xml version="1.0" encoding="utf-8"?>
+<p:sld xmlns:a="http://schemas.openxmlformats.org/drawingml/2006/main" xmlns:p="http://schemas.openxmlformats.org/presentationml/2006/main" xmlns:r="http://schemas.openxmlformats.org/officeDocument/2006/relationships">
+  <p:cSld>
+    <p:spTree>
+      <p:nvGrpSpPr>
+        <p:cNvPr id="1" name=""/>
+        <p:cNvGrpSpPr/>
+        <p:nvPr/>
+      </p:nvGrpSpPr>
+      <p:grpSpPr/>
+      <p:pic>
+        <p:nvPicPr>
+          <p:cNvPr id="2" name="Picture 1" descr="paper.png"/>
+          <p:cNvPicPr>
+            <a:picLocks noChangeAspect="1"/>
+          </p:cNvPicPr>
+          <p:nvPr/>
+        </p:nvPicPr>
+        <p:blipFill>
+          <a:blip r:embed="rId2"/>
+          <a:stretch>
+            <a:fillRect/>
+          </a:stretch>
+        </p:blipFill>
+        <p:spPr>
+          <a:xfrm>
+            <a:off x="0" y="0"/>
+            <a:ext cx="12191695" cy="6858000"/>
+          </a:xfrm>
+          <a:prstGeom prst="rect">
+            <a:avLst/>
+          </a:prstGeom>
+        </p:spPr>
+      </p:pic>
+      <p:sp>
+        <p:nvSpPr>
+          <p:cNvPr id="3" name="TextBox 2"/>
+          <p:cNvSpPr txBox="1"/>
+          <p:nvPr/>
+        </p:nvSpPr>
+        <p:spPr>
+          <a:xfrm>
+            <a:off x="685800" y="274320"/>
+            <a:ext cx="10881360" cy="822960"/>
+          </a:xfrm>
+          <a:prstGeom prst="rect">
+            <a:avLst/>
+          </a:prstGeom>
+          <a:noFill/>
+        </p:spPr>
+        <p:txBody>
+          <a:bodyPr wrap="square" lIns="0" rIns="0" tIns="0" bIns="0" anchor="t">
+            <a:spAutoFit/>
+          </a:bodyPr>
+          <a:lstStyle/>
+          <a:p>
+            <a:pPr algn="l">
+              <a:spcAft>
+                <a:spcPts val="800"/>
+              </a:spcAft>
+            </a:pPr>
+            <a:r>
+              <a:rPr sz="4600" b="1">
+                <a:solidFill>
+                  <a:srgbClr val="2B2D42"/>
+                </a:solidFill>
+                <a:latin typeface="Caveat"/>
+              </a:rPr>
+              <a:t>Authors it wrote vs authors it missed</a:t>
+            </a:r>
+          </a:p>
+        </p:txBody>
+      </p:sp>
+      <p:sp>
+        <p:nvSpPr>
+          <p:cNvPr id="4" name="TextBox 3"/>
+          <p:cNvSpPr txBox="1"/>
+          <p:nvPr/>
+        </p:nvSpPr>
+        <p:spPr>
+          <a:xfrm>
+            <a:off x="713232" y="987552"/>
+            <a:ext cx="10881360" cy="411480"/>
+          </a:xfrm>
+          <a:prstGeom prst="rect">
+            <a:avLst/>
+          </a:prstGeom>
+          <a:noFill/>
+        </p:spPr>
+        <p:txBody>
+          <a:bodyPr wrap="square" lIns="0" rIns="0" tIns="0" bIns="0" anchor="t">
+            <a:spAutoFit/>
+          </a:bodyPr>
+          <a:lstStyle/>
+          <a:p>
+            <a:pPr algn="l">
+              <a:spcAft>
+                <a:spcPts val="800"/>
+              </a:spcAft>
+            </a:pPr>
+            <a:r>
+              <a:rPr sz="1900" b="0">
+                <a:solidFill>
+                  <a:srgbClr val="6E7080"/>
+                </a:solidFill>
+                <a:latin typeface="Patrick Hand"/>
+              </a:rPr>
+              <a:t>inside 495 R1 papers · paired within paper · 95% CI</a:t>
+            </a:r>
+          </a:p>
+        </p:txBody>
+      </p:sp>
+      <p:pic>
+        <p:nvPicPr>
+          <p:cNvPr id="5" name="Picture 4" descr="c18_r1_authors.png"/>
+          <p:cNvPicPr>
+            <a:picLocks noChangeAspect="1"/>
+          </p:cNvPicPr>
+          <p:nvPr/>
+        </p:nvPicPr>
+        <p:blipFill>
+          <a:blip r:embed="rId4"/>
+          <a:stretch>
+            <a:fillRect/>
+          </a:stretch>
+        </p:blipFill>
+        <p:spPr>
+          <a:xfrm>
+            <a:off x="457200" y="1463040"/>
+            <a:ext cx="8412480" cy="3968150"/>
+          </a:xfrm>
+          <a:prstGeom prst="rect">
+            <a:avLst/>
+          </a:prstGeom>
+        </p:spPr>
+      </p:pic>
+      <p:sp>
+        <p:nvSpPr>
+          <p:cNvPr id="6" name="Rectangle 5"/>
+          <p:cNvSpPr/>
+          <p:nvPr/>
+        </p:nvSpPr>
+        <p:spPr>
+          <a:xfrm rot="21510000">
+            <a:off x="9098280" y="1737360"/>
+            <a:ext cx="2651760" cy="3657600"/>
+          </a:xfrm>
+          <a:prstGeom prst="rect">
+            <a:avLst/>
+          </a:prstGeom>
+          <a:solidFill>
+            <a:srgbClr val="FFF1A8"/>
+          </a:solidFill>
+          <a:ln w="12700">
+            <a:solidFill>
+              <a:srgbClr val="E2D37A"/>
+            </a:solidFill>
+          </a:ln>
+          <a:effectLst/>
+        </p:spPr>
+        <p:style>
+          <a:lnRef idx="1">
+            <a:schemeClr val="accent1"/>
+          </a:lnRef>
+          <a:fillRef idx="3">
+            <a:schemeClr val="accent1"/>
+          </a:fillRef>
+          <a:effectRef idx="2">
+            <a:schemeClr val="accent1"/>
+          </a:effectRef>
+          <a:fontRef idx="minor">
+            <a:schemeClr val="lt1"/>
+          </a:fontRef>
+        </p:style>
+        <p:txBody>
+          <a:bodyPr rtlCol="0" anchor="t" wrap="square" lIns="201168" rIns="201168" tIns="164592" bIns="164592"/>
+          <a:lstStyle/>
+          <a:p>
+            <a:pPr algn="l">
+              <a:spcAft>
+                <a:spcPts val="900"/>
+              </a:spcAft>
+            </a:pPr>
+            <a:r>
+              <a:rPr sz="1800" b="0">
+                <a:solidFill>
+                  <a:srgbClr val="2B2D42"/>
+                </a:solidFill>
+                <a:latin typeface="Patrick Hand"/>
+              </a:rPr>
+              <a:t>written - missed, output: </a:t>
+            </a:r>
+            <a:r>
+              <a:rPr sz="1800" b="1">
+                <a:solidFill>
+                  <a:srgbClr val="E07A2F"/>
+                </a:solidFill>
+                <a:latin typeface="Patrick Hand"/>
+              </a:rPr>
+              <a:t>+0.20</a:t>
+            </a:r>
+          </a:p>
+          <a:p>
+            <a:pPr algn="l">
+              <a:spcAft>
+                <a:spcPts val="900"/>
+              </a:spcAft>
+            </a:pPr>
+            <a:r>
+              <a:rPr sz="1800" b="0">
+                <a:solidFill>
+                  <a:srgbClr val="2B2D42"/>
+                </a:solidFill>
+                <a:latin typeface="Patrick Hand"/>
+              </a:rPr>
+              <a:t>~0 up to L52, grows from </a:t>
+            </a:r>
+            <a:r>
+              <a:rPr sz="1800" b="1">
+                <a:solidFill>
+                  <a:srgbClr val="2B2D42"/>
+                </a:solidFill>
+                <a:latin typeface="Patrick Hand"/>
+              </a:rPr>
+              <a:t>L54</a:t>
+            </a:r>
+          </a:p>
+          <a:p>
+            <a:pPr algn="l">
+              <a:spcAft>
+                <a:spcPts val="900"/>
+              </a:spcAft>
+            </a:pPr>
+            <a:r>
+              <a:rPr sz="1800" b="0">
+                <a:solidFill>
+                  <a:srgbClr val="2B2D42"/>
+                </a:solidFill>
+                <a:latin typeface="Patrick Hand"/>
+              </a:rPr>
+              <a:t>no title (prior): +0.10</a:t>
+            </a:r>
+          </a:p>
+          <a:p>
+            <a:pPr algn="l">
+              <a:spcAft>
+                <a:spcPts val="900"/>
+              </a:spcAft>
+            </a:pPr>
+            <a:r>
+              <a:rPr sz="1800" b="0">
+                <a:solidFill>
+                  <a:srgbClr val="2B2D42"/>
+                </a:solidFill>
+                <a:latin typeface="Patrick Hand"/>
+              </a:rPr>
+              <a:t>same without first authors</a:t>
+            </a:r>
+          </a:p>
+        </p:txBody>
+      </p:sp>
+      <p:sp>
+        <p:nvSpPr>
+          <p:cNvPr id="7" name="Rounded Rectangle 6"/>
+          <p:cNvSpPr/>
+          <p:nvPr/>
+        </p:nvSpPr>
+        <p:spPr>
+          <a:xfrm>
+            <a:off x="10241280" y="182880"/>
+            <a:ext cx="1691640" cy="384048"/>
+          </a:xfrm>
+          <a:prstGeom prst="roundRect">
+            <a:avLst>
+              <a:gd name="adj" fmla="val 30000"/>
+            </a:avLst>
+          </a:prstGeom>
+          <a:solidFill>
+            <a:srgbClr val="FFFFFF"/>
+          </a:solidFill>
+          <a:ln w="22225">
+            <a:solidFill>
+              <a:srgbClr val="8A4FA3"/>
+            </a:solidFill>
+          </a:ln>
+          <a:effectLst/>
+        </p:spPr>
+        <p:style>
+          <a:lnRef idx="1">
+            <a:schemeClr val="accent1"/>
+          </a:lnRef>
+          <a:fillRef idx="3">
+            <a:schemeClr val="accent1"/>
+          </a:fillRef>
+          <a:effectRef idx="2">
+            <a:schemeClr val="accent1"/>
+          </a:effectRef>
+          <a:fontRef idx="minor">
+            <a:schemeClr val="lt1"/>
+          </a:fontRef>
+        </p:style>
+        <p:txBody>
+          <a:bodyPr rtlCol="0" anchor="ctr" lIns="0" rIns="0" tIns="0" bIns="0"/>
+          <a:lstStyle/>
+          <a:p>
+            <a:pPr algn="ctr"/>
+            <a:r>
+              <a:rPr sz="1500" b="1">
+                <a:solidFill>
+                  <a:srgbClr val="8A4FA3"/>
+                </a:solidFill>
+                <a:latin typeface="Patrick Hand"/>
+              </a:rPr>
+              <a:t>Stage 10-11</a:t>
+            </a:r>
+          </a:p>
+        </p:txBody>
+      </p:sp>
+    </p:spTree>
+  </p:cSld>
+  <p:clrMapOvr>
+    <a:masterClrMapping/>
+  </p:clrMapOvr>
+</p:sld>
+</file>
+
+<file path=ppt/slides/slide27.xml><?xml version="1.0" encoding="utf-8"?>
 <p:sld xmlns:a="http://schemas.openxmlformats.org/drawingml/2006/main" xmlns:p="http://schemas.openxmlformats.org/presentationml/2006/main" xmlns:r="http://schemas.openxmlformats.org/officeDocument/2006/relationships">
   <p:cSld>
     <p:spTree>

--- a/experiment_files/351_stage10/reports/talk/Stage10_author_readout_talk.pptx
+++ b/experiment_files/351_stage10/reports/talk/Stage10_author_readout_talk.pptx
@@ -7089,6 +7089,63 @@
           </a:p>
         </p:txBody>
       </p:sp>
+      <p:sp>
+        <p:nvSpPr>
+          <p:cNvPr id="8" name="Rounded Rectangle 7"/>
+          <p:cNvSpPr/>
+          <p:nvPr/>
+        </p:nvSpPr>
+        <p:spPr>
+          <a:xfrm rot="21510000">
+            <a:off x="731520" y="5989320"/>
+            <a:ext cx="5943600" cy="384048"/>
+          </a:xfrm>
+          <a:prstGeom prst="roundRect">
+            <a:avLst>
+              <a:gd name="adj" fmla="val 30000"/>
+            </a:avLst>
+          </a:prstGeom>
+          <a:solidFill>
+            <a:srgbClr val="B42318"/>
+          </a:solidFill>
+          <a:ln>
+            <a:solidFill>
+              <a:srgbClr val="B42318"/>
+            </a:solidFill>
+          </a:ln>
+          <a:effectLst/>
+        </p:spPr>
+        <p:style>
+          <a:lnRef idx="1">
+            <a:schemeClr val="accent1"/>
+          </a:lnRef>
+          <a:fillRef idx="3">
+            <a:schemeClr val="accent1"/>
+          </a:fillRef>
+          <a:effectRef idx="2">
+            <a:schemeClr val="accent1"/>
+          </a:effectRef>
+          <a:fontRef idx="minor">
+            <a:schemeClr val="lt1"/>
+          </a:fontRef>
+        </p:style>
+        <p:txBody>
+          <a:bodyPr rtlCol="0" anchor="ctr" lIns="0" rIns="0" tIns="0" bIns="0"/>
+          <a:lstStyle/>
+          <a:p>
+            <a:pPr algn="ctr"/>
+            <a:r>
+              <a:rPr sz="1500" b="1">
+                <a:solidFill>
+                  <a:srgbClr val="FFFFFF"/>
+                </a:solidFill>
+                <a:latin typeface="Patrick Hand"/>
+              </a:rPr>
+              <a:t>UNDER REVIEW: probe split leaks being re-checked (Stage 13)</a:t>
+            </a:r>
+          </a:p>
+        </p:txBody>
+      </p:sp>
     </p:spTree>
   </p:cSld>
   <p:clrMapOvr>
@@ -8110,6 +8167,63 @@
                 <a:latin typeface="Patrick Hand"/>
               </a:rPr>
               <a:t>Stage 12</a:t>
+            </a:r>
+          </a:p>
+        </p:txBody>
+      </p:sp>
+      <p:sp>
+        <p:nvSpPr>
+          <p:cNvPr id="8" name="Rounded Rectangle 7"/>
+          <p:cNvSpPr/>
+          <p:nvPr/>
+        </p:nvSpPr>
+        <p:spPr>
+          <a:xfrm rot="21510000">
+            <a:off x="731520" y="5989320"/>
+            <a:ext cx="5943600" cy="384048"/>
+          </a:xfrm>
+          <a:prstGeom prst="roundRect">
+            <a:avLst>
+              <a:gd name="adj" fmla="val 30000"/>
+            </a:avLst>
+          </a:prstGeom>
+          <a:solidFill>
+            <a:srgbClr val="B42318"/>
+          </a:solidFill>
+          <a:ln>
+            <a:solidFill>
+              <a:srgbClr val="B42318"/>
+            </a:solidFill>
+          </a:ln>
+          <a:effectLst/>
+        </p:spPr>
+        <p:style>
+          <a:lnRef idx="1">
+            <a:schemeClr val="accent1"/>
+          </a:lnRef>
+          <a:fillRef idx="3">
+            <a:schemeClr val="accent1"/>
+          </a:fillRef>
+          <a:effectRef idx="2">
+            <a:schemeClr val="accent1"/>
+          </a:effectRef>
+          <a:fontRef idx="minor">
+            <a:schemeClr val="lt1"/>
+          </a:fontRef>
+        </p:style>
+        <p:txBody>
+          <a:bodyPr rtlCol="0" anchor="ctr" lIns="0" rIns="0" tIns="0" bIns="0"/>
+          <a:lstStyle/>
+          <a:p>
+            <a:pPr algn="ctr"/>
+            <a:r>
+              <a:rPr sz="1500" b="1">
+                <a:solidFill>
+                  <a:srgbClr val="FFFFFF"/>
+                </a:solidFill>
+                <a:latin typeface="Patrick Hand"/>
+              </a:rPr>
+              <a:t>UNDER REVIEW: probe split leaks being re-checked (Stage 13)</a:t>
             </a:r>
           </a:p>
         </p:txBody>

--- a/experiment_files/351_stage10/reports/talk/Stage10_author_readout_talk.pptx
+++ b/experiment_files/351_stage10/reports/talk/Stage10_author_readout_talk.pptx
@@ -808,7 +808,7 @@
           <a:lstStyle/>
           <a:p>
             <a:r>
-              <a:t>Is the author readable at the title itself? With the lenses, barely: about 0.01 to 0.03 title-specific signal at the last title token. A linear probe trained across papers gets more, 0.04 at L16 rising to 0.08 at L56, and a little more for target papers. The controls (appendix) show this probe signal is specific to the paper, not a topic-to-name association. This is not in conflict with the lens result: the title is read early, at the title token, but names only become readable at the name positions in L57 to L61. Read early, spoken late.</a:t>
+              <a:t>Is the author readable at the title itself? With the lenses, barely: about 0.01 to 0.03 title-specific signal at the last title token. A linear probe trained across papers gets more: re-checked with author-team folds and with papers whose prompt title the probe saw in training removed, about 0.05 at L24 rising to 0.08 at L56, and 0.04 to 0.08 more for target papers. The controls (appendix) show this probe signal is specific to the paper, not a topic-to-name association. This is not in conflict with the lens result: the title is read early, at the title token, but names only become readable at the name positions in L57 to L61. Read early, spoken late.</a:t>
             </a:r>
           </a:p>
         </p:txBody>
@@ -1018,7 +1018,7 @@
           <a:lstStyle/>
           <a:p>
             <a:r>
-              <a:t>Is the probe at the title token reading real paper knowledge, or just topic to name associations? If we score its output against the authors of another paper, or of another paper in the same field, the signal drops to zero. If we train it only on false-title pairs it gets even stronger. So the last title token carries linearly decodable, paper-specific author information already at L24, more for target papers, even though the lenses cannot read it.</a:t>
+              <a:t>Is the probe at the title token reading real paper knowledge, or just topic to name associations? If we score its output against the authors of another paper, or of another paper in the same field, the signal drops to zero. If we train it only on false-title pairs it gives a similar signal (the earlier even-stronger result came from a leak: the same donor title in training and test). So the last title token carries linearly decodable, paper-specific author information already at L24, more for target papers, even though the lenses cannot read it.</a:t>
             </a:r>
           </a:p>
         </p:txBody>
@@ -6842,7 +6842,7 @@
                 </a:solidFill>
                 <a:latin typeface="Patrick Hand"/>
               </a:rPr>
-              <a:t>title-specific signal at the last title token · all 9,108 papers</a:t>
+              <a:t>title-specific signal at the last title token · lenses: all 9,108 papers · probe: re-checked, 1,395 papers</a:t>
             </a:r>
           </a:p>
         </p:txBody>
@@ -6959,7 +6959,7 @@
                 </a:solidFill>
                 <a:latin typeface="Patrick Hand"/>
               </a:rPr>
-              <a:t>0.04 -&gt; 0.08</a:t>
+              <a:t>0.05 -&gt; 0.08</a:t>
             </a:r>
           </a:p>
           <a:p>
@@ -6984,7 +6984,23 @@
                 </a:solidFill>
                 <a:latin typeface="Patrick Hand"/>
               </a:rPr>
-              <a:t>+0.02-0.04</a:t>
+              <a:t>+0.04-0.08</a:t>
+            </a:r>
+          </a:p>
+          <a:p>
+            <a:pPr algn="l">
+              <a:spcAft>
+                <a:spcPts val="900"/>
+              </a:spcAft>
+            </a:pPr>
+            <a:r>
+              <a:rPr sz="1800" b="0">
+                <a:solidFill>
+                  <a:srgbClr val="2B2D42"/>
+                </a:solidFill>
+                <a:latin typeface="Patrick Hand"/>
+              </a:rPr>
+              <a:t>re-checked: team folds, title reuse removed</a:t>
             </a:r>
           </a:p>
           <a:p>
@@ -7085,63 +7101,6 @@
                 <a:latin typeface="Patrick Hand"/>
               </a:rPr>
               <a:t>Stage 11</a:t>
-            </a:r>
-          </a:p>
-        </p:txBody>
-      </p:sp>
-      <p:sp>
-        <p:nvSpPr>
-          <p:cNvPr id="8" name="Rounded Rectangle 7"/>
-          <p:cNvSpPr/>
-          <p:nvPr/>
-        </p:nvSpPr>
-        <p:spPr>
-          <a:xfrm rot="21510000">
-            <a:off x="731520" y="5989320"/>
-            <a:ext cx="5943600" cy="384048"/>
-          </a:xfrm>
-          <a:prstGeom prst="roundRect">
-            <a:avLst>
-              <a:gd name="adj" fmla="val 30000"/>
-            </a:avLst>
-          </a:prstGeom>
-          <a:solidFill>
-            <a:srgbClr val="B42318"/>
-          </a:solidFill>
-          <a:ln>
-            <a:solidFill>
-              <a:srgbClr val="B42318"/>
-            </a:solidFill>
-          </a:ln>
-          <a:effectLst/>
-        </p:spPr>
-        <p:style>
-          <a:lnRef idx="1">
-            <a:schemeClr val="accent1"/>
-          </a:lnRef>
-          <a:fillRef idx="3">
-            <a:schemeClr val="accent1"/>
-          </a:fillRef>
-          <a:effectRef idx="2">
-            <a:schemeClr val="accent1"/>
-          </a:effectRef>
-          <a:fontRef idx="minor">
-            <a:schemeClr val="lt1"/>
-          </a:fontRef>
-        </p:style>
-        <p:txBody>
-          <a:bodyPr rtlCol="0" anchor="ctr" lIns="0" rIns="0" tIns="0" bIns="0"/>
-          <a:lstStyle/>
-          <a:p>
-            <a:pPr algn="ctr"/>
-            <a:r>
-              <a:rPr sz="1500" b="1">
-                <a:solidFill>
-                  <a:srgbClr val="FFFFFF"/>
-                </a:solidFill>
-                <a:latin typeface="Patrick Hand"/>
-              </a:rPr>
-              <a:t>UNDER REVIEW: probe split leaks being re-checked (Stage 13)</a:t>
             </a:r>
           </a:p>
         </p:txBody>
@@ -7942,7 +7901,7 @@
                 </a:solidFill>
                 <a:latin typeface="Patrick Hand"/>
               </a:rPr>
-              <a:t>last title token · 5-fold ridge probe · controls · all 9,108 papers</a:t>
+              <a:t>last title token · 5-fold ridge probe · re-checked: author-team folds, title reuse removed</a:t>
             </a:r>
           </a:p>
         </p:txBody>
@@ -8167,63 +8126,6 @@
                 <a:latin typeface="Patrick Hand"/>
               </a:rPr>
               <a:t>Stage 12</a:t>
-            </a:r>
-          </a:p>
-        </p:txBody>
-      </p:sp>
-      <p:sp>
-        <p:nvSpPr>
-          <p:cNvPr id="8" name="Rounded Rectangle 7"/>
-          <p:cNvSpPr/>
-          <p:nvPr/>
-        </p:nvSpPr>
-        <p:spPr>
-          <a:xfrm rot="21510000">
-            <a:off x="731520" y="5989320"/>
-            <a:ext cx="5943600" cy="384048"/>
-          </a:xfrm>
-          <a:prstGeom prst="roundRect">
-            <a:avLst>
-              <a:gd name="adj" fmla="val 30000"/>
-            </a:avLst>
-          </a:prstGeom>
-          <a:solidFill>
-            <a:srgbClr val="B42318"/>
-          </a:solidFill>
-          <a:ln>
-            <a:solidFill>
-              <a:srgbClr val="B42318"/>
-            </a:solidFill>
-          </a:ln>
-          <a:effectLst/>
-        </p:spPr>
-        <p:style>
-          <a:lnRef idx="1">
-            <a:schemeClr val="accent1"/>
-          </a:lnRef>
-          <a:fillRef idx="3">
-            <a:schemeClr val="accent1"/>
-          </a:fillRef>
-          <a:effectRef idx="2">
-            <a:schemeClr val="accent1"/>
-          </a:effectRef>
-          <a:fontRef idx="minor">
-            <a:schemeClr val="lt1"/>
-          </a:fontRef>
-        </p:style>
-        <p:txBody>
-          <a:bodyPr rtlCol="0" anchor="ctr" lIns="0" rIns="0" tIns="0" bIns="0"/>
-          <a:lstStyle/>
-          <a:p>
-            <a:pPr algn="ctr"/>
-            <a:r>
-              <a:rPr sz="1500" b="1">
-                <a:solidFill>
-                  <a:srgbClr val="FFFFFF"/>
-                </a:solidFill>
-                <a:latin typeface="Patrick Hand"/>
-              </a:rPr>
-              <a:t>UNDER REVIEW: probe split leaks being re-checked (Stage 13)</a:t>
             </a:r>
           </a:p>
         </p:txBody>

--- a/experiment_files/351_stage10/reports/talk/Stage10_author_readout_talk.pptx
+++ b/experiment_files/351_stage10/reports/talk/Stage10_author_readout_talk.pptx
@@ -6842,7 +6842,7 @@
                 </a:solidFill>
                 <a:latin typeface="Patrick Hand"/>
               </a:rPr>
-              <a:t>title-specific signal at the last title token · lenses: all 9,108 papers · probe: re-checked, 1,395 papers</a:t>
+              <a:t>title-specific signal at the last title token · lenses: all 9,108 papers · probe: re-checked, title reuse removed: 1,863 papers (896 target, 499 control)</a:t>
             </a:r>
           </a:p>
         </p:txBody>
